--- a/Sachi_Stream_Investor_Deck_Seed_Round_May2026.pptx
+++ b/Sachi_Stream_Investor_Deck_Seed_Round_May2026.pptx
@@ -3522,6 +3522,83 @@
           </a:p>
         </p:txBody>
       </p:sp>
+      <p:sp>
+        <p:nvSpPr>
+          <p:cNvPr id="13" name="Rectangle 12"/>
+          <p:cNvSpPr/>
+          <p:nvPr/>
+        </p:nvSpPr>
+        <p:spPr>
+          <a:xfrm>
+            <a:off x="640080" y="3749039"/>
+            <a:ext cx="8229600" cy="640080"/>
+          </a:xfrm>
+          <a:prstGeom prst="rect">
+            <a:avLst/>
+          </a:prstGeom>
+          <a:solidFill>
+            <a:srgbClr val="0B0C1A"/>
+          </a:solidFill>
+          <a:ln>
+            <a:noFill/>
+          </a:ln>
+        </p:spPr>
+        <p:style>
+          <a:lnRef idx="1">
+            <a:schemeClr val="accent1"/>
+          </a:lnRef>
+          <a:fillRef idx="3">
+            <a:schemeClr val="accent1"/>
+          </a:fillRef>
+          <a:effectRef idx="2">
+            <a:schemeClr val="accent1"/>
+          </a:effectRef>
+          <a:fontRef idx="minor">
+            <a:schemeClr val="lt1"/>
+          </a:fontRef>
+        </p:style>
+        <p:txBody>
+          <a:bodyPr rtlCol="0" anchor="ctr"/>
+          <a:lstStyle/>
+          <a:p>
+            <a:pPr algn="ctr"/>
+          </a:p>
+        </p:txBody>
+      </p:sp>
+      <p:sp>
+        <p:nvSpPr>
+          <p:cNvPr id="14" name="TextBox 13"/>
+          <p:cNvSpPr txBox="1"/>
+          <p:nvPr/>
+        </p:nvSpPr>
+        <p:spPr>
+          <a:xfrm>
+            <a:off x="731520" y="3886200"/>
+            <a:ext cx="8229600" cy="502920"/>
+          </a:xfrm>
+          <a:prstGeom prst="rect">
+            <a:avLst/>
+          </a:prstGeom>
+          <a:noFill/>
+        </p:spPr>
+        <p:txBody>
+          <a:bodyPr wrap="square">
+            <a:spAutoFit/>
+          </a:bodyPr>
+          <a:lstStyle/>
+          <a:p>
+            <a:pPr algn="l"/>
+            <a:r>
+              <a:rPr sz="2000" b="1" i="0">
+                <a:solidFill>
+                  <a:srgbClr val="FF6B6B"/>
+                </a:solidFill>
+              </a:rPr>
+              <a:t>M Seed Round  ·  M Series A  ·  0M Total Raise</a:t>
+            </a:r>
+          </a:p>
+        </p:txBody>
+      </p:sp>
     </p:spTree>
   </p:cSld>
   <p:clrMapOvr>
@@ -14980,6 +15057,1342 @@
                 </a:solidFill>
               </a:rPr>
               <a:t>· Secondary markets: South Asia, Pacific</a:t>
+            </a:r>
+          </a:p>
+        </p:txBody>
+      </p:sp>
+      <p:sp>
+        <p:nvSpPr>
+          <p:cNvPr id="31" name="Rectangle 30"/>
+          <p:cNvSpPr/>
+          <p:nvPr/>
+        </p:nvSpPr>
+        <p:spPr>
+          <a:xfrm>
+            <a:off x="0" y="1005840"/>
+            <a:ext cx="12188952" cy="5852160"/>
+          </a:xfrm>
+          <a:prstGeom prst="rect">
+            <a:avLst/>
+          </a:prstGeom>
+          <a:solidFill>
+            <a:srgbClr val="0B0C1A"/>
+          </a:solidFill>
+          <a:ln>
+            <a:noFill/>
+          </a:ln>
+        </p:spPr>
+        <p:style>
+          <a:lnRef idx="1">
+            <a:schemeClr val="accent1"/>
+          </a:lnRef>
+          <a:fillRef idx="3">
+            <a:schemeClr val="accent1"/>
+          </a:fillRef>
+          <a:effectRef idx="2">
+            <a:schemeClr val="accent1"/>
+          </a:effectRef>
+          <a:fontRef idx="minor">
+            <a:schemeClr val="lt1"/>
+          </a:fontRef>
+        </p:style>
+        <p:txBody>
+          <a:bodyPr rtlCol="0" anchor="ctr"/>
+          <a:lstStyle/>
+          <a:p>
+            <a:pPr algn="ctr"/>
+          </a:p>
+        </p:txBody>
+      </p:sp>
+      <p:sp>
+        <p:nvSpPr>
+          <p:cNvPr id="32" name="TextBox 31"/>
+          <p:cNvSpPr txBox="1"/>
+          <p:nvPr/>
+        </p:nvSpPr>
+        <p:spPr>
+          <a:xfrm>
+            <a:off x="777240" y="1143000"/>
+            <a:ext cx="10515600" cy="868680"/>
+          </a:xfrm>
+          <a:prstGeom prst="rect">
+            <a:avLst/>
+          </a:prstGeom>
+          <a:noFill/>
+        </p:spPr>
+        <p:txBody>
+          <a:bodyPr wrap="square">
+            <a:spAutoFit/>
+          </a:bodyPr>
+          <a:lstStyle/>
+          <a:p>
+            <a:pPr algn="ctr"/>
+            <a:r>
+              <a:rPr sz="5200" b="1" i="0">
+                <a:solidFill>
+                  <a:srgbClr val="F5C842"/>
+                </a:solidFill>
+              </a:rPr>
+              <a:t>0,000,000  Total Raise</a:t>
+            </a:r>
+          </a:p>
+        </p:txBody>
+      </p:sp>
+      <p:sp>
+        <p:nvSpPr>
+          <p:cNvPr id="33" name="TextBox 32"/>
+          <p:cNvSpPr txBox="1"/>
+          <p:nvPr/>
+        </p:nvSpPr>
+        <p:spPr>
+          <a:xfrm>
+            <a:off x="777240" y="2011680"/>
+            <a:ext cx="10515600" cy="365760"/>
+          </a:xfrm>
+          <a:prstGeom prst="rect">
+            <a:avLst/>
+          </a:prstGeom>
+          <a:noFill/>
+        </p:spPr>
+        <p:txBody>
+          <a:bodyPr wrap="square">
+            <a:spAutoFit/>
+          </a:bodyPr>
+          <a:lstStyle/>
+          <a:p>
+            <a:pPr algn="ctr"/>
+            <a:r>
+              <a:rPr sz="1600" b="0" i="0">
+                <a:solidFill>
+                  <a:srgbClr val="CCCCCC"/>
+                </a:solidFill>
+              </a:rPr>
+              <a:t>Two-Round Structure  ·  LDNA Consulting LLC  ·  2026–2027</a:t>
+            </a:r>
+          </a:p>
+        </p:txBody>
+      </p:sp>
+      <p:sp>
+        <p:nvSpPr>
+          <p:cNvPr id="34" name="Rectangle 33"/>
+          <p:cNvSpPr/>
+          <p:nvPr/>
+        </p:nvSpPr>
+        <p:spPr>
+          <a:xfrm>
+            <a:off x="777240" y="2514600"/>
+            <a:ext cx="10515600" cy="27432"/>
+          </a:xfrm>
+          <a:prstGeom prst="rect">
+            <a:avLst/>
+          </a:prstGeom>
+          <a:solidFill>
+            <a:srgbClr val="FF6B6B"/>
+          </a:solidFill>
+          <a:ln>
+            <a:noFill/>
+          </a:ln>
+        </p:spPr>
+        <p:style>
+          <a:lnRef idx="1">
+            <a:schemeClr val="accent1"/>
+          </a:lnRef>
+          <a:fillRef idx="3">
+            <a:schemeClr val="accent1"/>
+          </a:fillRef>
+          <a:effectRef idx="2">
+            <a:schemeClr val="accent1"/>
+          </a:effectRef>
+          <a:fontRef idx="minor">
+            <a:schemeClr val="lt1"/>
+          </a:fontRef>
+        </p:style>
+        <p:txBody>
+          <a:bodyPr rtlCol="0" anchor="ctr"/>
+          <a:lstStyle/>
+          <a:p>
+            <a:pPr algn="ctr"/>
+          </a:p>
+        </p:txBody>
+      </p:sp>
+      <p:sp>
+        <p:nvSpPr>
+          <p:cNvPr id="35" name="Rectangle 34"/>
+          <p:cNvSpPr/>
+          <p:nvPr/>
+        </p:nvSpPr>
+        <p:spPr>
+          <a:xfrm>
+            <a:off x="594360" y="2697480"/>
+            <a:ext cx="3611880" cy="3749039"/>
+          </a:xfrm>
+          <a:prstGeom prst="rect">
+            <a:avLst/>
+          </a:prstGeom>
+          <a:solidFill>
+            <a:srgbClr val="161830"/>
+          </a:solidFill>
+          <a:ln w="22860">
+            <a:solidFill>
+              <a:srgbClr val="F5C842"/>
+            </a:solidFill>
+          </a:ln>
+        </p:spPr>
+        <p:style>
+          <a:lnRef idx="1">
+            <a:schemeClr val="accent1"/>
+          </a:lnRef>
+          <a:fillRef idx="3">
+            <a:schemeClr val="accent1"/>
+          </a:fillRef>
+          <a:effectRef idx="2">
+            <a:schemeClr val="accent1"/>
+          </a:effectRef>
+          <a:fontRef idx="minor">
+            <a:schemeClr val="lt1"/>
+          </a:fontRef>
+        </p:style>
+        <p:txBody>
+          <a:bodyPr rtlCol="0" anchor="ctr"/>
+          <a:lstStyle/>
+          <a:p>
+            <a:pPr algn="ctr"/>
+          </a:p>
+        </p:txBody>
+      </p:sp>
+      <p:sp>
+        <p:nvSpPr>
+          <p:cNvPr id="36" name="TextBox 35"/>
+          <p:cNvSpPr txBox="1"/>
+          <p:nvPr/>
+        </p:nvSpPr>
+        <p:spPr>
+          <a:xfrm>
+            <a:off x="731520" y="2788920"/>
+            <a:ext cx="3337560" cy="347472"/>
+          </a:xfrm>
+          <a:prstGeom prst="rect">
+            <a:avLst/>
+          </a:prstGeom>
+          <a:noFill/>
+        </p:spPr>
+        <p:txBody>
+          <a:bodyPr wrap="square">
+            <a:spAutoFit/>
+          </a:bodyPr>
+          <a:lstStyle/>
+          <a:p>
+            <a:pPr algn="l"/>
+            <a:r>
+              <a:rPr sz="1300" b="1" i="0">
+                <a:solidFill>
+                  <a:srgbClr val="F5C842"/>
+                </a:solidFill>
+              </a:rPr>
+              <a:t>ROUND 1 — SEED</a:t>
+            </a:r>
+          </a:p>
+        </p:txBody>
+      </p:sp>
+      <p:sp>
+        <p:nvSpPr>
+          <p:cNvPr id="37" name="TextBox 36"/>
+          <p:cNvSpPr txBox="1"/>
+          <p:nvPr/>
+        </p:nvSpPr>
+        <p:spPr>
+          <a:xfrm>
+            <a:off x="731520" y="3172968"/>
+            <a:ext cx="3337560" cy="438912"/>
+          </a:xfrm>
+          <a:prstGeom prst="rect">
+            <a:avLst/>
+          </a:prstGeom>
+          <a:noFill/>
+        </p:spPr>
+        <p:txBody>
+          <a:bodyPr wrap="square">
+            <a:spAutoFit/>
+          </a:bodyPr>
+          <a:lstStyle/>
+          <a:p>
+            <a:pPr algn="l"/>
+            <a:r>
+              <a:rPr sz="2200" b="1" i="0">
+                <a:solidFill>
+                  <a:srgbClr val="FFFFFF"/>
+                </a:solidFill>
+              </a:rPr>
+              <a:t>,000,000</a:t>
+            </a:r>
+          </a:p>
+        </p:txBody>
+      </p:sp>
+      <p:sp>
+        <p:nvSpPr>
+          <p:cNvPr id="38" name="TextBox 37"/>
+          <p:cNvSpPr txBox="1"/>
+          <p:nvPr/>
+        </p:nvSpPr>
+        <p:spPr>
+          <a:xfrm>
+            <a:off x="731520" y="3593592"/>
+            <a:ext cx="3337560" cy="274320"/>
+          </a:xfrm>
+          <a:prstGeom prst="rect">
+            <a:avLst/>
+          </a:prstGeom>
+          <a:noFill/>
+        </p:spPr>
+        <p:txBody>
+          <a:bodyPr wrap="square">
+            <a:spAutoFit/>
+          </a:bodyPr>
+          <a:lstStyle/>
+          <a:p>
+            <a:pPr algn="l"/>
+            <a:r>
+              <a:rPr sz="1100" b="0" i="1">
+                <a:solidFill>
+                  <a:srgbClr val="CCCCCC"/>
+                </a:solidFill>
+              </a:rPr>
+              <a:t>Timing: Q2–Q3 2026</a:t>
+            </a:r>
+          </a:p>
+        </p:txBody>
+      </p:sp>
+      <p:sp>
+        <p:nvSpPr>
+          <p:cNvPr id="39" name="Rectangle 38"/>
+          <p:cNvSpPr/>
+          <p:nvPr/>
+        </p:nvSpPr>
+        <p:spPr>
+          <a:xfrm>
+            <a:off x="731520" y="3904488"/>
+            <a:ext cx="3291840" cy="18288"/>
+          </a:xfrm>
+          <a:prstGeom prst="rect">
+            <a:avLst/>
+          </a:prstGeom>
+          <a:solidFill>
+            <a:srgbClr val="F5C842"/>
+          </a:solidFill>
+          <a:ln>
+            <a:noFill/>
+          </a:ln>
+        </p:spPr>
+        <p:style>
+          <a:lnRef idx="1">
+            <a:schemeClr val="accent1"/>
+          </a:lnRef>
+          <a:fillRef idx="3">
+            <a:schemeClr val="accent1"/>
+          </a:fillRef>
+          <a:effectRef idx="2">
+            <a:schemeClr val="accent1"/>
+          </a:effectRef>
+          <a:fontRef idx="minor">
+            <a:schemeClr val="lt1"/>
+          </a:fontRef>
+        </p:style>
+        <p:txBody>
+          <a:bodyPr rtlCol="0" anchor="ctr"/>
+          <a:lstStyle/>
+          <a:p>
+            <a:pPr algn="ctr"/>
+          </a:p>
+        </p:txBody>
+      </p:sp>
+      <p:sp>
+        <p:nvSpPr>
+          <p:cNvPr id="40" name="TextBox 39"/>
+          <p:cNvSpPr txBox="1"/>
+          <p:nvPr/>
+        </p:nvSpPr>
+        <p:spPr>
+          <a:xfrm>
+            <a:off x="731520" y="4023360"/>
+            <a:ext cx="3337560" cy="347472"/>
+          </a:xfrm>
+          <a:prstGeom prst="rect">
+            <a:avLst/>
+          </a:prstGeom>
+          <a:noFill/>
+        </p:spPr>
+        <p:txBody>
+          <a:bodyPr wrap="square">
+            <a:spAutoFit/>
+          </a:bodyPr>
+          <a:lstStyle/>
+          <a:p>
+            <a:pPr algn="l"/>
+            <a:r>
+              <a:rPr sz="1100" b="0" i="0">
+                <a:solidFill>
+                  <a:srgbClr val="F0F0F0"/>
+                </a:solidFill>
+              </a:rPr>
+              <a:t>· Platform iOS + Android launch (App Store + Google Play)</a:t>
+            </a:r>
+          </a:p>
+        </p:txBody>
+      </p:sp>
+      <p:sp>
+        <p:nvSpPr>
+          <p:cNvPr id="41" name="TextBox 40"/>
+          <p:cNvSpPr txBox="1"/>
+          <p:nvPr/>
+        </p:nvSpPr>
+        <p:spPr>
+          <a:xfrm>
+            <a:off x="731520" y="4407408"/>
+            <a:ext cx="3337560" cy="347472"/>
+          </a:xfrm>
+          <a:prstGeom prst="rect">
+            <a:avLst/>
+          </a:prstGeom>
+          <a:noFill/>
+        </p:spPr>
+        <p:txBody>
+          <a:bodyPr wrap="square">
+            <a:spAutoFit/>
+          </a:bodyPr>
+          <a:lstStyle/>
+          <a:p>
+            <a:pPr algn="l"/>
+            <a:r>
+              <a:rPr sz="1100" b="0" i="0">
+                <a:solidFill>
+                  <a:srgbClr val="F0F0F0"/>
+                </a:solidFill>
+              </a:rPr>
+              <a:t>· Colombo engineering team: 10–15 developers hired</a:t>
+            </a:r>
+          </a:p>
+        </p:txBody>
+      </p:sp>
+      <p:sp>
+        <p:nvSpPr>
+          <p:cNvPr id="42" name="TextBox 41"/>
+          <p:cNvSpPr txBox="1"/>
+          <p:nvPr/>
+        </p:nvSpPr>
+        <p:spPr>
+          <a:xfrm>
+            <a:off x="731520" y="4791456"/>
+            <a:ext cx="3337560" cy="347472"/>
+          </a:xfrm>
+          <a:prstGeom prst="rect">
+            <a:avLst/>
+          </a:prstGeom>
+          <a:noFill/>
+        </p:spPr>
+        <p:txBody>
+          <a:bodyPr wrap="square">
+            <a:spAutoFit/>
+          </a:bodyPr>
+          <a:lstStyle/>
+          <a:p>
+            <a:pPr algn="l"/>
+            <a:r>
+              <a:rPr sz="1100" b="0" i="0">
+                <a:solidFill>
+                  <a:srgbClr val="F0F0F0"/>
+                </a:solidFill>
+              </a:rPr>
+              <a:t>· Bare metal infrastructure Phase 1 — Colombo facility</a:t>
+            </a:r>
+          </a:p>
+        </p:txBody>
+      </p:sp>
+      <p:sp>
+        <p:nvSpPr>
+          <p:cNvPr id="43" name="TextBox 42"/>
+          <p:cNvSpPr txBox="1"/>
+          <p:nvPr/>
+        </p:nvSpPr>
+        <p:spPr>
+          <a:xfrm>
+            <a:off x="731520" y="5175504"/>
+            <a:ext cx="3337560" cy="347472"/>
+          </a:xfrm>
+          <a:prstGeom prst="rect">
+            <a:avLst/>
+          </a:prstGeom>
+          <a:noFill/>
+        </p:spPr>
+        <p:txBody>
+          <a:bodyPr wrap="square">
+            <a:spAutoFit/>
+          </a:bodyPr>
+          <a:lstStyle/>
+          <a:p>
+            <a:pPr algn="l"/>
+            <a:r>
+              <a:rPr sz="1100" b="0" i="0">
+                <a:solidFill>
+                  <a:srgbClr val="F0F0F0"/>
+                </a:solidFill>
+              </a:rPr>
+              <a:t>· Marketing &amp; creator acquisition — 10,000 MAU target</a:t>
+            </a:r>
+          </a:p>
+        </p:txBody>
+      </p:sp>
+      <p:sp>
+        <p:nvSpPr>
+          <p:cNvPr id="44" name="TextBox 43"/>
+          <p:cNvSpPr txBox="1"/>
+          <p:nvPr/>
+        </p:nvSpPr>
+        <p:spPr>
+          <a:xfrm>
+            <a:off x="731520" y="5559552"/>
+            <a:ext cx="3337560" cy="347472"/>
+          </a:xfrm>
+          <a:prstGeom prst="rect">
+            <a:avLst/>
+          </a:prstGeom>
+          <a:noFill/>
+        </p:spPr>
+        <p:txBody>
+          <a:bodyPr wrap="square">
+            <a:spAutoFit/>
+          </a:bodyPr>
+          <a:lstStyle/>
+          <a:p>
+            <a:pPr algn="l"/>
+            <a:r>
+              <a:rPr sz="1100" b="0" i="0">
+                <a:solidFill>
+                  <a:srgbClr val="F0F0F0"/>
+                </a:solidFill>
+              </a:rPr>
+              <a:t>· Equity offered: TBD in negotiation</a:t>
+            </a:r>
+          </a:p>
+        </p:txBody>
+      </p:sp>
+      <p:sp>
+        <p:nvSpPr>
+          <p:cNvPr id="45" name="TextBox 44"/>
+          <p:cNvSpPr txBox="1"/>
+          <p:nvPr/>
+        </p:nvSpPr>
+        <p:spPr>
+          <a:xfrm>
+            <a:off x="731520" y="5943600"/>
+            <a:ext cx="3337560" cy="347472"/>
+          </a:xfrm>
+          <a:prstGeom prst="rect">
+            <a:avLst/>
+          </a:prstGeom>
+          <a:noFill/>
+        </p:spPr>
+        <p:txBody>
+          <a:bodyPr wrap="square">
+            <a:spAutoFit/>
+          </a:bodyPr>
+          <a:lstStyle/>
+          <a:p>
+            <a:pPr algn="l"/>
+            <a:r>
+              <a:rPr sz="1100" b="0" i="0">
+                <a:solidFill>
+                  <a:srgbClr val="F0F0F0"/>
+                </a:solidFill>
+              </a:rPr>
+              <a:t>· Board observer seat at M+ commitment</a:t>
+            </a:r>
+          </a:p>
+        </p:txBody>
+      </p:sp>
+      <p:sp>
+        <p:nvSpPr>
+          <p:cNvPr id="46" name="Rectangle 45"/>
+          <p:cNvSpPr/>
+          <p:nvPr/>
+        </p:nvSpPr>
+        <p:spPr>
+          <a:xfrm>
+            <a:off x="4434840" y="2697480"/>
+            <a:ext cx="3611880" cy="3749039"/>
+          </a:xfrm>
+          <a:prstGeom prst="rect">
+            <a:avLst/>
+          </a:prstGeom>
+          <a:solidFill>
+            <a:srgbClr val="161830"/>
+          </a:solidFill>
+          <a:ln w="22860">
+            <a:solidFill>
+              <a:srgbClr val="FF6B6B"/>
+            </a:solidFill>
+          </a:ln>
+        </p:spPr>
+        <p:style>
+          <a:lnRef idx="1">
+            <a:schemeClr val="accent1"/>
+          </a:lnRef>
+          <a:fillRef idx="3">
+            <a:schemeClr val="accent1"/>
+          </a:fillRef>
+          <a:effectRef idx="2">
+            <a:schemeClr val="accent1"/>
+          </a:effectRef>
+          <a:fontRef idx="minor">
+            <a:schemeClr val="lt1"/>
+          </a:fontRef>
+        </p:style>
+        <p:txBody>
+          <a:bodyPr rtlCol="0" anchor="ctr"/>
+          <a:lstStyle/>
+          <a:p>
+            <a:pPr algn="ctr"/>
+          </a:p>
+        </p:txBody>
+      </p:sp>
+      <p:sp>
+        <p:nvSpPr>
+          <p:cNvPr id="47" name="TextBox 46"/>
+          <p:cNvSpPr txBox="1"/>
+          <p:nvPr/>
+        </p:nvSpPr>
+        <p:spPr>
+          <a:xfrm>
+            <a:off x="4572000" y="2788920"/>
+            <a:ext cx="3337560" cy="347472"/>
+          </a:xfrm>
+          <a:prstGeom prst="rect">
+            <a:avLst/>
+          </a:prstGeom>
+          <a:noFill/>
+        </p:spPr>
+        <p:txBody>
+          <a:bodyPr wrap="square">
+            <a:spAutoFit/>
+          </a:bodyPr>
+          <a:lstStyle/>
+          <a:p>
+            <a:pPr algn="l"/>
+            <a:r>
+              <a:rPr sz="1300" b="1" i="0">
+                <a:solidFill>
+                  <a:srgbClr val="FF6B6B"/>
+                </a:solidFill>
+              </a:rPr>
+              <a:t>ROUND 2 — SERIES A</a:t>
+            </a:r>
+          </a:p>
+        </p:txBody>
+      </p:sp>
+      <p:sp>
+        <p:nvSpPr>
+          <p:cNvPr id="48" name="TextBox 47"/>
+          <p:cNvSpPr txBox="1"/>
+          <p:nvPr/>
+        </p:nvSpPr>
+        <p:spPr>
+          <a:xfrm>
+            <a:off x="4572000" y="3172968"/>
+            <a:ext cx="3337560" cy="438912"/>
+          </a:xfrm>
+          <a:prstGeom prst="rect">
+            <a:avLst/>
+          </a:prstGeom>
+          <a:noFill/>
+        </p:spPr>
+        <p:txBody>
+          <a:bodyPr wrap="square">
+            <a:spAutoFit/>
+          </a:bodyPr>
+          <a:lstStyle/>
+          <a:p>
+            <a:pPr algn="l"/>
+            <a:r>
+              <a:rPr sz="2200" b="1" i="0">
+                <a:solidFill>
+                  <a:srgbClr val="FFFFFF"/>
+                </a:solidFill>
+              </a:rPr>
+              <a:t>,000,000</a:t>
+            </a:r>
+          </a:p>
+        </p:txBody>
+      </p:sp>
+      <p:sp>
+        <p:nvSpPr>
+          <p:cNvPr id="49" name="TextBox 48"/>
+          <p:cNvSpPr txBox="1"/>
+          <p:nvPr/>
+        </p:nvSpPr>
+        <p:spPr>
+          <a:xfrm>
+            <a:off x="4572000" y="3593592"/>
+            <a:ext cx="3337560" cy="274320"/>
+          </a:xfrm>
+          <a:prstGeom prst="rect">
+            <a:avLst/>
+          </a:prstGeom>
+          <a:noFill/>
+        </p:spPr>
+        <p:txBody>
+          <a:bodyPr wrap="square">
+            <a:spAutoFit/>
+          </a:bodyPr>
+          <a:lstStyle/>
+          <a:p>
+            <a:pPr algn="l"/>
+            <a:r>
+              <a:rPr sz="1100" b="0" i="1">
+                <a:solidFill>
+                  <a:srgbClr val="CCCCCC"/>
+                </a:solidFill>
+              </a:rPr>
+              <a:t>Timing: 18–24 months post-Seed (2027–2028)</a:t>
+            </a:r>
+          </a:p>
+        </p:txBody>
+      </p:sp>
+      <p:sp>
+        <p:nvSpPr>
+          <p:cNvPr id="50" name="Rectangle 49"/>
+          <p:cNvSpPr/>
+          <p:nvPr/>
+        </p:nvSpPr>
+        <p:spPr>
+          <a:xfrm>
+            <a:off x="4572000" y="3904488"/>
+            <a:ext cx="3291840" cy="18288"/>
+          </a:xfrm>
+          <a:prstGeom prst="rect">
+            <a:avLst/>
+          </a:prstGeom>
+          <a:solidFill>
+            <a:srgbClr val="FF6B6B"/>
+          </a:solidFill>
+          <a:ln>
+            <a:noFill/>
+          </a:ln>
+        </p:spPr>
+        <p:style>
+          <a:lnRef idx="1">
+            <a:schemeClr val="accent1"/>
+          </a:lnRef>
+          <a:fillRef idx="3">
+            <a:schemeClr val="accent1"/>
+          </a:fillRef>
+          <a:effectRef idx="2">
+            <a:schemeClr val="accent1"/>
+          </a:effectRef>
+          <a:fontRef idx="minor">
+            <a:schemeClr val="lt1"/>
+          </a:fontRef>
+        </p:style>
+        <p:txBody>
+          <a:bodyPr rtlCol="0" anchor="ctr"/>
+          <a:lstStyle/>
+          <a:p>
+            <a:pPr algn="ctr"/>
+          </a:p>
+        </p:txBody>
+      </p:sp>
+      <p:sp>
+        <p:nvSpPr>
+          <p:cNvPr id="51" name="TextBox 50"/>
+          <p:cNvSpPr txBox="1"/>
+          <p:nvPr/>
+        </p:nvSpPr>
+        <p:spPr>
+          <a:xfrm>
+            <a:off x="4572000" y="4023360"/>
+            <a:ext cx="3337560" cy="347472"/>
+          </a:xfrm>
+          <a:prstGeom prst="rect">
+            <a:avLst/>
+          </a:prstGeom>
+          <a:noFill/>
+        </p:spPr>
+        <p:txBody>
+          <a:bodyPr wrap="square">
+            <a:spAutoFit/>
+          </a:bodyPr>
+          <a:lstStyle/>
+          <a:p>
+            <a:pPr algn="l"/>
+            <a:r>
+              <a:rPr sz="1100" b="0" i="0">
+                <a:solidFill>
+                  <a:srgbClr val="F0F0F0"/>
+                </a:solidFill>
+              </a:rPr>
+              <a:t>· Scale to 250,000–500,000 MAU</a:t>
+            </a:r>
+          </a:p>
+        </p:txBody>
+      </p:sp>
+      <p:sp>
+        <p:nvSpPr>
+          <p:cNvPr id="52" name="TextBox 51"/>
+          <p:cNvSpPr txBox="1"/>
+          <p:nvPr/>
+        </p:nvSpPr>
+        <p:spPr>
+          <a:xfrm>
+            <a:off x="4572000" y="4407408"/>
+            <a:ext cx="3337560" cy="347472"/>
+          </a:xfrm>
+          <a:prstGeom prst="rect">
+            <a:avLst/>
+          </a:prstGeom>
+          <a:noFill/>
+        </p:spPr>
+        <p:txBody>
+          <a:bodyPr wrap="square">
+            <a:spAutoFit/>
+          </a:bodyPr>
+          <a:lstStyle/>
+          <a:p>
+            <a:pPr algn="l"/>
+            <a:r>
+              <a:rPr sz="1100" b="0" i="0">
+                <a:solidFill>
+                  <a:srgbClr val="F0F0F0"/>
+                </a:solidFill>
+              </a:rPr>
+              <a:t>· Bare metal infrastructure Phase 2 — full data center</a:t>
+            </a:r>
+          </a:p>
+        </p:txBody>
+      </p:sp>
+      <p:sp>
+        <p:nvSpPr>
+          <p:cNvPr id="53" name="TextBox 52"/>
+          <p:cNvSpPr txBox="1"/>
+          <p:nvPr/>
+        </p:nvSpPr>
+        <p:spPr>
+          <a:xfrm>
+            <a:off x="4572000" y="4791456"/>
+            <a:ext cx="3337560" cy="347472"/>
+          </a:xfrm>
+          <a:prstGeom prst="rect">
+            <a:avLst/>
+          </a:prstGeom>
+          <a:noFill/>
+        </p:spPr>
+        <p:txBody>
+          <a:bodyPr wrap="square">
+            <a:spAutoFit/>
+          </a:bodyPr>
+          <a:lstStyle/>
+          <a:p>
+            <a:pPr algn="l"/>
+            <a:r>
+              <a:rPr sz="1100" b="0" i="0">
+                <a:solidFill>
+                  <a:srgbClr val="F0F0F0"/>
+                </a:solidFill>
+              </a:rPr>
+              <a:t>· Regional expansion: South Asia, Pacific, Middle East</a:t>
+            </a:r>
+          </a:p>
+        </p:txBody>
+      </p:sp>
+      <p:sp>
+        <p:nvSpPr>
+          <p:cNvPr id="54" name="TextBox 53"/>
+          <p:cNvSpPr txBox="1"/>
+          <p:nvPr/>
+        </p:nvSpPr>
+        <p:spPr>
+          <a:xfrm>
+            <a:off x="4572000" y="5175504"/>
+            <a:ext cx="3337560" cy="347472"/>
+          </a:xfrm>
+          <a:prstGeom prst="rect">
+            <a:avLst/>
+          </a:prstGeom>
+          <a:noFill/>
+        </p:spPr>
+        <p:txBody>
+          <a:bodyPr wrap="square">
+            <a:spAutoFit/>
+          </a:bodyPr>
+          <a:lstStyle/>
+          <a:p>
+            <a:pPr algn="l"/>
+            <a:r>
+              <a:rPr sz="1100" b="0" i="0">
+                <a:solidFill>
+                  <a:srgbClr val="F0F0F0"/>
+                </a:solidFill>
+              </a:rPr>
+              <a:t>· Creator fund launch: M/year to top creators</a:t>
+            </a:r>
+          </a:p>
+        </p:txBody>
+      </p:sp>
+      <p:sp>
+        <p:nvSpPr>
+          <p:cNvPr id="55" name="TextBox 54"/>
+          <p:cNvSpPr txBox="1"/>
+          <p:nvPr/>
+        </p:nvSpPr>
+        <p:spPr>
+          <a:xfrm>
+            <a:off x="4572000" y="5559552"/>
+            <a:ext cx="3337560" cy="347472"/>
+          </a:xfrm>
+          <a:prstGeom prst="rect">
+            <a:avLst/>
+          </a:prstGeom>
+          <a:noFill/>
+        </p:spPr>
+        <p:txBody>
+          <a:bodyPr wrap="square">
+            <a:spAutoFit/>
+          </a:bodyPr>
+          <a:lstStyle/>
+          <a:p>
+            <a:pPr algn="l"/>
+            <a:r>
+              <a:rPr sz="1100" b="0" i="0">
+                <a:solidFill>
+                  <a:srgbClr val="F0F0F0"/>
+                </a:solidFill>
+              </a:rPr>
+              <a:t>· Pre-money valuation target: 0–60M</a:t>
+            </a:r>
+          </a:p>
+        </p:txBody>
+      </p:sp>
+      <p:sp>
+        <p:nvSpPr>
+          <p:cNvPr id="56" name="TextBox 55"/>
+          <p:cNvSpPr txBox="1"/>
+          <p:nvPr/>
+        </p:nvSpPr>
+        <p:spPr>
+          <a:xfrm>
+            <a:off x="4572000" y="5943600"/>
+            <a:ext cx="3337560" cy="347472"/>
+          </a:xfrm>
+          <a:prstGeom prst="rect">
+            <a:avLst/>
+          </a:prstGeom>
+          <a:noFill/>
+        </p:spPr>
+        <p:txBody>
+          <a:bodyPr wrap="square">
+            <a:spAutoFit/>
+          </a:bodyPr>
+          <a:lstStyle/>
+          <a:p>
+            <a:pPr algn="l"/>
+            <a:r>
+              <a:rPr sz="1100" b="0" i="0">
+                <a:solidFill>
+                  <a:srgbClr val="F0F0F0"/>
+                </a:solidFill>
+              </a:rPr>
+              <a:t>· Trigger: M+ ARR run rate achieved</a:t>
+            </a:r>
+          </a:p>
+        </p:txBody>
+      </p:sp>
+      <p:sp>
+        <p:nvSpPr>
+          <p:cNvPr id="57" name="Rectangle 56"/>
+          <p:cNvSpPr/>
+          <p:nvPr/>
+        </p:nvSpPr>
+        <p:spPr>
+          <a:xfrm>
+            <a:off x="8275320" y="2697480"/>
+            <a:ext cx="3611880" cy="3749039"/>
+          </a:xfrm>
+          <a:prstGeom prst="rect">
+            <a:avLst/>
+          </a:prstGeom>
+          <a:solidFill>
+            <a:srgbClr val="161830"/>
+          </a:solidFill>
+          <a:ln w="22860">
+            <a:solidFill>
+              <a:srgbClr val="7BD4FF"/>
+            </a:solidFill>
+          </a:ln>
+        </p:spPr>
+        <p:style>
+          <a:lnRef idx="1">
+            <a:schemeClr val="accent1"/>
+          </a:lnRef>
+          <a:fillRef idx="3">
+            <a:schemeClr val="accent1"/>
+          </a:fillRef>
+          <a:effectRef idx="2">
+            <a:schemeClr val="accent1"/>
+          </a:effectRef>
+          <a:fontRef idx="minor">
+            <a:schemeClr val="lt1"/>
+          </a:fontRef>
+        </p:style>
+        <p:txBody>
+          <a:bodyPr rtlCol="0" anchor="ctr"/>
+          <a:lstStyle/>
+          <a:p>
+            <a:pPr algn="ctr"/>
+          </a:p>
+        </p:txBody>
+      </p:sp>
+      <p:sp>
+        <p:nvSpPr>
+          <p:cNvPr id="58" name="TextBox 57"/>
+          <p:cNvSpPr txBox="1"/>
+          <p:nvPr/>
+        </p:nvSpPr>
+        <p:spPr>
+          <a:xfrm>
+            <a:off x="8412480" y="2788920"/>
+            <a:ext cx="3337560" cy="347472"/>
+          </a:xfrm>
+          <a:prstGeom prst="rect">
+            <a:avLst/>
+          </a:prstGeom>
+          <a:noFill/>
+        </p:spPr>
+        <p:txBody>
+          <a:bodyPr wrap="square">
+            <a:spAutoFit/>
+          </a:bodyPr>
+          <a:lstStyle/>
+          <a:p>
+            <a:pPr algn="l"/>
+            <a:r>
+              <a:rPr sz="1300" b="1" i="0">
+                <a:solidFill>
+                  <a:srgbClr val="7BD4FF"/>
+                </a:solidFill>
+              </a:rPr>
+              <a:t>PATH TO 2M ARR</a:t>
+            </a:r>
+          </a:p>
+        </p:txBody>
+      </p:sp>
+      <p:sp>
+        <p:nvSpPr>
+          <p:cNvPr id="59" name="TextBox 58"/>
+          <p:cNvSpPr txBox="1"/>
+          <p:nvPr/>
+        </p:nvSpPr>
+        <p:spPr>
+          <a:xfrm>
+            <a:off x="8412480" y="3172968"/>
+            <a:ext cx="3337560" cy="438912"/>
+          </a:xfrm>
+          <a:prstGeom prst="rect">
+            <a:avLst/>
+          </a:prstGeom>
+          <a:noFill/>
+        </p:spPr>
+        <p:txBody>
+          <a:bodyPr wrap="square">
+            <a:spAutoFit/>
+          </a:bodyPr>
+          <a:lstStyle/>
+          <a:p>
+            <a:pPr algn="l"/>
+            <a:r>
+              <a:rPr sz="2200" b="1" i="0">
+                <a:solidFill>
+                  <a:srgbClr val="FFFFFF"/>
+                </a:solidFill>
+              </a:rPr>
+              <a:t>Year 5 Target</a:t>
+            </a:r>
+          </a:p>
+        </p:txBody>
+      </p:sp>
+      <p:sp>
+        <p:nvSpPr>
+          <p:cNvPr id="60" name="TextBox 59"/>
+          <p:cNvSpPr txBox="1"/>
+          <p:nvPr/>
+        </p:nvSpPr>
+        <p:spPr>
+          <a:xfrm>
+            <a:off x="8412480" y="3593592"/>
+            <a:ext cx="3337560" cy="274320"/>
+          </a:xfrm>
+          <a:prstGeom prst="rect">
+            <a:avLst/>
+          </a:prstGeom>
+          <a:noFill/>
+        </p:spPr>
+        <p:txBody>
+          <a:bodyPr wrap="square">
+            <a:spAutoFit/>
+          </a:bodyPr>
+          <a:lstStyle/>
+          <a:p>
+            <a:pPr algn="l"/>
+            <a:r>
+              <a:rPr sz="1100" b="0" i="1">
+                <a:solidFill>
+                  <a:srgbClr val="CCCCCC"/>
+                </a:solidFill>
+              </a:rPr>
+              <a:t>By 2030 — 3M MAU</a:t>
+            </a:r>
+          </a:p>
+        </p:txBody>
+      </p:sp>
+      <p:sp>
+        <p:nvSpPr>
+          <p:cNvPr id="61" name="Rectangle 60"/>
+          <p:cNvSpPr/>
+          <p:nvPr/>
+        </p:nvSpPr>
+        <p:spPr>
+          <a:xfrm>
+            <a:off x="8412480" y="3904488"/>
+            <a:ext cx="3291840" cy="18288"/>
+          </a:xfrm>
+          <a:prstGeom prst="rect">
+            <a:avLst/>
+          </a:prstGeom>
+          <a:solidFill>
+            <a:srgbClr val="7BD4FF"/>
+          </a:solidFill>
+          <a:ln>
+            <a:noFill/>
+          </a:ln>
+        </p:spPr>
+        <p:style>
+          <a:lnRef idx="1">
+            <a:schemeClr val="accent1"/>
+          </a:lnRef>
+          <a:fillRef idx="3">
+            <a:schemeClr val="accent1"/>
+          </a:fillRef>
+          <a:effectRef idx="2">
+            <a:schemeClr val="accent1"/>
+          </a:effectRef>
+          <a:fontRef idx="minor">
+            <a:schemeClr val="lt1"/>
+          </a:fontRef>
+        </p:style>
+        <p:txBody>
+          <a:bodyPr rtlCol="0" anchor="ctr"/>
+          <a:lstStyle/>
+          <a:p>
+            <a:pPr algn="ctr"/>
+          </a:p>
+        </p:txBody>
+      </p:sp>
+      <p:sp>
+        <p:nvSpPr>
+          <p:cNvPr id="62" name="TextBox 61"/>
+          <p:cNvSpPr txBox="1"/>
+          <p:nvPr/>
+        </p:nvSpPr>
+        <p:spPr>
+          <a:xfrm>
+            <a:off x="8412480" y="4023360"/>
+            <a:ext cx="3337560" cy="347472"/>
+          </a:xfrm>
+          <a:prstGeom prst="rect">
+            <a:avLst/>
+          </a:prstGeom>
+          <a:noFill/>
+        </p:spPr>
+        <p:txBody>
+          <a:bodyPr wrap="square">
+            <a:spAutoFit/>
+          </a:bodyPr>
+          <a:lstStyle/>
+          <a:p>
+            <a:pPr algn="l"/>
+            <a:r>
+              <a:rPr sz="1100" b="0" i="0">
+                <a:solidFill>
+                  <a:srgbClr val="F0F0F0"/>
+                </a:solidFill>
+              </a:rPr>
+              <a:t>· Gifting revenue: 8.8M</a:t>
+            </a:r>
+          </a:p>
+        </p:txBody>
+      </p:sp>
+      <p:sp>
+        <p:nvSpPr>
+          <p:cNvPr id="63" name="TextBox 62"/>
+          <p:cNvSpPr txBox="1"/>
+          <p:nvPr/>
+        </p:nvSpPr>
+        <p:spPr>
+          <a:xfrm>
+            <a:off x="8412480" y="4407408"/>
+            <a:ext cx="3337560" cy="347472"/>
+          </a:xfrm>
+          <a:prstGeom prst="rect">
+            <a:avLst/>
+          </a:prstGeom>
+          <a:noFill/>
+        </p:spPr>
+        <p:txBody>
+          <a:bodyPr wrap="square">
+            <a:spAutoFit/>
+          </a:bodyPr>
+          <a:lstStyle/>
+          <a:p>
+            <a:pPr algn="l"/>
+            <a:r>
+              <a:rPr sz="1100" b="0" i="0">
+                <a:solidFill>
+                  <a:srgbClr val="F0F0F0"/>
+                </a:solidFill>
+              </a:rPr>
+              <a:t>· Subscriptions: .2M</a:t>
+            </a:r>
+          </a:p>
+        </p:txBody>
+      </p:sp>
+      <p:sp>
+        <p:nvSpPr>
+          <p:cNvPr id="64" name="TextBox 63"/>
+          <p:cNvSpPr txBox="1"/>
+          <p:nvPr/>
+        </p:nvSpPr>
+        <p:spPr>
+          <a:xfrm>
+            <a:off x="8412480" y="4791456"/>
+            <a:ext cx="3337560" cy="347472"/>
+          </a:xfrm>
+          <a:prstGeom prst="rect">
+            <a:avLst/>
+          </a:prstGeom>
+          <a:noFill/>
+        </p:spPr>
+        <p:txBody>
+          <a:bodyPr wrap="square">
+            <a:spAutoFit/>
+          </a:bodyPr>
+          <a:lstStyle/>
+          <a:p>
+            <a:pPr algn="l"/>
+            <a:r>
+              <a:rPr sz="1100" b="0" i="0">
+                <a:solidFill>
+                  <a:srgbClr val="F0F0F0"/>
+                </a:solidFill>
+              </a:rPr>
+              <a:t>· Advertising: .0M</a:t>
+            </a:r>
+          </a:p>
+        </p:txBody>
+      </p:sp>
+      <p:sp>
+        <p:nvSpPr>
+          <p:cNvPr id="65" name="TextBox 64"/>
+          <p:cNvSpPr txBox="1"/>
+          <p:nvPr/>
+        </p:nvSpPr>
+        <p:spPr>
+          <a:xfrm>
+            <a:off x="8412480" y="5175504"/>
+            <a:ext cx="3337560" cy="347472"/>
+          </a:xfrm>
+          <a:prstGeom prst="rect">
+            <a:avLst/>
+          </a:prstGeom>
+          <a:noFill/>
+        </p:spPr>
+        <p:txBody>
+          <a:bodyPr wrap="square">
+            <a:spAutoFit/>
+          </a:bodyPr>
+          <a:lstStyle/>
+          <a:p>
+            <a:pPr algn="l"/>
+            <a:r>
+              <a:rPr sz="1100" b="0" i="0">
+                <a:solidFill>
+                  <a:srgbClr val="F0F0F0"/>
+                </a:solidFill>
+              </a:rPr>
+              <a:t>· EBITDA margin: 72%+</a:t>
+            </a:r>
+          </a:p>
+        </p:txBody>
+      </p:sp>
+      <p:sp>
+        <p:nvSpPr>
+          <p:cNvPr id="66" name="TextBox 65"/>
+          <p:cNvSpPr txBox="1"/>
+          <p:nvPr/>
+        </p:nvSpPr>
+        <p:spPr>
+          <a:xfrm>
+            <a:off x="8412480" y="5559552"/>
+            <a:ext cx="3337560" cy="347472"/>
+          </a:xfrm>
+          <a:prstGeom prst="rect">
+            <a:avLst/>
+          </a:prstGeom>
+          <a:noFill/>
+        </p:spPr>
+        <p:txBody>
+          <a:bodyPr wrap="square">
+            <a:spAutoFit/>
+          </a:bodyPr>
+          <a:lstStyle/>
+          <a:p>
+            <a:pPr algn="l"/>
+            <a:r>
+              <a:rPr sz="1100" b="0" i="0">
+                <a:solidFill>
+                  <a:srgbClr val="F0F0F0"/>
+                </a:solidFill>
+              </a:rPr>
+              <a:t>· Series B / strategic acquisition potential</a:t>
+            </a:r>
+          </a:p>
+        </p:txBody>
+      </p:sp>
+      <p:sp>
+        <p:nvSpPr>
+          <p:cNvPr id="67" name="TextBox 66"/>
+          <p:cNvSpPr txBox="1"/>
+          <p:nvPr/>
+        </p:nvSpPr>
+        <p:spPr>
+          <a:xfrm>
+            <a:off x="8412480" y="5943600"/>
+            <a:ext cx="3337560" cy="347472"/>
+          </a:xfrm>
+          <a:prstGeom prst="rect">
+            <a:avLst/>
+          </a:prstGeom>
+          <a:noFill/>
+        </p:spPr>
+        <p:txBody>
+          <a:bodyPr wrap="square">
+            <a:spAutoFit/>
+          </a:bodyPr>
+          <a:lstStyle/>
+          <a:p>
+            <a:pPr algn="l"/>
+            <a:r>
+              <a:rPr sz="1100" b="0" i="0">
+                <a:solidFill>
+                  <a:srgbClr val="F0F0F0"/>
+                </a:solidFill>
+              </a:rPr>
+              <a:t>· IPO or exit evaluation at 5M MAU milestone</a:t>
             </a:r>
           </a:p>
         </p:txBody>

--- a/Sachi_Stream_Investor_Deck_Seed_Round_May2026.pptx
+++ b/Sachi_Stream_Investor_Deck_Seed_Round_May2026.pptx
@@ -13975,6 +13975,591 @@
 Will manage 10–15 developer team
 Responsible for platform migration and scaling
 Recruitment underway — Q3 2026 target start</a:t>
+            </a:r>
+          </a:p>
+        </p:txBody>
+      </p:sp>
+      <p:sp>
+        <p:nvSpPr>
+          <p:cNvPr id="25" name="Rectangle 24"/>
+          <p:cNvSpPr/>
+          <p:nvPr/>
+        </p:nvSpPr>
+        <p:spPr>
+          <a:xfrm>
+            <a:off x="0" y="1005840"/>
+            <a:ext cx="12188952" cy="5852160"/>
+          </a:xfrm>
+          <a:prstGeom prst="rect">
+            <a:avLst/>
+          </a:prstGeom>
+          <a:solidFill>
+            <a:srgbClr val="0B0C1A"/>
+          </a:solidFill>
+          <a:ln>
+            <a:noFill/>
+          </a:ln>
+        </p:spPr>
+        <p:style>
+          <a:lnRef idx="1">
+            <a:schemeClr val="accent1"/>
+          </a:lnRef>
+          <a:fillRef idx="3">
+            <a:schemeClr val="accent1"/>
+          </a:fillRef>
+          <a:effectRef idx="2">
+            <a:schemeClr val="accent1"/>
+          </a:effectRef>
+          <a:fontRef idx="minor">
+            <a:schemeClr val="lt1"/>
+          </a:fontRef>
+        </p:style>
+        <p:txBody>
+          <a:bodyPr rtlCol="0" anchor="ctr"/>
+          <a:lstStyle/>
+          <a:p>
+            <a:pPr algn="ctr"/>
+          </a:p>
+        </p:txBody>
+      </p:sp>
+      <p:sp>
+        <p:nvSpPr>
+          <p:cNvPr id="26" name="Rectangle 25"/>
+          <p:cNvSpPr/>
+          <p:nvPr/>
+        </p:nvSpPr>
+        <p:spPr>
+          <a:xfrm>
+            <a:off x="640080" y="1280160"/>
+            <a:ext cx="5394960" cy="5120640"/>
+          </a:xfrm>
+          <a:prstGeom prst="rect">
+            <a:avLst/>
+          </a:prstGeom>
+          <a:solidFill>
+            <a:srgbClr val="161830"/>
+          </a:solidFill>
+          <a:ln w="22860">
+            <a:solidFill>
+              <a:srgbClr val="F5C842"/>
+            </a:solidFill>
+          </a:ln>
+        </p:spPr>
+        <p:style>
+          <a:lnRef idx="1">
+            <a:schemeClr val="accent1"/>
+          </a:lnRef>
+          <a:fillRef idx="3">
+            <a:schemeClr val="accent1"/>
+          </a:fillRef>
+          <a:effectRef idx="2">
+            <a:schemeClr val="accent1"/>
+          </a:effectRef>
+          <a:fontRef idx="minor">
+            <a:schemeClr val="lt1"/>
+          </a:fontRef>
+        </p:style>
+        <p:txBody>
+          <a:bodyPr rtlCol="0" anchor="ctr"/>
+          <a:lstStyle/>
+          <a:p>
+            <a:pPr algn="ctr"/>
+          </a:p>
+        </p:txBody>
+      </p:sp>
+      <p:sp>
+        <p:nvSpPr>
+          <p:cNvPr id="27" name="Oval 26"/>
+          <p:cNvSpPr/>
+          <p:nvPr/>
+        </p:nvSpPr>
+        <p:spPr>
+          <a:xfrm>
+            <a:off x="2743200" y="1417320"/>
+            <a:ext cx="1005840" cy="1005840"/>
+          </a:xfrm>
+          <a:prstGeom prst="ellipse">
+            <a:avLst/>
+          </a:prstGeom>
+          <a:solidFill>
+            <a:srgbClr val="F5C842"/>
+          </a:solidFill>
+          <a:ln>
+            <a:noFill/>
+          </a:ln>
+        </p:spPr>
+        <p:style>
+          <a:lnRef idx="1">
+            <a:schemeClr val="accent1"/>
+          </a:lnRef>
+          <a:fillRef idx="3">
+            <a:schemeClr val="accent1"/>
+          </a:fillRef>
+          <a:effectRef idx="2">
+            <a:schemeClr val="accent1"/>
+          </a:effectRef>
+          <a:fontRef idx="minor">
+            <a:schemeClr val="lt1"/>
+          </a:fontRef>
+        </p:style>
+        <p:txBody>
+          <a:bodyPr rtlCol="0" anchor="ctr"/>
+          <a:lstStyle/>
+          <a:p>
+            <a:pPr algn="ctr"/>
+          </a:p>
+        </p:txBody>
+      </p:sp>
+      <p:sp>
+        <p:nvSpPr>
+          <p:cNvPr id="28" name="TextBox 27"/>
+          <p:cNvSpPr txBox="1"/>
+          <p:nvPr/>
+        </p:nvSpPr>
+        <p:spPr>
+          <a:xfrm>
+            <a:off x="2880360" y="1554480"/>
+            <a:ext cx="731520" cy="731520"/>
+          </a:xfrm>
+          <a:prstGeom prst="rect">
+            <a:avLst/>
+          </a:prstGeom>
+          <a:noFill/>
+        </p:spPr>
+        <p:txBody>
+          <a:bodyPr wrap="square">
+            <a:spAutoFit/>
+          </a:bodyPr>
+          <a:lstStyle/>
+          <a:p>
+            <a:pPr algn="ctr"/>
+            <a:r>
+              <a:rPr sz="2600" b="1" i="0">
+                <a:solidFill>
+                  <a:srgbClr val="0B0C1A"/>
+                </a:solidFill>
+              </a:rPr>
+              <a:t>D</a:t>
+            </a:r>
+          </a:p>
+        </p:txBody>
+      </p:sp>
+      <p:sp>
+        <p:nvSpPr>
+          <p:cNvPr id="29" name="TextBox 28"/>
+          <p:cNvSpPr txBox="1"/>
+          <p:nvPr/>
+        </p:nvSpPr>
+        <p:spPr>
+          <a:xfrm>
+            <a:off x="822960" y="2578608"/>
+            <a:ext cx="5029200" cy="411480"/>
+          </a:xfrm>
+          <a:prstGeom prst="rect">
+            <a:avLst/>
+          </a:prstGeom>
+          <a:noFill/>
+        </p:spPr>
+        <p:txBody>
+          <a:bodyPr wrap="square">
+            <a:spAutoFit/>
+          </a:bodyPr>
+          <a:lstStyle/>
+          <a:p>
+            <a:pPr algn="l"/>
+            <a:r>
+              <a:rPr sz="1500" b="1" i="0">
+                <a:solidFill>
+                  <a:srgbClr val="F5C842"/>
+                </a:solidFill>
+              </a:rPr>
+              <a:t>Dhananjaya (Jay) Gunaratne</a:t>
+            </a:r>
+          </a:p>
+        </p:txBody>
+      </p:sp>
+      <p:sp>
+        <p:nvSpPr>
+          <p:cNvPr id="30" name="TextBox 29"/>
+          <p:cNvSpPr txBox="1"/>
+          <p:nvPr/>
+        </p:nvSpPr>
+        <p:spPr>
+          <a:xfrm>
+            <a:off x="822960" y="3017520"/>
+            <a:ext cx="5029200" cy="320040"/>
+          </a:xfrm>
+          <a:prstGeom prst="rect">
+            <a:avLst/>
+          </a:prstGeom>
+          <a:noFill/>
+        </p:spPr>
+        <p:txBody>
+          <a:bodyPr wrap="square">
+            <a:spAutoFit/>
+          </a:bodyPr>
+          <a:lstStyle/>
+          <a:p>
+            <a:pPr algn="l"/>
+            <a:r>
+              <a:rPr sz="1200" b="0" i="1">
+                <a:solidFill>
+                  <a:srgbClr val="CCCCCC"/>
+                </a:solidFill>
+              </a:rPr>
+              <a:t>Founder &amp; CEO</a:t>
+            </a:r>
+          </a:p>
+        </p:txBody>
+      </p:sp>
+      <p:sp>
+        <p:nvSpPr>
+          <p:cNvPr id="31" name="Rectangle 30"/>
+          <p:cNvSpPr/>
+          <p:nvPr/>
+        </p:nvSpPr>
+        <p:spPr>
+          <a:xfrm>
+            <a:off x="822960" y="3401568"/>
+            <a:ext cx="5029200" cy="18288"/>
+          </a:xfrm>
+          <a:prstGeom prst="rect">
+            <a:avLst/>
+          </a:prstGeom>
+          <a:solidFill>
+            <a:srgbClr val="F5C842"/>
+          </a:solidFill>
+          <a:ln>
+            <a:noFill/>
+          </a:ln>
+        </p:spPr>
+        <p:style>
+          <a:lnRef idx="1">
+            <a:schemeClr val="accent1"/>
+          </a:lnRef>
+          <a:fillRef idx="3">
+            <a:schemeClr val="accent1"/>
+          </a:fillRef>
+          <a:effectRef idx="2">
+            <a:schemeClr val="accent1"/>
+          </a:effectRef>
+          <a:fontRef idx="minor">
+            <a:schemeClr val="lt1"/>
+          </a:fontRef>
+        </p:style>
+        <p:txBody>
+          <a:bodyPr rtlCol="0" anchor="ctr"/>
+          <a:lstStyle/>
+          <a:p>
+            <a:pPr algn="ctr"/>
+          </a:p>
+        </p:txBody>
+      </p:sp>
+      <p:sp>
+        <p:nvSpPr>
+          <p:cNvPr id="32" name="TextBox 31"/>
+          <p:cNvSpPr txBox="1"/>
+          <p:nvPr/>
+        </p:nvSpPr>
+        <p:spPr>
+          <a:xfrm>
+            <a:off x="822960" y="3520440"/>
+            <a:ext cx="5029200" cy="2606040"/>
+          </a:xfrm>
+          <a:prstGeom prst="rect">
+            <a:avLst/>
+          </a:prstGeom>
+          <a:noFill/>
+        </p:spPr>
+        <p:txBody>
+          <a:bodyPr wrap="square">
+            <a:spAutoFit/>
+          </a:bodyPr>
+          <a:lstStyle/>
+          <a:p>
+            <a:pPr algn="l"/>
+            <a:r>
+              <a:rPr sz="1200" b="0" i="0">
+                <a:solidFill>
+                  <a:srgbClr val="F0F0F0"/>
+                </a:solidFill>
+              </a:rPr>
+              <a:t>21+ years Senior Infrastructure Project Manager — Nokia, MPLS, NERC-CIP, SCADA, telecom
+Architect of Sachi Stream: platform vision, strategy, product design, and brand identity
+Creator community strategy, content culture, and diaspora community engagement
+User experience design, creator onboarding, and founding creator program
+PSEG Long Island — 0M+ infrastructure programs  ·  Founder, LDNA Consulting LLC</a:t>
+            </a:r>
+          </a:p>
+        </p:txBody>
+      </p:sp>
+      <p:sp>
+        <p:nvSpPr>
+          <p:cNvPr id="33" name="Rectangle 32"/>
+          <p:cNvSpPr/>
+          <p:nvPr/>
+        </p:nvSpPr>
+        <p:spPr>
+          <a:xfrm>
+            <a:off x="6492240" y="1280160"/>
+            <a:ext cx="5394960" cy="5120640"/>
+          </a:xfrm>
+          <a:prstGeom prst="rect">
+            <a:avLst/>
+          </a:prstGeom>
+          <a:solidFill>
+            <a:srgbClr val="161830"/>
+          </a:solidFill>
+          <a:ln w="22860">
+            <a:solidFill>
+              <a:srgbClr val="7BD4FF"/>
+            </a:solidFill>
+          </a:ln>
+        </p:spPr>
+        <p:style>
+          <a:lnRef idx="1">
+            <a:schemeClr val="accent1"/>
+          </a:lnRef>
+          <a:fillRef idx="3">
+            <a:schemeClr val="accent1"/>
+          </a:fillRef>
+          <a:effectRef idx="2">
+            <a:schemeClr val="accent1"/>
+          </a:effectRef>
+          <a:fontRef idx="minor">
+            <a:schemeClr val="lt1"/>
+          </a:fontRef>
+        </p:style>
+        <p:txBody>
+          <a:bodyPr rtlCol="0" anchor="ctr"/>
+          <a:lstStyle/>
+          <a:p>
+            <a:pPr algn="ctr"/>
+          </a:p>
+        </p:txBody>
+      </p:sp>
+      <p:sp>
+        <p:nvSpPr>
+          <p:cNvPr id="34" name="Oval 33"/>
+          <p:cNvSpPr/>
+          <p:nvPr/>
+        </p:nvSpPr>
+        <p:spPr>
+          <a:xfrm>
+            <a:off x="8595360" y="1417320"/>
+            <a:ext cx="1005840" cy="1005840"/>
+          </a:xfrm>
+          <a:prstGeom prst="ellipse">
+            <a:avLst/>
+          </a:prstGeom>
+          <a:solidFill>
+            <a:srgbClr val="7BD4FF"/>
+          </a:solidFill>
+          <a:ln>
+            <a:noFill/>
+          </a:ln>
+        </p:spPr>
+        <p:style>
+          <a:lnRef idx="1">
+            <a:schemeClr val="accent1"/>
+          </a:lnRef>
+          <a:fillRef idx="3">
+            <a:schemeClr val="accent1"/>
+          </a:fillRef>
+          <a:effectRef idx="2">
+            <a:schemeClr val="accent1"/>
+          </a:effectRef>
+          <a:fontRef idx="minor">
+            <a:schemeClr val="lt1"/>
+          </a:fontRef>
+        </p:style>
+        <p:txBody>
+          <a:bodyPr rtlCol="0" anchor="ctr"/>
+          <a:lstStyle/>
+          <a:p>
+            <a:pPr algn="ctr"/>
+          </a:p>
+        </p:txBody>
+      </p:sp>
+      <p:sp>
+        <p:nvSpPr>
+          <p:cNvPr id="35" name="TextBox 34"/>
+          <p:cNvSpPr txBox="1"/>
+          <p:nvPr/>
+        </p:nvSpPr>
+        <p:spPr>
+          <a:xfrm>
+            <a:off x="8732520" y="1554480"/>
+            <a:ext cx="731520" cy="731520"/>
+          </a:xfrm>
+          <a:prstGeom prst="rect">
+            <a:avLst/>
+          </a:prstGeom>
+          <a:noFill/>
+        </p:spPr>
+        <p:txBody>
+          <a:bodyPr wrap="square">
+            <a:spAutoFit/>
+          </a:bodyPr>
+          <a:lstStyle/>
+          <a:p>
+            <a:pPr algn="ctr"/>
+            <a:r>
+              <a:rPr sz="2600" b="1" i="0">
+                <a:solidFill>
+                  <a:srgbClr val="0B0C1A"/>
+                </a:solidFill>
+              </a:rPr>
+              <a:t>C</a:t>
+            </a:r>
+          </a:p>
+        </p:txBody>
+      </p:sp>
+      <p:sp>
+        <p:nvSpPr>
+          <p:cNvPr id="36" name="TextBox 35"/>
+          <p:cNvSpPr txBox="1"/>
+          <p:nvPr/>
+        </p:nvSpPr>
+        <p:spPr>
+          <a:xfrm>
+            <a:off x="6675120" y="2578608"/>
+            <a:ext cx="5029200" cy="411480"/>
+          </a:xfrm>
+          <a:prstGeom prst="rect">
+            <a:avLst/>
+          </a:prstGeom>
+          <a:noFill/>
+        </p:spPr>
+        <p:txBody>
+          <a:bodyPr wrap="square">
+            <a:spAutoFit/>
+          </a:bodyPr>
+          <a:lstStyle/>
+          <a:p>
+            <a:pPr algn="l"/>
+            <a:r>
+              <a:rPr sz="1500" b="1" i="0">
+                <a:solidFill>
+                  <a:srgbClr val="7BD4FF"/>
+                </a:solidFill>
+              </a:rPr>
+              <a:t>Colombo Engineering Director</a:t>
+            </a:r>
+          </a:p>
+        </p:txBody>
+      </p:sp>
+      <p:sp>
+        <p:nvSpPr>
+          <p:cNvPr id="37" name="TextBox 36"/>
+          <p:cNvSpPr txBox="1"/>
+          <p:nvPr/>
+        </p:nvSpPr>
+        <p:spPr>
+          <a:xfrm>
+            <a:off x="6675120" y="3017520"/>
+            <a:ext cx="5029200" cy="320040"/>
+          </a:xfrm>
+          <a:prstGeom prst="rect">
+            <a:avLst/>
+          </a:prstGeom>
+          <a:noFill/>
+        </p:spPr>
+        <p:txBody>
+          <a:bodyPr wrap="square">
+            <a:spAutoFit/>
+          </a:bodyPr>
+          <a:lstStyle/>
+          <a:p>
+            <a:pPr algn="l"/>
+            <a:r>
+              <a:rPr sz="1200" b="0" i="1">
+                <a:solidFill>
+                  <a:srgbClr val="CCCCCC"/>
+                </a:solidFill>
+              </a:rPr>
+              <a:t>VP Engineering (To Be Hired)</a:t>
+            </a:r>
+          </a:p>
+        </p:txBody>
+      </p:sp>
+      <p:sp>
+        <p:nvSpPr>
+          <p:cNvPr id="38" name="Rectangle 37"/>
+          <p:cNvSpPr/>
+          <p:nvPr/>
+        </p:nvSpPr>
+        <p:spPr>
+          <a:xfrm>
+            <a:off x="6675120" y="3401568"/>
+            <a:ext cx="5029200" cy="18288"/>
+          </a:xfrm>
+          <a:prstGeom prst="rect">
+            <a:avLst/>
+          </a:prstGeom>
+          <a:solidFill>
+            <a:srgbClr val="7BD4FF"/>
+          </a:solidFill>
+          <a:ln>
+            <a:noFill/>
+          </a:ln>
+        </p:spPr>
+        <p:style>
+          <a:lnRef idx="1">
+            <a:schemeClr val="accent1"/>
+          </a:lnRef>
+          <a:fillRef idx="3">
+            <a:schemeClr val="accent1"/>
+          </a:fillRef>
+          <a:effectRef idx="2">
+            <a:schemeClr val="accent1"/>
+          </a:effectRef>
+          <a:fontRef idx="minor">
+            <a:schemeClr val="lt1"/>
+          </a:fontRef>
+        </p:style>
+        <p:txBody>
+          <a:bodyPr rtlCol="0" anchor="ctr"/>
+          <a:lstStyle/>
+          <a:p>
+            <a:pPr algn="ctr"/>
+          </a:p>
+        </p:txBody>
+      </p:sp>
+      <p:sp>
+        <p:nvSpPr>
+          <p:cNvPr id="39" name="TextBox 38"/>
+          <p:cNvSpPr txBox="1"/>
+          <p:nvPr/>
+        </p:nvSpPr>
+        <p:spPr>
+          <a:xfrm>
+            <a:off x="6675120" y="3520440"/>
+            <a:ext cx="5029200" cy="2606040"/>
+          </a:xfrm>
+          <a:prstGeom prst="rect">
+            <a:avLst/>
+          </a:prstGeom>
+          <a:noFill/>
+        </p:spPr>
+        <p:txBody>
+          <a:bodyPr wrap="square">
+            <a:spAutoFit/>
+          </a:bodyPr>
+          <a:lstStyle/>
+          <a:p>
+            <a:pPr algn="l"/>
+            <a:r>
+              <a:rPr sz="1200" b="0" i="0">
+                <a:solidFill>
+                  <a:srgbClr val="F0F0F0"/>
+                </a:solidFill>
+              </a:rPr>
+              <a:t>Target: Senior full-stack engineering leader based in Colombo, Sri Lanka
+Will manage 10–15 developer team across platform, mobile, and infrastructure
+Responsible for platform migration, scaling, and bare metal buildout
+App Store compliance, release management, and 24/7 ops oversight
+Recruitment underway — Q3 2026 target start date</a:t>
             </a:r>
           </a:p>
         </p:txBody>

--- a/Sachi_Stream_Investor_Deck_Seed_Round_May2026.pptx
+++ b/Sachi_Stream_Investor_Deck_Seed_Round_May2026.pptx
@@ -4764,6 +4764,1337 @@
               </a:rPr>
               <a:t>US operations, trademark filings, legal
 Compliance, accounting, executive team</a:t>
+            </a:r>
+          </a:p>
+        </p:txBody>
+      </p:sp>
+      <p:sp>
+        <p:nvSpPr>
+          <p:cNvPr id="32" name="Rectangle 31"/>
+          <p:cNvSpPr/>
+          <p:nvPr/>
+        </p:nvSpPr>
+        <p:spPr>
+          <a:xfrm>
+            <a:off x="0" y="1005840"/>
+            <a:ext cx="12188952" cy="5852160"/>
+          </a:xfrm>
+          <a:prstGeom prst="rect">
+            <a:avLst/>
+          </a:prstGeom>
+          <a:solidFill>
+            <a:srgbClr val="0B0C1A"/>
+          </a:solidFill>
+          <a:ln>
+            <a:noFill/>
+          </a:ln>
+        </p:spPr>
+        <p:style>
+          <a:lnRef idx="1">
+            <a:schemeClr val="accent1"/>
+          </a:lnRef>
+          <a:fillRef idx="3">
+            <a:schemeClr val="accent1"/>
+          </a:fillRef>
+          <a:effectRef idx="2">
+            <a:schemeClr val="accent1"/>
+          </a:effectRef>
+          <a:fontRef idx="minor">
+            <a:schemeClr val="lt1"/>
+          </a:fontRef>
+        </p:style>
+        <p:txBody>
+          <a:bodyPr rtlCol="0" anchor="ctr"/>
+          <a:lstStyle/>
+          <a:p>
+            <a:pPr algn="ctr"/>
+          </a:p>
+        </p:txBody>
+      </p:sp>
+      <p:sp>
+        <p:nvSpPr>
+          <p:cNvPr id="33" name="TextBox 32"/>
+          <p:cNvSpPr txBox="1"/>
+          <p:nvPr/>
+        </p:nvSpPr>
+        <p:spPr>
+          <a:xfrm>
+            <a:off x="777240" y="274320"/>
+            <a:ext cx="10058400" cy="594360"/>
+          </a:xfrm>
+          <a:prstGeom prst="rect">
+            <a:avLst/>
+          </a:prstGeom>
+          <a:noFill/>
+        </p:spPr>
+        <p:txBody>
+          <a:bodyPr wrap="square">
+            <a:spAutoFit/>
+          </a:bodyPr>
+          <a:lstStyle/>
+          <a:p>
+            <a:pPr algn="l"/>
+            <a:r>
+              <a:rPr sz="3600" b="1" i="0">
+                <a:solidFill>
+                  <a:srgbClr val="F5C842"/>
+                </a:solidFill>
+              </a:rPr>
+              <a:t>Use of Funds — M Seed Round</a:t>
+            </a:r>
+          </a:p>
+        </p:txBody>
+      </p:sp>
+      <p:sp>
+        <p:nvSpPr>
+          <p:cNvPr id="34" name="Rectangle 33"/>
+          <p:cNvSpPr/>
+          <p:nvPr/>
+        </p:nvSpPr>
+        <p:spPr>
+          <a:xfrm>
+            <a:off x="640080" y="1005840"/>
+            <a:ext cx="10881360" cy="27432"/>
+          </a:xfrm>
+          <a:prstGeom prst="rect">
+            <a:avLst/>
+          </a:prstGeom>
+          <a:solidFill>
+            <a:srgbClr val="F5C842"/>
+          </a:solidFill>
+          <a:ln>
+            <a:noFill/>
+          </a:ln>
+        </p:spPr>
+        <p:style>
+          <a:lnRef idx="1">
+            <a:schemeClr val="accent1"/>
+          </a:lnRef>
+          <a:fillRef idx="3">
+            <a:schemeClr val="accent1"/>
+          </a:fillRef>
+          <a:effectRef idx="2">
+            <a:schemeClr val="accent1"/>
+          </a:effectRef>
+          <a:fontRef idx="minor">
+            <a:schemeClr val="lt1"/>
+          </a:fontRef>
+        </p:style>
+        <p:txBody>
+          <a:bodyPr rtlCol="0" anchor="ctr"/>
+          <a:lstStyle/>
+          <a:p>
+            <a:pPr algn="ctr"/>
+          </a:p>
+        </p:txBody>
+      </p:sp>
+      <p:sp>
+        <p:nvSpPr>
+          <p:cNvPr id="35" name="Rectangle 34"/>
+          <p:cNvSpPr/>
+          <p:nvPr/>
+        </p:nvSpPr>
+        <p:spPr>
+          <a:xfrm>
+            <a:off x="457200" y="1280160"/>
+            <a:ext cx="109728" cy="4114800"/>
+          </a:xfrm>
+          <a:prstGeom prst="rect">
+            <a:avLst/>
+          </a:prstGeom>
+          <a:solidFill>
+            <a:srgbClr val="F5C842"/>
+          </a:solidFill>
+          <a:ln>
+            <a:noFill/>
+          </a:ln>
+        </p:spPr>
+        <p:style>
+          <a:lnRef idx="1">
+            <a:schemeClr val="accent1"/>
+          </a:lnRef>
+          <a:fillRef idx="3">
+            <a:schemeClr val="accent1"/>
+          </a:fillRef>
+          <a:effectRef idx="2">
+            <a:schemeClr val="accent1"/>
+          </a:effectRef>
+          <a:fontRef idx="minor">
+            <a:schemeClr val="lt1"/>
+          </a:fontRef>
+        </p:style>
+        <p:txBody>
+          <a:bodyPr rtlCol="0" anchor="ctr"/>
+          <a:lstStyle/>
+          <a:p>
+            <a:pPr algn="ctr"/>
+          </a:p>
+        </p:txBody>
+      </p:sp>
+      <p:sp>
+        <p:nvSpPr>
+          <p:cNvPr id="36" name="Rectangle 35"/>
+          <p:cNvSpPr/>
+          <p:nvPr/>
+        </p:nvSpPr>
+        <p:spPr>
+          <a:xfrm>
+            <a:off x="640080" y="1600200"/>
+            <a:ext cx="7772400" cy="274320"/>
+          </a:xfrm>
+          <a:prstGeom prst="rect">
+            <a:avLst/>
+          </a:prstGeom>
+          <a:solidFill>
+            <a:srgbClr val="161830"/>
+          </a:solidFill>
+          <a:ln>
+            <a:noFill/>
+          </a:ln>
+        </p:spPr>
+        <p:style>
+          <a:lnRef idx="1">
+            <a:schemeClr val="accent1"/>
+          </a:lnRef>
+          <a:fillRef idx="3">
+            <a:schemeClr val="accent1"/>
+          </a:fillRef>
+          <a:effectRef idx="2">
+            <a:schemeClr val="accent1"/>
+          </a:effectRef>
+          <a:fontRef idx="minor">
+            <a:schemeClr val="lt1"/>
+          </a:fontRef>
+        </p:style>
+        <p:txBody>
+          <a:bodyPr rtlCol="0" anchor="ctr"/>
+          <a:lstStyle/>
+          <a:p>
+            <a:pPr algn="ctr"/>
+          </a:p>
+        </p:txBody>
+      </p:sp>
+      <p:sp>
+        <p:nvSpPr>
+          <p:cNvPr id="37" name="Rectangle 36"/>
+          <p:cNvSpPr/>
+          <p:nvPr/>
+        </p:nvSpPr>
+        <p:spPr>
+          <a:xfrm>
+            <a:off x="640080" y="1600200"/>
+            <a:ext cx="3108960" cy="274320"/>
+          </a:xfrm>
+          <a:prstGeom prst="rect">
+            <a:avLst/>
+          </a:prstGeom>
+          <a:solidFill>
+            <a:srgbClr val="F5C842"/>
+          </a:solidFill>
+          <a:ln>
+            <a:noFill/>
+          </a:ln>
+        </p:spPr>
+        <p:style>
+          <a:lnRef idx="1">
+            <a:schemeClr val="accent1"/>
+          </a:lnRef>
+          <a:fillRef idx="3">
+            <a:schemeClr val="accent1"/>
+          </a:fillRef>
+          <a:effectRef idx="2">
+            <a:schemeClr val="accent1"/>
+          </a:effectRef>
+          <a:fontRef idx="minor">
+            <a:schemeClr val="lt1"/>
+          </a:fontRef>
+        </p:style>
+        <p:txBody>
+          <a:bodyPr rtlCol="0" anchor="ctr"/>
+          <a:lstStyle/>
+          <a:p>
+            <a:pPr algn="ctr"/>
+          </a:p>
+        </p:txBody>
+      </p:sp>
+      <p:sp>
+        <p:nvSpPr>
+          <p:cNvPr id="38" name="TextBox 37"/>
+          <p:cNvSpPr txBox="1"/>
+          <p:nvPr/>
+        </p:nvSpPr>
+        <p:spPr>
+          <a:xfrm>
+            <a:off x="640080" y="1325880"/>
+            <a:ext cx="5029200" cy="292608"/>
+          </a:xfrm>
+          <a:prstGeom prst="rect">
+            <a:avLst/>
+          </a:prstGeom>
+          <a:noFill/>
+        </p:spPr>
+        <p:txBody>
+          <a:bodyPr wrap="square">
+            <a:spAutoFit/>
+          </a:bodyPr>
+          <a:lstStyle/>
+          <a:p>
+            <a:pPr algn="l"/>
+            <a:r>
+              <a:rPr sz="1300" b="1" i="0">
+                <a:solidFill>
+                  <a:srgbClr val="F5C842"/>
+                </a:solidFill>
+              </a:rPr>
+              <a:t>Infrastructure &amp; Bare Metal</a:t>
+            </a:r>
+          </a:p>
+        </p:txBody>
+      </p:sp>
+      <p:sp>
+        <p:nvSpPr>
+          <p:cNvPr id="39" name="TextBox 38"/>
+          <p:cNvSpPr txBox="1"/>
+          <p:nvPr/>
+        </p:nvSpPr>
+        <p:spPr>
+          <a:xfrm>
+            <a:off x="5577840" y="1325880"/>
+            <a:ext cx="2926080" cy="292608"/>
+          </a:xfrm>
+          <a:prstGeom prst="rect">
+            <a:avLst/>
+          </a:prstGeom>
+          <a:noFill/>
+        </p:spPr>
+        <p:txBody>
+          <a:bodyPr wrap="square">
+            <a:spAutoFit/>
+          </a:bodyPr>
+          <a:lstStyle/>
+          <a:p>
+            <a:pPr algn="r"/>
+            <a:r>
+              <a:rPr sz="1300" b="1" i="0">
+                <a:solidFill>
+                  <a:srgbClr val="FFFFFF"/>
+                </a:solidFill>
+              </a:rPr>
+              <a:t>$2,000,000  (40%)</a:t>
+            </a:r>
+          </a:p>
+        </p:txBody>
+      </p:sp>
+      <p:sp>
+        <p:nvSpPr>
+          <p:cNvPr id="40" name="TextBox 39"/>
+          <p:cNvSpPr txBox="1"/>
+          <p:nvPr/>
+        </p:nvSpPr>
+        <p:spPr>
+          <a:xfrm>
+            <a:off x="8549640" y="1399032"/>
+            <a:ext cx="3383280" cy="502920"/>
+          </a:xfrm>
+          <a:prstGeom prst="rect">
+            <a:avLst/>
+          </a:prstGeom>
+          <a:noFill/>
+        </p:spPr>
+        <p:txBody>
+          <a:bodyPr wrap="square">
+            <a:spAutoFit/>
+          </a:bodyPr>
+          <a:lstStyle/>
+          <a:p>
+            <a:pPr algn="l"/>
+            <a:r>
+              <a:rPr sz="1100" b="0" i="0">
+                <a:solidFill>
+                  <a:srgbClr val="CCCCCC"/>
+                </a:solidFill>
+              </a:rPr>
+              <a:t>Colombo bare metal servers, switches, networking
+hardware, co-location facility setup, redundancy</a:t>
+            </a:r>
+          </a:p>
+        </p:txBody>
+      </p:sp>
+      <p:sp>
+        <p:nvSpPr>
+          <p:cNvPr id="41" name="Rectangle 40"/>
+          <p:cNvSpPr/>
+          <p:nvPr/>
+        </p:nvSpPr>
+        <p:spPr>
+          <a:xfrm>
+            <a:off x="640080" y="2359151"/>
+            <a:ext cx="7772400" cy="274320"/>
+          </a:xfrm>
+          <a:prstGeom prst="rect">
+            <a:avLst/>
+          </a:prstGeom>
+          <a:solidFill>
+            <a:srgbClr val="161830"/>
+          </a:solidFill>
+          <a:ln>
+            <a:noFill/>
+          </a:ln>
+        </p:spPr>
+        <p:style>
+          <a:lnRef idx="1">
+            <a:schemeClr val="accent1"/>
+          </a:lnRef>
+          <a:fillRef idx="3">
+            <a:schemeClr val="accent1"/>
+          </a:fillRef>
+          <a:effectRef idx="2">
+            <a:schemeClr val="accent1"/>
+          </a:effectRef>
+          <a:fontRef idx="minor">
+            <a:schemeClr val="lt1"/>
+          </a:fontRef>
+        </p:style>
+        <p:txBody>
+          <a:bodyPr rtlCol="0" anchor="ctr"/>
+          <a:lstStyle/>
+          <a:p>
+            <a:pPr algn="ctr"/>
+          </a:p>
+        </p:txBody>
+      </p:sp>
+      <p:sp>
+        <p:nvSpPr>
+          <p:cNvPr id="42" name="Rectangle 41"/>
+          <p:cNvSpPr/>
+          <p:nvPr/>
+        </p:nvSpPr>
+        <p:spPr>
+          <a:xfrm>
+            <a:off x="640080" y="2359151"/>
+            <a:ext cx="1865376" cy="274320"/>
+          </a:xfrm>
+          <a:prstGeom prst="rect">
+            <a:avLst/>
+          </a:prstGeom>
+          <a:solidFill>
+            <a:srgbClr val="FF6B6B"/>
+          </a:solidFill>
+          <a:ln>
+            <a:noFill/>
+          </a:ln>
+        </p:spPr>
+        <p:style>
+          <a:lnRef idx="1">
+            <a:schemeClr val="accent1"/>
+          </a:lnRef>
+          <a:fillRef idx="3">
+            <a:schemeClr val="accent1"/>
+          </a:fillRef>
+          <a:effectRef idx="2">
+            <a:schemeClr val="accent1"/>
+          </a:effectRef>
+          <a:fontRef idx="minor">
+            <a:schemeClr val="lt1"/>
+          </a:fontRef>
+        </p:style>
+        <p:txBody>
+          <a:bodyPr rtlCol="0" anchor="ctr"/>
+          <a:lstStyle/>
+          <a:p>
+            <a:pPr algn="ctr"/>
+          </a:p>
+        </p:txBody>
+      </p:sp>
+      <p:sp>
+        <p:nvSpPr>
+          <p:cNvPr id="43" name="TextBox 42"/>
+          <p:cNvSpPr txBox="1"/>
+          <p:nvPr/>
+        </p:nvSpPr>
+        <p:spPr>
+          <a:xfrm>
+            <a:off x="640080" y="2084831"/>
+            <a:ext cx="5029200" cy="292608"/>
+          </a:xfrm>
+          <a:prstGeom prst="rect">
+            <a:avLst/>
+          </a:prstGeom>
+          <a:noFill/>
+        </p:spPr>
+        <p:txBody>
+          <a:bodyPr wrap="square">
+            <a:spAutoFit/>
+          </a:bodyPr>
+          <a:lstStyle/>
+          <a:p>
+            <a:pPr algn="l"/>
+            <a:r>
+              <a:rPr sz="1300" b="1" i="0">
+                <a:solidFill>
+                  <a:srgbClr val="FF6B6B"/>
+                </a:solidFill>
+              </a:rPr>
+              <a:t>Engineering Team (Colombo)</a:t>
+            </a:r>
+          </a:p>
+        </p:txBody>
+      </p:sp>
+      <p:sp>
+        <p:nvSpPr>
+          <p:cNvPr id="44" name="TextBox 43"/>
+          <p:cNvSpPr txBox="1"/>
+          <p:nvPr/>
+        </p:nvSpPr>
+        <p:spPr>
+          <a:xfrm>
+            <a:off x="5577840" y="2084831"/>
+            <a:ext cx="2926080" cy="292608"/>
+          </a:xfrm>
+          <a:prstGeom prst="rect">
+            <a:avLst/>
+          </a:prstGeom>
+          <a:noFill/>
+        </p:spPr>
+        <p:txBody>
+          <a:bodyPr wrap="square">
+            <a:spAutoFit/>
+          </a:bodyPr>
+          <a:lstStyle/>
+          <a:p>
+            <a:pPr algn="r"/>
+            <a:r>
+              <a:rPr sz="1300" b="1" i="0">
+                <a:solidFill>
+                  <a:srgbClr val="FFFFFF"/>
+                </a:solidFill>
+              </a:rPr>
+              <a:t>$1,200,000  (24%)</a:t>
+            </a:r>
+          </a:p>
+        </p:txBody>
+      </p:sp>
+      <p:sp>
+        <p:nvSpPr>
+          <p:cNvPr id="45" name="TextBox 44"/>
+          <p:cNvSpPr txBox="1"/>
+          <p:nvPr/>
+        </p:nvSpPr>
+        <p:spPr>
+          <a:xfrm>
+            <a:off x="8549640" y="2157983"/>
+            <a:ext cx="3383280" cy="502920"/>
+          </a:xfrm>
+          <a:prstGeom prst="rect">
+            <a:avLst/>
+          </a:prstGeom>
+          <a:noFill/>
+        </p:spPr>
+        <p:txBody>
+          <a:bodyPr wrap="square">
+            <a:spAutoFit/>
+          </a:bodyPr>
+          <a:lstStyle/>
+          <a:p>
+            <a:pPr algn="l"/>
+            <a:r>
+              <a:rPr sz="1100" b="0" i="0">
+                <a:solidFill>
+                  <a:srgbClr val="CCCCCC"/>
+                </a:solidFill>
+              </a:rPr>
+              <a:t>10–15 developers, QA, DevOps — 24 months
+Senior engineering director + team leads</a:t>
+            </a:r>
+          </a:p>
+        </p:txBody>
+      </p:sp>
+      <p:sp>
+        <p:nvSpPr>
+          <p:cNvPr id="46" name="Rectangle 45"/>
+          <p:cNvSpPr/>
+          <p:nvPr/>
+        </p:nvSpPr>
+        <p:spPr>
+          <a:xfrm>
+            <a:off x="640080" y="3118104"/>
+            <a:ext cx="7772400" cy="274320"/>
+          </a:xfrm>
+          <a:prstGeom prst="rect">
+            <a:avLst/>
+          </a:prstGeom>
+          <a:solidFill>
+            <a:srgbClr val="161830"/>
+          </a:solidFill>
+          <a:ln>
+            <a:noFill/>
+          </a:ln>
+        </p:spPr>
+        <p:style>
+          <a:lnRef idx="1">
+            <a:schemeClr val="accent1"/>
+          </a:lnRef>
+          <a:fillRef idx="3">
+            <a:schemeClr val="accent1"/>
+          </a:fillRef>
+          <a:effectRef idx="2">
+            <a:schemeClr val="accent1"/>
+          </a:effectRef>
+          <a:fontRef idx="minor">
+            <a:schemeClr val="lt1"/>
+          </a:fontRef>
+        </p:style>
+        <p:txBody>
+          <a:bodyPr rtlCol="0" anchor="ctr"/>
+          <a:lstStyle/>
+          <a:p>
+            <a:pPr algn="ctr"/>
+          </a:p>
+        </p:txBody>
+      </p:sp>
+      <p:sp>
+        <p:nvSpPr>
+          <p:cNvPr id="47" name="Rectangle 46"/>
+          <p:cNvSpPr/>
+          <p:nvPr/>
+        </p:nvSpPr>
+        <p:spPr>
+          <a:xfrm>
+            <a:off x="640080" y="3118104"/>
+            <a:ext cx="777240" cy="274320"/>
+          </a:xfrm>
+          <a:prstGeom prst="rect">
+            <a:avLst/>
+          </a:prstGeom>
+          <a:solidFill>
+            <a:srgbClr val="A0FFB0"/>
+          </a:solidFill>
+          <a:ln>
+            <a:noFill/>
+          </a:ln>
+        </p:spPr>
+        <p:style>
+          <a:lnRef idx="1">
+            <a:schemeClr val="accent1"/>
+          </a:lnRef>
+          <a:fillRef idx="3">
+            <a:schemeClr val="accent1"/>
+          </a:fillRef>
+          <a:effectRef idx="2">
+            <a:schemeClr val="accent1"/>
+          </a:effectRef>
+          <a:fontRef idx="minor">
+            <a:schemeClr val="lt1"/>
+          </a:fontRef>
+        </p:style>
+        <p:txBody>
+          <a:bodyPr rtlCol="0" anchor="ctr"/>
+          <a:lstStyle/>
+          <a:p>
+            <a:pPr algn="ctr"/>
+          </a:p>
+        </p:txBody>
+      </p:sp>
+      <p:sp>
+        <p:nvSpPr>
+          <p:cNvPr id="48" name="TextBox 47"/>
+          <p:cNvSpPr txBox="1"/>
+          <p:nvPr/>
+        </p:nvSpPr>
+        <p:spPr>
+          <a:xfrm>
+            <a:off x="640080" y="2843784"/>
+            <a:ext cx="5029200" cy="292608"/>
+          </a:xfrm>
+          <a:prstGeom prst="rect">
+            <a:avLst/>
+          </a:prstGeom>
+          <a:noFill/>
+        </p:spPr>
+        <p:txBody>
+          <a:bodyPr wrap="square">
+            <a:spAutoFit/>
+          </a:bodyPr>
+          <a:lstStyle/>
+          <a:p>
+            <a:pPr algn="l"/>
+            <a:r>
+              <a:rPr sz="1300" b="1" i="0">
+                <a:solidFill>
+                  <a:srgbClr val="A0FFB0"/>
+                </a:solidFill>
+              </a:rPr>
+              <a:t>U.S. Operations Office</a:t>
+            </a:r>
+          </a:p>
+        </p:txBody>
+      </p:sp>
+      <p:sp>
+        <p:nvSpPr>
+          <p:cNvPr id="49" name="TextBox 48"/>
+          <p:cNvSpPr txBox="1"/>
+          <p:nvPr/>
+        </p:nvSpPr>
+        <p:spPr>
+          <a:xfrm>
+            <a:off x="5577840" y="2843784"/>
+            <a:ext cx="2926080" cy="292608"/>
+          </a:xfrm>
+          <a:prstGeom prst="rect">
+            <a:avLst/>
+          </a:prstGeom>
+          <a:noFill/>
+        </p:spPr>
+        <p:txBody>
+          <a:bodyPr wrap="square">
+            <a:spAutoFit/>
+          </a:bodyPr>
+          <a:lstStyle/>
+          <a:p>
+            <a:pPr algn="r"/>
+            <a:r>
+              <a:rPr sz="1300" b="1" i="0">
+                <a:solidFill>
+                  <a:srgbClr val="FFFFFF"/>
+                </a:solidFill>
+              </a:rPr>
+              <a:t>$500,000  (10%)</a:t>
+            </a:r>
+          </a:p>
+        </p:txBody>
+      </p:sp>
+      <p:sp>
+        <p:nvSpPr>
+          <p:cNvPr id="50" name="TextBox 49"/>
+          <p:cNvSpPr txBox="1"/>
+          <p:nvPr/>
+        </p:nvSpPr>
+        <p:spPr>
+          <a:xfrm>
+            <a:off x="8549640" y="2916936"/>
+            <a:ext cx="3383280" cy="502920"/>
+          </a:xfrm>
+          <a:prstGeom prst="rect">
+            <a:avLst/>
+          </a:prstGeom>
+          <a:noFill/>
+        </p:spPr>
+        <p:txBody>
+          <a:bodyPr wrap="square">
+            <a:spAutoFit/>
+          </a:bodyPr>
+          <a:lstStyle/>
+          <a:p>
+            <a:pPr algn="l"/>
+            <a:r>
+              <a:rPr sz="1100" b="0" i="0">
+                <a:solidFill>
+                  <a:srgbClr val="CCCCCC"/>
+                </a:solidFill>
+              </a:rPr>
+              <a:t>New Providence, NJ headquarters — office space,
+U.S. executive team, legal entity ops, compliance</a:t>
+            </a:r>
+          </a:p>
+        </p:txBody>
+      </p:sp>
+      <p:sp>
+        <p:nvSpPr>
+          <p:cNvPr id="51" name="Rectangle 50"/>
+          <p:cNvSpPr/>
+          <p:nvPr/>
+        </p:nvSpPr>
+        <p:spPr>
+          <a:xfrm>
+            <a:off x="640080" y="3877055"/>
+            <a:ext cx="7772400" cy="274320"/>
+          </a:xfrm>
+          <a:prstGeom prst="rect">
+            <a:avLst/>
+          </a:prstGeom>
+          <a:solidFill>
+            <a:srgbClr val="161830"/>
+          </a:solidFill>
+          <a:ln>
+            <a:noFill/>
+          </a:ln>
+        </p:spPr>
+        <p:style>
+          <a:lnRef idx="1">
+            <a:schemeClr val="accent1"/>
+          </a:lnRef>
+          <a:fillRef idx="3">
+            <a:schemeClr val="accent1"/>
+          </a:fillRef>
+          <a:effectRef idx="2">
+            <a:schemeClr val="accent1"/>
+          </a:effectRef>
+          <a:fontRef idx="minor">
+            <a:schemeClr val="lt1"/>
+          </a:fontRef>
+        </p:style>
+        <p:txBody>
+          <a:bodyPr rtlCol="0" anchor="ctr"/>
+          <a:lstStyle/>
+          <a:p>
+            <a:pPr algn="ctr"/>
+          </a:p>
+        </p:txBody>
+      </p:sp>
+      <p:sp>
+        <p:nvSpPr>
+          <p:cNvPr id="52" name="Rectangle 51"/>
+          <p:cNvSpPr/>
+          <p:nvPr/>
+        </p:nvSpPr>
+        <p:spPr>
+          <a:xfrm>
+            <a:off x="640080" y="3877055"/>
+            <a:ext cx="932688" cy="274320"/>
+          </a:xfrm>
+          <a:prstGeom prst="rect">
+            <a:avLst/>
+          </a:prstGeom>
+          <a:solidFill>
+            <a:srgbClr val="7BD4FF"/>
+          </a:solidFill>
+          <a:ln>
+            <a:noFill/>
+          </a:ln>
+        </p:spPr>
+        <p:style>
+          <a:lnRef idx="1">
+            <a:schemeClr val="accent1"/>
+          </a:lnRef>
+          <a:fillRef idx="3">
+            <a:schemeClr val="accent1"/>
+          </a:fillRef>
+          <a:effectRef idx="2">
+            <a:schemeClr val="accent1"/>
+          </a:effectRef>
+          <a:fontRef idx="minor">
+            <a:schemeClr val="lt1"/>
+          </a:fontRef>
+        </p:style>
+        <p:txBody>
+          <a:bodyPr rtlCol="0" anchor="ctr"/>
+          <a:lstStyle/>
+          <a:p>
+            <a:pPr algn="ctr"/>
+          </a:p>
+        </p:txBody>
+      </p:sp>
+      <p:sp>
+        <p:nvSpPr>
+          <p:cNvPr id="53" name="TextBox 52"/>
+          <p:cNvSpPr txBox="1"/>
+          <p:nvPr/>
+        </p:nvSpPr>
+        <p:spPr>
+          <a:xfrm>
+            <a:off x="640080" y="3602735"/>
+            <a:ext cx="5029200" cy="292608"/>
+          </a:xfrm>
+          <a:prstGeom prst="rect">
+            <a:avLst/>
+          </a:prstGeom>
+          <a:noFill/>
+        </p:spPr>
+        <p:txBody>
+          <a:bodyPr wrap="square">
+            <a:spAutoFit/>
+          </a:bodyPr>
+          <a:lstStyle/>
+          <a:p>
+            <a:pPr algn="l"/>
+            <a:r>
+              <a:rPr sz="1300" b="1" i="0">
+                <a:solidFill>
+                  <a:srgbClr val="7BD4FF"/>
+                </a:solidFill>
+              </a:rPr>
+              <a:t>Platform Development</a:t>
+            </a:r>
+          </a:p>
+        </p:txBody>
+      </p:sp>
+      <p:sp>
+        <p:nvSpPr>
+          <p:cNvPr id="54" name="TextBox 53"/>
+          <p:cNvSpPr txBox="1"/>
+          <p:nvPr/>
+        </p:nvSpPr>
+        <p:spPr>
+          <a:xfrm>
+            <a:off x="5577840" y="3602735"/>
+            <a:ext cx="2926080" cy="292608"/>
+          </a:xfrm>
+          <a:prstGeom prst="rect">
+            <a:avLst/>
+          </a:prstGeom>
+          <a:noFill/>
+        </p:spPr>
+        <p:txBody>
+          <a:bodyPr wrap="square">
+            <a:spAutoFit/>
+          </a:bodyPr>
+          <a:lstStyle/>
+          <a:p>
+            <a:pPr algn="r"/>
+            <a:r>
+              <a:rPr sz="1300" b="1" i="0">
+                <a:solidFill>
+                  <a:srgbClr val="FFFFFF"/>
+                </a:solidFill>
+              </a:rPr>
+              <a:t>$600,000  (12%)</a:t>
+            </a:r>
+          </a:p>
+        </p:txBody>
+      </p:sp>
+      <p:sp>
+        <p:nvSpPr>
+          <p:cNvPr id="55" name="TextBox 54"/>
+          <p:cNvSpPr txBox="1"/>
+          <p:nvPr/>
+        </p:nvSpPr>
+        <p:spPr>
+          <a:xfrm>
+            <a:off x="8549640" y="3675887"/>
+            <a:ext cx="3383280" cy="502920"/>
+          </a:xfrm>
+          <a:prstGeom prst="rect">
+            <a:avLst/>
+          </a:prstGeom>
+          <a:noFill/>
+        </p:spPr>
+        <p:txBody>
+          <a:bodyPr wrap="square">
+            <a:spAutoFit/>
+          </a:bodyPr>
+          <a:lstStyle/>
+          <a:p>
+            <a:pPr algn="l"/>
+            <a:r>
+              <a:rPr sz="1100" b="0" i="0">
+                <a:solidFill>
+                  <a:srgbClr val="CCCCCC"/>
+                </a:solidFill>
+              </a:rPr>
+              <a:t>iOS/Android app store launch, feature roadmap
+API development, third-party integrations</a:t>
+            </a:r>
+          </a:p>
+        </p:txBody>
+      </p:sp>
+      <p:sp>
+        <p:nvSpPr>
+          <p:cNvPr id="56" name="Rectangle 55"/>
+          <p:cNvSpPr/>
+          <p:nvPr/>
+        </p:nvSpPr>
+        <p:spPr>
+          <a:xfrm>
+            <a:off x="640080" y="4636008"/>
+            <a:ext cx="7772400" cy="274320"/>
+          </a:xfrm>
+          <a:prstGeom prst="rect">
+            <a:avLst/>
+          </a:prstGeom>
+          <a:solidFill>
+            <a:srgbClr val="161830"/>
+          </a:solidFill>
+          <a:ln>
+            <a:noFill/>
+          </a:ln>
+        </p:spPr>
+        <p:style>
+          <a:lnRef idx="1">
+            <a:schemeClr val="accent1"/>
+          </a:lnRef>
+          <a:fillRef idx="3">
+            <a:schemeClr val="accent1"/>
+          </a:fillRef>
+          <a:effectRef idx="2">
+            <a:schemeClr val="accent1"/>
+          </a:effectRef>
+          <a:fontRef idx="minor">
+            <a:schemeClr val="lt1"/>
+          </a:fontRef>
+        </p:style>
+        <p:txBody>
+          <a:bodyPr rtlCol="0" anchor="ctr"/>
+          <a:lstStyle/>
+          <a:p>
+            <a:pPr algn="ctr"/>
+          </a:p>
+        </p:txBody>
+      </p:sp>
+      <p:sp>
+        <p:nvSpPr>
+          <p:cNvPr id="57" name="Rectangle 56"/>
+          <p:cNvSpPr/>
+          <p:nvPr/>
+        </p:nvSpPr>
+        <p:spPr>
+          <a:xfrm>
+            <a:off x="640080" y="4636008"/>
+            <a:ext cx="699516" cy="274320"/>
+          </a:xfrm>
+          <a:prstGeom prst="rect">
+            <a:avLst/>
+          </a:prstGeom>
+          <a:solidFill>
+            <a:srgbClr val="FFA050"/>
+          </a:solidFill>
+          <a:ln>
+            <a:noFill/>
+          </a:ln>
+        </p:spPr>
+        <p:style>
+          <a:lnRef idx="1">
+            <a:schemeClr val="accent1"/>
+          </a:lnRef>
+          <a:fillRef idx="3">
+            <a:schemeClr val="accent1"/>
+          </a:fillRef>
+          <a:effectRef idx="2">
+            <a:schemeClr val="accent1"/>
+          </a:effectRef>
+          <a:fontRef idx="minor">
+            <a:schemeClr val="lt1"/>
+          </a:fontRef>
+        </p:style>
+        <p:txBody>
+          <a:bodyPr rtlCol="0" anchor="ctr"/>
+          <a:lstStyle/>
+          <a:p>
+            <a:pPr algn="ctr"/>
+          </a:p>
+        </p:txBody>
+      </p:sp>
+      <p:sp>
+        <p:nvSpPr>
+          <p:cNvPr id="58" name="TextBox 57"/>
+          <p:cNvSpPr txBox="1"/>
+          <p:nvPr/>
+        </p:nvSpPr>
+        <p:spPr>
+          <a:xfrm>
+            <a:off x="640080" y="4361688"/>
+            <a:ext cx="5029200" cy="292608"/>
+          </a:xfrm>
+          <a:prstGeom prst="rect">
+            <a:avLst/>
+          </a:prstGeom>
+          <a:noFill/>
+        </p:spPr>
+        <p:txBody>
+          <a:bodyPr wrap="square">
+            <a:spAutoFit/>
+          </a:bodyPr>
+          <a:lstStyle/>
+          <a:p>
+            <a:pPr algn="l"/>
+            <a:r>
+              <a:rPr sz="1300" b="1" i="0">
+                <a:solidFill>
+                  <a:srgbClr val="FFA050"/>
+                </a:solidFill>
+              </a:rPr>
+              <a:t>Marketing &amp; User Acquisition</a:t>
+            </a:r>
+          </a:p>
+        </p:txBody>
+      </p:sp>
+      <p:sp>
+        <p:nvSpPr>
+          <p:cNvPr id="59" name="TextBox 58"/>
+          <p:cNvSpPr txBox="1"/>
+          <p:nvPr/>
+        </p:nvSpPr>
+        <p:spPr>
+          <a:xfrm>
+            <a:off x="5577840" y="4361688"/>
+            <a:ext cx="2926080" cy="292608"/>
+          </a:xfrm>
+          <a:prstGeom prst="rect">
+            <a:avLst/>
+          </a:prstGeom>
+          <a:noFill/>
+        </p:spPr>
+        <p:txBody>
+          <a:bodyPr wrap="square">
+            <a:spAutoFit/>
+          </a:bodyPr>
+          <a:lstStyle/>
+          <a:p>
+            <a:pPr algn="r"/>
+            <a:r>
+              <a:rPr sz="1300" b="1" i="0">
+                <a:solidFill>
+                  <a:srgbClr val="FFFFFF"/>
+                </a:solidFill>
+              </a:rPr>
+              <a:t>$450,000  (9%)</a:t>
+            </a:r>
+          </a:p>
+        </p:txBody>
+      </p:sp>
+      <p:sp>
+        <p:nvSpPr>
+          <p:cNvPr id="60" name="TextBox 59"/>
+          <p:cNvSpPr txBox="1"/>
+          <p:nvPr/>
+        </p:nvSpPr>
+        <p:spPr>
+          <a:xfrm>
+            <a:off x="8549640" y="4434840"/>
+            <a:ext cx="3383280" cy="502920"/>
+          </a:xfrm>
+          <a:prstGeom prst="rect">
+            <a:avLst/>
+          </a:prstGeom>
+          <a:noFill/>
+        </p:spPr>
+        <p:txBody>
+          <a:bodyPr wrap="square">
+            <a:spAutoFit/>
+          </a:bodyPr>
+          <a:lstStyle/>
+          <a:p>
+            <a:pPr algn="l"/>
+            <a:r>
+              <a:rPr sz="1100" b="0" i="0">
+                <a:solidFill>
+                  <a:srgbClr val="CCCCCC"/>
+                </a:solidFill>
+              </a:rPr>
+              <a:t>Creator fund seed, influencer partnerships
+Paid acquisition, diaspora community outreach</a:t>
+            </a:r>
+          </a:p>
+        </p:txBody>
+      </p:sp>
+      <p:sp>
+        <p:nvSpPr>
+          <p:cNvPr id="61" name="Rectangle 60"/>
+          <p:cNvSpPr/>
+          <p:nvPr/>
+        </p:nvSpPr>
+        <p:spPr>
+          <a:xfrm>
+            <a:off x="640080" y="5394960"/>
+            <a:ext cx="7772400" cy="274320"/>
+          </a:xfrm>
+          <a:prstGeom prst="rect">
+            <a:avLst/>
+          </a:prstGeom>
+          <a:solidFill>
+            <a:srgbClr val="161830"/>
+          </a:solidFill>
+          <a:ln>
+            <a:noFill/>
+          </a:ln>
+        </p:spPr>
+        <p:style>
+          <a:lnRef idx="1">
+            <a:schemeClr val="accent1"/>
+          </a:lnRef>
+          <a:fillRef idx="3">
+            <a:schemeClr val="accent1"/>
+          </a:fillRef>
+          <a:effectRef idx="2">
+            <a:schemeClr val="accent1"/>
+          </a:effectRef>
+          <a:fontRef idx="minor">
+            <a:schemeClr val="lt1"/>
+          </a:fontRef>
+        </p:style>
+        <p:txBody>
+          <a:bodyPr rtlCol="0" anchor="ctr"/>
+          <a:lstStyle/>
+          <a:p>
+            <a:pPr algn="ctr"/>
+          </a:p>
+        </p:txBody>
+      </p:sp>
+      <p:sp>
+        <p:nvSpPr>
+          <p:cNvPr id="62" name="Rectangle 61"/>
+          <p:cNvSpPr/>
+          <p:nvPr/>
+        </p:nvSpPr>
+        <p:spPr>
+          <a:xfrm>
+            <a:off x="640080" y="5394960"/>
+            <a:ext cx="388620" cy="274320"/>
+          </a:xfrm>
+          <a:prstGeom prst="rect">
+            <a:avLst/>
+          </a:prstGeom>
+          <a:solidFill>
+            <a:srgbClr val="CCCCCC"/>
+          </a:solidFill>
+          <a:ln>
+            <a:noFill/>
+          </a:ln>
+        </p:spPr>
+        <p:style>
+          <a:lnRef idx="1">
+            <a:schemeClr val="accent1"/>
+          </a:lnRef>
+          <a:fillRef idx="3">
+            <a:schemeClr val="accent1"/>
+          </a:fillRef>
+          <a:effectRef idx="2">
+            <a:schemeClr val="accent1"/>
+          </a:effectRef>
+          <a:fontRef idx="minor">
+            <a:schemeClr val="lt1"/>
+          </a:fontRef>
+        </p:style>
+        <p:txBody>
+          <a:bodyPr rtlCol="0" anchor="ctr"/>
+          <a:lstStyle/>
+          <a:p>
+            <a:pPr algn="ctr"/>
+          </a:p>
+        </p:txBody>
+      </p:sp>
+      <p:sp>
+        <p:nvSpPr>
+          <p:cNvPr id="63" name="TextBox 62"/>
+          <p:cNvSpPr txBox="1"/>
+          <p:nvPr/>
+        </p:nvSpPr>
+        <p:spPr>
+          <a:xfrm>
+            <a:off x="640080" y="5120640"/>
+            <a:ext cx="5029200" cy="292608"/>
+          </a:xfrm>
+          <a:prstGeom prst="rect">
+            <a:avLst/>
+          </a:prstGeom>
+          <a:noFill/>
+        </p:spPr>
+        <p:txBody>
+          <a:bodyPr wrap="square">
+            <a:spAutoFit/>
+          </a:bodyPr>
+          <a:lstStyle/>
+          <a:p>
+            <a:pPr algn="l"/>
+            <a:r>
+              <a:rPr sz="1300" b="1" i="0">
+                <a:solidFill>
+                  <a:srgbClr val="CCCCCC"/>
+                </a:solidFill>
+              </a:rPr>
+              <a:t>Operations &amp; Legal</a:t>
+            </a:r>
+          </a:p>
+        </p:txBody>
+      </p:sp>
+      <p:sp>
+        <p:nvSpPr>
+          <p:cNvPr id="64" name="TextBox 63"/>
+          <p:cNvSpPr txBox="1"/>
+          <p:nvPr/>
+        </p:nvSpPr>
+        <p:spPr>
+          <a:xfrm>
+            <a:off x="5577840" y="5120640"/>
+            <a:ext cx="2926080" cy="292608"/>
+          </a:xfrm>
+          <a:prstGeom prst="rect">
+            <a:avLst/>
+          </a:prstGeom>
+          <a:noFill/>
+        </p:spPr>
+        <p:txBody>
+          <a:bodyPr wrap="square">
+            <a:spAutoFit/>
+          </a:bodyPr>
+          <a:lstStyle/>
+          <a:p>
+            <a:pPr algn="r"/>
+            <a:r>
+              <a:rPr sz="1300" b="1" i="0">
+                <a:solidFill>
+                  <a:srgbClr val="FFFFFF"/>
+                </a:solidFill>
+              </a:rPr>
+              <a:t>$250,000  (5%)</a:t>
+            </a:r>
+          </a:p>
+        </p:txBody>
+      </p:sp>
+      <p:sp>
+        <p:nvSpPr>
+          <p:cNvPr id="65" name="TextBox 64"/>
+          <p:cNvSpPr txBox="1"/>
+          <p:nvPr/>
+        </p:nvSpPr>
+        <p:spPr>
+          <a:xfrm>
+            <a:off x="8549640" y="5193792"/>
+            <a:ext cx="3383280" cy="502920"/>
+          </a:xfrm>
+          <a:prstGeom prst="rect">
+            <a:avLst/>
+          </a:prstGeom>
+          <a:noFill/>
+        </p:spPr>
+        <p:txBody>
+          <a:bodyPr wrap="square">
+            <a:spAutoFit/>
+          </a:bodyPr>
+          <a:lstStyle/>
+          <a:p>
+            <a:pPr algn="l"/>
+            <a:r>
+              <a:rPr sz="1100" b="0" i="0">
+                <a:solidFill>
+                  <a:srgbClr val="CCCCCC"/>
+                </a:solidFill>
+              </a:rPr>
+              <a:t>Trademark filings, legal counsel, accounting
+Compliance, insurance, executive admin</a:t>
+            </a:r>
+          </a:p>
+        </p:txBody>
+      </p:sp>
+      <p:sp>
+        <p:nvSpPr>
+          <p:cNvPr id="66" name="TextBox 65"/>
+          <p:cNvSpPr txBox="1"/>
+          <p:nvPr/>
+        </p:nvSpPr>
+        <p:spPr>
+          <a:xfrm>
+            <a:off x="640080" y="5989320"/>
+            <a:ext cx="7315200" cy="365760"/>
+          </a:xfrm>
+          <a:prstGeom prst="rect">
+            <a:avLst/>
+          </a:prstGeom>
+          <a:noFill/>
+        </p:spPr>
+        <p:txBody>
+          <a:bodyPr wrap="square">
+            <a:spAutoFit/>
+          </a:bodyPr>
+          <a:lstStyle/>
+          <a:p>
+            <a:pPr algn="l"/>
+            <a:r>
+              <a:rPr sz="1400" b="1" i="0">
+                <a:solidFill>
+                  <a:srgbClr val="F5C842"/>
+                </a:solidFill>
+              </a:rPr>
+              <a:t>TOTAL RAISE:  ,000,000</a:t>
             </a:r>
           </a:p>
         </p:txBody>

--- a/Sachi_Stream_Investor_Deck_Seed_Round_May2026.pptx
+++ b/Sachi_Stream_Investor_Deck_Seed_Round_May2026.pptx
@@ -8,6 +8,7 @@
     <p:sldId id="256" r:id="rId7"/>
     <p:sldId id="257" r:id="rId8"/>
     <p:sldId id="258" r:id="rId9"/>
+    <p:sldId id="271" r:id="rId22"/>
     <p:sldId id="259" r:id="rId10"/>
     <p:sldId id="260" r:id="rId11"/>
     <p:sldId id="261" r:id="rId12"/>
@@ -18715,6 +18716,858 @@
               </a:rPr>
               <a:t>"Sachi — happiness, good fortune, and bliss.
 We're building the platform where creators thrive."</a:t>
+            </a:r>
+          </a:p>
+        </p:txBody>
+      </p:sp>
+    </p:spTree>
+  </p:cSld>
+  <p:clrMapOvr>
+    <a:masterClrMapping/>
+  </p:clrMapOvr>
+</p:sld>
+</file>
+
+<file path=ppt/slides/slide16.xml><?xml version="1.0" encoding="utf-8"?>
+<p:sld xmlns:a="http://schemas.openxmlformats.org/drawingml/2006/main" xmlns:p="http://schemas.openxmlformats.org/presentationml/2006/main" xmlns:r="http://schemas.openxmlformats.org/officeDocument/2006/relationships">
+  <p:cSld>
+    <p:spTree>
+      <p:nvGrpSpPr>
+        <p:cNvPr id="1" name=""/>
+        <p:cNvGrpSpPr/>
+        <p:nvPr/>
+      </p:nvGrpSpPr>
+      <p:grpSpPr/>
+      <p:sp>
+        <p:nvSpPr>
+          <p:cNvPr id="2" name="Rectangle 1"/>
+          <p:cNvSpPr/>
+          <p:nvPr/>
+        </p:nvSpPr>
+        <p:spPr>
+          <a:xfrm>
+            <a:off x="0" y="0"/>
+            <a:ext cx="12188952" cy="6858000"/>
+          </a:xfrm>
+          <a:prstGeom prst="rect">
+            <a:avLst/>
+          </a:prstGeom>
+          <a:solidFill>
+            <a:srgbClr val="0B0C1A"/>
+          </a:solidFill>
+          <a:ln>
+            <a:noFill/>
+          </a:ln>
+        </p:spPr>
+        <p:style>
+          <a:lnRef idx="1">
+            <a:schemeClr val="accent1"/>
+          </a:lnRef>
+          <a:fillRef idx="3">
+            <a:schemeClr val="accent1"/>
+          </a:fillRef>
+          <a:effectRef idx="2">
+            <a:schemeClr val="accent1"/>
+          </a:effectRef>
+          <a:fontRef idx="minor">
+            <a:schemeClr val="lt1"/>
+          </a:fontRef>
+        </p:style>
+        <p:txBody>
+          <a:bodyPr rtlCol="0" anchor="ctr"/>
+          <a:lstStyle/>
+          <a:p>
+            <a:pPr algn="ctr"/>
+          </a:p>
+        </p:txBody>
+      </p:sp>
+      <p:sp>
+        <p:nvSpPr>
+          <p:cNvPr id="3" name="Rectangle 2"/>
+          <p:cNvSpPr/>
+          <p:nvPr/>
+        </p:nvSpPr>
+        <p:spPr>
+          <a:xfrm>
+            <a:off x="0" y="0"/>
+            <a:ext cx="12188952" cy="45720"/>
+          </a:xfrm>
+          <a:prstGeom prst="rect">
+            <a:avLst/>
+          </a:prstGeom>
+          <a:solidFill>
+            <a:srgbClr val="F5C842"/>
+          </a:solidFill>
+          <a:ln>
+            <a:noFill/>
+          </a:ln>
+        </p:spPr>
+        <p:style>
+          <a:lnRef idx="1">
+            <a:schemeClr val="accent1"/>
+          </a:lnRef>
+          <a:fillRef idx="3">
+            <a:schemeClr val="accent1"/>
+          </a:fillRef>
+          <a:effectRef idx="2">
+            <a:schemeClr val="accent1"/>
+          </a:effectRef>
+          <a:fontRef idx="minor">
+            <a:schemeClr val="lt1"/>
+          </a:fontRef>
+        </p:style>
+        <p:txBody>
+          <a:bodyPr rtlCol="0" anchor="ctr"/>
+          <a:lstStyle/>
+          <a:p>
+            <a:pPr algn="ctr"/>
+          </a:p>
+        </p:txBody>
+      </p:sp>
+      <p:sp>
+        <p:nvSpPr>
+          <p:cNvPr id="4" name="Rectangle 3"/>
+          <p:cNvSpPr/>
+          <p:nvPr/>
+        </p:nvSpPr>
+        <p:spPr>
+          <a:xfrm>
+            <a:off x="0" y="6812280"/>
+            <a:ext cx="12188952" cy="45720"/>
+          </a:xfrm>
+          <a:prstGeom prst="rect">
+            <a:avLst/>
+          </a:prstGeom>
+          <a:solidFill>
+            <a:srgbClr val="F5C842"/>
+          </a:solidFill>
+          <a:ln>
+            <a:noFill/>
+          </a:ln>
+        </p:spPr>
+        <p:style>
+          <a:lnRef idx="1">
+            <a:schemeClr val="accent1"/>
+          </a:lnRef>
+          <a:fillRef idx="3">
+            <a:schemeClr val="accent1"/>
+          </a:fillRef>
+          <a:effectRef idx="2">
+            <a:schemeClr val="accent1"/>
+          </a:effectRef>
+          <a:fontRef idx="minor">
+            <a:schemeClr val="lt1"/>
+          </a:fontRef>
+        </p:style>
+        <p:txBody>
+          <a:bodyPr rtlCol="0" anchor="ctr"/>
+          <a:lstStyle/>
+          <a:p>
+            <a:pPr algn="ctr"/>
+          </a:p>
+        </p:txBody>
+      </p:sp>
+      <p:sp>
+        <p:nvSpPr>
+          <p:cNvPr id="5" name="Rectangle 4"/>
+          <p:cNvSpPr/>
+          <p:nvPr/>
+        </p:nvSpPr>
+        <p:spPr>
+          <a:xfrm>
+            <a:off x="457200" y="1280160"/>
+            <a:ext cx="109728" cy="4114800"/>
+          </a:xfrm>
+          <a:prstGeom prst="rect">
+            <a:avLst/>
+          </a:prstGeom>
+          <a:solidFill>
+            <a:srgbClr val="FF6B6B"/>
+          </a:solidFill>
+          <a:ln>
+            <a:noFill/>
+          </a:ln>
+        </p:spPr>
+        <p:style>
+          <a:lnRef idx="1">
+            <a:schemeClr val="accent1"/>
+          </a:lnRef>
+          <a:fillRef idx="3">
+            <a:schemeClr val="accent1"/>
+          </a:fillRef>
+          <a:effectRef idx="2">
+            <a:schemeClr val="accent1"/>
+          </a:effectRef>
+          <a:fontRef idx="minor">
+            <a:schemeClr val="lt1"/>
+          </a:fontRef>
+        </p:style>
+        <p:txBody>
+          <a:bodyPr rtlCol="0" anchor="ctr"/>
+          <a:lstStyle/>
+          <a:p>
+            <a:pPr algn="ctr"/>
+          </a:p>
+        </p:txBody>
+      </p:sp>
+      <p:sp>
+        <p:nvSpPr>
+          <p:cNvPr id="6" name="Rectangle 5"/>
+          <p:cNvSpPr/>
+          <p:nvPr/>
+        </p:nvSpPr>
+        <p:spPr>
+          <a:xfrm>
+            <a:off x="0" y="6309360"/>
+            <a:ext cx="12188952" cy="64008"/>
+          </a:xfrm>
+          <a:prstGeom prst="rect">
+            <a:avLst/>
+          </a:prstGeom>
+          <a:solidFill>
+            <a:srgbClr val="F5C842"/>
+          </a:solidFill>
+          <a:ln>
+            <a:noFill/>
+          </a:ln>
+        </p:spPr>
+        <p:style>
+          <a:lnRef idx="1">
+            <a:schemeClr val="accent1"/>
+          </a:lnRef>
+          <a:fillRef idx="3">
+            <a:schemeClr val="accent1"/>
+          </a:fillRef>
+          <a:effectRef idx="2">
+            <a:schemeClr val="accent1"/>
+          </a:effectRef>
+          <a:fontRef idx="minor">
+            <a:schemeClr val="lt1"/>
+          </a:fontRef>
+        </p:style>
+        <p:txBody>
+          <a:bodyPr rtlCol="0" anchor="ctr"/>
+          <a:lstStyle/>
+          <a:p>
+            <a:pPr algn="ctr"/>
+          </a:p>
+        </p:txBody>
+      </p:sp>
+      <p:sp>
+        <p:nvSpPr>
+          <p:cNvPr id="7" name="TextBox 6"/>
+          <p:cNvSpPr txBox="1"/>
+          <p:nvPr/>
+        </p:nvSpPr>
+        <p:spPr>
+          <a:xfrm>
+            <a:off x="777240" y="256032"/>
+            <a:ext cx="10515600" cy="640080"/>
+          </a:xfrm>
+          <a:prstGeom prst="rect">
+            <a:avLst/>
+          </a:prstGeom>
+          <a:noFill/>
+        </p:spPr>
+        <p:txBody>
+          <a:bodyPr wrap="square">
+            <a:spAutoFit/>
+          </a:bodyPr>
+          <a:lstStyle/>
+          <a:p>
+            <a:pPr algn="l"/>
+            <a:r>
+              <a:rPr sz="3400" b="1" i="0">
+                <a:solidFill>
+                  <a:srgbClr val="F5C842"/>
+                </a:solidFill>
+              </a:rPr>
+              <a:t>Truth First — AI Detection &amp; Content Integrity</a:t>
+            </a:r>
+          </a:p>
+        </p:txBody>
+      </p:sp>
+      <p:sp>
+        <p:nvSpPr>
+          <p:cNvPr id="8" name="Rectangle 7"/>
+          <p:cNvSpPr/>
+          <p:nvPr/>
+        </p:nvSpPr>
+        <p:spPr>
+          <a:xfrm>
+            <a:off x="640080" y="1005840"/>
+            <a:ext cx="10881360" cy="27432"/>
+          </a:xfrm>
+          <a:prstGeom prst="rect">
+            <a:avLst/>
+          </a:prstGeom>
+          <a:solidFill>
+            <a:srgbClr val="FF6B6B"/>
+          </a:solidFill>
+          <a:ln>
+            <a:noFill/>
+          </a:ln>
+        </p:spPr>
+        <p:style>
+          <a:lnRef idx="1">
+            <a:schemeClr val="accent1"/>
+          </a:lnRef>
+          <a:fillRef idx="3">
+            <a:schemeClr val="accent1"/>
+          </a:fillRef>
+          <a:effectRef idx="2">
+            <a:schemeClr val="accent1"/>
+          </a:effectRef>
+          <a:fontRef idx="minor">
+            <a:schemeClr val="lt1"/>
+          </a:fontRef>
+        </p:style>
+        <p:txBody>
+          <a:bodyPr rtlCol="0" anchor="ctr"/>
+          <a:lstStyle/>
+          <a:p>
+            <a:pPr algn="ctr"/>
+          </a:p>
+        </p:txBody>
+      </p:sp>
+      <p:sp>
+        <p:nvSpPr>
+          <p:cNvPr id="9" name="TextBox 8"/>
+          <p:cNvSpPr txBox="1"/>
+          <p:nvPr/>
+        </p:nvSpPr>
+        <p:spPr>
+          <a:xfrm>
+            <a:off x="777240" y="1115568"/>
+            <a:ext cx="10515600" cy="594360"/>
+          </a:xfrm>
+          <a:prstGeom prst="rect">
+            <a:avLst/>
+          </a:prstGeom>
+          <a:noFill/>
+        </p:spPr>
+        <p:txBody>
+          <a:bodyPr wrap="square">
+            <a:spAutoFit/>
+          </a:bodyPr>
+          <a:lstStyle/>
+          <a:p>
+            <a:pPr algn="l"/>
+            <a:r>
+              <a:rPr sz="1600" b="0" i="0">
+                <a:solidFill>
+                  <a:srgbClr val="FFFFFF"/>
+                </a:solidFill>
+              </a:rPr>
+              <a:t>In a world flooded with deepfakes, AI-generated content, and misinformation — Sachi Stream is built on a foundation of authenticity and truth.</a:t>
+            </a:r>
+          </a:p>
+        </p:txBody>
+      </p:sp>
+      <p:sp>
+        <p:nvSpPr>
+          <p:cNvPr id="10" name="Rectangle 9"/>
+          <p:cNvSpPr/>
+          <p:nvPr/>
+        </p:nvSpPr>
+        <p:spPr>
+          <a:xfrm>
+            <a:off x="640080" y="1874519"/>
+            <a:ext cx="3566160" cy="4160520"/>
+          </a:xfrm>
+          <a:prstGeom prst="rect">
+            <a:avLst/>
+          </a:prstGeom>
+          <a:solidFill>
+            <a:srgbClr val="161830"/>
+          </a:solidFill>
+          <a:ln w="22860">
+            <a:solidFill>
+              <a:srgbClr val="FF6B6B"/>
+            </a:solidFill>
+          </a:ln>
+        </p:spPr>
+        <p:style>
+          <a:lnRef idx="1">
+            <a:schemeClr val="accent1"/>
+          </a:lnRef>
+          <a:fillRef idx="3">
+            <a:schemeClr val="accent1"/>
+          </a:fillRef>
+          <a:effectRef idx="2">
+            <a:schemeClr val="accent1"/>
+          </a:effectRef>
+          <a:fontRef idx="minor">
+            <a:schemeClr val="lt1"/>
+          </a:fontRef>
+        </p:style>
+        <p:txBody>
+          <a:bodyPr rtlCol="0" anchor="ctr"/>
+          <a:lstStyle/>
+          <a:p>
+            <a:pPr algn="ctr"/>
+          </a:p>
+        </p:txBody>
+      </p:sp>
+      <p:sp>
+        <p:nvSpPr>
+          <p:cNvPr id="11" name="TextBox 10"/>
+          <p:cNvSpPr txBox="1"/>
+          <p:nvPr/>
+        </p:nvSpPr>
+        <p:spPr>
+          <a:xfrm>
+            <a:off x="804672" y="1993392"/>
+            <a:ext cx="3246120" cy="594360"/>
+          </a:xfrm>
+          <a:prstGeom prst="rect">
+            <a:avLst/>
+          </a:prstGeom>
+          <a:noFill/>
+        </p:spPr>
+        <p:txBody>
+          <a:bodyPr wrap="square">
+            <a:spAutoFit/>
+          </a:bodyPr>
+          <a:lstStyle/>
+          <a:p>
+            <a:pPr algn="l"/>
+            <a:r>
+              <a:rPr sz="1500" b="1" i="0">
+                <a:solidFill>
+                  <a:srgbClr val="FF6B6B"/>
+                </a:solidFill>
+              </a:rPr>
+              <a:t>🤖  AI-Generated
+Content Detection</a:t>
+            </a:r>
+          </a:p>
+        </p:txBody>
+      </p:sp>
+      <p:sp>
+        <p:nvSpPr>
+          <p:cNvPr id="12" name="Rectangle 11"/>
+          <p:cNvSpPr/>
+          <p:nvPr/>
+        </p:nvSpPr>
+        <p:spPr>
+          <a:xfrm>
+            <a:off x="804672" y="2633472"/>
+            <a:ext cx="3246120" cy="22860"/>
+          </a:xfrm>
+          <a:prstGeom prst="rect">
+            <a:avLst/>
+          </a:prstGeom>
+          <a:solidFill>
+            <a:srgbClr val="FF6B6B"/>
+          </a:solidFill>
+          <a:ln>
+            <a:noFill/>
+          </a:ln>
+        </p:spPr>
+        <p:style>
+          <a:lnRef idx="1">
+            <a:schemeClr val="accent1"/>
+          </a:lnRef>
+          <a:fillRef idx="3">
+            <a:schemeClr val="accent1"/>
+          </a:fillRef>
+          <a:effectRef idx="2">
+            <a:schemeClr val="accent1"/>
+          </a:effectRef>
+          <a:fontRef idx="minor">
+            <a:schemeClr val="lt1"/>
+          </a:fontRef>
+        </p:style>
+        <p:txBody>
+          <a:bodyPr rtlCol="0" anchor="ctr"/>
+          <a:lstStyle/>
+          <a:p>
+            <a:pPr algn="ctr"/>
+          </a:p>
+        </p:txBody>
+      </p:sp>
+      <p:sp>
+        <p:nvSpPr>
+          <p:cNvPr id="13" name="TextBox 12"/>
+          <p:cNvSpPr txBox="1"/>
+          <p:nvPr/>
+        </p:nvSpPr>
+        <p:spPr>
+          <a:xfrm>
+            <a:off x="804672" y="2724912"/>
+            <a:ext cx="3246120" cy="3108960"/>
+          </a:xfrm>
+          <a:prstGeom prst="rect">
+            <a:avLst/>
+          </a:prstGeom>
+          <a:noFill/>
+        </p:spPr>
+        <p:txBody>
+          <a:bodyPr wrap="square">
+            <a:spAutoFit/>
+          </a:bodyPr>
+          <a:lstStyle/>
+          <a:p>
+            <a:pPr algn="l"/>
+            <a:r>
+              <a:rPr sz="1200" b="0" i="0">
+                <a:solidFill>
+                  <a:srgbClr val="F0F0F0"/>
+                </a:solidFill>
+              </a:rPr>
+              <a:t>Every video uploaded is automatically scanned for AI-generated or deepfake content using built-in detection models.
+Flagged content is held for review before going live — fake videos never reach the feed unseen.</a:t>
+            </a:r>
+          </a:p>
+        </p:txBody>
+      </p:sp>
+      <p:sp>
+        <p:nvSpPr>
+          <p:cNvPr id="14" name="Rectangle 13"/>
+          <p:cNvSpPr/>
+          <p:nvPr/>
+        </p:nvSpPr>
+        <p:spPr>
+          <a:xfrm>
+            <a:off x="4434840" y="1874519"/>
+            <a:ext cx="3566160" cy="4160520"/>
+          </a:xfrm>
+          <a:prstGeom prst="rect">
+            <a:avLst/>
+          </a:prstGeom>
+          <a:solidFill>
+            <a:srgbClr val="161830"/>
+          </a:solidFill>
+          <a:ln w="22860">
+            <a:solidFill>
+              <a:srgbClr val="F5C842"/>
+            </a:solidFill>
+          </a:ln>
+        </p:spPr>
+        <p:style>
+          <a:lnRef idx="1">
+            <a:schemeClr val="accent1"/>
+          </a:lnRef>
+          <a:fillRef idx="3">
+            <a:schemeClr val="accent1"/>
+          </a:fillRef>
+          <a:effectRef idx="2">
+            <a:schemeClr val="accent1"/>
+          </a:effectRef>
+          <a:fontRef idx="minor">
+            <a:schemeClr val="lt1"/>
+          </a:fontRef>
+        </p:style>
+        <p:txBody>
+          <a:bodyPr rtlCol="0" anchor="ctr"/>
+          <a:lstStyle/>
+          <a:p>
+            <a:pPr algn="ctr"/>
+          </a:p>
+        </p:txBody>
+      </p:sp>
+      <p:sp>
+        <p:nvSpPr>
+          <p:cNvPr id="15" name="TextBox 14"/>
+          <p:cNvSpPr txBox="1"/>
+          <p:nvPr/>
+        </p:nvSpPr>
+        <p:spPr>
+          <a:xfrm>
+            <a:off x="4599432" y="1993392"/>
+            <a:ext cx="3246120" cy="594360"/>
+          </a:xfrm>
+          <a:prstGeom prst="rect">
+            <a:avLst/>
+          </a:prstGeom>
+          <a:noFill/>
+        </p:spPr>
+        <p:txBody>
+          <a:bodyPr wrap="square">
+            <a:spAutoFit/>
+          </a:bodyPr>
+          <a:lstStyle/>
+          <a:p>
+            <a:pPr algn="l"/>
+            <a:r>
+              <a:rPr sz="1500" b="1" i="0">
+                <a:solidFill>
+                  <a:srgbClr val="F5C842"/>
+                </a:solidFill>
+              </a:rPr>
+              <a:t>✅  Verified Real
+Content Badge</a:t>
+            </a:r>
+          </a:p>
+        </p:txBody>
+      </p:sp>
+      <p:sp>
+        <p:nvSpPr>
+          <p:cNvPr id="16" name="Rectangle 15"/>
+          <p:cNvSpPr/>
+          <p:nvPr/>
+        </p:nvSpPr>
+        <p:spPr>
+          <a:xfrm>
+            <a:off x="4599432" y="2633472"/>
+            <a:ext cx="3246120" cy="22860"/>
+          </a:xfrm>
+          <a:prstGeom prst="rect">
+            <a:avLst/>
+          </a:prstGeom>
+          <a:solidFill>
+            <a:srgbClr val="F5C842"/>
+          </a:solidFill>
+          <a:ln>
+            <a:noFill/>
+          </a:ln>
+        </p:spPr>
+        <p:style>
+          <a:lnRef idx="1">
+            <a:schemeClr val="accent1"/>
+          </a:lnRef>
+          <a:fillRef idx="3">
+            <a:schemeClr val="accent1"/>
+          </a:fillRef>
+          <a:effectRef idx="2">
+            <a:schemeClr val="accent1"/>
+          </a:effectRef>
+          <a:fontRef idx="minor">
+            <a:schemeClr val="lt1"/>
+          </a:fontRef>
+        </p:style>
+        <p:txBody>
+          <a:bodyPr rtlCol="0" anchor="ctr"/>
+          <a:lstStyle/>
+          <a:p>
+            <a:pPr algn="ctr"/>
+          </a:p>
+        </p:txBody>
+      </p:sp>
+      <p:sp>
+        <p:nvSpPr>
+          <p:cNvPr id="17" name="TextBox 16"/>
+          <p:cNvSpPr txBox="1"/>
+          <p:nvPr/>
+        </p:nvSpPr>
+        <p:spPr>
+          <a:xfrm>
+            <a:off x="4599432" y="2724912"/>
+            <a:ext cx="3246120" cy="3108960"/>
+          </a:xfrm>
+          <a:prstGeom prst="rect">
+            <a:avLst/>
+          </a:prstGeom>
+          <a:noFill/>
+        </p:spPr>
+        <p:txBody>
+          <a:bodyPr wrap="square">
+            <a:spAutoFit/>
+          </a:bodyPr>
+          <a:lstStyle/>
+          <a:p>
+            <a:pPr algn="l"/>
+            <a:r>
+              <a:rPr sz="1200" b="0" i="0">
+                <a:solidFill>
+                  <a:srgbClr val="F0F0F0"/>
+                </a:solidFill>
+              </a:rPr>
+              <a:t>Creators who pass verification receive a "Real Content" badge on their posts — giving audiences confidence that what they watch is genuine, human-created content.
+Authenticity is a competitive advantage on Sachi.</a:t>
+            </a:r>
+          </a:p>
+        </p:txBody>
+      </p:sp>
+      <p:sp>
+        <p:nvSpPr>
+          <p:cNvPr id="18" name="Rectangle 17"/>
+          <p:cNvSpPr/>
+          <p:nvPr/>
+        </p:nvSpPr>
+        <p:spPr>
+          <a:xfrm>
+            <a:off x="8229600" y="1874519"/>
+            <a:ext cx="3566160" cy="4160520"/>
+          </a:xfrm>
+          <a:prstGeom prst="rect">
+            <a:avLst/>
+          </a:prstGeom>
+          <a:solidFill>
+            <a:srgbClr val="161830"/>
+          </a:solidFill>
+          <a:ln w="22860">
+            <a:solidFill>
+              <a:srgbClr val="A0FFB0"/>
+            </a:solidFill>
+          </a:ln>
+        </p:spPr>
+        <p:style>
+          <a:lnRef idx="1">
+            <a:schemeClr val="accent1"/>
+          </a:lnRef>
+          <a:fillRef idx="3">
+            <a:schemeClr val="accent1"/>
+          </a:fillRef>
+          <a:effectRef idx="2">
+            <a:schemeClr val="accent1"/>
+          </a:effectRef>
+          <a:fontRef idx="minor">
+            <a:schemeClr val="lt1"/>
+          </a:fontRef>
+        </p:style>
+        <p:txBody>
+          <a:bodyPr rtlCol="0" anchor="ctr"/>
+          <a:lstStyle/>
+          <a:p>
+            <a:pPr algn="ctr"/>
+          </a:p>
+        </p:txBody>
+      </p:sp>
+      <p:sp>
+        <p:nvSpPr>
+          <p:cNvPr id="19" name="TextBox 18"/>
+          <p:cNvSpPr txBox="1"/>
+          <p:nvPr/>
+        </p:nvSpPr>
+        <p:spPr>
+          <a:xfrm>
+            <a:off x="8394192" y="1993392"/>
+            <a:ext cx="3246120" cy="594360"/>
+          </a:xfrm>
+          <a:prstGeom prst="rect">
+            <a:avLst/>
+          </a:prstGeom>
+          <a:noFill/>
+        </p:spPr>
+        <p:txBody>
+          <a:bodyPr wrap="square">
+            <a:spAutoFit/>
+          </a:bodyPr>
+          <a:lstStyle/>
+          <a:p>
+            <a:pPr algn="l"/>
+            <a:r>
+              <a:rPr sz="1500" b="1" i="0">
+                <a:solidFill>
+                  <a:srgbClr val="A0FFB0"/>
+                </a:solidFill>
+              </a:rPr>
+              <a:t>🛡️  Truth-First
+Platform Policy</a:t>
+            </a:r>
+          </a:p>
+        </p:txBody>
+      </p:sp>
+      <p:sp>
+        <p:nvSpPr>
+          <p:cNvPr id="20" name="Rectangle 19"/>
+          <p:cNvSpPr/>
+          <p:nvPr/>
+        </p:nvSpPr>
+        <p:spPr>
+          <a:xfrm>
+            <a:off x="8394192" y="2633472"/>
+            <a:ext cx="3246120" cy="22860"/>
+          </a:xfrm>
+          <a:prstGeom prst="rect">
+            <a:avLst/>
+          </a:prstGeom>
+          <a:solidFill>
+            <a:srgbClr val="A0FFB0"/>
+          </a:solidFill>
+          <a:ln>
+            <a:noFill/>
+          </a:ln>
+        </p:spPr>
+        <p:style>
+          <a:lnRef idx="1">
+            <a:schemeClr val="accent1"/>
+          </a:lnRef>
+          <a:fillRef idx="3">
+            <a:schemeClr val="accent1"/>
+          </a:fillRef>
+          <a:effectRef idx="2">
+            <a:schemeClr val="accent1"/>
+          </a:effectRef>
+          <a:fontRef idx="minor">
+            <a:schemeClr val="lt1"/>
+          </a:fontRef>
+        </p:style>
+        <p:txBody>
+          <a:bodyPr rtlCol="0" anchor="ctr"/>
+          <a:lstStyle/>
+          <a:p>
+            <a:pPr algn="ctr"/>
+          </a:p>
+        </p:txBody>
+      </p:sp>
+      <p:sp>
+        <p:nvSpPr>
+          <p:cNvPr id="21" name="TextBox 20"/>
+          <p:cNvSpPr txBox="1"/>
+          <p:nvPr/>
+        </p:nvSpPr>
+        <p:spPr>
+          <a:xfrm>
+            <a:off x="8394192" y="2724912"/>
+            <a:ext cx="3246120" cy="3108960"/>
+          </a:xfrm>
+          <a:prstGeom prst="rect">
+            <a:avLst/>
+          </a:prstGeom>
+          <a:noFill/>
+        </p:spPr>
+        <p:txBody>
+          <a:bodyPr wrap="square">
+            <a:spAutoFit/>
+          </a:bodyPr>
+          <a:lstStyle/>
+          <a:p>
+            <a:pPr algn="l"/>
+            <a:r>
+              <a:rPr sz="1200" b="0" i="0">
+                <a:solidFill>
+                  <a:srgbClr val="F0F0F0"/>
+                </a:solidFill>
+              </a:rPr>
+              <a:t>Zero tolerance for synthetic misinformation, manipulated media, and coordinated fake accounts.
+Sachi's moderation stack combines AI flagging, human review, and community reporting — three layers of protection.</a:t>
+            </a:r>
+          </a:p>
+        </p:txBody>
+      </p:sp>
+      <p:sp>
+        <p:nvSpPr>
+          <p:cNvPr id="22" name="TextBox 21"/>
+          <p:cNvSpPr txBox="1"/>
+          <p:nvPr/>
+        </p:nvSpPr>
+        <p:spPr>
+          <a:xfrm>
+            <a:off x="777240" y="5779008"/>
+            <a:ext cx="10515600" cy="457200"/>
+          </a:xfrm>
+          <a:prstGeom prst="rect">
+            <a:avLst/>
+          </a:prstGeom>
+          <a:noFill/>
+        </p:spPr>
+        <p:txBody>
+          <a:bodyPr wrap="square">
+            <a:spAutoFit/>
+          </a:bodyPr>
+          <a:lstStyle/>
+          <a:p>
+            <a:pPr algn="ctr"/>
+            <a:r>
+              <a:rPr sz="1400" b="0" i="1">
+                <a:solidFill>
+                  <a:srgbClr val="F5C842"/>
+                </a:solidFill>
+              </a:rPr>
+              <a:t>"While other platforms profit from viral misinformation, Sachi Stream is where creators and audiences come for the truth."</a:t>
             </a:r>
           </a:p>
         </p:txBody>

--- a/Sachi_Stream_Investor_Deck_Seed_Round_May2026.pptx
+++ b/Sachi_Stream_Investor_Deck_Seed_Round_May2026.pptx
@@ -3600,6 +3600,30 @@
           </a:p>
         </p:txBody>
       </p:sp>
+      <p:pic>
+        <p:nvPicPr>
+          <p:cNvPr id="15" name="Picture 14" descr="sachi_logo_transparent.png"/>
+          <p:cNvPicPr>
+            <a:picLocks noChangeAspect="1"/>
+          </p:cNvPicPr>
+          <p:nvPr/>
+        </p:nvPicPr>
+        <p:blipFill>
+          <a:blip r:embed="rId2"/>
+          <a:stretch>
+            <a:fillRect/>
+          </a:stretch>
+        </p:blipFill>
+        <p:spPr>
+          <a:xfrm>
+            <a:off x="9235440" y="274320"/>
+            <a:ext cx="1005840" cy="1005840"/>
+          </a:xfrm>
+          <a:prstGeom prst="rect">
+            <a:avLst/>
+          </a:prstGeom>
+        </p:spPr>
+      </p:pic>
     </p:spTree>
   </p:cSld>
   <p:clrMapOvr>
@@ -4879,6 +4903,30 @@
           </a:p>
         </p:txBody>
       </p:sp>
+      <p:pic>
+        <p:nvPicPr>
+          <p:cNvPr id="38" name="Picture 37" descr="sachi_logo_transparent.png"/>
+          <p:cNvPicPr>
+            <a:picLocks noChangeAspect="1"/>
+          </p:cNvPicPr>
+          <p:nvPr/>
+        </p:nvPicPr>
+        <p:blipFill>
+          <a:blip r:embed="rId2"/>
+          <a:stretch>
+            <a:fillRect/>
+          </a:stretch>
+        </p:blipFill>
+        <p:spPr>
+          <a:xfrm>
+            <a:off x="11018520" y="6327648"/>
+            <a:ext cx="502920" cy="502920"/>
+          </a:xfrm>
+          <a:prstGeom prst="rect">
+            <a:avLst/>
+          </a:prstGeom>
+        </p:spPr>
+      </p:pic>
     </p:spTree>
   </p:cSld>
   <p:clrMapOvr>
@@ -8899,6 +8947,30 @@
           </a:p>
         </p:txBody>
       </p:sp>
+      <p:pic>
+        <p:nvPicPr>
+          <p:cNvPr id="107" name="Picture 106" descr="sachi_logo_transparent.png"/>
+          <p:cNvPicPr>
+            <a:picLocks noChangeAspect="1"/>
+          </p:cNvPicPr>
+          <p:nvPr/>
+        </p:nvPicPr>
+        <p:blipFill>
+          <a:blip r:embed="rId2"/>
+          <a:stretch>
+            <a:fillRect/>
+          </a:stretch>
+        </p:blipFill>
+        <p:spPr>
+          <a:xfrm>
+            <a:off x="11018520" y="6327648"/>
+            <a:ext cx="502920" cy="502920"/>
+          </a:xfrm>
+          <a:prstGeom prst="rect">
+            <a:avLst/>
+          </a:prstGeom>
+        </p:spPr>
+      </p:pic>
     </p:spTree>
   </p:cSld>
   <p:clrMapOvr>
@@ -13107,6 +13179,30 @@
           </a:p>
         </p:txBody>
       </p:sp>
+      <p:pic>
+        <p:nvPicPr>
+          <p:cNvPr id="108" name="Picture 107" descr="sachi_logo_transparent.png"/>
+          <p:cNvPicPr>
+            <a:picLocks noChangeAspect="1"/>
+          </p:cNvPicPr>
+          <p:nvPr/>
+        </p:nvPicPr>
+        <p:blipFill>
+          <a:blip r:embed="rId2"/>
+          <a:stretch>
+            <a:fillRect/>
+          </a:stretch>
+        </p:blipFill>
+        <p:spPr>
+          <a:xfrm>
+            <a:off x="11018520" y="6327648"/>
+            <a:ext cx="502920" cy="502920"/>
+          </a:xfrm>
+          <a:prstGeom prst="rect">
+            <a:avLst/>
+          </a:prstGeom>
+        </p:spPr>
+      </p:pic>
     </p:spTree>
   </p:cSld>
   <p:clrMapOvr>
@@ -17203,6 +17299,30 @@
           </a:p>
         </p:txBody>
       </p:sp>
+      <p:pic>
+        <p:nvPicPr>
+          <p:cNvPr id="105" name="Picture 104" descr="sachi_logo_transparent.png"/>
+          <p:cNvPicPr>
+            <a:picLocks noChangeAspect="1"/>
+          </p:cNvPicPr>
+          <p:nvPr/>
+        </p:nvPicPr>
+        <p:blipFill>
+          <a:blip r:embed="rId2"/>
+          <a:stretch>
+            <a:fillRect/>
+          </a:stretch>
+        </p:blipFill>
+        <p:spPr>
+          <a:xfrm>
+            <a:off x="11018520" y="6327648"/>
+            <a:ext cx="502920" cy="502920"/>
+          </a:xfrm>
+          <a:prstGeom prst="rect">
+            <a:avLst/>
+          </a:prstGeom>
+        </p:spPr>
+      </p:pic>
     </p:spTree>
   </p:cSld>
   <p:clrMapOvr>
@@ -18695,6 +18815,30 @@
           </a:p>
         </p:txBody>
       </p:sp>
+      <p:pic>
+        <p:nvPicPr>
+          <p:cNvPr id="40" name="Picture 39" descr="sachi_logo_transparent.png"/>
+          <p:cNvPicPr>
+            <a:picLocks noChangeAspect="1"/>
+          </p:cNvPicPr>
+          <p:nvPr/>
+        </p:nvPicPr>
+        <p:blipFill>
+          <a:blip r:embed="rId2"/>
+          <a:stretch>
+            <a:fillRect/>
+          </a:stretch>
+        </p:blipFill>
+        <p:spPr>
+          <a:xfrm>
+            <a:off x="11018520" y="6327648"/>
+            <a:ext cx="502920" cy="502920"/>
+          </a:xfrm>
+          <a:prstGeom prst="rect">
+            <a:avLst/>
+          </a:prstGeom>
+        </p:spPr>
+      </p:pic>
     </p:spTree>
   </p:cSld>
   <p:clrMapOvr>
@@ -21113,6 +21257,30 @@
           </a:p>
         </p:txBody>
       </p:sp>
+      <p:pic>
+        <p:nvPicPr>
+          <p:cNvPr id="68" name="Picture 67" descr="sachi_logo_transparent.png"/>
+          <p:cNvPicPr>
+            <a:picLocks noChangeAspect="1"/>
+          </p:cNvPicPr>
+          <p:nvPr/>
+        </p:nvPicPr>
+        <p:blipFill>
+          <a:blip r:embed="rId2"/>
+          <a:stretch>
+            <a:fillRect/>
+          </a:stretch>
+        </p:blipFill>
+        <p:spPr>
+          <a:xfrm>
+            <a:off x="11018520" y="6327648"/>
+            <a:ext cx="502920" cy="502920"/>
+          </a:xfrm>
+          <a:prstGeom prst="rect">
+            <a:avLst/>
+          </a:prstGeom>
+        </p:spPr>
+      </p:pic>
     </p:spTree>
   </p:cSld>
   <p:clrMapOvr>
@@ -21519,6 +21687,30 @@
           </a:p>
         </p:txBody>
       </p:sp>
+      <p:pic>
+        <p:nvPicPr>
+          <p:cNvPr id="12" name="Picture 11" descr="sachi_logo_transparent.png"/>
+          <p:cNvPicPr>
+            <a:picLocks noChangeAspect="1"/>
+          </p:cNvPicPr>
+          <p:nvPr/>
+        </p:nvPicPr>
+        <p:blipFill>
+          <a:blip r:embed="rId2"/>
+          <a:stretch>
+            <a:fillRect/>
+          </a:stretch>
+        </p:blipFill>
+        <p:spPr>
+          <a:xfrm>
+            <a:off x="11018520" y="6327648"/>
+            <a:ext cx="502920" cy="502920"/>
+          </a:xfrm>
+          <a:prstGeom prst="rect">
+            <a:avLst/>
+          </a:prstGeom>
+        </p:spPr>
+      </p:pic>
     </p:spTree>
   </p:cSld>
   <p:clrMapOvr>
@@ -22015,6 +22207,30 @@
           </a:p>
         </p:txBody>
       </p:sp>
+      <p:pic>
+        <p:nvPicPr>
+          <p:cNvPr id="15" name="Picture 14" descr="sachi_logo_transparent.png"/>
+          <p:cNvPicPr>
+            <a:picLocks noChangeAspect="1"/>
+          </p:cNvPicPr>
+          <p:nvPr/>
+        </p:nvPicPr>
+        <p:blipFill>
+          <a:blip r:embed="rId2"/>
+          <a:stretch>
+            <a:fillRect/>
+          </a:stretch>
+        </p:blipFill>
+        <p:spPr>
+          <a:xfrm>
+            <a:off x="11018520" y="6327648"/>
+            <a:ext cx="502920" cy="502920"/>
+          </a:xfrm>
+          <a:prstGeom prst="rect">
+            <a:avLst/>
+          </a:prstGeom>
+        </p:spPr>
+      </p:pic>
     </p:spTree>
   </p:cSld>
   <p:clrMapOvr>
@@ -22724,6 +22940,30 @@
           </a:p>
         </p:txBody>
       </p:sp>
+      <p:pic>
+        <p:nvPicPr>
+          <p:cNvPr id="21" name="Picture 20" descr="sachi_logo_transparent.png"/>
+          <p:cNvPicPr>
+            <a:picLocks noChangeAspect="1"/>
+          </p:cNvPicPr>
+          <p:nvPr/>
+        </p:nvPicPr>
+        <p:blipFill>
+          <a:blip r:embed="rId2"/>
+          <a:stretch>
+            <a:fillRect/>
+          </a:stretch>
+        </p:blipFill>
+        <p:spPr>
+          <a:xfrm>
+            <a:off x="11018520" y="6327648"/>
+            <a:ext cx="502920" cy="502920"/>
+          </a:xfrm>
+          <a:prstGeom prst="rect">
+            <a:avLst/>
+          </a:prstGeom>
+        </p:spPr>
+      </p:pic>
     </p:spTree>
   </p:cSld>
   <p:clrMapOvr>
@@ -23576,6 +23816,30 @@
           </a:p>
         </p:txBody>
       </p:sp>
+      <p:pic>
+        <p:nvPicPr>
+          <p:cNvPr id="23" name="Picture 22" descr="sachi_logo_transparent.png"/>
+          <p:cNvPicPr>
+            <a:picLocks noChangeAspect="1"/>
+          </p:cNvPicPr>
+          <p:nvPr/>
+        </p:nvPicPr>
+        <p:blipFill>
+          <a:blip r:embed="rId2"/>
+          <a:stretch>
+            <a:fillRect/>
+          </a:stretch>
+        </p:blipFill>
+        <p:spPr>
+          <a:xfrm>
+            <a:off x="11018520" y="6327648"/>
+            <a:ext cx="502920" cy="502920"/>
+          </a:xfrm>
+          <a:prstGeom prst="rect">
+            <a:avLst/>
+          </a:prstGeom>
+        </p:spPr>
+      </p:pic>
     </p:spTree>
   </p:cSld>
   <p:clrMapOvr>
@@ -24518,6 +24782,30 @@
           </a:p>
         </p:txBody>
       </p:sp>
+      <p:pic>
+        <p:nvPicPr>
+          <p:cNvPr id="26" name="Picture 25" descr="sachi_logo_transparent.png"/>
+          <p:cNvPicPr>
+            <a:picLocks noChangeAspect="1"/>
+          </p:cNvPicPr>
+          <p:nvPr/>
+        </p:nvPicPr>
+        <p:blipFill>
+          <a:blip r:embed="rId2"/>
+          <a:stretch>
+            <a:fillRect/>
+          </a:stretch>
+        </p:blipFill>
+        <p:spPr>
+          <a:xfrm>
+            <a:off x="11018520" y="6327648"/>
+            <a:ext cx="502920" cy="502920"/>
+          </a:xfrm>
+          <a:prstGeom prst="rect">
+            <a:avLst/>
+          </a:prstGeom>
+        </p:spPr>
+      </p:pic>
     </p:spTree>
   </p:cSld>
   <p:clrMapOvr>
@@ -25550,6 +25838,30 @@
           </a:p>
         </p:txBody>
       </p:sp>
+      <p:pic>
+        <p:nvPicPr>
+          <p:cNvPr id="29" name="Picture 28" descr="sachi_logo_transparent.png"/>
+          <p:cNvPicPr>
+            <a:picLocks noChangeAspect="1"/>
+          </p:cNvPicPr>
+          <p:nvPr/>
+        </p:nvPicPr>
+        <p:blipFill>
+          <a:blip r:embed="rId2"/>
+          <a:stretch>
+            <a:fillRect/>
+          </a:stretch>
+        </p:blipFill>
+        <p:spPr>
+          <a:xfrm>
+            <a:off x="11018520" y="6327648"/>
+            <a:ext cx="502920" cy="502920"/>
+          </a:xfrm>
+          <a:prstGeom prst="rect">
+            <a:avLst/>
+          </a:prstGeom>
+        </p:spPr>
+      </p:pic>
     </p:spTree>
   </p:cSld>
   <p:clrMapOvr>
@@ -26268,6 +26580,30 @@
           </a:p>
         </p:txBody>
       </p:sp>
+      <p:pic>
+        <p:nvPicPr>
+          <p:cNvPr id="20" name="Picture 19" descr="sachi_logo_transparent.png"/>
+          <p:cNvPicPr>
+            <a:picLocks noChangeAspect="1"/>
+          </p:cNvPicPr>
+          <p:nvPr/>
+        </p:nvPicPr>
+        <p:blipFill>
+          <a:blip r:embed="rId2"/>
+          <a:stretch>
+            <a:fillRect/>
+          </a:stretch>
+        </p:blipFill>
+        <p:spPr>
+          <a:xfrm>
+            <a:off x="11018520" y="6327648"/>
+            <a:ext cx="502920" cy="502920"/>
+          </a:xfrm>
+          <a:prstGeom prst="rect">
+            <a:avLst/>
+          </a:prstGeom>
+        </p:spPr>
+      </p:pic>
     </p:spTree>
   </p:cSld>
   <p:clrMapOvr>
@@ -27239,6 +27575,30 @@
           </a:p>
         </p:txBody>
       </p:sp>
+      <p:pic>
+        <p:nvPicPr>
+          <p:cNvPr id="28" name="Picture 27" descr="sachi_logo_transparent.png"/>
+          <p:cNvPicPr>
+            <a:picLocks noChangeAspect="1"/>
+          </p:cNvPicPr>
+          <p:nvPr/>
+        </p:nvPicPr>
+        <p:blipFill>
+          <a:blip r:embed="rId2"/>
+          <a:stretch>
+            <a:fillRect/>
+          </a:stretch>
+        </p:blipFill>
+        <p:spPr>
+          <a:xfrm>
+            <a:off x="11018520" y="6327648"/>
+            <a:ext cx="502920" cy="502920"/>
+          </a:xfrm>
+          <a:prstGeom prst="rect">
+            <a:avLst/>
+          </a:prstGeom>
+        </p:spPr>
+      </p:pic>
     </p:spTree>
   </p:cSld>
   <p:clrMapOvr>
@@ -29408,6 +29768,30 @@
           </a:p>
         </p:txBody>
       </p:sp>
+      <p:pic>
+        <p:nvPicPr>
+          <p:cNvPr id="61" name="Picture 60" descr="sachi_logo_transparent.png"/>
+          <p:cNvPicPr>
+            <a:picLocks noChangeAspect="1"/>
+          </p:cNvPicPr>
+          <p:nvPr/>
+        </p:nvPicPr>
+        <p:blipFill>
+          <a:blip r:embed="rId2"/>
+          <a:stretch>
+            <a:fillRect/>
+          </a:stretch>
+        </p:blipFill>
+        <p:spPr>
+          <a:xfrm>
+            <a:off x="11018520" y="6327648"/>
+            <a:ext cx="502920" cy="502920"/>
+          </a:xfrm>
+          <a:prstGeom prst="rect">
+            <a:avLst/>
+          </a:prstGeom>
+        </p:spPr>
+      </p:pic>
     </p:spTree>
   </p:cSld>
   <p:clrMapOvr>

--- a/Sachi_Stream_Investor_Deck_Seed_Round_May2026.pptx
+++ b/Sachi_Stream_Investor_Deck_Seed_Round_May2026.pptx
@@ -14,6 +14,7 @@
     <p:sldId id="261" r:id="rId12"/>
     <p:sldId id="262" r:id="rId13"/>
     <p:sldId id="263" r:id="rId14"/>
+    <p:sldId id="272" r:id="rId23"/>
     <p:sldId id="264" r:id="rId15"/>
     <p:sldId id="265" r:id="rId16"/>
     <p:sldId id="266" r:id="rId17"/>
@@ -21690,6 +21691,2051 @@
       <p:pic>
         <p:nvPicPr>
           <p:cNvPr id="12" name="Picture 11" descr="sachi_logo_transparent.png"/>
+          <p:cNvPicPr>
+            <a:picLocks noChangeAspect="1"/>
+          </p:cNvPicPr>
+          <p:nvPr/>
+        </p:nvPicPr>
+        <p:blipFill>
+          <a:blip r:embed="rId2"/>
+          <a:stretch>
+            <a:fillRect/>
+          </a:stretch>
+        </p:blipFill>
+        <p:spPr>
+          <a:xfrm>
+            <a:off x="11018520" y="6327648"/>
+            <a:ext cx="502920" cy="502920"/>
+          </a:xfrm>
+          <a:prstGeom prst="rect">
+            <a:avLst/>
+          </a:prstGeom>
+        </p:spPr>
+      </p:pic>
+    </p:spTree>
+  </p:cSld>
+  <p:clrMapOvr>
+    <a:masterClrMapping/>
+  </p:clrMapOvr>
+</p:sld>
+</file>
+
+<file path=ppt/slides/slide17.xml><?xml version="1.0" encoding="utf-8"?>
+<p:sld xmlns:a="http://schemas.openxmlformats.org/drawingml/2006/main" xmlns:p="http://schemas.openxmlformats.org/presentationml/2006/main" xmlns:r="http://schemas.openxmlformats.org/officeDocument/2006/relationships">
+  <p:cSld>
+    <p:spTree>
+      <p:nvGrpSpPr>
+        <p:cNvPr id="1" name=""/>
+        <p:cNvGrpSpPr/>
+        <p:nvPr/>
+      </p:nvGrpSpPr>
+      <p:grpSpPr/>
+      <p:sp>
+        <p:nvSpPr>
+          <p:cNvPr id="2" name="Rectangle 1"/>
+          <p:cNvSpPr/>
+          <p:nvPr/>
+        </p:nvSpPr>
+        <p:spPr>
+          <a:xfrm>
+            <a:off x="0" y="0"/>
+            <a:ext cx="12188952" cy="6858000"/>
+          </a:xfrm>
+          <a:prstGeom prst="rect">
+            <a:avLst/>
+          </a:prstGeom>
+          <a:solidFill>
+            <a:srgbClr val="0B0C1A"/>
+          </a:solidFill>
+          <a:ln>
+            <a:noFill/>
+          </a:ln>
+        </p:spPr>
+        <p:style>
+          <a:lnRef idx="1">
+            <a:schemeClr val="accent1"/>
+          </a:lnRef>
+          <a:fillRef idx="3">
+            <a:schemeClr val="accent1"/>
+          </a:fillRef>
+          <a:effectRef idx="2">
+            <a:schemeClr val="accent1"/>
+          </a:effectRef>
+          <a:fontRef idx="minor">
+            <a:schemeClr val="lt1"/>
+          </a:fontRef>
+        </p:style>
+        <p:txBody>
+          <a:bodyPr rtlCol="0" anchor="ctr"/>
+          <a:lstStyle/>
+          <a:p>
+            <a:pPr algn="ctr"/>
+          </a:p>
+        </p:txBody>
+      </p:sp>
+      <p:sp>
+        <p:nvSpPr>
+          <p:cNvPr id="3" name="Rectangle 2"/>
+          <p:cNvSpPr/>
+          <p:nvPr/>
+        </p:nvSpPr>
+        <p:spPr>
+          <a:xfrm>
+            <a:off x="0" y="0"/>
+            <a:ext cx="12188952" cy="45720"/>
+          </a:xfrm>
+          <a:prstGeom prst="rect">
+            <a:avLst/>
+          </a:prstGeom>
+          <a:solidFill>
+            <a:srgbClr val="F5C842"/>
+          </a:solidFill>
+          <a:ln>
+            <a:noFill/>
+          </a:ln>
+        </p:spPr>
+        <p:style>
+          <a:lnRef idx="1">
+            <a:schemeClr val="accent1"/>
+          </a:lnRef>
+          <a:fillRef idx="3">
+            <a:schemeClr val="accent1"/>
+          </a:fillRef>
+          <a:effectRef idx="2">
+            <a:schemeClr val="accent1"/>
+          </a:effectRef>
+          <a:fontRef idx="minor">
+            <a:schemeClr val="lt1"/>
+          </a:fontRef>
+        </p:style>
+        <p:txBody>
+          <a:bodyPr rtlCol="0" anchor="ctr"/>
+          <a:lstStyle/>
+          <a:p>
+            <a:pPr algn="ctr"/>
+          </a:p>
+        </p:txBody>
+      </p:sp>
+      <p:sp>
+        <p:nvSpPr>
+          <p:cNvPr id="4" name="Rectangle 3"/>
+          <p:cNvSpPr/>
+          <p:nvPr/>
+        </p:nvSpPr>
+        <p:spPr>
+          <a:xfrm>
+            <a:off x="0" y="6812280"/>
+            <a:ext cx="12188952" cy="45720"/>
+          </a:xfrm>
+          <a:prstGeom prst="rect">
+            <a:avLst/>
+          </a:prstGeom>
+          <a:solidFill>
+            <a:srgbClr val="F5C842"/>
+          </a:solidFill>
+          <a:ln>
+            <a:noFill/>
+          </a:ln>
+        </p:spPr>
+        <p:style>
+          <a:lnRef idx="1">
+            <a:schemeClr val="accent1"/>
+          </a:lnRef>
+          <a:fillRef idx="3">
+            <a:schemeClr val="accent1"/>
+          </a:fillRef>
+          <a:effectRef idx="2">
+            <a:schemeClr val="accent1"/>
+          </a:effectRef>
+          <a:fontRef idx="minor">
+            <a:schemeClr val="lt1"/>
+          </a:fontRef>
+        </p:style>
+        <p:txBody>
+          <a:bodyPr rtlCol="0" anchor="ctr"/>
+          <a:lstStyle/>
+          <a:p>
+            <a:pPr algn="ctr"/>
+          </a:p>
+        </p:txBody>
+      </p:sp>
+      <p:sp>
+        <p:nvSpPr>
+          <p:cNvPr id="5" name="Rectangle 4"/>
+          <p:cNvSpPr/>
+          <p:nvPr/>
+        </p:nvSpPr>
+        <p:spPr>
+          <a:xfrm>
+            <a:off x="0" y="6309360"/>
+            <a:ext cx="12188952" cy="64008"/>
+          </a:xfrm>
+          <a:prstGeom prst="rect">
+            <a:avLst/>
+          </a:prstGeom>
+          <a:solidFill>
+            <a:srgbClr val="F5C842"/>
+          </a:solidFill>
+          <a:ln>
+            <a:noFill/>
+          </a:ln>
+        </p:spPr>
+        <p:style>
+          <a:lnRef idx="1">
+            <a:schemeClr val="accent1"/>
+          </a:lnRef>
+          <a:fillRef idx="3">
+            <a:schemeClr val="accent1"/>
+          </a:fillRef>
+          <a:effectRef idx="2">
+            <a:schemeClr val="accent1"/>
+          </a:effectRef>
+          <a:fontRef idx="minor">
+            <a:schemeClr val="lt1"/>
+          </a:fontRef>
+        </p:style>
+        <p:txBody>
+          <a:bodyPr rtlCol="0" anchor="ctr"/>
+          <a:lstStyle/>
+          <a:p>
+            <a:pPr algn="ctr"/>
+          </a:p>
+        </p:txBody>
+      </p:sp>
+      <p:sp>
+        <p:nvSpPr>
+          <p:cNvPr id="6" name="Rectangle 5"/>
+          <p:cNvSpPr/>
+          <p:nvPr/>
+        </p:nvSpPr>
+        <p:spPr>
+          <a:xfrm>
+            <a:off x="457200" y="1280160"/>
+            <a:ext cx="109728" cy="4572000"/>
+          </a:xfrm>
+          <a:prstGeom prst="rect">
+            <a:avLst/>
+          </a:prstGeom>
+          <a:solidFill>
+            <a:srgbClr val="00D4C8"/>
+          </a:solidFill>
+          <a:ln>
+            <a:noFill/>
+          </a:ln>
+        </p:spPr>
+        <p:style>
+          <a:lnRef idx="1">
+            <a:schemeClr val="accent1"/>
+          </a:lnRef>
+          <a:fillRef idx="3">
+            <a:schemeClr val="accent1"/>
+          </a:fillRef>
+          <a:effectRef idx="2">
+            <a:schemeClr val="accent1"/>
+          </a:effectRef>
+          <a:fontRef idx="minor">
+            <a:schemeClr val="lt1"/>
+          </a:fontRef>
+        </p:style>
+        <p:txBody>
+          <a:bodyPr rtlCol="0" anchor="ctr"/>
+          <a:lstStyle/>
+          <a:p>
+            <a:pPr algn="ctr"/>
+          </a:p>
+        </p:txBody>
+      </p:sp>
+      <p:sp>
+        <p:nvSpPr>
+          <p:cNvPr id="7" name="TextBox 6"/>
+          <p:cNvSpPr txBox="1"/>
+          <p:nvPr/>
+        </p:nvSpPr>
+        <p:spPr>
+          <a:xfrm>
+            <a:off x="777240" y="228600"/>
+            <a:ext cx="10515600" cy="640080"/>
+          </a:xfrm>
+          <a:prstGeom prst="rect">
+            <a:avLst/>
+          </a:prstGeom>
+          <a:noFill/>
+        </p:spPr>
+        <p:txBody>
+          <a:bodyPr wrap="square">
+            <a:spAutoFit/>
+          </a:bodyPr>
+          <a:lstStyle/>
+          <a:p>
+            <a:pPr algn="l"/>
+            <a:r>
+              <a:rPr sz="3600" b="1" i="0">
+                <a:solidFill>
+                  <a:srgbClr val="F5C842"/>
+                </a:solidFill>
+              </a:rPr>
+              <a:t>Why Colombo, Sri Lanka?</a:t>
+            </a:r>
+          </a:p>
+        </p:txBody>
+      </p:sp>
+      <p:sp>
+        <p:nvSpPr>
+          <p:cNvPr id="8" name="Rectangle 7"/>
+          <p:cNvSpPr/>
+          <p:nvPr/>
+        </p:nvSpPr>
+        <p:spPr>
+          <a:xfrm>
+            <a:off x="640080" y="987552"/>
+            <a:ext cx="10881360" cy="27432"/>
+          </a:xfrm>
+          <a:prstGeom prst="rect">
+            <a:avLst/>
+          </a:prstGeom>
+          <a:solidFill>
+            <a:srgbClr val="00D4C8"/>
+          </a:solidFill>
+          <a:ln>
+            <a:noFill/>
+          </a:ln>
+        </p:spPr>
+        <p:style>
+          <a:lnRef idx="1">
+            <a:schemeClr val="accent1"/>
+          </a:lnRef>
+          <a:fillRef idx="3">
+            <a:schemeClr val="accent1"/>
+          </a:fillRef>
+          <a:effectRef idx="2">
+            <a:schemeClr val="accent1"/>
+          </a:effectRef>
+          <a:fontRef idx="minor">
+            <a:schemeClr val="lt1"/>
+          </a:fontRef>
+        </p:style>
+        <p:txBody>
+          <a:bodyPr rtlCol="0" anchor="ctr"/>
+          <a:lstStyle/>
+          <a:p>
+            <a:pPr algn="ctr"/>
+          </a:p>
+        </p:txBody>
+      </p:sp>
+      <p:sp>
+        <p:nvSpPr>
+          <p:cNvPr id="9" name="TextBox 8"/>
+          <p:cNvSpPr txBox="1"/>
+          <p:nvPr/>
+        </p:nvSpPr>
+        <p:spPr>
+          <a:xfrm>
+            <a:off x="777240" y="1078992"/>
+            <a:ext cx="10515600" cy="384048"/>
+          </a:xfrm>
+          <a:prstGeom prst="rect">
+            <a:avLst/>
+          </a:prstGeom>
+          <a:noFill/>
+        </p:spPr>
+        <p:txBody>
+          <a:bodyPr wrap="square">
+            <a:spAutoFit/>
+          </a:bodyPr>
+          <a:lstStyle/>
+          <a:p>
+            <a:pPr algn="l"/>
+            <a:r>
+              <a:rPr sz="1400" b="0" i="1">
+                <a:solidFill>
+                  <a:srgbClr val="CCCCCC"/>
+                </a:solidFill>
+              </a:rPr>
+              <a:t>A strategic, cost-efficient headquarters for Sachi Stream's global engineering operations.</a:t>
+            </a:r>
+          </a:p>
+        </p:txBody>
+      </p:sp>
+      <p:sp>
+        <p:nvSpPr>
+          <p:cNvPr id="10" name="Rounded Rectangle 9"/>
+          <p:cNvSpPr/>
+          <p:nvPr/>
+        </p:nvSpPr>
+        <p:spPr>
+          <a:xfrm>
+            <a:off x="640080" y="1600200"/>
+            <a:ext cx="2377440" cy="3840480"/>
+          </a:xfrm>
+          <a:prstGeom prst="roundRect">
+            <a:avLst/>
+          </a:prstGeom>
+          <a:solidFill>
+            <a:srgbClr val="1A3A2A"/>
+          </a:solidFill>
+          <a:ln w="19050">
+            <a:solidFill>
+              <a:srgbClr val="00D4C8"/>
+            </a:solidFill>
+          </a:ln>
+        </p:spPr>
+        <p:style>
+          <a:lnRef idx="1">
+            <a:schemeClr val="accent1"/>
+          </a:lnRef>
+          <a:fillRef idx="3">
+            <a:schemeClr val="accent1"/>
+          </a:fillRef>
+          <a:effectRef idx="2">
+            <a:schemeClr val="accent1"/>
+          </a:effectRef>
+          <a:fontRef idx="minor">
+            <a:schemeClr val="lt1"/>
+          </a:fontRef>
+        </p:style>
+        <p:txBody>
+          <a:bodyPr rtlCol="0" anchor="ctr"/>
+          <a:lstStyle/>
+          <a:p>
+            <a:pPr algn="ctr"/>
+          </a:p>
+        </p:txBody>
+      </p:sp>
+      <p:sp>
+        <p:nvSpPr>
+          <p:cNvPr id="11" name="TextBox 10"/>
+          <p:cNvSpPr txBox="1"/>
+          <p:nvPr/>
+        </p:nvSpPr>
+        <p:spPr>
+          <a:xfrm>
+            <a:off x="685800" y="1645920"/>
+            <a:ext cx="2286000" cy="548640"/>
+          </a:xfrm>
+          <a:prstGeom prst="rect">
+            <a:avLst/>
+          </a:prstGeom>
+          <a:noFill/>
+        </p:spPr>
+        <p:txBody>
+          <a:bodyPr wrap="square">
+            <a:spAutoFit/>
+          </a:bodyPr>
+          <a:lstStyle/>
+          <a:p>
+            <a:pPr algn="ctr"/>
+            <a:r>
+              <a:rPr sz="3200" b="0" i="0">
+                <a:solidFill>
+                  <a:srgbClr val="FFFFFF"/>
+                </a:solidFill>
+              </a:rPr>
+              <a:t>🌏</a:t>
+            </a:r>
+          </a:p>
+        </p:txBody>
+      </p:sp>
+      <p:sp>
+        <p:nvSpPr>
+          <p:cNvPr id="12" name="TextBox 11"/>
+          <p:cNvSpPr txBox="1"/>
+          <p:nvPr/>
+        </p:nvSpPr>
+        <p:spPr>
+          <a:xfrm>
+            <a:off x="685800" y="2286000"/>
+            <a:ext cx="2286000" cy="365760"/>
+          </a:xfrm>
+          <a:prstGeom prst="rect">
+            <a:avLst/>
+          </a:prstGeom>
+          <a:noFill/>
+        </p:spPr>
+        <p:txBody>
+          <a:bodyPr wrap="square">
+            <a:spAutoFit/>
+          </a:bodyPr>
+          <a:lstStyle/>
+          <a:p>
+            <a:pPr algn="ctr"/>
+            <a:r>
+              <a:rPr sz="1400" b="1" i="0">
+                <a:solidFill>
+                  <a:srgbClr val="00D4C8"/>
+                </a:solidFill>
+              </a:rPr>
+              <a:t>SRI LANKA</a:t>
+            </a:r>
+          </a:p>
+        </p:txBody>
+      </p:sp>
+      <p:sp>
+        <p:nvSpPr>
+          <p:cNvPr id="13" name="TextBox 12"/>
+          <p:cNvSpPr txBox="1"/>
+          <p:nvPr/>
+        </p:nvSpPr>
+        <p:spPr>
+          <a:xfrm>
+            <a:off x="685800" y="2697480"/>
+            <a:ext cx="2286000" cy="320040"/>
+          </a:xfrm>
+          <a:prstGeom prst="rect">
+            <a:avLst/>
+          </a:prstGeom>
+          <a:noFill/>
+        </p:spPr>
+        <p:txBody>
+          <a:bodyPr wrap="square">
+            <a:spAutoFit/>
+          </a:bodyPr>
+          <a:lstStyle/>
+          <a:p>
+            <a:pPr algn="ctr"/>
+            <a:r>
+              <a:rPr sz="1200" b="1" i="0">
+                <a:solidFill>
+                  <a:srgbClr val="F5C842"/>
+                </a:solidFill>
+              </a:rPr>
+              <a:t>COLOMBO</a:t>
+            </a:r>
+          </a:p>
+        </p:txBody>
+      </p:sp>
+      <p:sp>
+        <p:nvSpPr>
+          <p:cNvPr id="14" name="Oval 13"/>
+          <p:cNvSpPr/>
+          <p:nvPr/>
+        </p:nvSpPr>
+        <p:spPr>
+          <a:xfrm>
+            <a:off x="1600200" y="3090672"/>
+            <a:ext cx="201168" cy="201168"/>
+          </a:xfrm>
+          <a:prstGeom prst="ellipse">
+            <a:avLst/>
+          </a:prstGeom>
+          <a:solidFill>
+            <a:srgbClr val="FF6B6B"/>
+          </a:solidFill>
+          <a:ln>
+            <a:noFill/>
+          </a:ln>
+        </p:spPr>
+        <p:style>
+          <a:lnRef idx="1">
+            <a:schemeClr val="accent1"/>
+          </a:lnRef>
+          <a:fillRef idx="3">
+            <a:schemeClr val="accent1"/>
+          </a:fillRef>
+          <a:effectRef idx="2">
+            <a:schemeClr val="accent1"/>
+          </a:effectRef>
+          <a:fontRef idx="minor">
+            <a:schemeClr val="lt1"/>
+          </a:fontRef>
+        </p:style>
+        <p:txBody>
+          <a:bodyPr rtlCol="0" anchor="ctr"/>
+          <a:lstStyle/>
+          <a:p>
+            <a:pPr algn="ctr"/>
+          </a:p>
+        </p:txBody>
+      </p:sp>
+      <p:sp>
+        <p:nvSpPr>
+          <p:cNvPr id="15" name="TextBox 14"/>
+          <p:cNvSpPr txBox="1"/>
+          <p:nvPr/>
+        </p:nvSpPr>
+        <p:spPr>
+          <a:xfrm>
+            <a:off x="685800" y="3383280"/>
+            <a:ext cx="2286000" cy="457200"/>
+          </a:xfrm>
+          <a:prstGeom prst="rect">
+            <a:avLst/>
+          </a:prstGeom>
+          <a:noFill/>
+        </p:spPr>
+        <p:txBody>
+          <a:bodyPr wrap="square">
+            <a:spAutoFit/>
+          </a:bodyPr>
+          <a:lstStyle/>
+          <a:p>
+            <a:pPr algn="ctr"/>
+            <a:r>
+              <a:rPr sz="1000" b="0" i="1">
+                <a:solidFill>
+                  <a:srgbClr val="CCCCCC"/>
+                </a:solidFill>
+              </a:rPr>
+              <a:t>South Asia
+Indian Ocean</a:t>
+            </a:r>
+          </a:p>
+        </p:txBody>
+      </p:sp>
+      <p:sp>
+        <p:nvSpPr>
+          <p:cNvPr id="16" name="TextBox 15"/>
+          <p:cNvSpPr txBox="1"/>
+          <p:nvPr/>
+        </p:nvSpPr>
+        <p:spPr>
+          <a:xfrm>
+            <a:off x="713232" y="3977639"/>
+            <a:ext cx="2286000" cy="292608"/>
+          </a:xfrm>
+          <a:prstGeom prst="rect">
+            <a:avLst/>
+          </a:prstGeom>
+          <a:noFill/>
+        </p:spPr>
+        <p:txBody>
+          <a:bodyPr wrap="square">
+            <a:spAutoFit/>
+          </a:bodyPr>
+          <a:lstStyle/>
+          <a:p>
+            <a:pPr algn="ctr"/>
+            <a:r>
+              <a:rPr sz="1500" b="1" i="0">
+                <a:solidFill>
+                  <a:srgbClr val="F5C842"/>
+                </a:solidFill>
+              </a:rPr>
+              <a:t>15,000+</a:t>
+            </a:r>
+          </a:p>
+        </p:txBody>
+      </p:sp>
+      <p:sp>
+        <p:nvSpPr>
+          <p:cNvPr id="17" name="TextBox 16"/>
+          <p:cNvSpPr txBox="1"/>
+          <p:nvPr/>
+        </p:nvSpPr>
+        <p:spPr>
+          <a:xfrm>
+            <a:off x="713232" y="4251960"/>
+            <a:ext cx="2286000" cy="256032"/>
+          </a:xfrm>
+          <a:prstGeom prst="rect">
+            <a:avLst/>
+          </a:prstGeom>
+          <a:noFill/>
+        </p:spPr>
+        <p:txBody>
+          <a:bodyPr wrap="square">
+            <a:spAutoFit/>
+          </a:bodyPr>
+          <a:lstStyle/>
+          <a:p>
+            <a:pPr algn="ctr"/>
+            <a:r>
+              <a:rPr sz="1000" b="0" i="0">
+                <a:solidFill>
+                  <a:srgbClr val="CCCCCC"/>
+                </a:solidFill>
+              </a:rPr>
+              <a:t>Software Engineers</a:t>
+            </a:r>
+          </a:p>
+        </p:txBody>
+      </p:sp>
+      <p:sp>
+        <p:nvSpPr>
+          <p:cNvPr id="18" name="TextBox 17"/>
+          <p:cNvSpPr txBox="1"/>
+          <p:nvPr/>
+        </p:nvSpPr>
+        <p:spPr>
+          <a:xfrm>
+            <a:off x="713232" y="4416552"/>
+            <a:ext cx="2286000" cy="292608"/>
+          </a:xfrm>
+          <a:prstGeom prst="rect">
+            <a:avLst/>
+          </a:prstGeom>
+          <a:noFill/>
+        </p:spPr>
+        <p:txBody>
+          <a:bodyPr wrap="square">
+            <a:spAutoFit/>
+          </a:bodyPr>
+          <a:lstStyle/>
+          <a:p>
+            <a:pPr algn="ctr"/>
+            <a:r>
+              <a:rPr sz="1500" b="1" i="0">
+                <a:solidFill>
+                  <a:srgbClr val="F5C842"/>
+                </a:solidFill>
+              </a:rPr>
+              <a:t>~8K</a:t>
+            </a:r>
+          </a:p>
+        </p:txBody>
+      </p:sp>
+      <p:sp>
+        <p:nvSpPr>
+          <p:cNvPr id="19" name="TextBox 18"/>
+          <p:cNvSpPr txBox="1"/>
+          <p:nvPr/>
+        </p:nvSpPr>
+        <p:spPr>
+          <a:xfrm>
+            <a:off x="713232" y="4690872"/>
+            <a:ext cx="2286000" cy="256032"/>
+          </a:xfrm>
+          <a:prstGeom prst="rect">
+            <a:avLst/>
+          </a:prstGeom>
+          <a:noFill/>
+        </p:spPr>
+        <p:txBody>
+          <a:bodyPr wrap="square">
+            <a:spAutoFit/>
+          </a:bodyPr>
+          <a:lstStyle/>
+          <a:p>
+            <a:pPr algn="ctr"/>
+            <a:r>
+              <a:rPr sz="1000" b="0" i="0">
+                <a:solidFill>
+                  <a:srgbClr val="CCCCCC"/>
+                </a:solidFill>
+              </a:rPr>
+              <a:t>Avg Dev Salary/yr</a:t>
+            </a:r>
+          </a:p>
+        </p:txBody>
+      </p:sp>
+      <p:sp>
+        <p:nvSpPr>
+          <p:cNvPr id="20" name="TextBox 19"/>
+          <p:cNvSpPr txBox="1"/>
+          <p:nvPr/>
+        </p:nvSpPr>
+        <p:spPr>
+          <a:xfrm>
+            <a:off x="713232" y="4855464"/>
+            <a:ext cx="2286000" cy="292608"/>
+          </a:xfrm>
+          <a:prstGeom prst="rect">
+            <a:avLst/>
+          </a:prstGeom>
+          <a:noFill/>
+        </p:spPr>
+        <p:txBody>
+          <a:bodyPr wrap="square">
+            <a:spAutoFit/>
+          </a:bodyPr>
+          <a:lstStyle/>
+          <a:p>
+            <a:pPr algn="ctr"/>
+            <a:r>
+              <a:rPr sz="1500" b="1" i="0">
+                <a:solidFill>
+                  <a:srgbClr val="F5C842"/>
+                </a:solidFill>
+              </a:rPr>
+              <a:t>80%</a:t>
+            </a:r>
+          </a:p>
+        </p:txBody>
+      </p:sp>
+      <p:sp>
+        <p:nvSpPr>
+          <p:cNvPr id="21" name="TextBox 20"/>
+          <p:cNvSpPr txBox="1"/>
+          <p:nvPr/>
+        </p:nvSpPr>
+        <p:spPr>
+          <a:xfrm>
+            <a:off x="713232" y="5129784"/>
+            <a:ext cx="2286000" cy="256032"/>
+          </a:xfrm>
+          <a:prstGeom prst="rect">
+            <a:avLst/>
+          </a:prstGeom>
+          <a:noFill/>
+        </p:spPr>
+        <p:txBody>
+          <a:bodyPr wrap="square">
+            <a:spAutoFit/>
+          </a:bodyPr>
+          <a:lstStyle/>
+          <a:p>
+            <a:pPr algn="ctr"/>
+            <a:r>
+              <a:rPr sz="1000" b="0" i="0">
+                <a:solidFill>
+                  <a:srgbClr val="CCCCCC"/>
+                </a:solidFill>
+              </a:rPr>
+              <a:t>Cost vs. U.S.</a:t>
+            </a:r>
+          </a:p>
+        </p:txBody>
+      </p:sp>
+      <p:sp>
+        <p:nvSpPr>
+          <p:cNvPr id="22" name="TextBox 21"/>
+          <p:cNvSpPr txBox="1"/>
+          <p:nvPr/>
+        </p:nvSpPr>
+        <p:spPr>
+          <a:xfrm>
+            <a:off x="3246120" y="1188720"/>
+            <a:ext cx="3931920" cy="347472"/>
+          </a:xfrm>
+          <a:prstGeom prst="rect">
+            <a:avLst/>
+          </a:prstGeom>
+          <a:noFill/>
+        </p:spPr>
+        <p:txBody>
+          <a:bodyPr wrap="square">
+            <a:spAutoFit/>
+          </a:bodyPr>
+          <a:lstStyle/>
+          <a:p>
+            <a:pPr algn="l"/>
+            <a:r>
+              <a:rPr sz="1300" b="1" i="0">
+                <a:solidFill>
+                  <a:srgbClr val="00D4C8"/>
+                </a:solidFill>
+              </a:rPr>
+              <a:t>🏆  WHY SRI LANKA</a:t>
+            </a:r>
+          </a:p>
+        </p:txBody>
+      </p:sp>
+      <p:sp>
+        <p:nvSpPr>
+          <p:cNvPr id="23" name="Rectangle 22"/>
+          <p:cNvSpPr/>
+          <p:nvPr/>
+        </p:nvSpPr>
+        <p:spPr>
+          <a:xfrm>
+            <a:off x="3246120" y="1572768"/>
+            <a:ext cx="3931920" cy="22860"/>
+          </a:xfrm>
+          <a:prstGeom prst="rect">
+            <a:avLst/>
+          </a:prstGeom>
+          <a:solidFill>
+            <a:srgbClr val="00D4C8"/>
+          </a:solidFill>
+          <a:ln>
+            <a:noFill/>
+          </a:ln>
+        </p:spPr>
+        <p:style>
+          <a:lnRef idx="1">
+            <a:schemeClr val="accent1"/>
+          </a:lnRef>
+          <a:fillRef idx="3">
+            <a:schemeClr val="accent1"/>
+          </a:fillRef>
+          <a:effectRef idx="2">
+            <a:schemeClr val="accent1"/>
+          </a:effectRef>
+          <a:fontRef idx="minor">
+            <a:schemeClr val="lt1"/>
+          </a:fontRef>
+        </p:style>
+        <p:txBody>
+          <a:bodyPr rtlCol="0" anchor="ctr"/>
+          <a:lstStyle/>
+          <a:p>
+            <a:pPr algn="ctr"/>
+          </a:p>
+        </p:txBody>
+      </p:sp>
+      <p:sp>
+        <p:nvSpPr>
+          <p:cNvPr id="24" name="TextBox 23"/>
+          <p:cNvSpPr txBox="1"/>
+          <p:nvPr/>
+        </p:nvSpPr>
+        <p:spPr>
+          <a:xfrm>
+            <a:off x="3246120" y="1719072"/>
+            <a:ext cx="3931920" cy="274320"/>
+          </a:xfrm>
+          <a:prstGeom prst="rect">
+            <a:avLst/>
+          </a:prstGeom>
+          <a:noFill/>
+        </p:spPr>
+        <p:txBody>
+          <a:bodyPr wrap="square">
+            <a:spAutoFit/>
+          </a:bodyPr>
+          <a:lstStyle/>
+          <a:p>
+            <a:pPr algn="l"/>
+            <a:r>
+              <a:rPr sz="1200" b="1" i="0">
+                <a:solidFill>
+                  <a:srgbClr val="F5C842"/>
+                </a:solidFill>
+              </a:rPr>
+              <a:t>💰  80% Lower Cost</a:t>
+            </a:r>
+          </a:p>
+        </p:txBody>
+      </p:sp>
+      <p:sp>
+        <p:nvSpPr>
+          <p:cNvPr id="25" name="TextBox 24"/>
+          <p:cNvSpPr txBox="1"/>
+          <p:nvPr/>
+        </p:nvSpPr>
+        <p:spPr>
+          <a:xfrm>
+            <a:off x="3246120" y="1993392"/>
+            <a:ext cx="3931920" cy="438912"/>
+          </a:xfrm>
+          <a:prstGeom prst="rect">
+            <a:avLst/>
+          </a:prstGeom>
+          <a:noFill/>
+        </p:spPr>
+        <p:txBody>
+          <a:bodyPr wrap="square">
+            <a:spAutoFit/>
+          </a:bodyPr>
+          <a:lstStyle/>
+          <a:p>
+            <a:pPr algn="l"/>
+            <a:r>
+              <a:rPr sz="1050" b="0" i="0">
+                <a:solidFill>
+                  <a:srgbClr val="F0F0F0"/>
+                </a:solidFill>
+              </a:rPr>
+              <a:t>Developer salaries avg 5K–5K/yr
+vs. 20K–80K in the U.S. — same output</a:t>
+            </a:r>
+          </a:p>
+        </p:txBody>
+      </p:sp>
+      <p:sp>
+        <p:nvSpPr>
+          <p:cNvPr id="26" name="TextBox 25"/>
+          <p:cNvSpPr txBox="1"/>
+          <p:nvPr/>
+        </p:nvSpPr>
+        <p:spPr>
+          <a:xfrm>
+            <a:off x="3246120" y="2468879"/>
+            <a:ext cx="3931920" cy="274320"/>
+          </a:xfrm>
+          <a:prstGeom prst="rect">
+            <a:avLst/>
+          </a:prstGeom>
+          <a:noFill/>
+        </p:spPr>
+        <p:txBody>
+          <a:bodyPr wrap="square">
+            <a:spAutoFit/>
+          </a:bodyPr>
+          <a:lstStyle/>
+          <a:p>
+            <a:pPr algn="l"/>
+            <a:r>
+              <a:rPr sz="1200" b="1" i="0">
+                <a:solidFill>
+                  <a:srgbClr val="F5C842"/>
+                </a:solidFill>
+              </a:rPr>
+              <a:t>🎓  High-Quality Talent</a:t>
+            </a:r>
+          </a:p>
+        </p:txBody>
+      </p:sp>
+      <p:sp>
+        <p:nvSpPr>
+          <p:cNvPr id="27" name="TextBox 26"/>
+          <p:cNvSpPr txBox="1"/>
+          <p:nvPr/>
+        </p:nvSpPr>
+        <p:spPr>
+          <a:xfrm>
+            <a:off x="3246120" y="2743199"/>
+            <a:ext cx="3931920" cy="438912"/>
+          </a:xfrm>
+          <a:prstGeom prst="rect">
+            <a:avLst/>
+          </a:prstGeom>
+          <a:noFill/>
+        </p:spPr>
+        <p:txBody>
+          <a:bodyPr wrap="square">
+            <a:spAutoFit/>
+          </a:bodyPr>
+          <a:lstStyle/>
+          <a:p>
+            <a:pPr algn="l"/>
+            <a:r>
+              <a:rPr sz="1050" b="0" i="0">
+                <a:solidFill>
+                  <a:srgbClr val="F0F0F0"/>
+                </a:solidFill>
+              </a:rPr>
+              <a:t>15,000+ software engineers in Colombo
+Strong university pipeline: University of Moratuwa
+ranked #1 engineering school in South Asia</a:t>
+            </a:r>
+          </a:p>
+        </p:txBody>
+      </p:sp>
+      <p:sp>
+        <p:nvSpPr>
+          <p:cNvPr id="28" name="TextBox 27"/>
+          <p:cNvSpPr txBox="1"/>
+          <p:nvPr/>
+        </p:nvSpPr>
+        <p:spPr>
+          <a:xfrm>
+            <a:off x="3246120" y="3218687"/>
+            <a:ext cx="3931920" cy="274320"/>
+          </a:xfrm>
+          <a:prstGeom prst="rect">
+            <a:avLst/>
+          </a:prstGeom>
+          <a:noFill/>
+        </p:spPr>
+        <p:txBody>
+          <a:bodyPr wrap="square">
+            <a:spAutoFit/>
+          </a:bodyPr>
+          <a:lstStyle/>
+          <a:p>
+            <a:pPr algn="l"/>
+            <a:r>
+              <a:rPr sz="1200" b="1" i="0">
+                <a:solidFill>
+                  <a:srgbClr val="F5C842"/>
+                </a:solidFill>
+              </a:rPr>
+              <a:t>🌐  English Proficiency</a:t>
+            </a:r>
+          </a:p>
+        </p:txBody>
+      </p:sp>
+      <p:sp>
+        <p:nvSpPr>
+          <p:cNvPr id="29" name="TextBox 28"/>
+          <p:cNvSpPr txBox="1"/>
+          <p:nvPr/>
+        </p:nvSpPr>
+        <p:spPr>
+          <a:xfrm>
+            <a:off x="3246120" y="3493007"/>
+            <a:ext cx="3931920" cy="438912"/>
+          </a:xfrm>
+          <a:prstGeom prst="rect">
+            <a:avLst/>
+          </a:prstGeom>
+          <a:noFill/>
+        </p:spPr>
+        <p:txBody>
+          <a:bodyPr wrap="square">
+            <a:spAutoFit/>
+          </a:bodyPr>
+          <a:lstStyle/>
+          <a:p>
+            <a:pPr algn="l"/>
+            <a:r>
+              <a:rPr sz="1050" b="0" i="0">
+                <a:solidFill>
+                  <a:srgbClr val="F0F0F0"/>
+                </a:solidFill>
+              </a:rPr>
+              <a:t>Sri Lanka ranks among top English-speaking
+nations in South Asia — seamless communication
+with U.S. headquarters and investors</a:t>
+            </a:r>
+          </a:p>
+        </p:txBody>
+      </p:sp>
+      <p:sp>
+        <p:nvSpPr>
+          <p:cNvPr id="30" name="TextBox 29"/>
+          <p:cNvSpPr txBox="1"/>
+          <p:nvPr/>
+        </p:nvSpPr>
+        <p:spPr>
+          <a:xfrm>
+            <a:off x="3246120" y="3968496"/>
+            <a:ext cx="3931920" cy="274320"/>
+          </a:xfrm>
+          <a:prstGeom prst="rect">
+            <a:avLst/>
+          </a:prstGeom>
+          <a:noFill/>
+        </p:spPr>
+        <p:txBody>
+          <a:bodyPr wrap="square">
+            <a:spAutoFit/>
+          </a:bodyPr>
+          <a:lstStyle/>
+          <a:p>
+            <a:pPr algn="l"/>
+            <a:r>
+              <a:rPr sz="1200" b="1" i="0">
+                <a:solidFill>
+                  <a:srgbClr val="F5C842"/>
+                </a:solidFill>
+              </a:rPr>
+              <a:t>⏰  Time Zone Advantage</a:t>
+            </a:r>
+          </a:p>
+        </p:txBody>
+      </p:sp>
+      <p:sp>
+        <p:nvSpPr>
+          <p:cNvPr id="31" name="TextBox 30"/>
+          <p:cNvSpPr txBox="1"/>
+          <p:nvPr/>
+        </p:nvSpPr>
+        <p:spPr>
+          <a:xfrm>
+            <a:off x="3246120" y="4242816"/>
+            <a:ext cx="3931920" cy="438912"/>
+          </a:xfrm>
+          <a:prstGeom prst="rect">
+            <a:avLst/>
+          </a:prstGeom>
+          <a:noFill/>
+        </p:spPr>
+        <p:txBody>
+          <a:bodyPr wrap="square">
+            <a:spAutoFit/>
+          </a:bodyPr>
+          <a:lstStyle/>
+          <a:p>
+            <a:pPr algn="l"/>
+            <a:r>
+              <a:rPr sz="1050" b="0" i="0">
+                <a:solidFill>
+                  <a:srgbClr val="F0F0F0"/>
+                </a:solidFill>
+              </a:rPr>
+              <a:t>UTC+5:30 — overlaps with U.S. East Coast
+mornings, enabling real-time collaboration
+during key business hours</a:t>
+            </a:r>
+          </a:p>
+        </p:txBody>
+      </p:sp>
+      <p:sp>
+        <p:nvSpPr>
+          <p:cNvPr id="32" name="TextBox 31"/>
+          <p:cNvSpPr txBox="1"/>
+          <p:nvPr/>
+        </p:nvSpPr>
+        <p:spPr>
+          <a:xfrm>
+            <a:off x="3246120" y="4718304"/>
+            <a:ext cx="3931920" cy="274320"/>
+          </a:xfrm>
+          <a:prstGeom prst="rect">
+            <a:avLst/>
+          </a:prstGeom>
+          <a:noFill/>
+        </p:spPr>
+        <p:txBody>
+          <a:bodyPr wrap="square">
+            <a:spAutoFit/>
+          </a:bodyPr>
+          <a:lstStyle/>
+          <a:p>
+            <a:pPr algn="l"/>
+            <a:r>
+              <a:rPr sz="1200" b="1" i="0">
+                <a:solidFill>
+                  <a:srgbClr val="F5C842"/>
+                </a:solidFill>
+              </a:rPr>
+              <a:t>📈  Emerging Tech Hub</a:t>
+            </a:r>
+          </a:p>
+        </p:txBody>
+      </p:sp>
+      <p:sp>
+        <p:nvSpPr>
+          <p:cNvPr id="33" name="TextBox 32"/>
+          <p:cNvSpPr txBox="1"/>
+          <p:nvPr/>
+        </p:nvSpPr>
+        <p:spPr>
+          <a:xfrm>
+            <a:off x="3246120" y="4992624"/>
+            <a:ext cx="3931920" cy="438912"/>
+          </a:xfrm>
+          <a:prstGeom prst="rect">
+            <a:avLst/>
+          </a:prstGeom>
+          <a:noFill/>
+        </p:spPr>
+        <p:txBody>
+          <a:bodyPr wrap="square">
+            <a:spAutoFit/>
+          </a:bodyPr>
+          <a:lstStyle/>
+          <a:p>
+            <a:pPr algn="l"/>
+            <a:r>
+              <a:rPr sz="1050" b="0" i="0">
+                <a:solidFill>
+                  <a:srgbClr val="F0F0F0"/>
+                </a:solidFill>
+              </a:rPr>
+              <a:t>Colombo named South Asia's next tech hub
+423+ active startups, growing IT export sector
+Government incentives for tech companies</a:t>
+            </a:r>
+          </a:p>
+        </p:txBody>
+      </p:sp>
+      <p:sp>
+        <p:nvSpPr>
+          <p:cNvPr id="34" name="TextBox 33"/>
+          <p:cNvSpPr txBox="1"/>
+          <p:nvPr/>
+        </p:nvSpPr>
+        <p:spPr>
+          <a:xfrm>
+            <a:off x="3246120" y="5468112"/>
+            <a:ext cx="3931920" cy="274320"/>
+          </a:xfrm>
+          <a:prstGeom prst="rect">
+            <a:avLst/>
+          </a:prstGeom>
+          <a:noFill/>
+        </p:spPr>
+        <p:txBody>
+          <a:bodyPr wrap="square">
+            <a:spAutoFit/>
+          </a:bodyPr>
+          <a:lstStyle/>
+          <a:p>
+            <a:pPr algn="l"/>
+            <a:r>
+              <a:rPr sz="1200" b="1" i="0">
+                <a:solidFill>
+                  <a:srgbClr val="F5C842"/>
+                </a:solidFill>
+              </a:rPr>
+              <a:t>✈️  Strategic Location</a:t>
+            </a:r>
+          </a:p>
+        </p:txBody>
+      </p:sp>
+      <p:sp>
+        <p:nvSpPr>
+          <p:cNvPr id="35" name="TextBox 34"/>
+          <p:cNvSpPr txBox="1"/>
+          <p:nvPr/>
+        </p:nvSpPr>
+        <p:spPr>
+          <a:xfrm>
+            <a:off x="3246120" y="5742432"/>
+            <a:ext cx="3931920" cy="438912"/>
+          </a:xfrm>
+          <a:prstGeom prst="rect">
+            <a:avLst/>
+          </a:prstGeom>
+          <a:noFill/>
+        </p:spPr>
+        <p:txBody>
+          <a:bodyPr wrap="square">
+            <a:spAutoFit/>
+          </a:bodyPr>
+          <a:lstStyle/>
+          <a:p>
+            <a:pPr algn="l"/>
+            <a:r>
+              <a:rPr sz="1050" b="0" i="0">
+                <a:solidFill>
+                  <a:srgbClr val="F0F0F0"/>
+                </a:solidFill>
+              </a:rPr>
+              <a:t>Gateway between South Asia, Southeast Asia
+and the Middle East — perfect for regional
+expansion in Sachi's growth markets</a:t>
+            </a:r>
+          </a:p>
+        </p:txBody>
+      </p:sp>
+      <p:sp>
+        <p:nvSpPr>
+          <p:cNvPr id="36" name="TextBox 35"/>
+          <p:cNvSpPr txBox="1"/>
+          <p:nvPr/>
+        </p:nvSpPr>
+        <p:spPr>
+          <a:xfrm>
+            <a:off x="7360920" y="1188720"/>
+            <a:ext cx="4480560" cy="347472"/>
+          </a:xfrm>
+          <a:prstGeom prst="rect">
+            <a:avLst/>
+          </a:prstGeom>
+          <a:noFill/>
+        </p:spPr>
+        <p:txBody>
+          <a:bodyPr wrap="square">
+            <a:spAutoFit/>
+          </a:bodyPr>
+          <a:lstStyle/>
+          <a:p>
+            <a:pPr algn="l"/>
+            <a:r>
+              <a:rPr sz="1300" b="1" i="0">
+                <a:solidFill>
+                  <a:srgbClr val="FF6B6B"/>
+                </a:solidFill>
+              </a:rPr>
+              <a:t>🏢  OFFICE LOCATIONS</a:t>
+            </a:r>
+          </a:p>
+        </p:txBody>
+      </p:sp>
+      <p:sp>
+        <p:nvSpPr>
+          <p:cNvPr id="37" name="Rectangle 36"/>
+          <p:cNvSpPr/>
+          <p:nvPr/>
+        </p:nvSpPr>
+        <p:spPr>
+          <a:xfrm>
+            <a:off x="7360920" y="1572768"/>
+            <a:ext cx="4480560" cy="22860"/>
+          </a:xfrm>
+          <a:prstGeom prst="rect">
+            <a:avLst/>
+          </a:prstGeom>
+          <a:solidFill>
+            <a:srgbClr val="FF6B6B"/>
+          </a:solidFill>
+          <a:ln>
+            <a:noFill/>
+          </a:ln>
+        </p:spPr>
+        <p:style>
+          <a:lnRef idx="1">
+            <a:schemeClr val="accent1"/>
+          </a:lnRef>
+          <a:fillRef idx="3">
+            <a:schemeClr val="accent1"/>
+          </a:fillRef>
+          <a:effectRef idx="2">
+            <a:schemeClr val="accent1"/>
+          </a:effectRef>
+          <a:fontRef idx="minor">
+            <a:schemeClr val="lt1"/>
+          </a:fontRef>
+        </p:style>
+        <p:txBody>
+          <a:bodyPr rtlCol="0" anchor="ctr"/>
+          <a:lstStyle/>
+          <a:p>
+            <a:pPr algn="ctr"/>
+          </a:p>
+        </p:txBody>
+      </p:sp>
+      <p:sp>
+        <p:nvSpPr>
+          <p:cNvPr id="38" name="Rectangle 37"/>
+          <p:cNvSpPr/>
+          <p:nvPr/>
+        </p:nvSpPr>
+        <p:spPr>
+          <a:xfrm>
+            <a:off x="7360920" y="1719072"/>
+            <a:ext cx="4480560" cy="1024128"/>
+          </a:xfrm>
+          <a:prstGeom prst="rect">
+            <a:avLst/>
+          </a:prstGeom>
+          <a:solidFill>
+            <a:srgbClr val="161830"/>
+          </a:solidFill>
+          <a:ln w="15240">
+            <a:solidFill>
+              <a:srgbClr val="F5C842"/>
+            </a:solidFill>
+          </a:ln>
+        </p:spPr>
+        <p:style>
+          <a:lnRef idx="1">
+            <a:schemeClr val="accent1"/>
+          </a:lnRef>
+          <a:fillRef idx="3">
+            <a:schemeClr val="accent1"/>
+          </a:fillRef>
+          <a:effectRef idx="2">
+            <a:schemeClr val="accent1"/>
+          </a:effectRef>
+          <a:fontRef idx="minor">
+            <a:schemeClr val="lt1"/>
+          </a:fontRef>
+        </p:style>
+        <p:txBody>
+          <a:bodyPr rtlCol="0" anchor="ctr"/>
+          <a:lstStyle/>
+          <a:p>
+            <a:pPr algn="ctr"/>
+          </a:p>
+        </p:txBody>
+      </p:sp>
+      <p:sp>
+        <p:nvSpPr>
+          <p:cNvPr id="39" name="TextBox 38"/>
+          <p:cNvSpPr txBox="1"/>
+          <p:nvPr/>
+        </p:nvSpPr>
+        <p:spPr>
+          <a:xfrm>
+            <a:off x="7479792" y="1783080"/>
+            <a:ext cx="4206240" cy="274320"/>
+          </a:xfrm>
+          <a:prstGeom prst="rect">
+            <a:avLst/>
+          </a:prstGeom>
+          <a:noFill/>
+        </p:spPr>
+        <p:txBody>
+          <a:bodyPr wrap="square">
+            <a:spAutoFit/>
+          </a:bodyPr>
+          <a:lstStyle/>
+          <a:p>
+            <a:pPr algn="l"/>
+            <a:r>
+              <a:rPr sz="1200" b="1" i="0">
+                <a:solidFill>
+                  <a:srgbClr val="F5C842"/>
+                </a:solidFill>
+              </a:rPr>
+              <a:t>📍 World Trade Centre</a:t>
+            </a:r>
+          </a:p>
+        </p:txBody>
+      </p:sp>
+      <p:sp>
+        <p:nvSpPr>
+          <p:cNvPr id="40" name="TextBox 39"/>
+          <p:cNvSpPr txBox="1"/>
+          <p:nvPr/>
+        </p:nvSpPr>
+        <p:spPr>
+          <a:xfrm>
+            <a:off x="7479792" y="2039112"/>
+            <a:ext cx="4206240" cy="228600"/>
+          </a:xfrm>
+          <a:prstGeom prst="rect">
+            <a:avLst/>
+          </a:prstGeom>
+          <a:noFill/>
+        </p:spPr>
+        <p:txBody>
+          <a:bodyPr wrap="square">
+            <a:spAutoFit/>
+          </a:bodyPr>
+          <a:lstStyle/>
+          <a:p>
+            <a:pPr algn="l"/>
+            <a:r>
+              <a:rPr sz="1000" b="0" i="1">
+                <a:solidFill>
+                  <a:srgbClr val="CCCCCC"/>
+                </a:solidFill>
+              </a:rPr>
+              <a:t>Colombo 1 — Echelon Square</a:t>
+            </a:r>
+          </a:p>
+        </p:txBody>
+      </p:sp>
+      <p:sp>
+        <p:nvSpPr>
+          <p:cNvPr id="41" name="TextBox 40"/>
+          <p:cNvSpPr txBox="1"/>
+          <p:nvPr/>
+        </p:nvSpPr>
+        <p:spPr>
+          <a:xfrm>
+            <a:off x="7479792" y="2249424"/>
+            <a:ext cx="4206240" cy="457200"/>
+          </a:xfrm>
+          <a:prstGeom prst="rect">
+            <a:avLst/>
+          </a:prstGeom>
+          <a:noFill/>
+        </p:spPr>
+        <p:txBody>
+          <a:bodyPr wrap="square">
+            <a:spAutoFit/>
+          </a:bodyPr>
+          <a:lstStyle/>
+          <a:p>
+            <a:pPr algn="l"/>
+            <a:r>
+              <a:rPr sz="1000" b="0" i="0">
+                <a:solidFill>
+                  <a:srgbClr val="F0F0F0"/>
+                </a:solidFill>
+              </a:rPr>
+              <a:t>Grade A corporate tower. Regus serviced
+offices from 00/mo. Prestige address.
+Ideal for investor meetings &amp; HQ branding.</a:t>
+            </a:r>
+          </a:p>
+        </p:txBody>
+      </p:sp>
+      <p:sp>
+        <p:nvSpPr>
+          <p:cNvPr id="42" name="Rectangle 41"/>
+          <p:cNvSpPr/>
+          <p:nvPr/>
+        </p:nvSpPr>
+        <p:spPr>
+          <a:xfrm>
+            <a:off x="7360920" y="2834639"/>
+            <a:ext cx="4480560" cy="1024128"/>
+          </a:xfrm>
+          <a:prstGeom prst="rect">
+            <a:avLst/>
+          </a:prstGeom>
+          <a:solidFill>
+            <a:srgbClr val="161830"/>
+          </a:solidFill>
+          <a:ln w="15240">
+            <a:solidFill>
+              <a:srgbClr val="FF6B6B"/>
+            </a:solidFill>
+          </a:ln>
+        </p:spPr>
+        <p:style>
+          <a:lnRef idx="1">
+            <a:schemeClr val="accent1"/>
+          </a:lnRef>
+          <a:fillRef idx="3">
+            <a:schemeClr val="accent1"/>
+          </a:fillRef>
+          <a:effectRef idx="2">
+            <a:schemeClr val="accent1"/>
+          </a:effectRef>
+          <a:fontRef idx="minor">
+            <a:schemeClr val="lt1"/>
+          </a:fontRef>
+        </p:style>
+        <p:txBody>
+          <a:bodyPr rtlCol="0" anchor="ctr"/>
+          <a:lstStyle/>
+          <a:p>
+            <a:pPr algn="ctr"/>
+          </a:p>
+        </p:txBody>
+      </p:sp>
+      <p:sp>
+        <p:nvSpPr>
+          <p:cNvPr id="43" name="TextBox 42"/>
+          <p:cNvSpPr txBox="1"/>
+          <p:nvPr/>
+        </p:nvSpPr>
+        <p:spPr>
+          <a:xfrm>
+            <a:off x="7479792" y="2898647"/>
+            <a:ext cx="4206240" cy="274320"/>
+          </a:xfrm>
+          <a:prstGeom prst="rect">
+            <a:avLst/>
+          </a:prstGeom>
+          <a:noFill/>
+        </p:spPr>
+        <p:txBody>
+          <a:bodyPr wrap="square">
+            <a:spAutoFit/>
+          </a:bodyPr>
+          <a:lstStyle/>
+          <a:p>
+            <a:pPr algn="l"/>
+            <a:r>
+              <a:rPr sz="1200" b="1" i="0">
+                <a:solidFill>
+                  <a:srgbClr val="FF6B6B"/>
+                </a:solidFill>
+              </a:rPr>
+              <a:t>📍 Colombo 3 — Colpetty</a:t>
+            </a:r>
+          </a:p>
+        </p:txBody>
+      </p:sp>
+      <p:sp>
+        <p:nvSpPr>
+          <p:cNvPr id="44" name="TextBox 43"/>
+          <p:cNvSpPr txBox="1"/>
+          <p:nvPr/>
+        </p:nvSpPr>
+        <p:spPr>
+          <a:xfrm>
+            <a:off x="7479792" y="3154679"/>
+            <a:ext cx="4206240" cy="228600"/>
+          </a:xfrm>
+          <a:prstGeom prst="rect">
+            <a:avLst/>
+          </a:prstGeom>
+          <a:noFill/>
+        </p:spPr>
+        <p:txBody>
+          <a:bodyPr wrap="square">
+            <a:spAutoFit/>
+          </a:bodyPr>
+          <a:lstStyle/>
+          <a:p>
+            <a:pPr algn="l"/>
+            <a:r>
+              <a:rPr sz="1000" b="0" i="1">
+                <a:solidFill>
+                  <a:srgbClr val="CCCCCC"/>
+                </a:solidFill>
+              </a:rPr>
+              <a:t>Prime Tech &amp; Business District</a:t>
+            </a:r>
+          </a:p>
+        </p:txBody>
+      </p:sp>
+      <p:sp>
+        <p:nvSpPr>
+          <p:cNvPr id="45" name="TextBox 44"/>
+          <p:cNvSpPr txBox="1"/>
+          <p:nvPr/>
+        </p:nvSpPr>
+        <p:spPr>
+          <a:xfrm>
+            <a:off x="7479792" y="3364991"/>
+            <a:ext cx="4206240" cy="457200"/>
+          </a:xfrm>
+          <a:prstGeom prst="rect">
+            <a:avLst/>
+          </a:prstGeom>
+          <a:noFill/>
+        </p:spPr>
+        <p:txBody>
+          <a:bodyPr wrap="square">
+            <a:spAutoFit/>
+          </a:bodyPr>
+          <a:lstStyle/>
+          <a:p>
+            <a:pPr algn="l"/>
+            <a:r>
+              <a:rPr sz="1000" b="0" i="0">
+                <a:solidFill>
+                  <a:srgbClr val="F0F0F0"/>
+                </a:solidFill>
+              </a:rPr>
+              <a:t>Grade A space: .70/sqft/mo.
+2,000 sqft fits 15–20 desks = ~,400/mo.
+High-speed fiber, parking, 24/7 access.</a:t>
+            </a:r>
+          </a:p>
+        </p:txBody>
+      </p:sp>
+      <p:sp>
+        <p:nvSpPr>
+          <p:cNvPr id="46" name="Rectangle 45"/>
+          <p:cNvSpPr/>
+          <p:nvPr/>
+        </p:nvSpPr>
+        <p:spPr>
+          <a:xfrm>
+            <a:off x="7360920" y="3950208"/>
+            <a:ext cx="4480560" cy="1024128"/>
+          </a:xfrm>
+          <a:prstGeom prst="rect">
+            <a:avLst/>
+          </a:prstGeom>
+          <a:solidFill>
+            <a:srgbClr val="161830"/>
+          </a:solidFill>
+          <a:ln w="15240">
+            <a:solidFill>
+              <a:srgbClr val="00D4C8"/>
+            </a:solidFill>
+          </a:ln>
+        </p:spPr>
+        <p:style>
+          <a:lnRef idx="1">
+            <a:schemeClr val="accent1"/>
+          </a:lnRef>
+          <a:fillRef idx="3">
+            <a:schemeClr val="accent1"/>
+          </a:fillRef>
+          <a:effectRef idx="2">
+            <a:schemeClr val="accent1"/>
+          </a:effectRef>
+          <a:fontRef idx="minor">
+            <a:schemeClr val="lt1"/>
+          </a:fontRef>
+        </p:style>
+        <p:txBody>
+          <a:bodyPr rtlCol="0" anchor="ctr"/>
+          <a:lstStyle/>
+          <a:p>
+            <a:pPr algn="ctr"/>
+          </a:p>
+        </p:txBody>
+      </p:sp>
+      <p:sp>
+        <p:nvSpPr>
+          <p:cNvPr id="47" name="TextBox 46"/>
+          <p:cNvSpPr txBox="1"/>
+          <p:nvPr/>
+        </p:nvSpPr>
+        <p:spPr>
+          <a:xfrm>
+            <a:off x="7479792" y="4014216"/>
+            <a:ext cx="4206240" cy="274320"/>
+          </a:xfrm>
+          <a:prstGeom prst="rect">
+            <a:avLst/>
+          </a:prstGeom>
+          <a:noFill/>
+        </p:spPr>
+        <p:txBody>
+          <a:bodyPr wrap="square">
+            <a:spAutoFit/>
+          </a:bodyPr>
+          <a:lstStyle/>
+          <a:p>
+            <a:pPr algn="l"/>
+            <a:r>
+              <a:rPr sz="1200" b="1" i="0">
+                <a:solidFill>
+                  <a:srgbClr val="00D4C8"/>
+                </a:solidFill>
+              </a:rPr>
+              <a:t>📍 Colombo 7 — Cinnamon Gardens</a:t>
+            </a:r>
+          </a:p>
+        </p:txBody>
+      </p:sp>
+      <p:sp>
+        <p:nvSpPr>
+          <p:cNvPr id="48" name="TextBox 47"/>
+          <p:cNvSpPr txBox="1"/>
+          <p:nvPr/>
+        </p:nvSpPr>
+        <p:spPr>
+          <a:xfrm>
+            <a:off x="7479792" y="4270248"/>
+            <a:ext cx="4206240" cy="228600"/>
+          </a:xfrm>
+          <a:prstGeom prst="rect">
+            <a:avLst/>
+          </a:prstGeom>
+          <a:noFill/>
+        </p:spPr>
+        <p:txBody>
+          <a:bodyPr wrap="square">
+            <a:spAutoFit/>
+          </a:bodyPr>
+          <a:lstStyle/>
+          <a:p>
+            <a:pPr algn="l"/>
+            <a:r>
+              <a:rPr sz="1000" b="0" i="1">
+                <a:solidFill>
+                  <a:srgbClr val="CCCCCC"/>
+                </a:solidFill>
+              </a:rPr>
+              <a:t>Premium Residential-Commercial</a:t>
+            </a:r>
+          </a:p>
+        </p:txBody>
+      </p:sp>
+      <p:sp>
+        <p:nvSpPr>
+          <p:cNvPr id="49" name="TextBox 48"/>
+          <p:cNvSpPr txBox="1"/>
+          <p:nvPr/>
+        </p:nvSpPr>
+        <p:spPr>
+          <a:xfrm>
+            <a:off x="7479792" y="4480560"/>
+            <a:ext cx="4206240" cy="457200"/>
+          </a:xfrm>
+          <a:prstGeom prst="rect">
+            <a:avLst/>
+          </a:prstGeom>
+          <a:noFill/>
+        </p:spPr>
+        <p:txBody>
+          <a:bodyPr wrap="square">
+            <a:spAutoFit/>
+          </a:bodyPr>
+          <a:lstStyle/>
+          <a:p>
+            <a:pPr algn="l"/>
+            <a:r>
+              <a:rPr sz="1000" b="0" i="0">
+                <a:solidFill>
+                  <a:srgbClr val="F0F0F0"/>
+                </a:solidFill>
+              </a:rPr>
+              <a:t>Boutique corporate offices ,000–,000/mo.
+Quiet, secure, prestigious neighborhood.
+Popular with tech firms and embassies.</a:t>
+            </a:r>
+          </a:p>
+        </p:txBody>
+      </p:sp>
+      <p:sp>
+        <p:nvSpPr>
+          <p:cNvPr id="50" name="Rectangle 49"/>
+          <p:cNvSpPr/>
+          <p:nvPr/>
+        </p:nvSpPr>
+        <p:spPr>
+          <a:xfrm>
+            <a:off x="7360920" y="5065776"/>
+            <a:ext cx="4480560" cy="1024128"/>
+          </a:xfrm>
+          <a:prstGeom prst="rect">
+            <a:avLst/>
+          </a:prstGeom>
+          <a:solidFill>
+            <a:srgbClr val="161830"/>
+          </a:solidFill>
+          <a:ln w="15240">
+            <a:solidFill>
+              <a:srgbClr val="A0FFB0"/>
+            </a:solidFill>
+          </a:ln>
+        </p:spPr>
+        <p:style>
+          <a:lnRef idx="1">
+            <a:schemeClr val="accent1"/>
+          </a:lnRef>
+          <a:fillRef idx="3">
+            <a:schemeClr val="accent1"/>
+          </a:fillRef>
+          <a:effectRef idx="2">
+            <a:schemeClr val="accent1"/>
+          </a:effectRef>
+          <a:fontRef idx="minor">
+            <a:schemeClr val="lt1"/>
+          </a:fontRef>
+        </p:style>
+        <p:txBody>
+          <a:bodyPr rtlCol="0" anchor="ctr"/>
+          <a:lstStyle/>
+          <a:p>
+            <a:pPr algn="ctr"/>
+          </a:p>
+        </p:txBody>
+      </p:sp>
+      <p:sp>
+        <p:nvSpPr>
+          <p:cNvPr id="51" name="TextBox 50"/>
+          <p:cNvSpPr txBox="1"/>
+          <p:nvPr/>
+        </p:nvSpPr>
+        <p:spPr>
+          <a:xfrm>
+            <a:off x="7479792" y="5129784"/>
+            <a:ext cx="4206240" cy="274320"/>
+          </a:xfrm>
+          <a:prstGeom prst="rect">
+            <a:avLst/>
+          </a:prstGeom>
+          <a:noFill/>
+        </p:spPr>
+        <p:txBody>
+          <a:bodyPr wrap="square">
+            <a:spAutoFit/>
+          </a:bodyPr>
+          <a:lstStyle/>
+          <a:p>
+            <a:pPr algn="l"/>
+            <a:r>
+              <a:rPr sz="1200" b="1" i="0">
+                <a:solidFill>
+                  <a:srgbClr val="A0FFB0"/>
+                </a:solidFill>
+              </a:rPr>
+              <a:t>📍 Rajagiriya / Nawala</a:t>
+            </a:r>
+          </a:p>
+        </p:txBody>
+      </p:sp>
+      <p:sp>
+        <p:nvSpPr>
+          <p:cNvPr id="52" name="TextBox 51"/>
+          <p:cNvSpPr txBox="1"/>
+          <p:nvPr/>
+        </p:nvSpPr>
+        <p:spPr>
+          <a:xfrm>
+            <a:off x="7479792" y="5385816"/>
+            <a:ext cx="4206240" cy="228600"/>
+          </a:xfrm>
+          <a:prstGeom prst="rect">
+            <a:avLst/>
+          </a:prstGeom>
+          <a:noFill/>
+        </p:spPr>
+        <p:txBody>
+          <a:bodyPr wrap="square">
+            <a:spAutoFit/>
+          </a:bodyPr>
+          <a:lstStyle/>
+          <a:p>
+            <a:pPr algn="l"/>
+            <a:r>
+              <a:rPr sz="1000" b="0" i="1">
+                <a:solidFill>
+                  <a:srgbClr val="CCCCCC"/>
+                </a:solidFill>
+              </a:rPr>
+              <a:t>Emerging Tech Corridor</a:t>
+            </a:r>
+          </a:p>
+        </p:txBody>
+      </p:sp>
+      <p:sp>
+        <p:nvSpPr>
+          <p:cNvPr id="53" name="TextBox 52"/>
+          <p:cNvSpPr txBox="1"/>
+          <p:nvPr/>
+        </p:nvSpPr>
+        <p:spPr>
+          <a:xfrm>
+            <a:off x="7479792" y="5596128"/>
+            <a:ext cx="4206240" cy="457200"/>
+          </a:xfrm>
+          <a:prstGeom prst="rect">
+            <a:avLst/>
+          </a:prstGeom>
+          <a:noFill/>
+        </p:spPr>
+        <p:txBody>
+          <a:bodyPr wrap="square">
+            <a:spAutoFit/>
+          </a:bodyPr>
+          <a:lstStyle/>
+          <a:p>
+            <a:pPr algn="l"/>
+            <a:r>
+              <a:rPr sz="1000" b="0" i="0">
+                <a:solidFill>
+                  <a:srgbClr val="F0F0F0"/>
+                </a:solidFill>
+              </a:rPr>
+              <a:t>Most affordable: ,200–,500/mo.
+Close to University of Moratuwa talent.
+Growing startup ecosystem nearby.</a:t>
+            </a:r>
+          </a:p>
+        </p:txBody>
+      </p:sp>
+      <p:sp>
+        <p:nvSpPr>
+          <p:cNvPr id="54" name="Rectangle 53"/>
+          <p:cNvSpPr/>
+          <p:nvPr/>
+        </p:nvSpPr>
+        <p:spPr>
+          <a:xfrm>
+            <a:off x="640080" y="5989320"/>
+            <a:ext cx="10881360" cy="502920"/>
+          </a:xfrm>
+          <a:prstGeom prst="rect">
+            <a:avLst/>
+          </a:prstGeom>
+          <a:solidFill>
+            <a:srgbClr val="161830"/>
+          </a:solidFill>
+          <a:ln w="10160">
+            <a:solidFill>
+              <a:srgbClr val="F5C842"/>
+            </a:solidFill>
+          </a:ln>
+        </p:spPr>
+        <p:style>
+          <a:lnRef idx="1">
+            <a:schemeClr val="accent1"/>
+          </a:lnRef>
+          <a:fillRef idx="3">
+            <a:schemeClr val="accent1"/>
+          </a:fillRef>
+          <a:effectRef idx="2">
+            <a:schemeClr val="accent1"/>
+          </a:effectRef>
+          <a:fontRef idx="minor">
+            <a:schemeClr val="lt1"/>
+          </a:fontRef>
+        </p:style>
+        <p:txBody>
+          <a:bodyPr rtlCol="0" anchor="ctr"/>
+          <a:lstStyle/>
+          <a:p>
+            <a:pPr algn="ctr"/>
+          </a:p>
+        </p:txBody>
+      </p:sp>
+      <p:sp>
+        <p:nvSpPr>
+          <p:cNvPr id="55" name="TextBox 54"/>
+          <p:cNvSpPr txBox="1"/>
+          <p:nvPr/>
+        </p:nvSpPr>
+        <p:spPr>
+          <a:xfrm>
+            <a:off x="822960" y="6035040"/>
+            <a:ext cx="10515600" cy="438912"/>
+          </a:xfrm>
+          <a:prstGeom prst="rect">
+            <a:avLst/>
+          </a:prstGeom>
+          <a:noFill/>
+        </p:spPr>
+        <p:txBody>
+          <a:bodyPr wrap="square">
+            <a:spAutoFit/>
+          </a:bodyPr>
+          <a:lstStyle/>
+          <a:p>
+            <a:pPr algn="l"/>
+            <a:r>
+              <a:rPr sz="1150" b="0" i="0">
+                <a:solidFill>
+                  <a:srgbClr val="F0F0F0"/>
+                </a:solidFill>
+              </a:rPr>
+              <a:t>💡  Recommendation: Colombo 3 (Colpetty) — Grade A office, ~2,000 sqft, fits 15–20 developers, ,400/month. Estimated 24-month lease + fit-out = 00,000 (included in Use of Funds).</a:t>
+            </a:r>
+          </a:p>
+        </p:txBody>
+      </p:sp>
+      <p:pic>
+        <p:nvPicPr>
+          <p:cNvPr id="56" name="Picture 55" descr="image.png"/>
           <p:cNvPicPr>
             <a:picLocks noChangeAspect="1"/>
           </p:cNvPicPr>

--- a/Sachi_Stream_Investor_Deck_Seed_Round_May2026.pptx
+++ b/Sachi_Stream_Investor_Deck_Seed_Round_May2026.pptx
@@ -3603,7 +3603,7 @@
       </p:sp>
       <p:pic>
         <p:nvPicPr>
-          <p:cNvPr id="15" name="Picture 14" descr="sachi_logo_transparent.png"/>
+          <p:cNvPr id="15" name="Picture 14" descr="image.png"/>
           <p:cNvPicPr>
             <a:picLocks noChangeAspect="1"/>
           </p:cNvPicPr>
@@ -5662,7 +5662,7 @@
         </p:blipFill>
         <p:spPr>
           <a:xfrm>
-            <a:off x="11430000" y="109728"/>
+            <a:off x="11430000" y="91440"/>
             <a:ext cx="594360" cy="594360"/>
           </a:xfrm>
           <a:prstGeom prst="rect">
@@ -6951,7 +6951,7 @@
       </p:sp>
       <p:pic>
         <p:nvPicPr>
-          <p:cNvPr id="38" name="Picture 37" descr="sachi_logo_transparent.png"/>
+          <p:cNvPr id="38" name="Picture 37" descr="image.png"/>
           <p:cNvPicPr>
             <a:picLocks noChangeAspect="1"/>
           </p:cNvPicPr>
@@ -6965,7 +6965,7 @@
         </p:blipFill>
         <p:spPr>
           <a:xfrm>
-            <a:off x="11430000" y="109728"/>
+            <a:off x="11430000" y="91440"/>
             <a:ext cx="594360" cy="594360"/>
           </a:xfrm>
           <a:prstGeom prst="rect">
@@ -7042,8 +7042,8 @@
         </p:nvSpPr>
         <p:spPr>
           <a:xfrm>
-            <a:off x="0" y="6309360"/>
-            <a:ext cx="12188952" cy="64008"/>
+            <a:off x="0" y="0"/>
+            <a:ext cx="12188952" cy="45720"/>
           </a:xfrm>
           <a:prstGeom prst="rect">
             <a:avLst/>
@@ -7085,8 +7085,8 @@
         </p:nvSpPr>
         <p:spPr>
           <a:xfrm>
-            <a:off x="457200" y="1280160"/>
-            <a:ext cx="109728" cy="4114800"/>
+            <a:off x="0" y="6812280"/>
+            <a:ext cx="12188952" cy="45720"/>
           </a:xfrm>
           <a:prstGeom prst="rect">
             <a:avLst/>
@@ -7122,48 +7122,14 @@
       </p:sp>
       <p:sp>
         <p:nvSpPr>
-          <p:cNvPr id="5" name="TextBox 4"/>
-          <p:cNvSpPr txBox="1"/>
-          <p:nvPr/>
-        </p:nvSpPr>
-        <p:spPr>
-          <a:xfrm>
-            <a:off x="777240" y="274320"/>
-            <a:ext cx="10058400" cy="594360"/>
-          </a:xfrm>
-          <a:prstGeom prst="rect">
-            <a:avLst/>
-          </a:prstGeom>
-          <a:noFill/>
-        </p:spPr>
-        <p:txBody>
-          <a:bodyPr wrap="square">
-            <a:spAutoFit/>
-          </a:bodyPr>
-          <a:lstStyle/>
-          <a:p>
-            <a:pPr algn="l"/>
-            <a:r>
-              <a:rPr sz="3600" b="1" i="0">
-                <a:solidFill>
-                  <a:srgbClr val="F5C842"/>
-                </a:solidFill>
-              </a:rPr>
-              <a:t>Use of Funds — $5M Seed Round</a:t>
-            </a:r>
-          </a:p>
-        </p:txBody>
-      </p:sp>
-      <p:sp>
-        <p:nvSpPr>
-          <p:cNvPr id="6" name="Rectangle 5"/>
+          <p:cNvPr id="5" name="Rectangle 4"/>
           <p:cNvSpPr/>
           <p:nvPr/>
         </p:nvSpPr>
         <p:spPr>
           <a:xfrm>
-            <a:off x="640080" y="1005840"/>
-            <a:ext cx="10881360" cy="27432"/>
+            <a:off x="0" y="6309360"/>
+            <a:ext cx="12188952" cy="64008"/>
           </a:xfrm>
           <a:prstGeom prst="rect">
             <a:avLst/>
@@ -7199,14 +7165,134 @@
       </p:sp>
       <p:sp>
         <p:nvSpPr>
+          <p:cNvPr id="6" name="Rectangle 5"/>
+          <p:cNvSpPr/>
+          <p:nvPr/>
+        </p:nvSpPr>
+        <p:spPr>
+          <a:xfrm>
+            <a:off x="457200" y="1280160"/>
+            <a:ext cx="109728" cy="4389120"/>
+          </a:xfrm>
+          <a:prstGeom prst="rect">
+            <a:avLst/>
+          </a:prstGeom>
+          <a:solidFill>
+            <a:srgbClr val="F5C842"/>
+          </a:solidFill>
+          <a:ln>
+            <a:noFill/>
+          </a:ln>
+        </p:spPr>
+        <p:style>
+          <a:lnRef idx="1">
+            <a:schemeClr val="accent1"/>
+          </a:lnRef>
+          <a:fillRef idx="3">
+            <a:schemeClr val="accent1"/>
+          </a:fillRef>
+          <a:effectRef idx="2">
+            <a:schemeClr val="accent1"/>
+          </a:effectRef>
+          <a:fontRef idx="minor">
+            <a:schemeClr val="lt1"/>
+          </a:fontRef>
+        </p:style>
+        <p:txBody>
+          <a:bodyPr rtlCol="0" anchor="ctr"/>
+          <a:lstStyle/>
+          <a:p>
+            <a:pPr algn="ctr"/>
+          </a:p>
+        </p:txBody>
+      </p:sp>
+      <p:sp>
+        <p:nvSpPr>
           <p:cNvPr id="7" name="Rectangle 6"/>
           <p:cNvSpPr/>
           <p:nvPr/>
         </p:nvSpPr>
         <p:spPr>
           <a:xfrm>
-            <a:off x="640080" y="1581912"/>
-            <a:ext cx="7772400" cy="320040"/>
+            <a:off x="640080" y="987552"/>
+            <a:ext cx="10881360" cy="27432"/>
+          </a:xfrm>
+          <a:prstGeom prst="rect">
+            <a:avLst/>
+          </a:prstGeom>
+          <a:solidFill>
+            <a:srgbClr val="F5C842"/>
+          </a:solidFill>
+          <a:ln>
+            <a:noFill/>
+          </a:ln>
+        </p:spPr>
+        <p:style>
+          <a:lnRef idx="1">
+            <a:schemeClr val="accent1"/>
+          </a:lnRef>
+          <a:fillRef idx="3">
+            <a:schemeClr val="accent1"/>
+          </a:fillRef>
+          <a:effectRef idx="2">
+            <a:schemeClr val="accent1"/>
+          </a:effectRef>
+          <a:fontRef idx="minor">
+            <a:schemeClr val="lt1"/>
+          </a:fontRef>
+        </p:style>
+        <p:txBody>
+          <a:bodyPr rtlCol="0" anchor="ctr"/>
+          <a:lstStyle/>
+          <a:p>
+            <a:pPr algn="ctr"/>
+          </a:p>
+        </p:txBody>
+      </p:sp>
+      <p:sp>
+        <p:nvSpPr>
+          <p:cNvPr id="9" name="TextBox 8"/>
+          <p:cNvSpPr txBox="1"/>
+          <p:nvPr/>
+        </p:nvSpPr>
+        <p:spPr>
+          <a:xfrm>
+            <a:off x="777240" y="201168"/>
+            <a:ext cx="9144000" cy="640080"/>
+          </a:xfrm>
+          <a:prstGeom prst="rect">
+            <a:avLst/>
+          </a:prstGeom>
+          <a:noFill/>
+        </p:spPr>
+        <p:txBody>
+          <a:bodyPr wrap="square">
+            <a:spAutoFit/>
+          </a:bodyPr>
+          <a:lstStyle/>
+          <a:p>
+            <a:pPr algn="l"/>
+            <a:r>
+              <a:rPr sz="3400" b="1" i="0">
+                <a:solidFill>
+                  <a:srgbClr val="F5C842"/>
+                </a:solidFill>
+              </a:rPr>
+              <a:t>Use of Funds  -  USD 5M Seed Round</a:t>
+            </a:r>
+          </a:p>
+        </p:txBody>
+      </p:sp>
+      <p:sp>
+        <p:nvSpPr>
+          <p:cNvPr id="10" name="Rectangle 9"/>
+          <p:cNvSpPr/>
+          <p:nvPr/>
+        </p:nvSpPr>
+        <p:spPr>
+          <a:xfrm>
+            <a:off x="640080" y="1481328"/>
+            <a:ext cx="7132320" cy="237744"/>
           </a:xfrm>
           <a:prstGeom prst="rect">
             <a:avLst/>
@@ -7242,14 +7328,14 @@
       </p:sp>
       <p:sp>
         <p:nvSpPr>
-          <p:cNvPr id="8" name="Rectangle 7"/>
+          <p:cNvPr id="11" name="Rectangle 10"/>
           <p:cNvSpPr/>
           <p:nvPr/>
         </p:nvSpPr>
         <p:spPr>
           <a:xfrm>
-            <a:off x="640080" y="1581912"/>
-            <a:ext cx="3886200" cy="320040"/>
+            <a:off x="640080" y="1481328"/>
+            <a:ext cx="2424988" cy="237744"/>
           </a:xfrm>
           <a:prstGeom prst="rect">
             <a:avLst/>
@@ -7285,14 +7371,14 @@
       </p:sp>
       <p:sp>
         <p:nvSpPr>
-          <p:cNvPr id="9" name="TextBox 8"/>
-          <p:cNvSpPr txBox="1"/>
-          <p:nvPr/>
-        </p:nvSpPr>
-        <p:spPr>
-          <a:xfrm>
-            <a:off x="640080" y="1325880"/>
-            <a:ext cx="5029200" cy="292608"/>
+          <p:cNvPr id="12" name="TextBox 11"/>
+          <p:cNvSpPr txBox="1"/>
+          <p:nvPr/>
+        </p:nvSpPr>
+        <p:spPr>
+          <a:xfrm>
+            <a:off x="658368" y="1207008"/>
+            <a:ext cx="4754880" cy="274320"/>
           </a:xfrm>
           <a:prstGeom prst="rect">
             <a:avLst/>
@@ -7307,60 +7393,60 @@
           <a:p>
             <a:pPr algn="l"/>
             <a:r>
-              <a:rPr sz="1400" b="1" i="0">
+              <a:rPr sz="1200" b="1" i="0">
                 <a:solidFill>
                   <a:srgbClr val="F5C842"/>
                 </a:solidFill>
               </a:rPr>
-              <a:t>Infrastructure &amp; Bare Metal</a:t>
-            </a:r>
-          </a:p>
-        </p:txBody>
-      </p:sp>
-      <p:sp>
-        <p:nvSpPr>
-          <p:cNvPr id="10" name="TextBox 9"/>
-          <p:cNvSpPr txBox="1"/>
-          <p:nvPr/>
-        </p:nvSpPr>
-        <p:spPr>
-          <a:xfrm>
-            <a:off x="5760720" y="1325880"/>
-            <a:ext cx="2743200" cy="292608"/>
-          </a:xfrm>
-          <a:prstGeom prst="rect">
-            <a:avLst/>
-          </a:prstGeom>
-          <a:noFill/>
-        </p:spPr>
-        <p:txBody>
-          <a:bodyPr wrap="square">
-            <a:spAutoFit/>
-          </a:bodyPr>
-          <a:lstStyle/>
-          <a:p>
-            <a:pPr algn="r"/>
-            <a:r>
-              <a:rPr sz="1400" b="1" i="0">
+              <a:t>Infrastructure &amp; Bare Metal (Colombo)</a:t>
+            </a:r>
+          </a:p>
+        </p:txBody>
+      </p:sp>
+      <p:sp>
+        <p:nvSpPr>
+          <p:cNvPr id="13" name="TextBox 12"/>
+          <p:cNvSpPr txBox="1"/>
+          <p:nvPr/>
+        </p:nvSpPr>
+        <p:spPr>
+          <a:xfrm>
+            <a:off x="5212080" y="1207008"/>
+            <a:ext cx="2743200" cy="274320"/>
+          </a:xfrm>
+          <a:prstGeom prst="rect">
+            <a:avLst/>
+          </a:prstGeom>
+          <a:noFill/>
+        </p:spPr>
+        <p:txBody>
+          <a:bodyPr wrap="square">
+            <a:spAutoFit/>
+          </a:bodyPr>
+          <a:lstStyle/>
+          <a:p>
+            <a:pPr algn="l"/>
+            <a:r>
+              <a:rPr sz="1200" b="1" i="0">
                 <a:solidFill>
                   <a:srgbClr val="FFFFFF"/>
                 </a:solidFill>
               </a:rPr>
-              <a:t>$2,500,000  (50%)</a:t>
-            </a:r>
-          </a:p>
-        </p:txBody>
-      </p:sp>
-      <p:sp>
-        <p:nvSpPr>
-          <p:cNvPr id="11" name="TextBox 10"/>
-          <p:cNvSpPr txBox="1"/>
-          <p:nvPr/>
-        </p:nvSpPr>
-        <p:spPr>
-          <a:xfrm>
-            <a:off x="8549640" y="1399032"/>
-            <a:ext cx="3383280" cy="502920"/>
+              <a:t>  USD 1,700,000   (34%)</a:t>
+            </a:r>
+          </a:p>
+        </p:txBody>
+      </p:sp>
+      <p:sp>
+        <p:nvSpPr>
+          <p:cNvPr id="14" name="TextBox 13"/>
+          <p:cNvSpPr txBox="1"/>
+          <p:nvPr/>
+        </p:nvSpPr>
+        <p:spPr>
+          <a:xfrm>
+            <a:off x="8092440" y="1225296"/>
+            <a:ext cx="3931920" cy="457200"/>
           </a:xfrm>
           <a:prstGeom prst="rect">
             <a:avLst/>
@@ -7375,27 +7461,27 @@
           <a:p>
             <a:pPr algn="l"/>
             <a:r>
-              <a:rPr sz="1100" b="0" i="0">
+              <a:rPr sz="1000" b="0" i="0">
                 <a:solidFill>
                   <a:srgbClr val="CCCCCC"/>
                 </a:solidFill>
               </a:rPr>
-              <a:t>Colombo bare metal servers, switches, networking
-hardware, co-location facility setup, redundancy</a:t>
-            </a:r>
-          </a:p>
-        </p:txBody>
-      </p:sp>
-      <p:sp>
-        <p:nvSpPr>
-          <p:cNvPr id="12" name="Rectangle 11"/>
+              <a:t>Bare metal servers, switches, networking hardware
+Colombo co-location facility + redundancy build-out</a:t>
+            </a:r>
+          </a:p>
+        </p:txBody>
+      </p:sp>
+      <p:sp>
+        <p:nvSpPr>
+          <p:cNvPr id="15" name="Rectangle 14"/>
           <p:cNvSpPr/>
           <p:nvPr/>
         </p:nvSpPr>
         <p:spPr>
           <a:xfrm>
-            <a:off x="640080" y="2478023"/>
-            <a:ext cx="7772400" cy="320040"/>
+            <a:off x="640080" y="2157984"/>
+            <a:ext cx="7132320" cy="237744"/>
           </a:xfrm>
           <a:prstGeom prst="rect">
             <a:avLst/>
@@ -7431,14 +7517,14 @@
       </p:sp>
       <p:sp>
         <p:nvSpPr>
-          <p:cNvPr id="13" name="Rectangle 12"/>
+          <p:cNvPr id="16" name="Rectangle 15"/>
           <p:cNvSpPr/>
           <p:nvPr/>
         </p:nvSpPr>
         <p:spPr>
           <a:xfrm>
-            <a:off x="640080" y="2478023"/>
-            <a:ext cx="1865376" cy="320040"/>
+            <a:off x="640080" y="2157984"/>
+            <a:ext cx="1711756" cy="237744"/>
           </a:xfrm>
           <a:prstGeom prst="rect">
             <a:avLst/>
@@ -7474,14 +7560,14 @@
       </p:sp>
       <p:sp>
         <p:nvSpPr>
-          <p:cNvPr id="14" name="TextBox 13"/>
-          <p:cNvSpPr txBox="1"/>
-          <p:nvPr/>
-        </p:nvSpPr>
-        <p:spPr>
-          <a:xfrm>
-            <a:off x="640080" y="2221991"/>
-            <a:ext cx="5029200" cy="292608"/>
+          <p:cNvPr id="17" name="TextBox 16"/>
+          <p:cNvSpPr txBox="1"/>
+          <p:nvPr/>
+        </p:nvSpPr>
+        <p:spPr>
+          <a:xfrm>
+            <a:off x="658368" y="1883664"/>
+            <a:ext cx="4754880" cy="274320"/>
           </a:xfrm>
           <a:prstGeom prst="rect">
             <a:avLst/>
@@ -7496,60 +7582,60 @@
           <a:p>
             <a:pPr algn="l"/>
             <a:r>
-              <a:rPr sz="1400" b="1" i="0">
+              <a:rPr sz="1200" b="1" i="0">
                 <a:solidFill>
                   <a:srgbClr val="FF6B6B"/>
                 </a:solidFill>
               </a:rPr>
-              <a:t>Engineering Team (Colombo)</a:t>
-            </a:r>
-          </a:p>
-        </p:txBody>
-      </p:sp>
-      <p:sp>
-        <p:nvSpPr>
-          <p:cNvPr id="15" name="TextBox 14"/>
-          <p:cNvSpPr txBox="1"/>
-          <p:nvPr/>
-        </p:nvSpPr>
-        <p:spPr>
-          <a:xfrm>
-            <a:off x="5760720" y="2221991"/>
-            <a:ext cx="2743200" cy="292608"/>
-          </a:xfrm>
-          <a:prstGeom prst="rect">
-            <a:avLst/>
-          </a:prstGeom>
-          <a:noFill/>
-        </p:spPr>
-        <p:txBody>
-          <a:bodyPr wrap="square">
-            <a:spAutoFit/>
-          </a:bodyPr>
-          <a:lstStyle/>
-          <a:p>
-            <a:pPr algn="r"/>
-            <a:r>
-              <a:rPr sz="1400" b="1" i="0">
+              <a:t>Engineering Team  -  Colombo</a:t>
+            </a:r>
+          </a:p>
+        </p:txBody>
+      </p:sp>
+      <p:sp>
+        <p:nvSpPr>
+          <p:cNvPr id="18" name="TextBox 17"/>
+          <p:cNvSpPr txBox="1"/>
+          <p:nvPr/>
+        </p:nvSpPr>
+        <p:spPr>
+          <a:xfrm>
+            <a:off x="5212080" y="1883664"/>
+            <a:ext cx="2743200" cy="274320"/>
+          </a:xfrm>
+          <a:prstGeom prst="rect">
+            <a:avLst/>
+          </a:prstGeom>
+          <a:noFill/>
+        </p:spPr>
+        <p:txBody>
+          <a:bodyPr wrap="square">
+            <a:spAutoFit/>
+          </a:bodyPr>
+          <a:lstStyle/>
+          <a:p>
+            <a:pPr algn="l"/>
+            <a:r>
+              <a:rPr sz="1200" b="1" i="0">
                 <a:solidFill>
                   <a:srgbClr val="FFFFFF"/>
                 </a:solidFill>
               </a:rPr>
-              <a:t>$1,200,000  (24%)</a:t>
-            </a:r>
-          </a:p>
-        </p:txBody>
-      </p:sp>
-      <p:sp>
-        <p:nvSpPr>
-          <p:cNvPr id="16" name="TextBox 15"/>
-          <p:cNvSpPr txBox="1"/>
-          <p:nvPr/>
-        </p:nvSpPr>
-        <p:spPr>
-          <a:xfrm>
-            <a:off x="8549640" y="2295143"/>
-            <a:ext cx="3383280" cy="502920"/>
+              <a:t>  USD 1,200,000   (24%)</a:t>
+            </a:r>
+          </a:p>
+        </p:txBody>
+      </p:sp>
+      <p:sp>
+        <p:nvSpPr>
+          <p:cNvPr id="19" name="TextBox 18"/>
+          <p:cNvSpPr txBox="1"/>
+          <p:nvPr/>
+        </p:nvSpPr>
+        <p:spPr>
+          <a:xfrm>
+            <a:off x="8092440" y="1901952"/>
+            <a:ext cx="3931920" cy="457200"/>
           </a:xfrm>
           <a:prstGeom prst="rect">
             <a:avLst/>
@@ -7564,27 +7650,27 @@
           <a:p>
             <a:pPr algn="l"/>
             <a:r>
-              <a:rPr sz="1100" b="0" i="0">
+              <a:rPr sz="1000" b="0" i="0">
                 <a:solidFill>
                   <a:srgbClr val="CCCCCC"/>
                 </a:solidFill>
               </a:rPr>
-              <a:t>10–15 developers, QA, DevOps — 24 months
-Senior engineering director + team leads</a:t>
-            </a:r>
-          </a:p>
-        </p:txBody>
-      </p:sp>
-      <p:sp>
-        <p:nvSpPr>
-          <p:cNvPr id="17" name="Rectangle 16"/>
+              <a:t>10-15 developers, QA, DevOps - 24 months
+VP Engineering + team leads</a:t>
+            </a:r>
+          </a:p>
+        </p:txBody>
+      </p:sp>
+      <p:sp>
+        <p:nvSpPr>
+          <p:cNvPr id="20" name="Rectangle 19"/>
           <p:cNvSpPr/>
           <p:nvPr/>
         </p:nvSpPr>
         <p:spPr>
           <a:xfrm>
-            <a:off x="640080" y="3374136"/>
-            <a:ext cx="7772400" cy="320040"/>
+            <a:off x="640080" y="2834640"/>
+            <a:ext cx="7132320" cy="237744"/>
           </a:xfrm>
           <a:prstGeom prst="rect">
             <a:avLst/>
@@ -7620,14 +7706,14 @@
       </p:sp>
       <p:sp>
         <p:nvSpPr>
-          <p:cNvPr id="18" name="Rectangle 17"/>
+          <p:cNvPr id="21" name="Rectangle 20"/>
           <p:cNvSpPr/>
           <p:nvPr/>
         </p:nvSpPr>
         <p:spPr>
           <a:xfrm>
-            <a:off x="640080" y="3374136"/>
-            <a:ext cx="932688" cy="320040"/>
+            <a:off x="640080" y="2834640"/>
+            <a:ext cx="427939" cy="237744"/>
           </a:xfrm>
           <a:prstGeom prst="rect">
             <a:avLst/>
@@ -7663,14 +7749,14 @@
       </p:sp>
       <p:sp>
         <p:nvSpPr>
-          <p:cNvPr id="19" name="TextBox 18"/>
-          <p:cNvSpPr txBox="1"/>
-          <p:nvPr/>
-        </p:nvSpPr>
-        <p:spPr>
-          <a:xfrm>
-            <a:off x="640080" y="3118104"/>
-            <a:ext cx="5029200" cy="292608"/>
+          <p:cNvPr id="22" name="TextBox 21"/>
+          <p:cNvSpPr txBox="1"/>
+          <p:nvPr/>
+        </p:nvSpPr>
+        <p:spPr>
+          <a:xfrm>
+            <a:off x="658368" y="2560320"/>
+            <a:ext cx="4754880" cy="274320"/>
           </a:xfrm>
           <a:prstGeom prst="rect">
             <a:avLst/>
@@ -7685,60 +7771,60 @@
           <a:p>
             <a:pPr algn="l"/>
             <a:r>
-              <a:rPr sz="1400" b="1" i="0">
+              <a:rPr sz="1200" b="1" i="0">
                 <a:solidFill>
                   <a:srgbClr val="7BD4FF"/>
                 </a:solidFill>
               </a:rPr>
-              <a:t>Platform Development</a:t>
-            </a:r>
-          </a:p>
-        </p:txBody>
-      </p:sp>
-      <p:sp>
-        <p:nvSpPr>
-          <p:cNvPr id="20" name="TextBox 19"/>
-          <p:cNvSpPr txBox="1"/>
-          <p:nvPr/>
-        </p:nvSpPr>
-        <p:spPr>
-          <a:xfrm>
-            <a:off x="5760720" y="3118104"/>
-            <a:ext cx="2743200" cy="292608"/>
-          </a:xfrm>
-          <a:prstGeom prst="rect">
-            <a:avLst/>
-          </a:prstGeom>
-          <a:noFill/>
-        </p:spPr>
-        <p:txBody>
-          <a:bodyPr wrap="square">
-            <a:spAutoFit/>
-          </a:bodyPr>
-          <a:lstStyle/>
-          <a:p>
-            <a:pPr algn="r"/>
-            <a:r>
-              <a:rPr sz="1400" b="1" i="0">
+              <a:t>Colombo Corporate Office</a:t>
+            </a:r>
+          </a:p>
+        </p:txBody>
+      </p:sp>
+      <p:sp>
+        <p:nvSpPr>
+          <p:cNvPr id="23" name="TextBox 22"/>
+          <p:cNvSpPr txBox="1"/>
+          <p:nvPr/>
+        </p:nvSpPr>
+        <p:spPr>
+          <a:xfrm>
+            <a:off x="5212080" y="2560320"/>
+            <a:ext cx="2743200" cy="274320"/>
+          </a:xfrm>
+          <a:prstGeom prst="rect">
+            <a:avLst/>
+          </a:prstGeom>
+          <a:noFill/>
+        </p:spPr>
+        <p:txBody>
+          <a:bodyPr wrap="square">
+            <a:spAutoFit/>
+          </a:bodyPr>
+          <a:lstStyle/>
+          <a:p>
+            <a:pPr algn="l"/>
+            <a:r>
+              <a:rPr sz="1200" b="1" i="0">
                 <a:solidFill>
                   <a:srgbClr val="FFFFFF"/>
                 </a:solidFill>
               </a:rPr>
-              <a:t>$600,000  (12%)</a:t>
-            </a:r>
-          </a:p>
-        </p:txBody>
-      </p:sp>
-      <p:sp>
-        <p:nvSpPr>
-          <p:cNvPr id="21" name="TextBox 20"/>
-          <p:cNvSpPr txBox="1"/>
-          <p:nvPr/>
-        </p:nvSpPr>
-        <p:spPr>
-          <a:xfrm>
-            <a:off x="8549640" y="3191256"/>
-            <a:ext cx="3383280" cy="502920"/>
+              <a:t>  USD 300,000     (6%)</a:t>
+            </a:r>
+          </a:p>
+        </p:txBody>
+      </p:sp>
+      <p:sp>
+        <p:nvSpPr>
+          <p:cNvPr id="24" name="TextBox 23"/>
+          <p:cNvSpPr txBox="1"/>
+          <p:nvPr/>
+        </p:nvSpPr>
+        <p:spPr>
+          <a:xfrm>
+            <a:off x="8092440" y="2578608"/>
+            <a:ext cx="3931920" cy="457200"/>
           </a:xfrm>
           <a:prstGeom prst="rect">
             <a:avLst/>
@@ -7753,27 +7839,27 @@
           <a:p>
             <a:pPr algn="l"/>
             <a:r>
-              <a:rPr sz="1100" b="0" i="0">
+              <a:rPr sz="1000" b="0" i="0">
                 <a:solidFill>
                   <a:srgbClr val="CCCCCC"/>
                 </a:solidFill>
               </a:rPr>
-              <a:t>iOS/Android app store launch, feature roadmap
-API development, third-party integrations</a:t>
-            </a:r>
-          </a:p>
-        </p:txBody>
-      </p:sp>
-      <p:sp>
-        <p:nvSpPr>
-          <p:cNvPr id="22" name="Rectangle 21"/>
+              <a:t>Office lease (Colombo 3/7), fit-out, workstations
+High-speed fiber, server room, 24-month commitment</a:t>
+            </a:r>
+          </a:p>
+        </p:txBody>
+      </p:sp>
+      <p:sp>
+        <p:nvSpPr>
+          <p:cNvPr id="25" name="Rectangle 24"/>
           <p:cNvSpPr/>
           <p:nvPr/>
         </p:nvSpPr>
         <p:spPr>
           <a:xfrm>
-            <a:off x="640080" y="4270247"/>
-            <a:ext cx="7772400" cy="320040"/>
+            <a:off x="640080" y="3511296"/>
+            <a:ext cx="7132320" cy="237744"/>
           </a:xfrm>
           <a:prstGeom prst="rect">
             <a:avLst/>
@@ -7809,14 +7895,14 @@
       </p:sp>
       <p:sp>
         <p:nvSpPr>
-          <p:cNvPr id="23" name="Rectangle 22"/>
+          <p:cNvPr id="26" name="Rectangle 25"/>
           <p:cNvSpPr/>
           <p:nvPr/>
         </p:nvSpPr>
         <p:spPr>
           <a:xfrm>
-            <a:off x="640080" y="4270247"/>
-            <a:ext cx="699516" cy="320040"/>
+            <a:off x="640080" y="3511296"/>
+            <a:ext cx="713232" cy="237744"/>
           </a:xfrm>
           <a:prstGeom prst="rect">
             <a:avLst/>
@@ -7852,14 +7938,14 @@
       </p:sp>
       <p:sp>
         <p:nvSpPr>
-          <p:cNvPr id="24" name="TextBox 23"/>
-          <p:cNvSpPr txBox="1"/>
-          <p:nvPr/>
-        </p:nvSpPr>
-        <p:spPr>
-          <a:xfrm>
-            <a:off x="640080" y="4014215"/>
-            <a:ext cx="5029200" cy="292608"/>
+          <p:cNvPr id="27" name="TextBox 26"/>
+          <p:cNvSpPr txBox="1"/>
+          <p:nvPr/>
+        </p:nvSpPr>
+        <p:spPr>
+          <a:xfrm>
+            <a:off x="658368" y="3236976"/>
+            <a:ext cx="4754880" cy="274320"/>
           </a:xfrm>
           <a:prstGeom prst="rect">
             <a:avLst/>
@@ -7874,60 +7960,60 @@
           <a:p>
             <a:pPr algn="l"/>
             <a:r>
-              <a:rPr sz="1400" b="1" i="0">
+              <a:rPr sz="1200" b="1" i="0">
                 <a:solidFill>
                   <a:srgbClr val="A0FFB0"/>
                 </a:solidFill>
               </a:rPr>
-              <a:t>Marketing &amp; User Acquisition</a:t>
-            </a:r>
-          </a:p>
-        </p:txBody>
-      </p:sp>
-      <p:sp>
-        <p:nvSpPr>
-          <p:cNvPr id="25" name="TextBox 24"/>
-          <p:cNvSpPr txBox="1"/>
-          <p:nvPr/>
-        </p:nvSpPr>
-        <p:spPr>
-          <a:xfrm>
-            <a:off x="5760720" y="4014215"/>
-            <a:ext cx="2743200" cy="292608"/>
-          </a:xfrm>
-          <a:prstGeom prst="rect">
-            <a:avLst/>
-          </a:prstGeom>
-          <a:noFill/>
-        </p:spPr>
-        <p:txBody>
-          <a:bodyPr wrap="square">
-            <a:spAutoFit/>
-          </a:bodyPr>
-          <a:lstStyle/>
-          <a:p>
-            <a:pPr algn="r"/>
-            <a:r>
-              <a:rPr sz="1400" b="1" i="0">
+              <a:t>U.S. Operations Office (New Jersey)</a:t>
+            </a:r>
+          </a:p>
+        </p:txBody>
+      </p:sp>
+      <p:sp>
+        <p:nvSpPr>
+          <p:cNvPr id="28" name="TextBox 27"/>
+          <p:cNvSpPr txBox="1"/>
+          <p:nvPr/>
+        </p:nvSpPr>
+        <p:spPr>
+          <a:xfrm>
+            <a:off x="5212080" y="3236976"/>
+            <a:ext cx="2743200" cy="274320"/>
+          </a:xfrm>
+          <a:prstGeom prst="rect">
+            <a:avLst/>
+          </a:prstGeom>
+          <a:noFill/>
+        </p:spPr>
+        <p:txBody>
+          <a:bodyPr wrap="square">
+            <a:spAutoFit/>
+          </a:bodyPr>
+          <a:lstStyle/>
+          <a:p>
+            <a:pPr algn="l"/>
+            <a:r>
+              <a:rPr sz="1200" b="1" i="0">
                 <a:solidFill>
                   <a:srgbClr val="FFFFFF"/>
                 </a:solidFill>
               </a:rPr>
-              <a:t>$450,000  (9%)</a:t>
-            </a:r>
-          </a:p>
-        </p:txBody>
-      </p:sp>
-      <p:sp>
-        <p:nvSpPr>
-          <p:cNvPr id="26" name="TextBox 25"/>
-          <p:cNvSpPr txBox="1"/>
-          <p:nvPr/>
-        </p:nvSpPr>
-        <p:spPr>
-          <a:xfrm>
-            <a:off x="8549640" y="4087367"/>
-            <a:ext cx="3383280" cy="502920"/>
+              <a:t>  USD 500,000     (10%)</a:t>
+            </a:r>
+          </a:p>
+        </p:txBody>
+      </p:sp>
+      <p:sp>
+        <p:nvSpPr>
+          <p:cNvPr id="29" name="TextBox 28"/>
+          <p:cNvSpPr txBox="1"/>
+          <p:nvPr/>
+        </p:nvSpPr>
+        <p:spPr>
+          <a:xfrm>
+            <a:off x="8092440" y="3255264"/>
+            <a:ext cx="3931920" cy="457200"/>
           </a:xfrm>
           <a:prstGeom prst="rect">
             <a:avLst/>
@@ -7942,27 +8028,27 @@
           <a:p>
             <a:pPr algn="l"/>
             <a:r>
-              <a:rPr sz="1100" b="0" i="0">
+              <a:rPr sz="1000" b="0" i="0">
                 <a:solidFill>
                   <a:srgbClr val="CCCCCC"/>
                 </a:solidFill>
               </a:rPr>
-              <a:t>Creator fund seed, influencer partnerships
-Paid acquisition, diaspora community outreach</a:t>
-            </a:r>
-          </a:p>
-        </p:txBody>
-      </p:sp>
-      <p:sp>
-        <p:nvSpPr>
-          <p:cNvPr id="27" name="Rectangle 26"/>
+              <a:t>NJ headquarters - executive office space
+U.S. legal entity ops, compliance, admin</a:t>
+            </a:r>
+          </a:p>
+        </p:txBody>
+      </p:sp>
+      <p:sp>
+        <p:nvSpPr>
+          <p:cNvPr id="30" name="Rectangle 29"/>
           <p:cNvSpPr/>
           <p:nvPr/>
         </p:nvSpPr>
         <p:spPr>
           <a:xfrm>
-            <a:off x="640080" y="5166360"/>
-            <a:ext cx="7772400" cy="320040"/>
+            <a:off x="640080" y="4187952"/>
+            <a:ext cx="7132320" cy="237744"/>
           </a:xfrm>
           <a:prstGeom prst="rect">
             <a:avLst/>
@@ -7998,14 +8084,392 @@
       </p:sp>
       <p:sp>
         <p:nvSpPr>
-          <p:cNvPr id="28" name="Rectangle 27"/>
+          <p:cNvPr id="31" name="Rectangle 30"/>
           <p:cNvSpPr/>
           <p:nvPr/>
         </p:nvSpPr>
         <p:spPr>
           <a:xfrm>
-            <a:off x="640080" y="5166360"/>
-            <a:ext cx="388620" cy="320040"/>
+            <a:off x="640080" y="4187952"/>
+            <a:ext cx="855878" cy="237744"/>
+          </a:xfrm>
+          <a:prstGeom prst="rect">
+            <a:avLst/>
+          </a:prstGeom>
+          <a:solidFill>
+            <a:srgbClr val="FFA050"/>
+          </a:solidFill>
+          <a:ln>
+            <a:noFill/>
+          </a:ln>
+        </p:spPr>
+        <p:style>
+          <a:lnRef idx="1">
+            <a:schemeClr val="accent1"/>
+          </a:lnRef>
+          <a:fillRef idx="3">
+            <a:schemeClr val="accent1"/>
+          </a:fillRef>
+          <a:effectRef idx="2">
+            <a:schemeClr val="accent1"/>
+          </a:effectRef>
+          <a:fontRef idx="minor">
+            <a:schemeClr val="lt1"/>
+          </a:fontRef>
+        </p:style>
+        <p:txBody>
+          <a:bodyPr rtlCol="0" anchor="ctr"/>
+          <a:lstStyle/>
+          <a:p>
+            <a:pPr algn="ctr"/>
+          </a:p>
+        </p:txBody>
+      </p:sp>
+      <p:sp>
+        <p:nvSpPr>
+          <p:cNvPr id="32" name="TextBox 31"/>
+          <p:cNvSpPr txBox="1"/>
+          <p:nvPr/>
+        </p:nvSpPr>
+        <p:spPr>
+          <a:xfrm>
+            <a:off x="658368" y="3913632"/>
+            <a:ext cx="4754880" cy="274320"/>
+          </a:xfrm>
+          <a:prstGeom prst="rect">
+            <a:avLst/>
+          </a:prstGeom>
+          <a:noFill/>
+        </p:spPr>
+        <p:txBody>
+          <a:bodyPr wrap="square">
+            <a:spAutoFit/>
+          </a:bodyPr>
+          <a:lstStyle/>
+          <a:p>
+            <a:pPr algn="l"/>
+            <a:r>
+              <a:rPr sz="1200" b="1" i="0">
+                <a:solidFill>
+                  <a:srgbClr val="FFA050"/>
+                </a:solidFill>
+              </a:rPr>
+              <a:t>Platform Development</a:t>
+            </a:r>
+          </a:p>
+        </p:txBody>
+      </p:sp>
+      <p:sp>
+        <p:nvSpPr>
+          <p:cNvPr id="33" name="TextBox 32"/>
+          <p:cNvSpPr txBox="1"/>
+          <p:nvPr/>
+        </p:nvSpPr>
+        <p:spPr>
+          <a:xfrm>
+            <a:off x="5212080" y="3913632"/>
+            <a:ext cx="2743200" cy="274320"/>
+          </a:xfrm>
+          <a:prstGeom prst="rect">
+            <a:avLst/>
+          </a:prstGeom>
+          <a:noFill/>
+        </p:spPr>
+        <p:txBody>
+          <a:bodyPr wrap="square">
+            <a:spAutoFit/>
+          </a:bodyPr>
+          <a:lstStyle/>
+          <a:p>
+            <a:pPr algn="l"/>
+            <a:r>
+              <a:rPr sz="1200" b="1" i="0">
+                <a:solidFill>
+                  <a:srgbClr val="FFFFFF"/>
+                </a:solidFill>
+              </a:rPr>
+              <a:t>  USD 600,000     (12%)</a:t>
+            </a:r>
+          </a:p>
+        </p:txBody>
+      </p:sp>
+      <p:sp>
+        <p:nvSpPr>
+          <p:cNvPr id="34" name="TextBox 33"/>
+          <p:cNvSpPr txBox="1"/>
+          <p:nvPr/>
+        </p:nvSpPr>
+        <p:spPr>
+          <a:xfrm>
+            <a:off x="8092440" y="3931920"/>
+            <a:ext cx="3931920" cy="457200"/>
+          </a:xfrm>
+          <a:prstGeom prst="rect">
+            <a:avLst/>
+          </a:prstGeom>
+          <a:noFill/>
+        </p:spPr>
+        <p:txBody>
+          <a:bodyPr wrap="square">
+            <a:spAutoFit/>
+          </a:bodyPr>
+          <a:lstStyle/>
+          <a:p>
+            <a:pPr algn="l"/>
+            <a:r>
+              <a:rPr sz="1000" b="0" i="0">
+                <a:solidFill>
+                  <a:srgbClr val="CCCCCC"/>
+                </a:solidFill>
+              </a:rPr>
+              <a:t>iOS/Android App Store launch, feature roadmap
+API development, third-party integrations</a:t>
+            </a:r>
+          </a:p>
+        </p:txBody>
+      </p:sp>
+      <p:sp>
+        <p:nvSpPr>
+          <p:cNvPr id="35" name="Rectangle 34"/>
+          <p:cNvSpPr/>
+          <p:nvPr/>
+        </p:nvSpPr>
+        <p:spPr>
+          <a:xfrm>
+            <a:off x="640080" y="4864608"/>
+            <a:ext cx="7132320" cy="237744"/>
+          </a:xfrm>
+          <a:prstGeom prst="rect">
+            <a:avLst/>
+          </a:prstGeom>
+          <a:solidFill>
+            <a:srgbClr val="161830"/>
+          </a:solidFill>
+          <a:ln>
+            <a:noFill/>
+          </a:ln>
+        </p:spPr>
+        <p:style>
+          <a:lnRef idx="1">
+            <a:schemeClr val="accent1"/>
+          </a:lnRef>
+          <a:fillRef idx="3">
+            <a:schemeClr val="accent1"/>
+          </a:fillRef>
+          <a:effectRef idx="2">
+            <a:schemeClr val="accent1"/>
+          </a:effectRef>
+          <a:fontRef idx="minor">
+            <a:schemeClr val="lt1"/>
+          </a:fontRef>
+        </p:style>
+        <p:txBody>
+          <a:bodyPr rtlCol="0" anchor="ctr"/>
+          <a:lstStyle/>
+          <a:p>
+            <a:pPr algn="ctr"/>
+          </a:p>
+        </p:txBody>
+      </p:sp>
+      <p:sp>
+        <p:nvSpPr>
+          <p:cNvPr id="36" name="Rectangle 35"/>
+          <p:cNvSpPr/>
+          <p:nvPr/>
+        </p:nvSpPr>
+        <p:spPr>
+          <a:xfrm>
+            <a:off x="640080" y="4864608"/>
+            <a:ext cx="641908" cy="237744"/>
+          </a:xfrm>
+          <a:prstGeom prst="rect">
+            <a:avLst/>
+          </a:prstGeom>
+          <a:solidFill>
+            <a:srgbClr val="FFD700"/>
+          </a:solidFill>
+          <a:ln>
+            <a:noFill/>
+          </a:ln>
+        </p:spPr>
+        <p:style>
+          <a:lnRef idx="1">
+            <a:schemeClr val="accent1"/>
+          </a:lnRef>
+          <a:fillRef idx="3">
+            <a:schemeClr val="accent1"/>
+          </a:fillRef>
+          <a:effectRef idx="2">
+            <a:schemeClr val="accent1"/>
+          </a:effectRef>
+          <a:fontRef idx="minor">
+            <a:schemeClr val="lt1"/>
+          </a:fontRef>
+        </p:style>
+        <p:txBody>
+          <a:bodyPr rtlCol="0" anchor="ctr"/>
+          <a:lstStyle/>
+          <a:p>
+            <a:pPr algn="ctr"/>
+          </a:p>
+        </p:txBody>
+      </p:sp>
+      <p:sp>
+        <p:nvSpPr>
+          <p:cNvPr id="37" name="TextBox 36"/>
+          <p:cNvSpPr txBox="1"/>
+          <p:nvPr/>
+        </p:nvSpPr>
+        <p:spPr>
+          <a:xfrm>
+            <a:off x="658368" y="4590288"/>
+            <a:ext cx="4754880" cy="274320"/>
+          </a:xfrm>
+          <a:prstGeom prst="rect">
+            <a:avLst/>
+          </a:prstGeom>
+          <a:noFill/>
+        </p:spPr>
+        <p:txBody>
+          <a:bodyPr wrap="square">
+            <a:spAutoFit/>
+          </a:bodyPr>
+          <a:lstStyle/>
+          <a:p>
+            <a:pPr algn="l"/>
+            <a:r>
+              <a:rPr sz="1200" b="1" i="0">
+                <a:solidFill>
+                  <a:srgbClr val="FFD700"/>
+                </a:solidFill>
+              </a:rPr>
+              <a:t>Marketing &amp; User Acquisition</a:t>
+            </a:r>
+          </a:p>
+        </p:txBody>
+      </p:sp>
+      <p:sp>
+        <p:nvSpPr>
+          <p:cNvPr id="38" name="TextBox 37"/>
+          <p:cNvSpPr txBox="1"/>
+          <p:nvPr/>
+        </p:nvSpPr>
+        <p:spPr>
+          <a:xfrm>
+            <a:off x="5212080" y="4590288"/>
+            <a:ext cx="2743200" cy="274320"/>
+          </a:xfrm>
+          <a:prstGeom prst="rect">
+            <a:avLst/>
+          </a:prstGeom>
+          <a:noFill/>
+        </p:spPr>
+        <p:txBody>
+          <a:bodyPr wrap="square">
+            <a:spAutoFit/>
+          </a:bodyPr>
+          <a:lstStyle/>
+          <a:p>
+            <a:pPr algn="l"/>
+            <a:r>
+              <a:rPr sz="1200" b="1" i="0">
+                <a:solidFill>
+                  <a:srgbClr val="FFFFFF"/>
+                </a:solidFill>
+              </a:rPr>
+              <a:t>  USD 450,000     (9%)</a:t>
+            </a:r>
+          </a:p>
+        </p:txBody>
+      </p:sp>
+      <p:sp>
+        <p:nvSpPr>
+          <p:cNvPr id="39" name="TextBox 38"/>
+          <p:cNvSpPr txBox="1"/>
+          <p:nvPr/>
+        </p:nvSpPr>
+        <p:spPr>
+          <a:xfrm>
+            <a:off x="8092440" y="4608576"/>
+            <a:ext cx="3931920" cy="457200"/>
+          </a:xfrm>
+          <a:prstGeom prst="rect">
+            <a:avLst/>
+          </a:prstGeom>
+          <a:noFill/>
+        </p:spPr>
+        <p:txBody>
+          <a:bodyPr wrap="square">
+            <a:spAutoFit/>
+          </a:bodyPr>
+          <a:lstStyle/>
+          <a:p>
+            <a:pPr algn="l"/>
+            <a:r>
+              <a:rPr sz="1000" b="0" i="0">
+                <a:solidFill>
+                  <a:srgbClr val="CCCCCC"/>
+                </a:solidFill>
+              </a:rPr>
+              <a:t>Creator fund seed, influencer partnerships
+Paid acquisition, diaspora community outreach</a:t>
+            </a:r>
+          </a:p>
+        </p:txBody>
+      </p:sp>
+      <p:sp>
+        <p:nvSpPr>
+          <p:cNvPr id="40" name="Rectangle 39"/>
+          <p:cNvSpPr/>
+          <p:nvPr/>
+        </p:nvSpPr>
+        <p:spPr>
+          <a:xfrm>
+            <a:off x="640080" y="5541264"/>
+            <a:ext cx="7132320" cy="237744"/>
+          </a:xfrm>
+          <a:prstGeom prst="rect">
+            <a:avLst/>
+          </a:prstGeom>
+          <a:solidFill>
+            <a:srgbClr val="161830"/>
+          </a:solidFill>
+          <a:ln>
+            <a:noFill/>
+          </a:ln>
+        </p:spPr>
+        <p:style>
+          <a:lnRef idx="1">
+            <a:schemeClr val="accent1"/>
+          </a:lnRef>
+          <a:fillRef idx="3">
+            <a:schemeClr val="accent1"/>
+          </a:fillRef>
+          <a:effectRef idx="2">
+            <a:schemeClr val="accent1"/>
+          </a:effectRef>
+          <a:fontRef idx="minor">
+            <a:schemeClr val="lt1"/>
+          </a:fontRef>
+        </p:style>
+        <p:txBody>
+          <a:bodyPr rtlCol="0" anchor="ctr"/>
+          <a:lstStyle/>
+          <a:p>
+            <a:pPr algn="ctr"/>
+          </a:p>
+        </p:txBody>
+      </p:sp>
+      <p:sp>
+        <p:nvSpPr>
+          <p:cNvPr id="41" name="Rectangle 40"/>
+          <p:cNvSpPr/>
+          <p:nvPr/>
+        </p:nvSpPr>
+        <p:spPr>
+          <a:xfrm>
+            <a:off x="640080" y="5541264"/>
+            <a:ext cx="356616" cy="237744"/>
           </a:xfrm>
           <a:prstGeom prst="rect">
             <a:avLst/>
@@ -8041,14 +8505,14 @@
       </p:sp>
       <p:sp>
         <p:nvSpPr>
-          <p:cNvPr id="29" name="TextBox 28"/>
-          <p:cNvSpPr txBox="1"/>
-          <p:nvPr/>
-        </p:nvSpPr>
-        <p:spPr>
-          <a:xfrm>
-            <a:off x="640080" y="4910328"/>
-            <a:ext cx="5029200" cy="292608"/>
+          <p:cNvPr id="42" name="TextBox 41"/>
+          <p:cNvSpPr txBox="1"/>
+          <p:nvPr/>
+        </p:nvSpPr>
+        <p:spPr>
+          <a:xfrm>
+            <a:off x="658368" y="5266944"/>
+            <a:ext cx="4754880" cy="274320"/>
           </a:xfrm>
           <a:prstGeom prst="rect">
             <a:avLst/>
@@ -8063,7 +8527,7 @@
           <a:p>
             <a:pPr algn="l"/>
             <a:r>
-              <a:rPr sz="1400" b="1" i="0">
+              <a:rPr sz="1200" b="1" i="0">
                 <a:solidFill>
                   <a:srgbClr val="CCCCCC"/>
                 </a:solidFill>
@@ -8075,48 +8539,48 @@
       </p:sp>
       <p:sp>
         <p:nvSpPr>
-          <p:cNvPr id="30" name="TextBox 29"/>
-          <p:cNvSpPr txBox="1"/>
-          <p:nvPr/>
-        </p:nvSpPr>
-        <p:spPr>
-          <a:xfrm>
-            <a:off x="5760720" y="4910328"/>
-            <a:ext cx="2743200" cy="292608"/>
-          </a:xfrm>
-          <a:prstGeom prst="rect">
-            <a:avLst/>
-          </a:prstGeom>
-          <a:noFill/>
-        </p:spPr>
-        <p:txBody>
-          <a:bodyPr wrap="square">
-            <a:spAutoFit/>
-          </a:bodyPr>
-          <a:lstStyle/>
-          <a:p>
-            <a:pPr algn="r"/>
-            <a:r>
-              <a:rPr sz="1400" b="1" i="0">
+          <p:cNvPr id="43" name="TextBox 42"/>
+          <p:cNvSpPr txBox="1"/>
+          <p:nvPr/>
+        </p:nvSpPr>
+        <p:spPr>
+          <a:xfrm>
+            <a:off x="5212080" y="5266944"/>
+            <a:ext cx="2743200" cy="274320"/>
+          </a:xfrm>
+          <a:prstGeom prst="rect">
+            <a:avLst/>
+          </a:prstGeom>
+          <a:noFill/>
+        </p:spPr>
+        <p:txBody>
+          <a:bodyPr wrap="square">
+            <a:spAutoFit/>
+          </a:bodyPr>
+          <a:lstStyle/>
+          <a:p>
+            <a:pPr algn="l"/>
+            <a:r>
+              <a:rPr sz="1200" b="1" i="0">
                 <a:solidFill>
                   <a:srgbClr val="FFFFFF"/>
                 </a:solidFill>
               </a:rPr>
-              <a:t>$250,000  (5%)</a:t>
-            </a:r>
-          </a:p>
-        </p:txBody>
-      </p:sp>
-      <p:sp>
-        <p:nvSpPr>
-          <p:cNvPr id="31" name="TextBox 30"/>
-          <p:cNvSpPr txBox="1"/>
-          <p:nvPr/>
-        </p:nvSpPr>
-        <p:spPr>
-          <a:xfrm>
-            <a:off x="8549640" y="4983480"/>
-            <a:ext cx="3383280" cy="502920"/>
+              <a:t>  USD 250,000     (5%)</a:t>
+            </a:r>
+          </a:p>
+        </p:txBody>
+      </p:sp>
+      <p:sp>
+        <p:nvSpPr>
+          <p:cNvPr id="44" name="TextBox 43"/>
+          <p:cNvSpPr txBox="1"/>
+          <p:nvPr/>
+        </p:nvSpPr>
+        <p:spPr>
+          <a:xfrm>
+            <a:off x="8092440" y="5285232"/>
+            <a:ext cx="3931920" cy="457200"/>
           </a:xfrm>
           <a:prstGeom prst="rect">
             <a:avLst/>
@@ -8131,1304 +8595,7 @@
           <a:p>
             <a:pPr algn="l"/>
             <a:r>
-              <a:rPr sz="1100" b="0" i="0">
-                <a:solidFill>
-                  <a:srgbClr val="CCCCCC"/>
-                </a:solidFill>
-              </a:rPr>
-              <a:t>US operations, trademark filings, legal
-Compliance, accounting, executive team</a:t>
-            </a:r>
-          </a:p>
-        </p:txBody>
-      </p:sp>
-      <p:sp>
-        <p:nvSpPr>
-          <p:cNvPr id="32" name="Rectangle 31"/>
-          <p:cNvSpPr/>
-          <p:nvPr/>
-        </p:nvSpPr>
-        <p:spPr>
-          <a:xfrm>
-            <a:off x="0" y="1005840"/>
-            <a:ext cx="12188952" cy="5852160"/>
-          </a:xfrm>
-          <a:prstGeom prst="rect">
-            <a:avLst/>
-          </a:prstGeom>
-          <a:solidFill>
-            <a:srgbClr val="0B0C1A"/>
-          </a:solidFill>
-          <a:ln>
-            <a:noFill/>
-          </a:ln>
-        </p:spPr>
-        <p:style>
-          <a:lnRef idx="1">
-            <a:schemeClr val="accent1"/>
-          </a:lnRef>
-          <a:fillRef idx="3">
-            <a:schemeClr val="accent1"/>
-          </a:fillRef>
-          <a:effectRef idx="2">
-            <a:schemeClr val="accent1"/>
-          </a:effectRef>
-          <a:fontRef idx="minor">
-            <a:schemeClr val="lt1"/>
-          </a:fontRef>
-        </p:style>
-        <p:txBody>
-          <a:bodyPr rtlCol="0" anchor="ctr"/>
-          <a:lstStyle/>
-          <a:p>
-            <a:pPr algn="ctr"/>
-          </a:p>
-        </p:txBody>
-      </p:sp>
-      <p:sp>
-        <p:nvSpPr>
-          <p:cNvPr id="33" name="TextBox 32"/>
-          <p:cNvSpPr txBox="1"/>
-          <p:nvPr/>
-        </p:nvSpPr>
-        <p:spPr>
-          <a:xfrm>
-            <a:off x="777240" y="274320"/>
-            <a:ext cx="10058400" cy="594360"/>
-          </a:xfrm>
-          <a:prstGeom prst="rect">
-            <a:avLst/>
-          </a:prstGeom>
-          <a:noFill/>
-        </p:spPr>
-        <p:txBody>
-          <a:bodyPr wrap="square">
-            <a:spAutoFit/>
-          </a:bodyPr>
-          <a:lstStyle/>
-          <a:p>
-            <a:pPr algn="l"/>
-            <a:r>
-              <a:rPr sz="3600" b="1" i="0">
-                <a:solidFill>
-                  <a:srgbClr val="F5C842"/>
-                </a:solidFill>
-              </a:rPr>
-              <a:t>Use of Funds — M Seed Round</a:t>
-            </a:r>
-          </a:p>
-        </p:txBody>
-      </p:sp>
-      <p:sp>
-        <p:nvSpPr>
-          <p:cNvPr id="34" name="Rectangle 33"/>
-          <p:cNvSpPr/>
-          <p:nvPr/>
-        </p:nvSpPr>
-        <p:spPr>
-          <a:xfrm>
-            <a:off x="640080" y="1005840"/>
-            <a:ext cx="10881360" cy="27432"/>
-          </a:xfrm>
-          <a:prstGeom prst="rect">
-            <a:avLst/>
-          </a:prstGeom>
-          <a:solidFill>
-            <a:srgbClr val="F5C842"/>
-          </a:solidFill>
-          <a:ln>
-            <a:noFill/>
-          </a:ln>
-        </p:spPr>
-        <p:style>
-          <a:lnRef idx="1">
-            <a:schemeClr val="accent1"/>
-          </a:lnRef>
-          <a:fillRef idx="3">
-            <a:schemeClr val="accent1"/>
-          </a:fillRef>
-          <a:effectRef idx="2">
-            <a:schemeClr val="accent1"/>
-          </a:effectRef>
-          <a:fontRef idx="minor">
-            <a:schemeClr val="lt1"/>
-          </a:fontRef>
-        </p:style>
-        <p:txBody>
-          <a:bodyPr rtlCol="0" anchor="ctr"/>
-          <a:lstStyle/>
-          <a:p>
-            <a:pPr algn="ctr"/>
-          </a:p>
-        </p:txBody>
-      </p:sp>
-      <p:sp>
-        <p:nvSpPr>
-          <p:cNvPr id="35" name="Rectangle 34"/>
-          <p:cNvSpPr/>
-          <p:nvPr/>
-        </p:nvSpPr>
-        <p:spPr>
-          <a:xfrm>
-            <a:off x="457200" y="1280160"/>
-            <a:ext cx="109728" cy="4114800"/>
-          </a:xfrm>
-          <a:prstGeom prst="rect">
-            <a:avLst/>
-          </a:prstGeom>
-          <a:solidFill>
-            <a:srgbClr val="F5C842"/>
-          </a:solidFill>
-          <a:ln>
-            <a:noFill/>
-          </a:ln>
-        </p:spPr>
-        <p:style>
-          <a:lnRef idx="1">
-            <a:schemeClr val="accent1"/>
-          </a:lnRef>
-          <a:fillRef idx="3">
-            <a:schemeClr val="accent1"/>
-          </a:fillRef>
-          <a:effectRef idx="2">
-            <a:schemeClr val="accent1"/>
-          </a:effectRef>
-          <a:fontRef idx="minor">
-            <a:schemeClr val="lt1"/>
-          </a:fontRef>
-        </p:style>
-        <p:txBody>
-          <a:bodyPr rtlCol="0" anchor="ctr"/>
-          <a:lstStyle/>
-          <a:p>
-            <a:pPr algn="ctr"/>
-          </a:p>
-        </p:txBody>
-      </p:sp>
-      <p:sp>
-        <p:nvSpPr>
-          <p:cNvPr id="36" name="Rectangle 35"/>
-          <p:cNvSpPr/>
-          <p:nvPr/>
-        </p:nvSpPr>
-        <p:spPr>
-          <a:xfrm>
-            <a:off x="640080" y="1600200"/>
-            <a:ext cx="7772400" cy="274320"/>
-          </a:xfrm>
-          <a:prstGeom prst="rect">
-            <a:avLst/>
-          </a:prstGeom>
-          <a:solidFill>
-            <a:srgbClr val="161830"/>
-          </a:solidFill>
-          <a:ln>
-            <a:noFill/>
-          </a:ln>
-        </p:spPr>
-        <p:style>
-          <a:lnRef idx="1">
-            <a:schemeClr val="accent1"/>
-          </a:lnRef>
-          <a:fillRef idx="3">
-            <a:schemeClr val="accent1"/>
-          </a:fillRef>
-          <a:effectRef idx="2">
-            <a:schemeClr val="accent1"/>
-          </a:effectRef>
-          <a:fontRef idx="minor">
-            <a:schemeClr val="lt1"/>
-          </a:fontRef>
-        </p:style>
-        <p:txBody>
-          <a:bodyPr rtlCol="0" anchor="ctr"/>
-          <a:lstStyle/>
-          <a:p>
-            <a:pPr algn="ctr"/>
-          </a:p>
-        </p:txBody>
-      </p:sp>
-      <p:sp>
-        <p:nvSpPr>
-          <p:cNvPr id="37" name="Rectangle 36"/>
-          <p:cNvSpPr/>
-          <p:nvPr/>
-        </p:nvSpPr>
-        <p:spPr>
-          <a:xfrm>
-            <a:off x="640080" y="1600200"/>
-            <a:ext cx="3108960" cy="274320"/>
-          </a:xfrm>
-          <a:prstGeom prst="rect">
-            <a:avLst/>
-          </a:prstGeom>
-          <a:solidFill>
-            <a:srgbClr val="F5C842"/>
-          </a:solidFill>
-          <a:ln>
-            <a:noFill/>
-          </a:ln>
-        </p:spPr>
-        <p:style>
-          <a:lnRef idx="1">
-            <a:schemeClr val="accent1"/>
-          </a:lnRef>
-          <a:fillRef idx="3">
-            <a:schemeClr val="accent1"/>
-          </a:fillRef>
-          <a:effectRef idx="2">
-            <a:schemeClr val="accent1"/>
-          </a:effectRef>
-          <a:fontRef idx="minor">
-            <a:schemeClr val="lt1"/>
-          </a:fontRef>
-        </p:style>
-        <p:txBody>
-          <a:bodyPr rtlCol="0" anchor="ctr"/>
-          <a:lstStyle/>
-          <a:p>
-            <a:pPr algn="ctr"/>
-          </a:p>
-        </p:txBody>
-      </p:sp>
-      <p:sp>
-        <p:nvSpPr>
-          <p:cNvPr id="38" name="TextBox 37"/>
-          <p:cNvSpPr txBox="1"/>
-          <p:nvPr/>
-        </p:nvSpPr>
-        <p:spPr>
-          <a:xfrm>
-            <a:off x="640080" y="1325880"/>
-            <a:ext cx="5029200" cy="292608"/>
-          </a:xfrm>
-          <a:prstGeom prst="rect">
-            <a:avLst/>
-          </a:prstGeom>
-          <a:noFill/>
-        </p:spPr>
-        <p:txBody>
-          <a:bodyPr wrap="square">
-            <a:spAutoFit/>
-          </a:bodyPr>
-          <a:lstStyle/>
-          <a:p>
-            <a:pPr algn="l"/>
-            <a:r>
-              <a:rPr sz="1300" b="1" i="0">
-                <a:solidFill>
-                  <a:srgbClr val="F5C842"/>
-                </a:solidFill>
-              </a:rPr>
-              <a:t>Infrastructure &amp; Bare Metal</a:t>
-            </a:r>
-          </a:p>
-        </p:txBody>
-      </p:sp>
-      <p:sp>
-        <p:nvSpPr>
-          <p:cNvPr id="39" name="TextBox 38"/>
-          <p:cNvSpPr txBox="1"/>
-          <p:nvPr/>
-        </p:nvSpPr>
-        <p:spPr>
-          <a:xfrm>
-            <a:off x="5577840" y="1325880"/>
-            <a:ext cx="2926080" cy="292608"/>
-          </a:xfrm>
-          <a:prstGeom prst="rect">
-            <a:avLst/>
-          </a:prstGeom>
-          <a:noFill/>
-        </p:spPr>
-        <p:txBody>
-          <a:bodyPr wrap="square">
-            <a:spAutoFit/>
-          </a:bodyPr>
-          <a:lstStyle/>
-          <a:p>
-            <a:pPr algn="r"/>
-            <a:r>
-              <a:rPr sz="1300" b="1" i="0">
-                <a:solidFill>
-                  <a:srgbClr val="FFFFFF"/>
-                </a:solidFill>
-              </a:rPr>
-              <a:t>$2,000,000  (40%)</a:t>
-            </a:r>
-          </a:p>
-        </p:txBody>
-      </p:sp>
-      <p:sp>
-        <p:nvSpPr>
-          <p:cNvPr id="40" name="TextBox 39"/>
-          <p:cNvSpPr txBox="1"/>
-          <p:nvPr/>
-        </p:nvSpPr>
-        <p:spPr>
-          <a:xfrm>
-            <a:off x="8549640" y="1399032"/>
-            <a:ext cx="3383280" cy="502920"/>
-          </a:xfrm>
-          <a:prstGeom prst="rect">
-            <a:avLst/>
-          </a:prstGeom>
-          <a:noFill/>
-        </p:spPr>
-        <p:txBody>
-          <a:bodyPr wrap="square">
-            <a:spAutoFit/>
-          </a:bodyPr>
-          <a:lstStyle/>
-          <a:p>
-            <a:pPr algn="l"/>
-            <a:r>
-              <a:rPr sz="1100" b="0" i="0">
-                <a:solidFill>
-                  <a:srgbClr val="CCCCCC"/>
-                </a:solidFill>
-              </a:rPr>
-              <a:t>Colombo bare metal servers, switches, networking
-hardware, co-location facility setup, redundancy</a:t>
-            </a:r>
-          </a:p>
-        </p:txBody>
-      </p:sp>
-      <p:sp>
-        <p:nvSpPr>
-          <p:cNvPr id="41" name="Rectangle 40"/>
-          <p:cNvSpPr/>
-          <p:nvPr/>
-        </p:nvSpPr>
-        <p:spPr>
-          <a:xfrm>
-            <a:off x="640080" y="2359151"/>
-            <a:ext cx="7772400" cy="274320"/>
-          </a:xfrm>
-          <a:prstGeom prst="rect">
-            <a:avLst/>
-          </a:prstGeom>
-          <a:solidFill>
-            <a:srgbClr val="161830"/>
-          </a:solidFill>
-          <a:ln>
-            <a:noFill/>
-          </a:ln>
-        </p:spPr>
-        <p:style>
-          <a:lnRef idx="1">
-            <a:schemeClr val="accent1"/>
-          </a:lnRef>
-          <a:fillRef idx="3">
-            <a:schemeClr val="accent1"/>
-          </a:fillRef>
-          <a:effectRef idx="2">
-            <a:schemeClr val="accent1"/>
-          </a:effectRef>
-          <a:fontRef idx="minor">
-            <a:schemeClr val="lt1"/>
-          </a:fontRef>
-        </p:style>
-        <p:txBody>
-          <a:bodyPr rtlCol="0" anchor="ctr"/>
-          <a:lstStyle/>
-          <a:p>
-            <a:pPr algn="ctr"/>
-          </a:p>
-        </p:txBody>
-      </p:sp>
-      <p:sp>
-        <p:nvSpPr>
-          <p:cNvPr id="42" name="Rectangle 41"/>
-          <p:cNvSpPr/>
-          <p:nvPr/>
-        </p:nvSpPr>
-        <p:spPr>
-          <a:xfrm>
-            <a:off x="640080" y="2359151"/>
-            <a:ext cx="1865376" cy="274320"/>
-          </a:xfrm>
-          <a:prstGeom prst="rect">
-            <a:avLst/>
-          </a:prstGeom>
-          <a:solidFill>
-            <a:srgbClr val="FF6B6B"/>
-          </a:solidFill>
-          <a:ln>
-            <a:noFill/>
-          </a:ln>
-        </p:spPr>
-        <p:style>
-          <a:lnRef idx="1">
-            <a:schemeClr val="accent1"/>
-          </a:lnRef>
-          <a:fillRef idx="3">
-            <a:schemeClr val="accent1"/>
-          </a:fillRef>
-          <a:effectRef idx="2">
-            <a:schemeClr val="accent1"/>
-          </a:effectRef>
-          <a:fontRef idx="minor">
-            <a:schemeClr val="lt1"/>
-          </a:fontRef>
-        </p:style>
-        <p:txBody>
-          <a:bodyPr rtlCol="0" anchor="ctr"/>
-          <a:lstStyle/>
-          <a:p>
-            <a:pPr algn="ctr"/>
-          </a:p>
-        </p:txBody>
-      </p:sp>
-      <p:sp>
-        <p:nvSpPr>
-          <p:cNvPr id="43" name="TextBox 42"/>
-          <p:cNvSpPr txBox="1"/>
-          <p:nvPr/>
-        </p:nvSpPr>
-        <p:spPr>
-          <a:xfrm>
-            <a:off x="640080" y="2084831"/>
-            <a:ext cx="5029200" cy="292608"/>
-          </a:xfrm>
-          <a:prstGeom prst="rect">
-            <a:avLst/>
-          </a:prstGeom>
-          <a:noFill/>
-        </p:spPr>
-        <p:txBody>
-          <a:bodyPr wrap="square">
-            <a:spAutoFit/>
-          </a:bodyPr>
-          <a:lstStyle/>
-          <a:p>
-            <a:pPr algn="l"/>
-            <a:r>
-              <a:rPr sz="1300" b="1" i="0">
-                <a:solidFill>
-                  <a:srgbClr val="FF6B6B"/>
-                </a:solidFill>
-              </a:rPr>
-              <a:t>Engineering Team (Colombo)</a:t>
-            </a:r>
-          </a:p>
-        </p:txBody>
-      </p:sp>
-      <p:sp>
-        <p:nvSpPr>
-          <p:cNvPr id="44" name="TextBox 43"/>
-          <p:cNvSpPr txBox="1"/>
-          <p:nvPr/>
-        </p:nvSpPr>
-        <p:spPr>
-          <a:xfrm>
-            <a:off x="5577840" y="2084831"/>
-            <a:ext cx="2926080" cy="292608"/>
-          </a:xfrm>
-          <a:prstGeom prst="rect">
-            <a:avLst/>
-          </a:prstGeom>
-          <a:noFill/>
-        </p:spPr>
-        <p:txBody>
-          <a:bodyPr wrap="square">
-            <a:spAutoFit/>
-          </a:bodyPr>
-          <a:lstStyle/>
-          <a:p>
-            <a:pPr algn="r"/>
-            <a:r>
-              <a:rPr sz="1300" b="1" i="0">
-                <a:solidFill>
-                  <a:srgbClr val="FFFFFF"/>
-                </a:solidFill>
-              </a:rPr>
-              <a:t>$1,200,000  (24%)</a:t>
-            </a:r>
-          </a:p>
-        </p:txBody>
-      </p:sp>
-      <p:sp>
-        <p:nvSpPr>
-          <p:cNvPr id="45" name="TextBox 44"/>
-          <p:cNvSpPr txBox="1"/>
-          <p:nvPr/>
-        </p:nvSpPr>
-        <p:spPr>
-          <a:xfrm>
-            <a:off x="8549640" y="2157983"/>
-            <a:ext cx="3383280" cy="502920"/>
-          </a:xfrm>
-          <a:prstGeom prst="rect">
-            <a:avLst/>
-          </a:prstGeom>
-          <a:noFill/>
-        </p:spPr>
-        <p:txBody>
-          <a:bodyPr wrap="square">
-            <a:spAutoFit/>
-          </a:bodyPr>
-          <a:lstStyle/>
-          <a:p>
-            <a:pPr algn="l"/>
-            <a:r>
-              <a:rPr sz="1100" b="0" i="0">
-                <a:solidFill>
-                  <a:srgbClr val="CCCCCC"/>
-                </a:solidFill>
-              </a:rPr>
-              <a:t>10–15 developers, QA, DevOps — 24 months
-Senior engineering director + team leads</a:t>
-            </a:r>
-          </a:p>
-        </p:txBody>
-      </p:sp>
-      <p:sp>
-        <p:nvSpPr>
-          <p:cNvPr id="46" name="Rectangle 45"/>
-          <p:cNvSpPr/>
-          <p:nvPr/>
-        </p:nvSpPr>
-        <p:spPr>
-          <a:xfrm>
-            <a:off x="640080" y="3118104"/>
-            <a:ext cx="7772400" cy="274320"/>
-          </a:xfrm>
-          <a:prstGeom prst="rect">
-            <a:avLst/>
-          </a:prstGeom>
-          <a:solidFill>
-            <a:srgbClr val="161830"/>
-          </a:solidFill>
-          <a:ln>
-            <a:noFill/>
-          </a:ln>
-        </p:spPr>
-        <p:style>
-          <a:lnRef idx="1">
-            <a:schemeClr val="accent1"/>
-          </a:lnRef>
-          <a:fillRef idx="3">
-            <a:schemeClr val="accent1"/>
-          </a:fillRef>
-          <a:effectRef idx="2">
-            <a:schemeClr val="accent1"/>
-          </a:effectRef>
-          <a:fontRef idx="minor">
-            <a:schemeClr val="lt1"/>
-          </a:fontRef>
-        </p:style>
-        <p:txBody>
-          <a:bodyPr rtlCol="0" anchor="ctr"/>
-          <a:lstStyle/>
-          <a:p>
-            <a:pPr algn="ctr"/>
-          </a:p>
-        </p:txBody>
-      </p:sp>
-      <p:sp>
-        <p:nvSpPr>
-          <p:cNvPr id="47" name="Rectangle 46"/>
-          <p:cNvSpPr/>
-          <p:nvPr/>
-        </p:nvSpPr>
-        <p:spPr>
-          <a:xfrm>
-            <a:off x="640080" y="3118104"/>
-            <a:ext cx="777240" cy="274320"/>
-          </a:xfrm>
-          <a:prstGeom prst="rect">
-            <a:avLst/>
-          </a:prstGeom>
-          <a:solidFill>
-            <a:srgbClr val="A0FFB0"/>
-          </a:solidFill>
-          <a:ln>
-            <a:noFill/>
-          </a:ln>
-        </p:spPr>
-        <p:style>
-          <a:lnRef idx="1">
-            <a:schemeClr val="accent1"/>
-          </a:lnRef>
-          <a:fillRef idx="3">
-            <a:schemeClr val="accent1"/>
-          </a:fillRef>
-          <a:effectRef idx="2">
-            <a:schemeClr val="accent1"/>
-          </a:effectRef>
-          <a:fontRef idx="minor">
-            <a:schemeClr val="lt1"/>
-          </a:fontRef>
-        </p:style>
-        <p:txBody>
-          <a:bodyPr rtlCol="0" anchor="ctr"/>
-          <a:lstStyle/>
-          <a:p>
-            <a:pPr algn="ctr"/>
-          </a:p>
-        </p:txBody>
-      </p:sp>
-      <p:sp>
-        <p:nvSpPr>
-          <p:cNvPr id="48" name="TextBox 47"/>
-          <p:cNvSpPr txBox="1"/>
-          <p:nvPr/>
-        </p:nvSpPr>
-        <p:spPr>
-          <a:xfrm>
-            <a:off x="640080" y="2843784"/>
-            <a:ext cx="5029200" cy="292608"/>
-          </a:xfrm>
-          <a:prstGeom prst="rect">
-            <a:avLst/>
-          </a:prstGeom>
-          <a:noFill/>
-        </p:spPr>
-        <p:txBody>
-          <a:bodyPr wrap="square">
-            <a:spAutoFit/>
-          </a:bodyPr>
-          <a:lstStyle/>
-          <a:p>
-            <a:pPr algn="l"/>
-            <a:r>
-              <a:rPr sz="1300" b="1" i="0">
-                <a:solidFill>
-                  <a:srgbClr val="A0FFB0"/>
-                </a:solidFill>
-              </a:rPr>
-              <a:t>U.S. Operations Office</a:t>
-            </a:r>
-          </a:p>
-        </p:txBody>
-      </p:sp>
-      <p:sp>
-        <p:nvSpPr>
-          <p:cNvPr id="49" name="TextBox 48"/>
-          <p:cNvSpPr txBox="1"/>
-          <p:nvPr/>
-        </p:nvSpPr>
-        <p:spPr>
-          <a:xfrm>
-            <a:off x="5577840" y="2843784"/>
-            <a:ext cx="2926080" cy="292608"/>
-          </a:xfrm>
-          <a:prstGeom prst="rect">
-            <a:avLst/>
-          </a:prstGeom>
-          <a:noFill/>
-        </p:spPr>
-        <p:txBody>
-          <a:bodyPr wrap="square">
-            <a:spAutoFit/>
-          </a:bodyPr>
-          <a:lstStyle/>
-          <a:p>
-            <a:pPr algn="r"/>
-            <a:r>
-              <a:rPr sz="1300" b="1" i="0">
-                <a:solidFill>
-                  <a:srgbClr val="FFFFFF"/>
-                </a:solidFill>
-              </a:rPr>
-              <a:t>$500,000  (10%)</a:t>
-            </a:r>
-          </a:p>
-        </p:txBody>
-      </p:sp>
-      <p:sp>
-        <p:nvSpPr>
-          <p:cNvPr id="50" name="TextBox 49"/>
-          <p:cNvSpPr txBox="1"/>
-          <p:nvPr/>
-        </p:nvSpPr>
-        <p:spPr>
-          <a:xfrm>
-            <a:off x="8549640" y="2916936"/>
-            <a:ext cx="3383280" cy="502920"/>
-          </a:xfrm>
-          <a:prstGeom prst="rect">
-            <a:avLst/>
-          </a:prstGeom>
-          <a:noFill/>
-        </p:spPr>
-        <p:txBody>
-          <a:bodyPr wrap="square">
-            <a:spAutoFit/>
-          </a:bodyPr>
-          <a:lstStyle/>
-          <a:p>
-            <a:pPr algn="l"/>
-            <a:r>
-              <a:rPr sz="1100" b="0" i="0">
-                <a:solidFill>
-                  <a:srgbClr val="CCCCCC"/>
-                </a:solidFill>
-              </a:rPr>
-              <a:t>New Providence, NJ headquarters — office space,
-U.S. executive team, legal entity ops, compliance</a:t>
-            </a:r>
-          </a:p>
-        </p:txBody>
-      </p:sp>
-      <p:sp>
-        <p:nvSpPr>
-          <p:cNvPr id="51" name="Rectangle 50"/>
-          <p:cNvSpPr/>
-          <p:nvPr/>
-        </p:nvSpPr>
-        <p:spPr>
-          <a:xfrm>
-            <a:off x="640080" y="3877055"/>
-            <a:ext cx="7772400" cy="274320"/>
-          </a:xfrm>
-          <a:prstGeom prst="rect">
-            <a:avLst/>
-          </a:prstGeom>
-          <a:solidFill>
-            <a:srgbClr val="161830"/>
-          </a:solidFill>
-          <a:ln>
-            <a:noFill/>
-          </a:ln>
-        </p:spPr>
-        <p:style>
-          <a:lnRef idx="1">
-            <a:schemeClr val="accent1"/>
-          </a:lnRef>
-          <a:fillRef idx="3">
-            <a:schemeClr val="accent1"/>
-          </a:fillRef>
-          <a:effectRef idx="2">
-            <a:schemeClr val="accent1"/>
-          </a:effectRef>
-          <a:fontRef idx="minor">
-            <a:schemeClr val="lt1"/>
-          </a:fontRef>
-        </p:style>
-        <p:txBody>
-          <a:bodyPr rtlCol="0" anchor="ctr"/>
-          <a:lstStyle/>
-          <a:p>
-            <a:pPr algn="ctr"/>
-          </a:p>
-        </p:txBody>
-      </p:sp>
-      <p:sp>
-        <p:nvSpPr>
-          <p:cNvPr id="52" name="Rectangle 51"/>
-          <p:cNvSpPr/>
-          <p:nvPr/>
-        </p:nvSpPr>
-        <p:spPr>
-          <a:xfrm>
-            <a:off x="640080" y="3877055"/>
-            <a:ext cx="932688" cy="274320"/>
-          </a:xfrm>
-          <a:prstGeom prst="rect">
-            <a:avLst/>
-          </a:prstGeom>
-          <a:solidFill>
-            <a:srgbClr val="7BD4FF"/>
-          </a:solidFill>
-          <a:ln>
-            <a:noFill/>
-          </a:ln>
-        </p:spPr>
-        <p:style>
-          <a:lnRef idx="1">
-            <a:schemeClr val="accent1"/>
-          </a:lnRef>
-          <a:fillRef idx="3">
-            <a:schemeClr val="accent1"/>
-          </a:fillRef>
-          <a:effectRef idx="2">
-            <a:schemeClr val="accent1"/>
-          </a:effectRef>
-          <a:fontRef idx="minor">
-            <a:schemeClr val="lt1"/>
-          </a:fontRef>
-        </p:style>
-        <p:txBody>
-          <a:bodyPr rtlCol="0" anchor="ctr"/>
-          <a:lstStyle/>
-          <a:p>
-            <a:pPr algn="ctr"/>
-          </a:p>
-        </p:txBody>
-      </p:sp>
-      <p:sp>
-        <p:nvSpPr>
-          <p:cNvPr id="53" name="TextBox 52"/>
-          <p:cNvSpPr txBox="1"/>
-          <p:nvPr/>
-        </p:nvSpPr>
-        <p:spPr>
-          <a:xfrm>
-            <a:off x="640080" y="3602735"/>
-            <a:ext cx="5029200" cy="292608"/>
-          </a:xfrm>
-          <a:prstGeom prst="rect">
-            <a:avLst/>
-          </a:prstGeom>
-          <a:noFill/>
-        </p:spPr>
-        <p:txBody>
-          <a:bodyPr wrap="square">
-            <a:spAutoFit/>
-          </a:bodyPr>
-          <a:lstStyle/>
-          <a:p>
-            <a:pPr algn="l"/>
-            <a:r>
-              <a:rPr sz="1300" b="1" i="0">
-                <a:solidFill>
-                  <a:srgbClr val="7BD4FF"/>
-                </a:solidFill>
-              </a:rPr>
-              <a:t>Platform Development</a:t>
-            </a:r>
-          </a:p>
-        </p:txBody>
-      </p:sp>
-      <p:sp>
-        <p:nvSpPr>
-          <p:cNvPr id="54" name="TextBox 53"/>
-          <p:cNvSpPr txBox="1"/>
-          <p:nvPr/>
-        </p:nvSpPr>
-        <p:spPr>
-          <a:xfrm>
-            <a:off x="5577840" y="3602735"/>
-            <a:ext cx="2926080" cy="292608"/>
-          </a:xfrm>
-          <a:prstGeom prst="rect">
-            <a:avLst/>
-          </a:prstGeom>
-          <a:noFill/>
-        </p:spPr>
-        <p:txBody>
-          <a:bodyPr wrap="square">
-            <a:spAutoFit/>
-          </a:bodyPr>
-          <a:lstStyle/>
-          <a:p>
-            <a:pPr algn="r"/>
-            <a:r>
-              <a:rPr sz="1300" b="1" i="0">
-                <a:solidFill>
-                  <a:srgbClr val="FFFFFF"/>
-                </a:solidFill>
-              </a:rPr>
-              <a:t>$600,000  (12%)</a:t>
-            </a:r>
-          </a:p>
-        </p:txBody>
-      </p:sp>
-      <p:sp>
-        <p:nvSpPr>
-          <p:cNvPr id="55" name="TextBox 54"/>
-          <p:cNvSpPr txBox="1"/>
-          <p:nvPr/>
-        </p:nvSpPr>
-        <p:spPr>
-          <a:xfrm>
-            <a:off x="8549640" y="3675887"/>
-            <a:ext cx="3383280" cy="502920"/>
-          </a:xfrm>
-          <a:prstGeom prst="rect">
-            <a:avLst/>
-          </a:prstGeom>
-          <a:noFill/>
-        </p:spPr>
-        <p:txBody>
-          <a:bodyPr wrap="square">
-            <a:spAutoFit/>
-          </a:bodyPr>
-          <a:lstStyle/>
-          <a:p>
-            <a:pPr algn="l"/>
-            <a:r>
-              <a:rPr sz="1100" b="0" i="0">
-                <a:solidFill>
-                  <a:srgbClr val="CCCCCC"/>
-                </a:solidFill>
-              </a:rPr>
-              <a:t>iOS/Android app store launch, feature roadmap
-API development, third-party integrations</a:t>
-            </a:r>
-          </a:p>
-        </p:txBody>
-      </p:sp>
-      <p:sp>
-        <p:nvSpPr>
-          <p:cNvPr id="56" name="Rectangle 55"/>
-          <p:cNvSpPr/>
-          <p:nvPr/>
-        </p:nvSpPr>
-        <p:spPr>
-          <a:xfrm>
-            <a:off x="640080" y="4636008"/>
-            <a:ext cx="7772400" cy="274320"/>
-          </a:xfrm>
-          <a:prstGeom prst="rect">
-            <a:avLst/>
-          </a:prstGeom>
-          <a:solidFill>
-            <a:srgbClr val="161830"/>
-          </a:solidFill>
-          <a:ln>
-            <a:noFill/>
-          </a:ln>
-        </p:spPr>
-        <p:style>
-          <a:lnRef idx="1">
-            <a:schemeClr val="accent1"/>
-          </a:lnRef>
-          <a:fillRef idx="3">
-            <a:schemeClr val="accent1"/>
-          </a:fillRef>
-          <a:effectRef idx="2">
-            <a:schemeClr val="accent1"/>
-          </a:effectRef>
-          <a:fontRef idx="minor">
-            <a:schemeClr val="lt1"/>
-          </a:fontRef>
-        </p:style>
-        <p:txBody>
-          <a:bodyPr rtlCol="0" anchor="ctr"/>
-          <a:lstStyle/>
-          <a:p>
-            <a:pPr algn="ctr"/>
-          </a:p>
-        </p:txBody>
-      </p:sp>
-      <p:sp>
-        <p:nvSpPr>
-          <p:cNvPr id="57" name="Rectangle 56"/>
-          <p:cNvSpPr/>
-          <p:nvPr/>
-        </p:nvSpPr>
-        <p:spPr>
-          <a:xfrm>
-            <a:off x="640080" y="4636008"/>
-            <a:ext cx="699516" cy="274320"/>
-          </a:xfrm>
-          <a:prstGeom prst="rect">
-            <a:avLst/>
-          </a:prstGeom>
-          <a:solidFill>
-            <a:srgbClr val="FFA050"/>
-          </a:solidFill>
-          <a:ln>
-            <a:noFill/>
-          </a:ln>
-        </p:spPr>
-        <p:style>
-          <a:lnRef idx="1">
-            <a:schemeClr val="accent1"/>
-          </a:lnRef>
-          <a:fillRef idx="3">
-            <a:schemeClr val="accent1"/>
-          </a:fillRef>
-          <a:effectRef idx="2">
-            <a:schemeClr val="accent1"/>
-          </a:effectRef>
-          <a:fontRef idx="minor">
-            <a:schemeClr val="lt1"/>
-          </a:fontRef>
-        </p:style>
-        <p:txBody>
-          <a:bodyPr rtlCol="0" anchor="ctr"/>
-          <a:lstStyle/>
-          <a:p>
-            <a:pPr algn="ctr"/>
-          </a:p>
-        </p:txBody>
-      </p:sp>
-      <p:sp>
-        <p:nvSpPr>
-          <p:cNvPr id="58" name="TextBox 57"/>
-          <p:cNvSpPr txBox="1"/>
-          <p:nvPr/>
-        </p:nvSpPr>
-        <p:spPr>
-          <a:xfrm>
-            <a:off x="640080" y="4361688"/>
-            <a:ext cx="5029200" cy="292608"/>
-          </a:xfrm>
-          <a:prstGeom prst="rect">
-            <a:avLst/>
-          </a:prstGeom>
-          <a:noFill/>
-        </p:spPr>
-        <p:txBody>
-          <a:bodyPr wrap="square">
-            <a:spAutoFit/>
-          </a:bodyPr>
-          <a:lstStyle/>
-          <a:p>
-            <a:pPr algn="l"/>
-            <a:r>
-              <a:rPr sz="1300" b="1" i="0">
-                <a:solidFill>
-                  <a:srgbClr val="FFA050"/>
-                </a:solidFill>
-              </a:rPr>
-              <a:t>Marketing &amp; User Acquisition</a:t>
-            </a:r>
-          </a:p>
-        </p:txBody>
-      </p:sp>
-      <p:sp>
-        <p:nvSpPr>
-          <p:cNvPr id="59" name="TextBox 58"/>
-          <p:cNvSpPr txBox="1"/>
-          <p:nvPr/>
-        </p:nvSpPr>
-        <p:spPr>
-          <a:xfrm>
-            <a:off x="5577840" y="4361688"/>
-            <a:ext cx="2926080" cy="292608"/>
-          </a:xfrm>
-          <a:prstGeom prst="rect">
-            <a:avLst/>
-          </a:prstGeom>
-          <a:noFill/>
-        </p:spPr>
-        <p:txBody>
-          <a:bodyPr wrap="square">
-            <a:spAutoFit/>
-          </a:bodyPr>
-          <a:lstStyle/>
-          <a:p>
-            <a:pPr algn="r"/>
-            <a:r>
-              <a:rPr sz="1300" b="1" i="0">
-                <a:solidFill>
-                  <a:srgbClr val="FFFFFF"/>
-                </a:solidFill>
-              </a:rPr>
-              <a:t>$450,000  (9%)</a:t>
-            </a:r>
-          </a:p>
-        </p:txBody>
-      </p:sp>
-      <p:sp>
-        <p:nvSpPr>
-          <p:cNvPr id="60" name="TextBox 59"/>
-          <p:cNvSpPr txBox="1"/>
-          <p:nvPr/>
-        </p:nvSpPr>
-        <p:spPr>
-          <a:xfrm>
-            <a:off x="8549640" y="4434840"/>
-            <a:ext cx="3383280" cy="502920"/>
-          </a:xfrm>
-          <a:prstGeom prst="rect">
-            <a:avLst/>
-          </a:prstGeom>
-          <a:noFill/>
-        </p:spPr>
-        <p:txBody>
-          <a:bodyPr wrap="square">
-            <a:spAutoFit/>
-          </a:bodyPr>
-          <a:lstStyle/>
-          <a:p>
-            <a:pPr algn="l"/>
-            <a:r>
-              <a:rPr sz="1100" b="0" i="0">
-                <a:solidFill>
-                  <a:srgbClr val="CCCCCC"/>
-                </a:solidFill>
-              </a:rPr>
-              <a:t>Creator fund seed, influencer partnerships
-Paid acquisition, diaspora community outreach</a:t>
-            </a:r>
-          </a:p>
-        </p:txBody>
-      </p:sp>
-      <p:sp>
-        <p:nvSpPr>
-          <p:cNvPr id="61" name="Rectangle 60"/>
-          <p:cNvSpPr/>
-          <p:nvPr/>
-        </p:nvSpPr>
-        <p:spPr>
-          <a:xfrm>
-            <a:off x="640080" y="5394960"/>
-            <a:ext cx="7772400" cy="274320"/>
-          </a:xfrm>
-          <a:prstGeom prst="rect">
-            <a:avLst/>
-          </a:prstGeom>
-          <a:solidFill>
-            <a:srgbClr val="161830"/>
-          </a:solidFill>
-          <a:ln>
-            <a:noFill/>
-          </a:ln>
-        </p:spPr>
-        <p:style>
-          <a:lnRef idx="1">
-            <a:schemeClr val="accent1"/>
-          </a:lnRef>
-          <a:fillRef idx="3">
-            <a:schemeClr val="accent1"/>
-          </a:fillRef>
-          <a:effectRef idx="2">
-            <a:schemeClr val="accent1"/>
-          </a:effectRef>
-          <a:fontRef idx="minor">
-            <a:schemeClr val="lt1"/>
-          </a:fontRef>
-        </p:style>
-        <p:txBody>
-          <a:bodyPr rtlCol="0" anchor="ctr"/>
-          <a:lstStyle/>
-          <a:p>
-            <a:pPr algn="ctr"/>
-          </a:p>
-        </p:txBody>
-      </p:sp>
-      <p:sp>
-        <p:nvSpPr>
-          <p:cNvPr id="62" name="Rectangle 61"/>
-          <p:cNvSpPr/>
-          <p:nvPr/>
-        </p:nvSpPr>
-        <p:spPr>
-          <a:xfrm>
-            <a:off x="640080" y="5394960"/>
-            <a:ext cx="388620" cy="274320"/>
-          </a:xfrm>
-          <a:prstGeom prst="rect">
-            <a:avLst/>
-          </a:prstGeom>
-          <a:solidFill>
-            <a:srgbClr val="CCCCCC"/>
-          </a:solidFill>
-          <a:ln>
-            <a:noFill/>
-          </a:ln>
-        </p:spPr>
-        <p:style>
-          <a:lnRef idx="1">
-            <a:schemeClr val="accent1"/>
-          </a:lnRef>
-          <a:fillRef idx="3">
-            <a:schemeClr val="accent1"/>
-          </a:fillRef>
-          <a:effectRef idx="2">
-            <a:schemeClr val="accent1"/>
-          </a:effectRef>
-          <a:fontRef idx="minor">
-            <a:schemeClr val="lt1"/>
-          </a:fontRef>
-        </p:style>
-        <p:txBody>
-          <a:bodyPr rtlCol="0" anchor="ctr"/>
-          <a:lstStyle/>
-          <a:p>
-            <a:pPr algn="ctr"/>
-          </a:p>
-        </p:txBody>
-      </p:sp>
-      <p:sp>
-        <p:nvSpPr>
-          <p:cNvPr id="63" name="TextBox 62"/>
-          <p:cNvSpPr txBox="1"/>
-          <p:nvPr/>
-        </p:nvSpPr>
-        <p:spPr>
-          <a:xfrm>
-            <a:off x="640080" y="5120640"/>
-            <a:ext cx="5029200" cy="292608"/>
-          </a:xfrm>
-          <a:prstGeom prst="rect">
-            <a:avLst/>
-          </a:prstGeom>
-          <a:noFill/>
-        </p:spPr>
-        <p:txBody>
-          <a:bodyPr wrap="square">
-            <a:spAutoFit/>
-          </a:bodyPr>
-          <a:lstStyle/>
-          <a:p>
-            <a:pPr algn="l"/>
-            <a:r>
-              <a:rPr sz="1300" b="1" i="0">
-                <a:solidFill>
-                  <a:srgbClr val="CCCCCC"/>
-                </a:solidFill>
-              </a:rPr>
-              <a:t>Operations &amp; Legal</a:t>
-            </a:r>
-          </a:p>
-        </p:txBody>
-      </p:sp>
-      <p:sp>
-        <p:nvSpPr>
-          <p:cNvPr id="64" name="TextBox 63"/>
-          <p:cNvSpPr txBox="1"/>
-          <p:nvPr/>
-        </p:nvSpPr>
-        <p:spPr>
-          <a:xfrm>
-            <a:off x="5577840" y="5120640"/>
-            <a:ext cx="2926080" cy="292608"/>
-          </a:xfrm>
-          <a:prstGeom prst="rect">
-            <a:avLst/>
-          </a:prstGeom>
-          <a:noFill/>
-        </p:spPr>
-        <p:txBody>
-          <a:bodyPr wrap="square">
-            <a:spAutoFit/>
-          </a:bodyPr>
-          <a:lstStyle/>
-          <a:p>
-            <a:pPr algn="r"/>
-            <a:r>
-              <a:rPr sz="1300" b="1" i="0">
-                <a:solidFill>
-                  <a:srgbClr val="FFFFFF"/>
-                </a:solidFill>
-              </a:rPr>
-              <a:t>$250,000  (5%)</a:t>
-            </a:r>
-          </a:p>
-        </p:txBody>
-      </p:sp>
-      <p:sp>
-        <p:nvSpPr>
-          <p:cNvPr id="65" name="TextBox 64"/>
-          <p:cNvSpPr txBox="1"/>
-          <p:nvPr/>
-        </p:nvSpPr>
-        <p:spPr>
-          <a:xfrm>
-            <a:off x="8549640" y="5193792"/>
-            <a:ext cx="3383280" cy="502920"/>
-          </a:xfrm>
-          <a:prstGeom prst="rect">
-            <a:avLst/>
-          </a:prstGeom>
-          <a:noFill/>
-        </p:spPr>
-        <p:txBody>
-          <a:bodyPr wrap="square">
-            <a:spAutoFit/>
-          </a:bodyPr>
-          <a:lstStyle/>
-          <a:p>
-            <a:pPr algn="l"/>
-            <a:r>
-              <a:rPr sz="1100" b="0" i="0">
+              <a:rPr sz="1000" b="0" i="0">
                 <a:solidFill>
                   <a:srgbClr val="CCCCCC"/>
                 </a:solidFill>
@@ -9441,14 +8608,14 @@
       </p:sp>
       <p:sp>
         <p:nvSpPr>
-          <p:cNvPr id="66" name="TextBox 65"/>
-          <p:cNvSpPr txBox="1"/>
-          <p:nvPr/>
-        </p:nvSpPr>
-        <p:spPr>
-          <a:xfrm>
-            <a:off x="640080" y="5989320"/>
-            <a:ext cx="7315200" cy="365760"/>
+          <p:cNvPr id="45" name="TextBox 44"/>
+          <p:cNvSpPr txBox="1"/>
+          <p:nvPr/>
+        </p:nvSpPr>
+        <p:spPr>
+          <a:xfrm>
+            <a:off x="640080" y="6035040"/>
+            <a:ext cx="5486400" cy="347472"/>
           </a:xfrm>
           <a:prstGeom prst="rect">
             <a:avLst/>
@@ -9468,1534 +8635,14 @@
                   <a:srgbClr val="F5C842"/>
                 </a:solidFill>
               </a:rPr>
-              <a:t>TOTAL RAISE:  ,000,000</a:t>
-            </a:r>
-          </a:p>
-        </p:txBody>
-      </p:sp>
-      <p:sp>
-        <p:nvSpPr>
-          <p:cNvPr id="67" name="Rectangle 66"/>
-          <p:cNvSpPr/>
-          <p:nvPr/>
-        </p:nvSpPr>
-        <p:spPr>
-          <a:xfrm>
-            <a:off x="0" y="1005840"/>
-            <a:ext cx="12188952" cy="5852160"/>
-          </a:xfrm>
-          <a:prstGeom prst="rect">
-            <a:avLst/>
-          </a:prstGeom>
-          <a:solidFill>
-            <a:srgbClr val="0B0C1A"/>
-          </a:solidFill>
-          <a:ln>
-            <a:noFill/>
-          </a:ln>
-        </p:spPr>
-        <p:style>
-          <a:lnRef idx="1">
-            <a:schemeClr val="accent1"/>
-          </a:lnRef>
-          <a:fillRef idx="3">
-            <a:schemeClr val="accent1"/>
-          </a:fillRef>
-          <a:effectRef idx="2">
-            <a:schemeClr val="accent1"/>
-          </a:effectRef>
-          <a:fontRef idx="minor">
-            <a:schemeClr val="lt1"/>
-          </a:fontRef>
-        </p:style>
-        <p:txBody>
-          <a:bodyPr rtlCol="0" anchor="ctr"/>
-          <a:lstStyle/>
-          <a:p>
-            <a:pPr algn="ctr"/>
-          </a:p>
-        </p:txBody>
-      </p:sp>
-      <p:sp>
-        <p:nvSpPr>
-          <p:cNvPr id="68" name="Rectangle 67"/>
-          <p:cNvSpPr/>
-          <p:nvPr/>
-        </p:nvSpPr>
-        <p:spPr>
-          <a:xfrm>
-            <a:off x="457200" y="1280160"/>
-            <a:ext cx="109728" cy="4389120"/>
-          </a:xfrm>
-          <a:prstGeom prst="rect">
-            <a:avLst/>
-          </a:prstGeom>
-          <a:solidFill>
-            <a:srgbClr val="F5C842"/>
-          </a:solidFill>
-          <a:ln>
-            <a:noFill/>
-          </a:ln>
-        </p:spPr>
-        <p:style>
-          <a:lnRef idx="1">
-            <a:schemeClr val="accent1"/>
-          </a:lnRef>
-          <a:fillRef idx="3">
-            <a:schemeClr val="accent1"/>
-          </a:fillRef>
-          <a:effectRef idx="2">
-            <a:schemeClr val="accent1"/>
-          </a:effectRef>
-          <a:fontRef idx="minor">
-            <a:schemeClr val="lt1"/>
-          </a:fontRef>
-        </p:style>
-        <p:txBody>
-          <a:bodyPr rtlCol="0" anchor="ctr"/>
-          <a:lstStyle/>
-          <a:p>
-            <a:pPr algn="ctr"/>
-          </a:p>
-        </p:txBody>
-      </p:sp>
-      <p:sp>
-        <p:nvSpPr>
-          <p:cNvPr id="69" name="Rectangle 68"/>
-          <p:cNvSpPr/>
-          <p:nvPr/>
-        </p:nvSpPr>
-        <p:spPr>
-          <a:xfrm>
-            <a:off x="640080" y="1005840"/>
-            <a:ext cx="10881360" cy="27432"/>
-          </a:xfrm>
-          <a:prstGeom prst="rect">
-            <a:avLst/>
-          </a:prstGeom>
-          <a:solidFill>
-            <a:srgbClr val="F5C842"/>
-          </a:solidFill>
-          <a:ln>
-            <a:noFill/>
-          </a:ln>
-        </p:spPr>
-        <p:style>
-          <a:lnRef idx="1">
-            <a:schemeClr val="accent1"/>
-          </a:lnRef>
-          <a:fillRef idx="3">
-            <a:schemeClr val="accent1"/>
-          </a:fillRef>
-          <a:effectRef idx="2">
-            <a:schemeClr val="accent1"/>
-          </a:effectRef>
-          <a:fontRef idx="minor">
-            <a:schemeClr val="lt1"/>
-          </a:fontRef>
-        </p:style>
-        <p:txBody>
-          <a:bodyPr rtlCol="0" anchor="ctr"/>
-          <a:lstStyle/>
-          <a:p>
-            <a:pPr algn="ctr"/>
-          </a:p>
-        </p:txBody>
-      </p:sp>
-      <p:sp>
-        <p:nvSpPr>
-          <p:cNvPr id="70" name="TextBox 69"/>
-          <p:cNvSpPr txBox="1"/>
-          <p:nvPr/>
-        </p:nvSpPr>
-        <p:spPr>
-          <a:xfrm>
-            <a:off x="777240" y="256032"/>
-            <a:ext cx="10058400" cy="594360"/>
-          </a:xfrm>
-          <a:prstGeom prst="rect">
-            <a:avLst/>
-          </a:prstGeom>
-          <a:noFill/>
-        </p:spPr>
-        <p:txBody>
-          <a:bodyPr wrap="square">
-            <a:spAutoFit/>
-          </a:bodyPr>
-          <a:lstStyle/>
-          <a:p>
-            <a:pPr algn="l"/>
-            <a:r>
-              <a:rPr sz="3600" b="1" i="0">
-                <a:solidFill>
-                  <a:srgbClr val="F5C842"/>
-                </a:solidFill>
-              </a:rPr>
-              <a:t>Use of Funds — $5M Seed Round</a:t>
-            </a:r>
-          </a:p>
-        </p:txBody>
-      </p:sp>
-      <p:sp>
-        <p:nvSpPr>
-          <p:cNvPr id="71" name="Rectangle 70"/>
-          <p:cNvSpPr/>
-          <p:nvPr/>
-        </p:nvSpPr>
-        <p:spPr>
-          <a:xfrm>
-            <a:off x="640080" y="1554480"/>
-            <a:ext cx="7315200" cy="228600"/>
-          </a:xfrm>
-          <a:prstGeom prst="rect">
-            <a:avLst/>
-          </a:prstGeom>
-          <a:solidFill>
-            <a:srgbClr val="161830"/>
-          </a:solidFill>
-          <a:ln>
-            <a:noFill/>
-          </a:ln>
-        </p:spPr>
-        <p:style>
-          <a:lnRef idx="1">
-            <a:schemeClr val="accent1"/>
-          </a:lnRef>
-          <a:fillRef idx="3">
-            <a:schemeClr val="accent1"/>
-          </a:fillRef>
-          <a:effectRef idx="2">
-            <a:schemeClr val="accent1"/>
-          </a:effectRef>
-          <a:fontRef idx="minor">
-            <a:schemeClr val="lt1"/>
-          </a:fontRef>
-        </p:style>
-        <p:txBody>
-          <a:bodyPr rtlCol="0" anchor="ctr"/>
-          <a:lstStyle/>
-          <a:p>
-            <a:pPr algn="ctr"/>
-          </a:p>
-        </p:txBody>
-      </p:sp>
-      <p:sp>
-        <p:nvSpPr>
-          <p:cNvPr id="72" name="Rectangle 71"/>
-          <p:cNvSpPr/>
-          <p:nvPr/>
-        </p:nvSpPr>
-        <p:spPr>
-          <a:xfrm>
-            <a:off x="640080" y="1554480"/>
-            <a:ext cx="2487168" cy="228600"/>
-          </a:xfrm>
-          <a:prstGeom prst="rect">
-            <a:avLst/>
-          </a:prstGeom>
-          <a:solidFill>
-            <a:srgbClr val="F5C842"/>
-          </a:solidFill>
-          <a:ln>
-            <a:noFill/>
-          </a:ln>
-        </p:spPr>
-        <p:style>
-          <a:lnRef idx="1">
-            <a:schemeClr val="accent1"/>
-          </a:lnRef>
-          <a:fillRef idx="3">
-            <a:schemeClr val="accent1"/>
-          </a:fillRef>
-          <a:effectRef idx="2">
-            <a:schemeClr val="accent1"/>
-          </a:effectRef>
-          <a:fontRef idx="minor">
-            <a:schemeClr val="lt1"/>
-          </a:fontRef>
-        </p:style>
-        <p:txBody>
-          <a:bodyPr rtlCol="0" anchor="ctr"/>
-          <a:lstStyle/>
-          <a:p>
-            <a:pPr algn="ctr"/>
-          </a:p>
-        </p:txBody>
-      </p:sp>
-      <p:sp>
-        <p:nvSpPr>
-          <p:cNvPr id="73" name="TextBox 72"/>
-          <p:cNvSpPr txBox="1"/>
-          <p:nvPr/>
-        </p:nvSpPr>
-        <p:spPr>
-          <a:xfrm>
-            <a:off x="640080" y="1298448"/>
-            <a:ext cx="5029200" cy="274320"/>
-          </a:xfrm>
-          <a:prstGeom prst="rect">
-            <a:avLst/>
-          </a:prstGeom>
-          <a:noFill/>
-        </p:spPr>
-        <p:txBody>
-          <a:bodyPr wrap="square">
-            <a:spAutoFit/>
-          </a:bodyPr>
-          <a:lstStyle/>
-          <a:p>
-            <a:pPr algn="l"/>
-            <a:r>
-              <a:rPr sz="1200" b="1" i="0">
-                <a:solidFill>
-                  <a:srgbClr val="F5C842"/>
-                </a:solidFill>
-              </a:rPr>
-              <a:t>Infrastructure &amp; Bare Metal (Colombo)</a:t>
-            </a:r>
-          </a:p>
-        </p:txBody>
-      </p:sp>
-      <p:sp>
-        <p:nvSpPr>
-          <p:cNvPr id="74" name="TextBox 73"/>
-          <p:cNvSpPr txBox="1"/>
-          <p:nvPr/>
-        </p:nvSpPr>
-        <p:spPr>
-          <a:xfrm>
-            <a:off x="5486400" y="1298448"/>
-            <a:ext cx="2651760" cy="274320"/>
-          </a:xfrm>
-          <a:prstGeom prst="rect">
-            <a:avLst/>
-          </a:prstGeom>
-          <a:noFill/>
-        </p:spPr>
-        <p:txBody>
-          <a:bodyPr wrap="square">
-            <a:spAutoFit/>
-          </a:bodyPr>
-          <a:lstStyle/>
-          <a:p>
-            <a:pPr algn="r"/>
-            <a:r>
-              <a:rPr sz="1200" b="1" i="0">
-                <a:solidFill>
-                  <a:srgbClr val="FFFFFF"/>
-                </a:solidFill>
-              </a:rPr>
-              <a:t>$1,700,000  (34%)</a:t>
-            </a:r>
-          </a:p>
-        </p:txBody>
-      </p:sp>
-      <p:sp>
-        <p:nvSpPr>
-          <p:cNvPr id="75" name="TextBox 74"/>
-          <p:cNvSpPr txBox="1"/>
-          <p:nvPr/>
-        </p:nvSpPr>
-        <p:spPr>
-          <a:xfrm>
-            <a:off x="8229600" y="1316736"/>
-            <a:ext cx="3749039" cy="457200"/>
-          </a:xfrm>
-          <a:prstGeom prst="rect">
-            <a:avLst/>
-          </a:prstGeom>
-          <a:noFill/>
-        </p:spPr>
-        <p:txBody>
-          <a:bodyPr wrap="square">
-            <a:spAutoFit/>
-          </a:bodyPr>
-          <a:lstStyle/>
-          <a:p>
-            <a:pPr algn="l"/>
-            <a:r>
-              <a:rPr sz="1050" b="0" i="0">
-                <a:solidFill>
-                  <a:srgbClr val="CCCCCC"/>
-                </a:solidFill>
-              </a:rPr>
-              <a:t>Bare metal servers, switches, networking hardware
-Colombo co-location facility + redundancy build-out</a:t>
-            </a:r>
-          </a:p>
-        </p:txBody>
-      </p:sp>
-      <p:sp>
-        <p:nvSpPr>
-          <p:cNvPr id="76" name="Rectangle 75"/>
-          <p:cNvSpPr/>
-          <p:nvPr/>
-        </p:nvSpPr>
-        <p:spPr>
-          <a:xfrm>
-            <a:off x="640080" y="2221992"/>
-            <a:ext cx="7315200" cy="228600"/>
-          </a:xfrm>
-          <a:prstGeom prst="rect">
-            <a:avLst/>
-          </a:prstGeom>
-          <a:solidFill>
-            <a:srgbClr val="161830"/>
-          </a:solidFill>
-          <a:ln>
-            <a:noFill/>
-          </a:ln>
-        </p:spPr>
-        <p:style>
-          <a:lnRef idx="1">
-            <a:schemeClr val="accent1"/>
-          </a:lnRef>
-          <a:fillRef idx="3">
-            <a:schemeClr val="accent1"/>
-          </a:fillRef>
-          <a:effectRef idx="2">
-            <a:schemeClr val="accent1"/>
-          </a:effectRef>
-          <a:fontRef idx="minor">
-            <a:schemeClr val="lt1"/>
-          </a:fontRef>
-        </p:style>
-        <p:txBody>
-          <a:bodyPr rtlCol="0" anchor="ctr"/>
-          <a:lstStyle/>
-          <a:p>
-            <a:pPr algn="ctr"/>
-          </a:p>
-        </p:txBody>
-      </p:sp>
-      <p:sp>
-        <p:nvSpPr>
-          <p:cNvPr id="77" name="Rectangle 76"/>
-          <p:cNvSpPr/>
-          <p:nvPr/>
-        </p:nvSpPr>
-        <p:spPr>
-          <a:xfrm>
-            <a:off x="640080" y="2221992"/>
-            <a:ext cx="1755648" cy="228600"/>
-          </a:xfrm>
-          <a:prstGeom prst="rect">
-            <a:avLst/>
-          </a:prstGeom>
-          <a:solidFill>
-            <a:srgbClr val="FF6B6B"/>
-          </a:solidFill>
-          <a:ln>
-            <a:noFill/>
-          </a:ln>
-        </p:spPr>
-        <p:style>
-          <a:lnRef idx="1">
-            <a:schemeClr val="accent1"/>
-          </a:lnRef>
-          <a:fillRef idx="3">
-            <a:schemeClr val="accent1"/>
-          </a:fillRef>
-          <a:effectRef idx="2">
-            <a:schemeClr val="accent1"/>
-          </a:effectRef>
-          <a:fontRef idx="minor">
-            <a:schemeClr val="lt1"/>
-          </a:fontRef>
-        </p:style>
-        <p:txBody>
-          <a:bodyPr rtlCol="0" anchor="ctr"/>
-          <a:lstStyle/>
-          <a:p>
-            <a:pPr algn="ctr"/>
-          </a:p>
-        </p:txBody>
-      </p:sp>
-      <p:sp>
-        <p:nvSpPr>
-          <p:cNvPr id="78" name="TextBox 77"/>
-          <p:cNvSpPr txBox="1"/>
-          <p:nvPr/>
-        </p:nvSpPr>
-        <p:spPr>
-          <a:xfrm>
-            <a:off x="640080" y="1965960"/>
-            <a:ext cx="5029200" cy="274320"/>
-          </a:xfrm>
-          <a:prstGeom prst="rect">
-            <a:avLst/>
-          </a:prstGeom>
-          <a:noFill/>
-        </p:spPr>
-        <p:txBody>
-          <a:bodyPr wrap="square">
-            <a:spAutoFit/>
-          </a:bodyPr>
-          <a:lstStyle/>
-          <a:p>
-            <a:pPr algn="l"/>
-            <a:r>
-              <a:rPr sz="1200" b="1" i="0">
-                <a:solidFill>
-                  <a:srgbClr val="FF6B6B"/>
-                </a:solidFill>
-              </a:rPr>
-              <a:t>Engineering Team — Colombo</a:t>
-            </a:r>
-          </a:p>
-        </p:txBody>
-      </p:sp>
-      <p:sp>
-        <p:nvSpPr>
-          <p:cNvPr id="79" name="TextBox 78"/>
-          <p:cNvSpPr txBox="1"/>
-          <p:nvPr/>
-        </p:nvSpPr>
-        <p:spPr>
-          <a:xfrm>
-            <a:off x="5486400" y="1965960"/>
-            <a:ext cx="2651760" cy="274320"/>
-          </a:xfrm>
-          <a:prstGeom prst="rect">
-            <a:avLst/>
-          </a:prstGeom>
-          <a:noFill/>
-        </p:spPr>
-        <p:txBody>
-          <a:bodyPr wrap="square">
-            <a:spAutoFit/>
-          </a:bodyPr>
-          <a:lstStyle/>
-          <a:p>
-            <a:pPr algn="r"/>
-            <a:r>
-              <a:rPr sz="1200" b="1" i="0">
-                <a:solidFill>
-                  <a:srgbClr val="FFFFFF"/>
-                </a:solidFill>
-              </a:rPr>
-              <a:t>$1,200,000  (24%)</a:t>
-            </a:r>
-          </a:p>
-        </p:txBody>
-      </p:sp>
-      <p:sp>
-        <p:nvSpPr>
-          <p:cNvPr id="80" name="TextBox 79"/>
-          <p:cNvSpPr txBox="1"/>
-          <p:nvPr/>
-        </p:nvSpPr>
-        <p:spPr>
-          <a:xfrm>
-            <a:off x="8229600" y="1984248"/>
-            <a:ext cx="3749039" cy="457200"/>
-          </a:xfrm>
-          <a:prstGeom prst="rect">
-            <a:avLst/>
-          </a:prstGeom>
-          <a:noFill/>
-        </p:spPr>
-        <p:txBody>
-          <a:bodyPr wrap="square">
-            <a:spAutoFit/>
-          </a:bodyPr>
-          <a:lstStyle/>
-          <a:p>
-            <a:pPr algn="l"/>
-            <a:r>
-              <a:rPr sz="1050" b="0" i="0">
-                <a:solidFill>
-                  <a:srgbClr val="CCCCCC"/>
-                </a:solidFill>
-              </a:rPr>
-              <a:t>10–15 developers, QA, DevOps — 24 months
-VP Engineering + team leads</a:t>
-            </a:r>
-          </a:p>
-        </p:txBody>
-      </p:sp>
-      <p:sp>
-        <p:nvSpPr>
-          <p:cNvPr id="81" name="Rectangle 80"/>
-          <p:cNvSpPr/>
-          <p:nvPr/>
-        </p:nvSpPr>
-        <p:spPr>
-          <a:xfrm>
-            <a:off x="640080" y="2889504"/>
-            <a:ext cx="7315200" cy="228600"/>
-          </a:xfrm>
-          <a:prstGeom prst="rect">
-            <a:avLst/>
-          </a:prstGeom>
-          <a:solidFill>
-            <a:srgbClr val="161830"/>
-          </a:solidFill>
-          <a:ln>
-            <a:noFill/>
-          </a:ln>
-        </p:spPr>
-        <p:style>
-          <a:lnRef idx="1">
-            <a:schemeClr val="accent1"/>
-          </a:lnRef>
-          <a:fillRef idx="3">
-            <a:schemeClr val="accent1"/>
-          </a:fillRef>
-          <a:effectRef idx="2">
-            <a:schemeClr val="accent1"/>
-          </a:effectRef>
-          <a:fontRef idx="minor">
-            <a:schemeClr val="lt1"/>
-          </a:fontRef>
-        </p:style>
-        <p:txBody>
-          <a:bodyPr rtlCol="0" anchor="ctr"/>
-          <a:lstStyle/>
-          <a:p>
-            <a:pPr algn="ctr"/>
-          </a:p>
-        </p:txBody>
-      </p:sp>
-      <p:sp>
-        <p:nvSpPr>
-          <p:cNvPr id="82" name="Rectangle 81"/>
-          <p:cNvSpPr/>
-          <p:nvPr/>
-        </p:nvSpPr>
-        <p:spPr>
-          <a:xfrm>
-            <a:off x="640080" y="2889504"/>
-            <a:ext cx="438912" cy="228600"/>
-          </a:xfrm>
-          <a:prstGeom prst="rect">
-            <a:avLst/>
-          </a:prstGeom>
-          <a:solidFill>
-            <a:srgbClr val="7BD4FF"/>
-          </a:solidFill>
-          <a:ln>
-            <a:noFill/>
-          </a:ln>
-        </p:spPr>
-        <p:style>
-          <a:lnRef idx="1">
-            <a:schemeClr val="accent1"/>
-          </a:lnRef>
-          <a:fillRef idx="3">
-            <a:schemeClr val="accent1"/>
-          </a:fillRef>
-          <a:effectRef idx="2">
-            <a:schemeClr val="accent1"/>
-          </a:effectRef>
-          <a:fontRef idx="minor">
-            <a:schemeClr val="lt1"/>
-          </a:fontRef>
-        </p:style>
-        <p:txBody>
-          <a:bodyPr rtlCol="0" anchor="ctr"/>
-          <a:lstStyle/>
-          <a:p>
-            <a:pPr algn="ctr"/>
-          </a:p>
-        </p:txBody>
-      </p:sp>
-      <p:sp>
-        <p:nvSpPr>
-          <p:cNvPr id="83" name="TextBox 82"/>
-          <p:cNvSpPr txBox="1"/>
-          <p:nvPr/>
-        </p:nvSpPr>
-        <p:spPr>
-          <a:xfrm>
-            <a:off x="640080" y="2633472"/>
-            <a:ext cx="5029200" cy="274320"/>
-          </a:xfrm>
-          <a:prstGeom prst="rect">
-            <a:avLst/>
-          </a:prstGeom>
-          <a:noFill/>
-        </p:spPr>
-        <p:txBody>
-          <a:bodyPr wrap="square">
-            <a:spAutoFit/>
-          </a:bodyPr>
-          <a:lstStyle/>
-          <a:p>
-            <a:pPr algn="l"/>
-            <a:r>
-              <a:rPr sz="1200" b="1" i="0">
-                <a:solidFill>
-                  <a:srgbClr val="7BD4FF"/>
-                </a:solidFill>
-              </a:rPr>
-              <a:t>Colombo Corporate Office</a:t>
-            </a:r>
-          </a:p>
-        </p:txBody>
-      </p:sp>
-      <p:sp>
-        <p:nvSpPr>
-          <p:cNvPr id="84" name="TextBox 83"/>
-          <p:cNvSpPr txBox="1"/>
-          <p:nvPr/>
-        </p:nvSpPr>
-        <p:spPr>
-          <a:xfrm>
-            <a:off x="5486400" y="2633472"/>
-            <a:ext cx="2651760" cy="274320"/>
-          </a:xfrm>
-          <a:prstGeom prst="rect">
-            <a:avLst/>
-          </a:prstGeom>
-          <a:noFill/>
-        </p:spPr>
-        <p:txBody>
-          <a:bodyPr wrap="square">
-            <a:spAutoFit/>
-          </a:bodyPr>
-          <a:lstStyle/>
-          <a:p>
-            <a:pPr algn="r"/>
-            <a:r>
-              <a:rPr sz="1200" b="1" i="0">
-                <a:solidFill>
-                  <a:srgbClr val="FFFFFF"/>
-                </a:solidFill>
-              </a:rPr>
-              <a:t>$300,000  (6%)</a:t>
-            </a:r>
-          </a:p>
-        </p:txBody>
-      </p:sp>
-      <p:sp>
-        <p:nvSpPr>
-          <p:cNvPr id="85" name="TextBox 84"/>
-          <p:cNvSpPr txBox="1"/>
-          <p:nvPr/>
-        </p:nvSpPr>
-        <p:spPr>
-          <a:xfrm>
-            <a:off x="8229600" y="2651760"/>
-            <a:ext cx="3749039" cy="457200"/>
-          </a:xfrm>
-          <a:prstGeom prst="rect">
-            <a:avLst/>
-          </a:prstGeom>
-          <a:noFill/>
-        </p:spPr>
-        <p:txBody>
-          <a:bodyPr wrap="square">
-            <a:spAutoFit/>
-          </a:bodyPr>
-          <a:lstStyle/>
-          <a:p>
-            <a:pPr algn="l"/>
-            <a:r>
-              <a:rPr sz="1050" b="0" i="0">
-                <a:solidFill>
-                  <a:srgbClr val="CCCCCC"/>
-                </a:solidFill>
-              </a:rPr>
-              <a:t>Office lease (Colombo 3/7), fit-out, workstations
-High-speed fiber, server room, 24-month commitment</a:t>
-            </a:r>
-          </a:p>
-        </p:txBody>
-      </p:sp>
-      <p:sp>
-        <p:nvSpPr>
-          <p:cNvPr id="86" name="Rectangle 85"/>
-          <p:cNvSpPr/>
-          <p:nvPr/>
-        </p:nvSpPr>
-        <p:spPr>
-          <a:xfrm>
-            <a:off x="640080" y="3557016"/>
-            <a:ext cx="7315200" cy="228600"/>
-          </a:xfrm>
-          <a:prstGeom prst="rect">
-            <a:avLst/>
-          </a:prstGeom>
-          <a:solidFill>
-            <a:srgbClr val="161830"/>
-          </a:solidFill>
-          <a:ln>
-            <a:noFill/>
-          </a:ln>
-        </p:spPr>
-        <p:style>
-          <a:lnRef idx="1">
-            <a:schemeClr val="accent1"/>
-          </a:lnRef>
-          <a:fillRef idx="3">
-            <a:schemeClr val="accent1"/>
-          </a:fillRef>
-          <a:effectRef idx="2">
-            <a:schemeClr val="accent1"/>
-          </a:effectRef>
-          <a:fontRef idx="minor">
-            <a:schemeClr val="lt1"/>
-          </a:fontRef>
-        </p:style>
-        <p:txBody>
-          <a:bodyPr rtlCol="0" anchor="ctr"/>
-          <a:lstStyle/>
-          <a:p>
-            <a:pPr algn="ctr"/>
-          </a:p>
-        </p:txBody>
-      </p:sp>
-      <p:sp>
-        <p:nvSpPr>
-          <p:cNvPr id="87" name="Rectangle 86"/>
-          <p:cNvSpPr/>
-          <p:nvPr/>
-        </p:nvSpPr>
-        <p:spPr>
-          <a:xfrm>
-            <a:off x="640080" y="3557016"/>
-            <a:ext cx="731520" cy="228600"/>
-          </a:xfrm>
-          <a:prstGeom prst="rect">
-            <a:avLst/>
-          </a:prstGeom>
-          <a:solidFill>
-            <a:srgbClr val="A0FFB0"/>
-          </a:solidFill>
-          <a:ln>
-            <a:noFill/>
-          </a:ln>
-        </p:spPr>
-        <p:style>
-          <a:lnRef idx="1">
-            <a:schemeClr val="accent1"/>
-          </a:lnRef>
-          <a:fillRef idx="3">
-            <a:schemeClr val="accent1"/>
-          </a:fillRef>
-          <a:effectRef idx="2">
-            <a:schemeClr val="accent1"/>
-          </a:effectRef>
-          <a:fontRef idx="minor">
-            <a:schemeClr val="lt1"/>
-          </a:fontRef>
-        </p:style>
-        <p:txBody>
-          <a:bodyPr rtlCol="0" anchor="ctr"/>
-          <a:lstStyle/>
-          <a:p>
-            <a:pPr algn="ctr"/>
-          </a:p>
-        </p:txBody>
-      </p:sp>
-      <p:sp>
-        <p:nvSpPr>
-          <p:cNvPr id="88" name="TextBox 87"/>
-          <p:cNvSpPr txBox="1"/>
-          <p:nvPr/>
-        </p:nvSpPr>
-        <p:spPr>
-          <a:xfrm>
-            <a:off x="640080" y="3300984"/>
-            <a:ext cx="5029200" cy="274320"/>
-          </a:xfrm>
-          <a:prstGeom prst="rect">
-            <a:avLst/>
-          </a:prstGeom>
-          <a:noFill/>
-        </p:spPr>
-        <p:txBody>
-          <a:bodyPr wrap="square">
-            <a:spAutoFit/>
-          </a:bodyPr>
-          <a:lstStyle/>
-          <a:p>
-            <a:pPr algn="l"/>
-            <a:r>
-              <a:rPr sz="1200" b="1" i="0">
-                <a:solidFill>
-                  <a:srgbClr val="A0FFB0"/>
-                </a:solidFill>
-              </a:rPr>
-              <a:t>U.S. Operations Office (New Jersey)</a:t>
-            </a:r>
-          </a:p>
-        </p:txBody>
-      </p:sp>
-      <p:sp>
-        <p:nvSpPr>
-          <p:cNvPr id="89" name="TextBox 88"/>
-          <p:cNvSpPr txBox="1"/>
-          <p:nvPr/>
-        </p:nvSpPr>
-        <p:spPr>
-          <a:xfrm>
-            <a:off x="5486400" y="3300984"/>
-            <a:ext cx="2651760" cy="274320"/>
-          </a:xfrm>
-          <a:prstGeom prst="rect">
-            <a:avLst/>
-          </a:prstGeom>
-          <a:noFill/>
-        </p:spPr>
-        <p:txBody>
-          <a:bodyPr wrap="square">
-            <a:spAutoFit/>
-          </a:bodyPr>
-          <a:lstStyle/>
-          <a:p>
-            <a:pPr algn="r"/>
-            <a:r>
-              <a:rPr sz="1200" b="1" i="0">
-                <a:solidFill>
-                  <a:srgbClr val="FFFFFF"/>
-                </a:solidFill>
-              </a:rPr>
-              <a:t>$500,000  (10%)</a:t>
-            </a:r>
-          </a:p>
-        </p:txBody>
-      </p:sp>
-      <p:sp>
-        <p:nvSpPr>
-          <p:cNvPr id="90" name="TextBox 89"/>
-          <p:cNvSpPr txBox="1"/>
-          <p:nvPr/>
-        </p:nvSpPr>
-        <p:spPr>
-          <a:xfrm>
-            <a:off x="8229600" y="3319272"/>
-            <a:ext cx="3749039" cy="457200"/>
-          </a:xfrm>
-          <a:prstGeom prst="rect">
-            <a:avLst/>
-          </a:prstGeom>
-          <a:noFill/>
-        </p:spPr>
-        <p:txBody>
-          <a:bodyPr wrap="square">
-            <a:spAutoFit/>
-          </a:bodyPr>
-          <a:lstStyle/>
-          <a:p>
-            <a:pPr algn="l"/>
-            <a:r>
-              <a:rPr sz="1050" b="0" i="0">
-                <a:solidFill>
-                  <a:srgbClr val="CCCCCC"/>
-                </a:solidFill>
-              </a:rPr>
-              <a:t>NJ headquarters — executive office space
-U.S. legal entity ops, compliance, admin</a:t>
-            </a:r>
-          </a:p>
-        </p:txBody>
-      </p:sp>
-      <p:sp>
-        <p:nvSpPr>
-          <p:cNvPr id="91" name="Rectangle 90"/>
-          <p:cNvSpPr/>
-          <p:nvPr/>
-        </p:nvSpPr>
-        <p:spPr>
-          <a:xfrm>
-            <a:off x="640080" y="4224528"/>
-            <a:ext cx="7315200" cy="228600"/>
-          </a:xfrm>
-          <a:prstGeom prst="rect">
-            <a:avLst/>
-          </a:prstGeom>
-          <a:solidFill>
-            <a:srgbClr val="161830"/>
-          </a:solidFill>
-          <a:ln>
-            <a:noFill/>
-          </a:ln>
-        </p:spPr>
-        <p:style>
-          <a:lnRef idx="1">
-            <a:schemeClr val="accent1"/>
-          </a:lnRef>
-          <a:fillRef idx="3">
-            <a:schemeClr val="accent1"/>
-          </a:fillRef>
-          <a:effectRef idx="2">
-            <a:schemeClr val="accent1"/>
-          </a:effectRef>
-          <a:fontRef idx="minor">
-            <a:schemeClr val="lt1"/>
-          </a:fontRef>
-        </p:style>
-        <p:txBody>
-          <a:bodyPr rtlCol="0" anchor="ctr"/>
-          <a:lstStyle/>
-          <a:p>
-            <a:pPr algn="ctr"/>
-          </a:p>
-        </p:txBody>
-      </p:sp>
-      <p:sp>
-        <p:nvSpPr>
-          <p:cNvPr id="92" name="Rectangle 91"/>
-          <p:cNvSpPr/>
-          <p:nvPr/>
-        </p:nvSpPr>
-        <p:spPr>
-          <a:xfrm>
-            <a:off x="640080" y="4224528"/>
-            <a:ext cx="877824" cy="228600"/>
-          </a:xfrm>
-          <a:prstGeom prst="rect">
-            <a:avLst/>
-          </a:prstGeom>
-          <a:solidFill>
-            <a:srgbClr val="FFA050"/>
-          </a:solidFill>
-          <a:ln>
-            <a:noFill/>
-          </a:ln>
-        </p:spPr>
-        <p:style>
-          <a:lnRef idx="1">
-            <a:schemeClr val="accent1"/>
-          </a:lnRef>
-          <a:fillRef idx="3">
-            <a:schemeClr val="accent1"/>
-          </a:fillRef>
-          <a:effectRef idx="2">
-            <a:schemeClr val="accent1"/>
-          </a:effectRef>
-          <a:fontRef idx="minor">
-            <a:schemeClr val="lt1"/>
-          </a:fontRef>
-        </p:style>
-        <p:txBody>
-          <a:bodyPr rtlCol="0" anchor="ctr"/>
-          <a:lstStyle/>
-          <a:p>
-            <a:pPr algn="ctr"/>
-          </a:p>
-        </p:txBody>
-      </p:sp>
-      <p:sp>
-        <p:nvSpPr>
-          <p:cNvPr id="93" name="TextBox 92"/>
-          <p:cNvSpPr txBox="1"/>
-          <p:nvPr/>
-        </p:nvSpPr>
-        <p:spPr>
-          <a:xfrm>
-            <a:off x="640080" y="3968496"/>
-            <a:ext cx="5029200" cy="274320"/>
-          </a:xfrm>
-          <a:prstGeom prst="rect">
-            <a:avLst/>
-          </a:prstGeom>
-          <a:noFill/>
-        </p:spPr>
-        <p:txBody>
-          <a:bodyPr wrap="square">
-            <a:spAutoFit/>
-          </a:bodyPr>
-          <a:lstStyle/>
-          <a:p>
-            <a:pPr algn="l"/>
-            <a:r>
-              <a:rPr sz="1200" b="1" i="0">
-                <a:solidFill>
-                  <a:srgbClr val="FFA050"/>
-                </a:solidFill>
-              </a:rPr>
-              <a:t>Platform Development</a:t>
-            </a:r>
-          </a:p>
-        </p:txBody>
-      </p:sp>
-      <p:sp>
-        <p:nvSpPr>
-          <p:cNvPr id="94" name="TextBox 93"/>
-          <p:cNvSpPr txBox="1"/>
-          <p:nvPr/>
-        </p:nvSpPr>
-        <p:spPr>
-          <a:xfrm>
-            <a:off x="5486400" y="3968496"/>
-            <a:ext cx="2651760" cy="274320"/>
-          </a:xfrm>
-          <a:prstGeom prst="rect">
-            <a:avLst/>
-          </a:prstGeom>
-          <a:noFill/>
-        </p:spPr>
-        <p:txBody>
-          <a:bodyPr wrap="square">
-            <a:spAutoFit/>
-          </a:bodyPr>
-          <a:lstStyle/>
-          <a:p>
-            <a:pPr algn="r"/>
-            <a:r>
-              <a:rPr sz="1200" b="1" i="0">
-                <a:solidFill>
-                  <a:srgbClr val="FFFFFF"/>
-                </a:solidFill>
-              </a:rPr>
-              <a:t>$600,000  (12%)</a:t>
-            </a:r>
-          </a:p>
-        </p:txBody>
-      </p:sp>
-      <p:sp>
-        <p:nvSpPr>
-          <p:cNvPr id="95" name="TextBox 94"/>
-          <p:cNvSpPr txBox="1"/>
-          <p:nvPr/>
-        </p:nvSpPr>
-        <p:spPr>
-          <a:xfrm>
-            <a:off x="8229600" y="3986784"/>
-            <a:ext cx="3749039" cy="457200"/>
-          </a:xfrm>
-          <a:prstGeom prst="rect">
-            <a:avLst/>
-          </a:prstGeom>
-          <a:noFill/>
-        </p:spPr>
-        <p:txBody>
-          <a:bodyPr wrap="square">
-            <a:spAutoFit/>
-          </a:bodyPr>
-          <a:lstStyle/>
-          <a:p>
-            <a:pPr algn="l"/>
-            <a:r>
-              <a:rPr sz="1050" b="0" i="0">
-                <a:solidFill>
-                  <a:srgbClr val="CCCCCC"/>
-                </a:solidFill>
-              </a:rPr>
-              <a:t>iOS/Android App Store launch, feature roadmap
-API development, third-party integrations</a:t>
-            </a:r>
-          </a:p>
-        </p:txBody>
-      </p:sp>
-      <p:sp>
-        <p:nvSpPr>
-          <p:cNvPr id="96" name="Rectangle 95"/>
-          <p:cNvSpPr/>
-          <p:nvPr/>
-        </p:nvSpPr>
-        <p:spPr>
-          <a:xfrm>
-            <a:off x="640080" y="4892040"/>
-            <a:ext cx="7315200" cy="228600"/>
-          </a:xfrm>
-          <a:prstGeom prst="rect">
-            <a:avLst/>
-          </a:prstGeom>
-          <a:solidFill>
-            <a:srgbClr val="161830"/>
-          </a:solidFill>
-          <a:ln>
-            <a:noFill/>
-          </a:ln>
-        </p:spPr>
-        <p:style>
-          <a:lnRef idx="1">
-            <a:schemeClr val="accent1"/>
-          </a:lnRef>
-          <a:fillRef idx="3">
-            <a:schemeClr val="accent1"/>
-          </a:fillRef>
-          <a:effectRef idx="2">
-            <a:schemeClr val="accent1"/>
-          </a:effectRef>
-          <a:fontRef idx="minor">
-            <a:schemeClr val="lt1"/>
-          </a:fontRef>
-        </p:style>
-        <p:txBody>
-          <a:bodyPr rtlCol="0" anchor="ctr"/>
-          <a:lstStyle/>
-          <a:p>
-            <a:pPr algn="ctr"/>
-          </a:p>
-        </p:txBody>
-      </p:sp>
-      <p:sp>
-        <p:nvSpPr>
-          <p:cNvPr id="97" name="Rectangle 96"/>
-          <p:cNvSpPr/>
-          <p:nvPr/>
-        </p:nvSpPr>
-        <p:spPr>
-          <a:xfrm>
-            <a:off x="640080" y="4892040"/>
-            <a:ext cx="658368" cy="228600"/>
-          </a:xfrm>
-          <a:prstGeom prst="rect">
-            <a:avLst/>
-          </a:prstGeom>
-          <a:solidFill>
-            <a:srgbClr val="FFD700"/>
-          </a:solidFill>
-          <a:ln>
-            <a:noFill/>
-          </a:ln>
-        </p:spPr>
-        <p:style>
-          <a:lnRef idx="1">
-            <a:schemeClr val="accent1"/>
-          </a:lnRef>
-          <a:fillRef idx="3">
-            <a:schemeClr val="accent1"/>
-          </a:fillRef>
-          <a:effectRef idx="2">
-            <a:schemeClr val="accent1"/>
-          </a:effectRef>
-          <a:fontRef idx="minor">
-            <a:schemeClr val="lt1"/>
-          </a:fontRef>
-        </p:style>
-        <p:txBody>
-          <a:bodyPr rtlCol="0" anchor="ctr"/>
-          <a:lstStyle/>
-          <a:p>
-            <a:pPr algn="ctr"/>
-          </a:p>
-        </p:txBody>
-      </p:sp>
-      <p:sp>
-        <p:nvSpPr>
-          <p:cNvPr id="98" name="TextBox 97"/>
-          <p:cNvSpPr txBox="1"/>
-          <p:nvPr/>
-        </p:nvSpPr>
-        <p:spPr>
-          <a:xfrm>
-            <a:off x="640080" y="4636008"/>
-            <a:ext cx="5029200" cy="274320"/>
-          </a:xfrm>
-          <a:prstGeom prst="rect">
-            <a:avLst/>
-          </a:prstGeom>
-          <a:noFill/>
-        </p:spPr>
-        <p:txBody>
-          <a:bodyPr wrap="square">
-            <a:spAutoFit/>
-          </a:bodyPr>
-          <a:lstStyle/>
-          <a:p>
-            <a:pPr algn="l"/>
-            <a:r>
-              <a:rPr sz="1200" b="1" i="0">
-                <a:solidFill>
-                  <a:srgbClr val="FFD700"/>
-                </a:solidFill>
-              </a:rPr>
-              <a:t>Marketing &amp; User Acquisition</a:t>
-            </a:r>
-          </a:p>
-        </p:txBody>
-      </p:sp>
-      <p:sp>
-        <p:nvSpPr>
-          <p:cNvPr id="99" name="TextBox 98"/>
-          <p:cNvSpPr txBox="1"/>
-          <p:nvPr/>
-        </p:nvSpPr>
-        <p:spPr>
-          <a:xfrm>
-            <a:off x="5486400" y="4636008"/>
-            <a:ext cx="2651760" cy="274320"/>
-          </a:xfrm>
-          <a:prstGeom prst="rect">
-            <a:avLst/>
-          </a:prstGeom>
-          <a:noFill/>
-        </p:spPr>
-        <p:txBody>
-          <a:bodyPr wrap="square">
-            <a:spAutoFit/>
-          </a:bodyPr>
-          <a:lstStyle/>
-          <a:p>
-            <a:pPr algn="r"/>
-            <a:r>
-              <a:rPr sz="1200" b="1" i="0">
-                <a:solidFill>
-                  <a:srgbClr val="FFFFFF"/>
-                </a:solidFill>
-              </a:rPr>
-              <a:t>$450,000  (9%)</a:t>
-            </a:r>
-          </a:p>
-        </p:txBody>
-      </p:sp>
-      <p:sp>
-        <p:nvSpPr>
-          <p:cNvPr id="100" name="TextBox 99"/>
-          <p:cNvSpPr txBox="1"/>
-          <p:nvPr/>
-        </p:nvSpPr>
-        <p:spPr>
-          <a:xfrm>
-            <a:off x="8229600" y="4654296"/>
-            <a:ext cx="3749039" cy="457200"/>
-          </a:xfrm>
-          <a:prstGeom prst="rect">
-            <a:avLst/>
-          </a:prstGeom>
-          <a:noFill/>
-        </p:spPr>
-        <p:txBody>
-          <a:bodyPr wrap="square">
-            <a:spAutoFit/>
-          </a:bodyPr>
-          <a:lstStyle/>
-          <a:p>
-            <a:pPr algn="l"/>
-            <a:r>
-              <a:rPr sz="1050" b="0" i="0">
-                <a:solidFill>
-                  <a:srgbClr val="CCCCCC"/>
-                </a:solidFill>
-              </a:rPr>
-              <a:t>Creator fund seed, influencer partnerships
-Paid acquisition, diaspora community outreach</a:t>
-            </a:r>
-          </a:p>
-        </p:txBody>
-      </p:sp>
-      <p:sp>
-        <p:nvSpPr>
-          <p:cNvPr id="101" name="Rectangle 100"/>
-          <p:cNvSpPr/>
-          <p:nvPr/>
-        </p:nvSpPr>
-        <p:spPr>
-          <a:xfrm>
-            <a:off x="640080" y="5559552"/>
-            <a:ext cx="7315200" cy="228600"/>
-          </a:xfrm>
-          <a:prstGeom prst="rect">
-            <a:avLst/>
-          </a:prstGeom>
-          <a:solidFill>
-            <a:srgbClr val="161830"/>
-          </a:solidFill>
-          <a:ln>
-            <a:noFill/>
-          </a:ln>
-        </p:spPr>
-        <p:style>
-          <a:lnRef idx="1">
-            <a:schemeClr val="accent1"/>
-          </a:lnRef>
-          <a:fillRef idx="3">
-            <a:schemeClr val="accent1"/>
-          </a:fillRef>
-          <a:effectRef idx="2">
-            <a:schemeClr val="accent1"/>
-          </a:effectRef>
-          <a:fontRef idx="minor">
-            <a:schemeClr val="lt1"/>
-          </a:fontRef>
-        </p:style>
-        <p:txBody>
-          <a:bodyPr rtlCol="0" anchor="ctr"/>
-          <a:lstStyle/>
-          <a:p>
-            <a:pPr algn="ctr"/>
-          </a:p>
-        </p:txBody>
-      </p:sp>
-      <p:sp>
-        <p:nvSpPr>
-          <p:cNvPr id="102" name="Rectangle 101"/>
-          <p:cNvSpPr/>
-          <p:nvPr/>
-        </p:nvSpPr>
-        <p:spPr>
-          <a:xfrm>
-            <a:off x="640080" y="5559552"/>
-            <a:ext cx="365760" cy="228600"/>
-          </a:xfrm>
-          <a:prstGeom prst="rect">
-            <a:avLst/>
-          </a:prstGeom>
-          <a:solidFill>
-            <a:srgbClr val="CCCCCC"/>
-          </a:solidFill>
-          <a:ln>
-            <a:noFill/>
-          </a:ln>
-        </p:spPr>
-        <p:style>
-          <a:lnRef idx="1">
-            <a:schemeClr val="accent1"/>
-          </a:lnRef>
-          <a:fillRef idx="3">
-            <a:schemeClr val="accent1"/>
-          </a:fillRef>
-          <a:effectRef idx="2">
-            <a:schemeClr val="accent1"/>
-          </a:effectRef>
-          <a:fontRef idx="minor">
-            <a:schemeClr val="lt1"/>
-          </a:fontRef>
-        </p:style>
-        <p:txBody>
-          <a:bodyPr rtlCol="0" anchor="ctr"/>
-          <a:lstStyle/>
-          <a:p>
-            <a:pPr algn="ctr"/>
-          </a:p>
-        </p:txBody>
-      </p:sp>
-      <p:sp>
-        <p:nvSpPr>
-          <p:cNvPr id="103" name="TextBox 102"/>
-          <p:cNvSpPr txBox="1"/>
-          <p:nvPr/>
-        </p:nvSpPr>
-        <p:spPr>
-          <a:xfrm>
-            <a:off x="640080" y="5303520"/>
-            <a:ext cx="5029200" cy="274320"/>
-          </a:xfrm>
-          <a:prstGeom prst="rect">
-            <a:avLst/>
-          </a:prstGeom>
-          <a:noFill/>
-        </p:spPr>
-        <p:txBody>
-          <a:bodyPr wrap="square">
-            <a:spAutoFit/>
-          </a:bodyPr>
-          <a:lstStyle/>
-          <a:p>
-            <a:pPr algn="l"/>
-            <a:r>
-              <a:rPr sz="1200" b="1" i="0">
-                <a:solidFill>
-                  <a:srgbClr val="CCCCCC"/>
-                </a:solidFill>
-              </a:rPr>
-              <a:t>Operations &amp; Legal</a:t>
-            </a:r>
-          </a:p>
-        </p:txBody>
-      </p:sp>
-      <p:sp>
-        <p:nvSpPr>
-          <p:cNvPr id="104" name="TextBox 103"/>
-          <p:cNvSpPr txBox="1"/>
-          <p:nvPr/>
-        </p:nvSpPr>
-        <p:spPr>
-          <a:xfrm>
-            <a:off x="5486400" y="5303520"/>
-            <a:ext cx="2651760" cy="274320"/>
-          </a:xfrm>
-          <a:prstGeom prst="rect">
-            <a:avLst/>
-          </a:prstGeom>
-          <a:noFill/>
-        </p:spPr>
-        <p:txBody>
-          <a:bodyPr wrap="square">
-            <a:spAutoFit/>
-          </a:bodyPr>
-          <a:lstStyle/>
-          <a:p>
-            <a:pPr algn="r"/>
-            <a:r>
-              <a:rPr sz="1200" b="1" i="0">
-                <a:solidFill>
-                  <a:srgbClr val="FFFFFF"/>
-                </a:solidFill>
-              </a:rPr>
-              <a:t>$250,000  (5%)</a:t>
-            </a:r>
-          </a:p>
-        </p:txBody>
-      </p:sp>
-      <p:sp>
-        <p:nvSpPr>
-          <p:cNvPr id="105" name="TextBox 104"/>
-          <p:cNvSpPr txBox="1"/>
-          <p:nvPr/>
-        </p:nvSpPr>
-        <p:spPr>
-          <a:xfrm>
-            <a:off x="8229600" y="5321808"/>
-            <a:ext cx="3749039" cy="457200"/>
-          </a:xfrm>
-          <a:prstGeom prst="rect">
-            <a:avLst/>
-          </a:prstGeom>
-          <a:noFill/>
-        </p:spPr>
-        <p:txBody>
-          <a:bodyPr wrap="square">
-            <a:spAutoFit/>
-          </a:bodyPr>
-          <a:lstStyle/>
-          <a:p>
-            <a:pPr algn="l"/>
-            <a:r>
-              <a:rPr sz="1050" b="0" i="0">
-                <a:solidFill>
-                  <a:srgbClr val="CCCCCC"/>
-                </a:solidFill>
-              </a:rPr>
-              <a:t>Trademark filings, legal counsel, accounting
-Compliance, insurance, executive admin</a:t>
-            </a:r>
-          </a:p>
-        </p:txBody>
-      </p:sp>
-      <p:sp>
-        <p:nvSpPr>
-          <p:cNvPr id="106" name="TextBox 105"/>
-          <p:cNvSpPr txBox="1"/>
-          <p:nvPr/>
-        </p:nvSpPr>
-        <p:spPr>
-          <a:xfrm>
-            <a:off x="640080" y="6016752"/>
-            <a:ext cx="7315200" cy="347472"/>
-          </a:xfrm>
-          <a:prstGeom prst="rect">
-            <a:avLst/>
-          </a:prstGeom>
-          <a:noFill/>
-        </p:spPr>
-        <p:txBody>
-          <a:bodyPr wrap="square">
-            <a:spAutoFit/>
-          </a:bodyPr>
-          <a:lstStyle/>
-          <a:p>
-            <a:pPr algn="l"/>
-            <a:r>
-              <a:rPr sz="1400" b="1" i="0">
-                <a:solidFill>
-                  <a:srgbClr val="F5C842"/>
-                </a:solidFill>
-              </a:rPr>
-              <a:t>TOTAL:  $5,000,000</a:t>
+              <a:t>TOTAL:  USD 5,000,000</a:t>
             </a:r>
           </a:p>
         </p:txBody>
       </p:sp>
       <p:pic>
         <p:nvPicPr>
-          <p:cNvPr id="107" name="Picture 106" descr="sachi_logo_transparent.png"/>
+          <p:cNvPr id="46" name="Picture 45" descr="image.png"/>
           <p:cNvPicPr>
             <a:picLocks noChangeAspect="1"/>
           </p:cNvPicPr>
@@ -11009,7 +8656,7 @@
         </p:blipFill>
         <p:spPr>
           <a:xfrm>
-            <a:off x="11430000" y="109728"/>
+            <a:off x="11430000" y="91440"/>
             <a:ext cx="594360" cy="594360"/>
           </a:xfrm>
           <a:prstGeom prst="rect">
@@ -15227,7 +12874,7 @@
       </p:sp>
       <p:pic>
         <p:nvPicPr>
-          <p:cNvPr id="108" name="Picture 107" descr="sachi_logo_transparent.png"/>
+          <p:cNvPr id="108" name="Picture 107" descr="image.png"/>
           <p:cNvPicPr>
             <a:picLocks noChangeAspect="1"/>
           </p:cNvPicPr>
@@ -15241,7 +12888,7 @@
         </p:blipFill>
         <p:spPr>
           <a:xfrm>
-            <a:off x="11430000" y="109728"/>
+            <a:off x="11430000" y="91440"/>
             <a:ext cx="594360" cy="594360"/>
           </a:xfrm>
           <a:prstGeom prst="rect">
@@ -19347,7 +16994,7 @@
       </p:sp>
       <p:pic>
         <p:nvPicPr>
-          <p:cNvPr id="105" name="Picture 104" descr="sachi_logo_transparent.png"/>
+          <p:cNvPr id="105" name="Picture 104" descr="image.png"/>
           <p:cNvPicPr>
             <a:picLocks noChangeAspect="1"/>
           </p:cNvPicPr>
@@ -19361,7 +17008,7 @@
         </p:blipFill>
         <p:spPr>
           <a:xfrm>
-            <a:off x="11430000" y="109728"/>
+            <a:off x="11430000" y="91440"/>
             <a:ext cx="594360" cy="594360"/>
           </a:xfrm>
           <a:prstGeom prst="rect">
@@ -20863,7 +18510,7 @@
       </p:sp>
       <p:pic>
         <p:nvPicPr>
-          <p:cNvPr id="40" name="Picture 39" descr="sachi_logo_transparent.png"/>
+          <p:cNvPr id="40" name="Picture 39" descr="image.png"/>
           <p:cNvPicPr>
             <a:picLocks noChangeAspect="1"/>
           </p:cNvPicPr>
@@ -20877,7 +18524,7 @@
         </p:blipFill>
         <p:spPr>
           <a:xfrm>
-            <a:off x="11430000" y="109728"/>
+            <a:off x="11430000" y="91440"/>
             <a:ext cx="594360" cy="594360"/>
           </a:xfrm>
           <a:prstGeom prst="rect">
@@ -20954,8 +18601,8 @@
         </p:nvSpPr>
         <p:spPr>
           <a:xfrm>
-            <a:off x="0" y="6309360"/>
-            <a:ext cx="12188952" cy="64008"/>
+            <a:off x="0" y="0"/>
+            <a:ext cx="12188952" cy="45720"/>
           </a:xfrm>
           <a:prstGeom prst="rect">
             <a:avLst/>
@@ -20997,8 +18644,8 @@
         </p:nvSpPr>
         <p:spPr>
           <a:xfrm>
-            <a:off x="457200" y="1280160"/>
-            <a:ext cx="109728" cy="4114800"/>
+            <a:off x="0" y="6812280"/>
+            <a:ext cx="12188952" cy="45720"/>
           </a:xfrm>
           <a:prstGeom prst="rect">
             <a:avLst/>
@@ -21034,48 +18681,14 @@
       </p:sp>
       <p:sp>
         <p:nvSpPr>
-          <p:cNvPr id="5" name="TextBox 4"/>
-          <p:cNvSpPr txBox="1"/>
-          <p:nvPr/>
-        </p:nvSpPr>
-        <p:spPr>
-          <a:xfrm>
-            <a:off x="777240" y="274320"/>
-            <a:ext cx="9144000" cy="594360"/>
-          </a:xfrm>
-          <a:prstGeom prst="rect">
-            <a:avLst/>
-          </a:prstGeom>
-          <a:noFill/>
-        </p:spPr>
-        <p:txBody>
-          <a:bodyPr wrap="square">
-            <a:spAutoFit/>
-          </a:bodyPr>
-          <a:lstStyle/>
-          <a:p>
-            <a:pPr algn="l"/>
-            <a:r>
-              <a:rPr sz="3600" b="1" i="0">
-                <a:solidFill>
-                  <a:srgbClr val="F5C842"/>
-                </a:solidFill>
-              </a:rPr>
-              <a:t>The Ask</a:t>
-            </a:r>
-          </a:p>
-        </p:txBody>
-      </p:sp>
-      <p:sp>
-        <p:nvSpPr>
-          <p:cNvPr id="6" name="Rectangle 5"/>
+          <p:cNvPr id="5" name="Rectangle 4"/>
           <p:cNvSpPr/>
           <p:nvPr/>
         </p:nvSpPr>
         <p:spPr>
           <a:xfrm>
-            <a:off x="640080" y="1005840"/>
-            <a:ext cx="10881360" cy="27432"/>
+            <a:off x="0" y="6309360"/>
+            <a:ext cx="12188952" cy="64008"/>
           </a:xfrm>
           <a:prstGeom prst="rect">
             <a:avLst/>
@@ -21111,82 +18724,202 @@
       </p:sp>
       <p:sp>
         <p:nvSpPr>
-          <p:cNvPr id="7" name="TextBox 6"/>
-          <p:cNvSpPr txBox="1"/>
-          <p:nvPr/>
-        </p:nvSpPr>
-        <p:spPr>
-          <a:xfrm>
-            <a:off x="777240" y="1188720"/>
-            <a:ext cx="10515600" cy="914400"/>
-          </a:xfrm>
-          <a:prstGeom prst="rect">
-            <a:avLst/>
-          </a:prstGeom>
-          <a:noFill/>
-        </p:spPr>
-        <p:txBody>
-          <a:bodyPr wrap="square">
-            <a:spAutoFit/>
-          </a:bodyPr>
-          <a:lstStyle/>
-          <a:p>
-            <a:pPr algn="ctr"/>
-            <a:r>
-              <a:rPr sz="6400" b="1" i="0">
+          <p:cNvPr id="6" name="Rectangle 5"/>
+          <p:cNvSpPr/>
+          <p:nvPr/>
+        </p:nvSpPr>
+        <p:spPr>
+          <a:xfrm>
+            <a:off x="457200" y="1280160"/>
+            <a:ext cx="109728" cy="4389120"/>
+          </a:xfrm>
+          <a:prstGeom prst="rect">
+            <a:avLst/>
+          </a:prstGeom>
+          <a:solidFill>
+            <a:srgbClr val="F5C842"/>
+          </a:solidFill>
+          <a:ln>
+            <a:noFill/>
+          </a:ln>
+        </p:spPr>
+        <p:style>
+          <a:lnRef idx="1">
+            <a:schemeClr val="accent1"/>
+          </a:lnRef>
+          <a:fillRef idx="3">
+            <a:schemeClr val="accent1"/>
+          </a:fillRef>
+          <a:effectRef idx="2">
+            <a:schemeClr val="accent1"/>
+          </a:effectRef>
+          <a:fontRef idx="minor">
+            <a:schemeClr val="lt1"/>
+          </a:fontRef>
+        </p:style>
+        <p:txBody>
+          <a:bodyPr rtlCol="0" anchor="ctr"/>
+          <a:lstStyle/>
+          <a:p>
+            <a:pPr algn="ctr"/>
+          </a:p>
+        </p:txBody>
+      </p:sp>
+      <p:sp>
+        <p:nvSpPr>
+          <p:cNvPr id="7" name="Rectangle 6"/>
+          <p:cNvSpPr/>
+          <p:nvPr/>
+        </p:nvSpPr>
+        <p:spPr>
+          <a:xfrm>
+            <a:off x="640080" y="987552"/>
+            <a:ext cx="10881360" cy="27432"/>
+          </a:xfrm>
+          <a:prstGeom prst="rect">
+            <a:avLst/>
+          </a:prstGeom>
+          <a:solidFill>
+            <a:srgbClr val="F5C842"/>
+          </a:solidFill>
+          <a:ln>
+            <a:noFill/>
+          </a:ln>
+        </p:spPr>
+        <p:style>
+          <a:lnRef idx="1">
+            <a:schemeClr val="accent1"/>
+          </a:lnRef>
+          <a:fillRef idx="3">
+            <a:schemeClr val="accent1"/>
+          </a:fillRef>
+          <a:effectRef idx="2">
+            <a:schemeClr val="accent1"/>
+          </a:effectRef>
+          <a:fontRef idx="minor">
+            <a:schemeClr val="lt1"/>
+          </a:fontRef>
+        </p:style>
+        <p:txBody>
+          <a:bodyPr rtlCol="0" anchor="ctr"/>
+          <a:lstStyle/>
+          <a:p>
+            <a:pPr algn="ctr"/>
+          </a:p>
+        </p:txBody>
+      </p:sp>
+      <p:sp>
+        <p:nvSpPr>
+          <p:cNvPr id="9" name="TextBox 8"/>
+          <p:cNvSpPr txBox="1"/>
+          <p:nvPr/>
+        </p:nvSpPr>
+        <p:spPr>
+          <a:xfrm>
+            <a:off x="777240" y="201168"/>
+            <a:ext cx="9144000" cy="640080"/>
+          </a:xfrm>
+          <a:prstGeom prst="rect">
+            <a:avLst/>
+          </a:prstGeom>
+          <a:noFill/>
+        </p:spPr>
+        <p:txBody>
+          <a:bodyPr wrap="square">
+            <a:spAutoFit/>
+          </a:bodyPr>
+          <a:lstStyle/>
+          <a:p>
+            <a:pPr algn="l"/>
+            <a:r>
+              <a:rPr sz="3400" b="1" i="0">
                 <a:solidFill>
                   <a:srgbClr val="F5C842"/>
                 </a:solidFill>
               </a:rPr>
-              <a:t>$5,000,000</a:t>
-            </a:r>
-          </a:p>
-        </p:txBody>
-      </p:sp>
-      <p:sp>
-        <p:nvSpPr>
-          <p:cNvPr id="8" name="TextBox 7"/>
-          <p:cNvSpPr txBox="1"/>
-          <p:nvPr/>
-        </p:nvSpPr>
-        <p:spPr>
-          <a:xfrm>
-            <a:off x="777240" y="2103120"/>
-            <a:ext cx="10515600" cy="411480"/>
-          </a:xfrm>
-          <a:prstGeom prst="rect">
-            <a:avLst/>
-          </a:prstGeom>
-          <a:noFill/>
-        </p:spPr>
-        <p:txBody>
-          <a:bodyPr wrap="square">
-            <a:spAutoFit/>
-          </a:bodyPr>
-          <a:lstStyle/>
-          <a:p>
-            <a:pPr algn="ctr"/>
-            <a:r>
-              <a:rPr sz="1800" b="0" i="0">
+              <a:t>The Ask</a:t>
+            </a:r>
+          </a:p>
+        </p:txBody>
+      </p:sp>
+      <p:sp>
+        <p:nvSpPr>
+          <p:cNvPr id="10" name="TextBox 9"/>
+          <p:cNvSpPr txBox="1"/>
+          <p:nvPr/>
+        </p:nvSpPr>
+        <p:spPr>
+          <a:xfrm>
+            <a:off x="777240" y="1097280"/>
+            <a:ext cx="10515600" cy="822960"/>
+          </a:xfrm>
+          <a:prstGeom prst="rect">
+            <a:avLst/>
+          </a:prstGeom>
+          <a:noFill/>
+        </p:spPr>
+        <p:txBody>
+          <a:bodyPr wrap="square">
+            <a:spAutoFit/>
+          </a:bodyPr>
+          <a:lstStyle/>
+          <a:p>
+            <a:pPr algn="ctr"/>
+            <a:r>
+              <a:rPr sz="5000" b="1" i="0">
+                <a:solidFill>
+                  <a:srgbClr val="F5C842"/>
+                </a:solidFill>
+              </a:rPr>
+              <a:t>USD 10,000,000  Total Raise</a:t>
+            </a:r>
+          </a:p>
+        </p:txBody>
+      </p:sp>
+      <p:sp>
+        <p:nvSpPr>
+          <p:cNvPr id="11" name="TextBox 10"/>
+          <p:cNvSpPr txBox="1"/>
+          <p:nvPr/>
+        </p:nvSpPr>
+        <p:spPr>
+          <a:xfrm>
+            <a:off x="777240" y="1965960"/>
+            <a:ext cx="10515600" cy="365760"/>
+          </a:xfrm>
+          <a:prstGeom prst="rect">
+            <a:avLst/>
+          </a:prstGeom>
+          <a:noFill/>
+        </p:spPr>
+        <p:txBody>
+          <a:bodyPr wrap="square">
+            <a:spAutoFit/>
+          </a:bodyPr>
+          <a:lstStyle/>
+          <a:p>
+            <a:pPr algn="ctr"/>
+            <a:r>
+              <a:rPr sz="1500" b="0" i="0">
                 <a:solidFill>
                   <a:srgbClr val="CCCCCC"/>
                 </a:solidFill>
               </a:rPr>
-              <a:t>Seed Round  ·  LDNA Consulting LLC  ·  May 2026</a:t>
-            </a:r>
-          </a:p>
-        </p:txBody>
-      </p:sp>
-      <p:sp>
-        <p:nvSpPr>
-          <p:cNvPr id="9" name="Rectangle 8"/>
+              <a:t>Two-Round Structure  |  LDNA Consulting LLC  |  2026-2027</a:t>
+            </a:r>
+          </a:p>
+        </p:txBody>
+      </p:sp>
+      <p:sp>
+        <p:nvSpPr>
+          <p:cNvPr id="12" name="Rectangle 11"/>
           <p:cNvSpPr/>
           <p:nvPr/>
         </p:nvSpPr>
         <p:spPr>
           <a:xfrm>
-            <a:off x="640080" y="2651760"/>
-            <a:ext cx="10881360" cy="27432"/>
+            <a:off x="777240" y="2423160"/>
+            <a:ext cx="10515600" cy="27432"/>
           </a:xfrm>
           <a:prstGeom prst="rect">
             <a:avLst/>
@@ -21222,915 +18955,14 @@
       </p:sp>
       <p:sp>
         <p:nvSpPr>
-          <p:cNvPr id="10" name="Rectangle 9"/>
+          <p:cNvPr id="13" name="Rectangle 12"/>
           <p:cNvSpPr/>
           <p:nvPr/>
         </p:nvSpPr>
         <p:spPr>
           <a:xfrm>
-            <a:off x="640080" y="2926080"/>
-            <a:ext cx="3520440" cy="3246120"/>
-          </a:xfrm>
-          <a:prstGeom prst="rect">
-            <a:avLst/>
-          </a:prstGeom>
-          <a:solidFill>
-            <a:srgbClr val="161830"/>
-          </a:solidFill>
-          <a:ln w="19050">
-            <a:solidFill>
-              <a:srgbClr val="F5C842"/>
-            </a:solidFill>
-          </a:ln>
-        </p:spPr>
-        <p:style>
-          <a:lnRef idx="1">
-            <a:schemeClr val="accent1"/>
-          </a:lnRef>
-          <a:fillRef idx="3">
-            <a:schemeClr val="accent1"/>
-          </a:fillRef>
-          <a:effectRef idx="2">
-            <a:schemeClr val="accent1"/>
-          </a:effectRef>
-          <a:fontRef idx="minor">
-            <a:schemeClr val="lt1"/>
-          </a:fontRef>
-        </p:style>
-        <p:txBody>
-          <a:bodyPr rtlCol="0" anchor="ctr"/>
-          <a:lstStyle/>
-          <a:p>
-            <a:pPr algn="ctr"/>
-          </a:p>
-        </p:txBody>
-      </p:sp>
-      <p:sp>
-        <p:nvSpPr>
-          <p:cNvPr id="11" name="TextBox 10"/>
-          <p:cNvSpPr txBox="1"/>
-          <p:nvPr/>
-        </p:nvSpPr>
-        <p:spPr>
-          <a:xfrm>
-            <a:off x="777240" y="3017520"/>
-            <a:ext cx="3246120" cy="365760"/>
-          </a:xfrm>
-          <a:prstGeom prst="rect">
-            <a:avLst/>
-          </a:prstGeom>
-          <a:noFill/>
-        </p:spPr>
-        <p:txBody>
-          <a:bodyPr wrap="square">
-            <a:spAutoFit/>
-          </a:bodyPr>
-          <a:lstStyle/>
-          <a:p>
-            <a:pPr algn="l"/>
-            <a:r>
-              <a:rPr sz="1300" b="1" i="0">
-                <a:solidFill>
-                  <a:srgbClr val="F5C842"/>
-                </a:solidFill>
-              </a:rPr>
-              <a:t>What We're Offering</a:t>
-            </a:r>
-          </a:p>
-        </p:txBody>
-      </p:sp>
-      <p:sp>
-        <p:nvSpPr>
-          <p:cNvPr id="12" name="TextBox 11"/>
-          <p:cNvSpPr txBox="1"/>
-          <p:nvPr/>
-        </p:nvSpPr>
-        <p:spPr>
-          <a:xfrm>
-            <a:off x="777240" y="3520440"/>
-            <a:ext cx="3246120" cy="411480"/>
-          </a:xfrm>
-          <a:prstGeom prst="rect">
-            <a:avLst/>
-          </a:prstGeom>
-          <a:noFill/>
-        </p:spPr>
-        <p:txBody>
-          <a:bodyPr wrap="square">
-            <a:spAutoFit/>
-          </a:bodyPr>
-          <a:lstStyle/>
-          <a:p>
-            <a:pPr algn="l"/>
-            <a:r>
-              <a:rPr sz="1200" b="0" i="0">
-                <a:solidFill>
-                  <a:srgbClr val="F0F0F0"/>
-                </a:solidFill>
-              </a:rPr>
-              <a:t>· Equity stake — percentage TBD in negotiation</a:t>
-            </a:r>
-          </a:p>
-        </p:txBody>
-      </p:sp>
-      <p:sp>
-        <p:nvSpPr>
-          <p:cNvPr id="13" name="TextBox 12"/>
-          <p:cNvSpPr txBox="1"/>
-          <p:nvPr/>
-        </p:nvSpPr>
-        <p:spPr>
-          <a:xfrm>
-            <a:off x="777240" y="3977639"/>
-            <a:ext cx="3246120" cy="411480"/>
-          </a:xfrm>
-          <a:prstGeom prst="rect">
-            <a:avLst/>
-          </a:prstGeom>
-          <a:noFill/>
-        </p:spPr>
-        <p:txBody>
-          <a:bodyPr wrap="square">
-            <a:spAutoFit/>
-          </a:bodyPr>
-          <a:lstStyle/>
-          <a:p>
-            <a:pPr algn="l"/>
-            <a:r>
-              <a:rPr sz="1200" b="0" i="0">
-                <a:solidFill>
-                  <a:srgbClr val="F0F0F0"/>
-                </a:solidFill>
-              </a:rPr>
-              <a:t>· Board observer seat available at $1M+ commitment</a:t>
-            </a:r>
-          </a:p>
-        </p:txBody>
-      </p:sp>
-      <p:sp>
-        <p:nvSpPr>
-          <p:cNvPr id="14" name="TextBox 13"/>
-          <p:cNvSpPr txBox="1"/>
-          <p:nvPr/>
-        </p:nvSpPr>
-        <p:spPr>
-          <a:xfrm>
-            <a:off x="777240" y="4434840"/>
-            <a:ext cx="3246120" cy="411480"/>
-          </a:xfrm>
-          <a:prstGeom prst="rect">
-            <a:avLst/>
-          </a:prstGeom>
-          <a:noFill/>
-        </p:spPr>
-        <p:txBody>
-          <a:bodyPr wrap="square">
-            <a:spAutoFit/>
-          </a:bodyPr>
-          <a:lstStyle/>
-          <a:p>
-            <a:pPr algn="l"/>
-            <a:r>
-              <a:rPr sz="1200" b="0" i="0">
-                <a:solidFill>
-                  <a:srgbClr val="F0F0F0"/>
-                </a:solidFill>
-              </a:rPr>
-              <a:t>· Series A right of first refusal</a:t>
-            </a:r>
-          </a:p>
-        </p:txBody>
-      </p:sp>
-      <p:sp>
-        <p:nvSpPr>
-          <p:cNvPr id="15" name="TextBox 14"/>
-          <p:cNvSpPr txBox="1"/>
-          <p:nvPr/>
-        </p:nvSpPr>
-        <p:spPr>
-          <a:xfrm>
-            <a:off x="777240" y="4892040"/>
-            <a:ext cx="3246120" cy="411480"/>
-          </a:xfrm>
-          <a:prstGeom prst="rect">
-            <a:avLst/>
-          </a:prstGeom>
-          <a:noFill/>
-        </p:spPr>
-        <p:txBody>
-          <a:bodyPr wrap="square">
-            <a:spAutoFit/>
-          </a:bodyPr>
-          <a:lstStyle/>
-          <a:p>
-            <a:pPr algn="l"/>
-            <a:r>
-              <a:rPr sz="1200" b="0" i="0">
-                <a:solidFill>
-                  <a:srgbClr val="F0F0F0"/>
-                </a:solidFill>
-              </a:rPr>
-              <a:t>· Quarterly financial reporting</a:t>
-            </a:r>
-          </a:p>
-        </p:txBody>
-      </p:sp>
-      <p:sp>
-        <p:nvSpPr>
-          <p:cNvPr id="16" name="TextBox 15"/>
-          <p:cNvSpPr txBox="1"/>
-          <p:nvPr/>
-        </p:nvSpPr>
-        <p:spPr>
-          <a:xfrm>
-            <a:off x="777240" y="5349240"/>
-            <a:ext cx="3246120" cy="411480"/>
-          </a:xfrm>
-          <a:prstGeom prst="rect">
-            <a:avLst/>
-          </a:prstGeom>
-          <a:noFill/>
-        </p:spPr>
-        <p:txBody>
-          <a:bodyPr wrap="square">
-            <a:spAutoFit/>
-          </a:bodyPr>
-          <a:lstStyle/>
-          <a:p>
-            <a:pPr algn="l"/>
-            <a:r>
-              <a:rPr sz="1200" b="0" i="0">
-                <a:solidFill>
-                  <a:srgbClr val="F0F0F0"/>
-                </a:solidFill>
-              </a:rPr>
-              <a:t>· Direct access to founding team</a:t>
-            </a:r>
-          </a:p>
-        </p:txBody>
-      </p:sp>
-      <p:sp>
-        <p:nvSpPr>
-          <p:cNvPr id="17" name="Rectangle 16"/>
-          <p:cNvSpPr/>
-          <p:nvPr/>
-        </p:nvSpPr>
-        <p:spPr>
-          <a:xfrm>
-            <a:off x="4434840" y="2926080"/>
-            <a:ext cx="3520440" cy="3246120"/>
-          </a:xfrm>
-          <a:prstGeom prst="rect">
-            <a:avLst/>
-          </a:prstGeom>
-          <a:solidFill>
-            <a:srgbClr val="161830"/>
-          </a:solidFill>
-          <a:ln w="19050">
-            <a:solidFill>
-              <a:srgbClr val="FF6B6B"/>
-            </a:solidFill>
-          </a:ln>
-        </p:spPr>
-        <p:style>
-          <a:lnRef idx="1">
-            <a:schemeClr val="accent1"/>
-          </a:lnRef>
-          <a:fillRef idx="3">
-            <a:schemeClr val="accent1"/>
-          </a:fillRef>
-          <a:effectRef idx="2">
-            <a:schemeClr val="accent1"/>
-          </a:effectRef>
-          <a:fontRef idx="minor">
-            <a:schemeClr val="lt1"/>
-          </a:fontRef>
-        </p:style>
-        <p:txBody>
-          <a:bodyPr rtlCol="0" anchor="ctr"/>
-          <a:lstStyle/>
-          <a:p>
-            <a:pPr algn="ctr"/>
-          </a:p>
-        </p:txBody>
-      </p:sp>
-      <p:sp>
-        <p:nvSpPr>
-          <p:cNvPr id="18" name="TextBox 17"/>
-          <p:cNvSpPr txBox="1"/>
-          <p:nvPr/>
-        </p:nvSpPr>
-        <p:spPr>
-          <a:xfrm>
-            <a:off x="4572000" y="3017520"/>
-            <a:ext cx="3246120" cy="365760"/>
-          </a:xfrm>
-          <a:prstGeom prst="rect">
-            <a:avLst/>
-          </a:prstGeom>
-          <a:noFill/>
-        </p:spPr>
-        <p:txBody>
-          <a:bodyPr wrap="square">
-            <a:spAutoFit/>
-          </a:bodyPr>
-          <a:lstStyle/>
-          <a:p>
-            <a:pPr algn="l"/>
-            <a:r>
-              <a:rPr sz="1300" b="1" i="0">
-                <a:solidFill>
-                  <a:srgbClr val="FF6B6B"/>
-                </a:solidFill>
-              </a:rPr>
-              <a:t>What We'll Deliver in 18 Months</a:t>
-            </a:r>
-          </a:p>
-        </p:txBody>
-      </p:sp>
-      <p:sp>
-        <p:nvSpPr>
-          <p:cNvPr id="19" name="TextBox 18"/>
-          <p:cNvSpPr txBox="1"/>
-          <p:nvPr/>
-        </p:nvSpPr>
-        <p:spPr>
-          <a:xfrm>
-            <a:off x="4572000" y="3520440"/>
-            <a:ext cx="3246120" cy="411480"/>
-          </a:xfrm>
-          <a:prstGeom prst="rect">
-            <a:avLst/>
-          </a:prstGeom>
-          <a:noFill/>
-        </p:spPr>
-        <p:txBody>
-          <a:bodyPr wrap="square">
-            <a:spAutoFit/>
-          </a:bodyPr>
-          <a:lstStyle/>
-          <a:p>
-            <a:pPr algn="l"/>
-            <a:r>
-              <a:rPr sz="1200" b="0" i="0">
-                <a:solidFill>
-                  <a:srgbClr val="F0F0F0"/>
-                </a:solidFill>
-              </a:rPr>
-              <a:t>· iOS + Android app live on both stores</a:t>
-            </a:r>
-          </a:p>
-        </p:txBody>
-      </p:sp>
-      <p:sp>
-        <p:nvSpPr>
-          <p:cNvPr id="20" name="TextBox 19"/>
-          <p:cNvSpPr txBox="1"/>
-          <p:nvPr/>
-        </p:nvSpPr>
-        <p:spPr>
-          <a:xfrm>
-            <a:off x="4572000" y="3977639"/>
-            <a:ext cx="3246120" cy="411480"/>
-          </a:xfrm>
-          <a:prstGeom prst="rect">
-            <a:avLst/>
-          </a:prstGeom>
-          <a:noFill/>
-        </p:spPr>
-        <p:txBody>
-          <a:bodyPr wrap="square">
-            <a:spAutoFit/>
-          </a:bodyPr>
-          <a:lstStyle/>
-          <a:p>
-            <a:pPr algn="l"/>
-            <a:r>
-              <a:rPr sz="1200" b="0" i="0">
-                <a:solidFill>
-                  <a:srgbClr val="F0F0F0"/>
-                </a:solidFill>
-              </a:rPr>
-              <a:t>· Colombo engineering team operational</a:t>
-            </a:r>
-          </a:p>
-        </p:txBody>
-      </p:sp>
-      <p:sp>
-        <p:nvSpPr>
-          <p:cNvPr id="21" name="TextBox 20"/>
-          <p:cNvSpPr txBox="1"/>
-          <p:nvPr/>
-        </p:nvSpPr>
-        <p:spPr>
-          <a:xfrm>
-            <a:off x="4572000" y="4434840"/>
-            <a:ext cx="3246120" cy="411480"/>
-          </a:xfrm>
-          <a:prstGeom prst="rect">
-            <a:avLst/>
-          </a:prstGeom>
-          <a:noFill/>
-        </p:spPr>
-        <p:txBody>
-          <a:bodyPr wrap="square">
-            <a:spAutoFit/>
-          </a:bodyPr>
-          <a:lstStyle/>
-          <a:p>
-            <a:pPr algn="l"/>
-            <a:r>
-              <a:rPr sz="1200" b="0" i="0">
-                <a:solidFill>
-                  <a:srgbClr val="F0F0F0"/>
-                </a:solidFill>
-              </a:rPr>
-              <a:t>· 150,000+ MAU target</a:t>
-            </a:r>
-          </a:p>
-        </p:txBody>
-      </p:sp>
-      <p:sp>
-        <p:nvSpPr>
-          <p:cNvPr id="22" name="TextBox 21"/>
-          <p:cNvSpPr txBox="1"/>
-          <p:nvPr/>
-        </p:nvSpPr>
-        <p:spPr>
-          <a:xfrm>
-            <a:off x="4572000" y="4892040"/>
-            <a:ext cx="3246120" cy="411480"/>
-          </a:xfrm>
-          <a:prstGeom prst="rect">
-            <a:avLst/>
-          </a:prstGeom>
-          <a:noFill/>
-        </p:spPr>
-        <p:txBody>
-          <a:bodyPr wrap="square">
-            <a:spAutoFit/>
-          </a:bodyPr>
-          <a:lstStyle/>
-          <a:p>
-            <a:pPr algn="l"/>
-            <a:r>
-              <a:rPr sz="1200" b="0" i="0">
-                <a:solidFill>
-                  <a:srgbClr val="F0F0F0"/>
-                </a:solidFill>
-              </a:rPr>
-              <a:t>· Bare metal infrastructure Phase 1 online</a:t>
-            </a:r>
-          </a:p>
-        </p:txBody>
-      </p:sp>
-      <p:sp>
-        <p:nvSpPr>
-          <p:cNvPr id="23" name="TextBox 22"/>
-          <p:cNvSpPr txBox="1"/>
-          <p:nvPr/>
-        </p:nvSpPr>
-        <p:spPr>
-          <a:xfrm>
-            <a:off x="4572000" y="5349240"/>
-            <a:ext cx="3246120" cy="411480"/>
-          </a:xfrm>
-          <a:prstGeom prst="rect">
-            <a:avLst/>
-          </a:prstGeom>
-          <a:noFill/>
-        </p:spPr>
-        <p:txBody>
-          <a:bodyPr wrap="square">
-            <a:spAutoFit/>
-          </a:bodyPr>
-          <a:lstStyle/>
-          <a:p>
-            <a:pPr algn="l"/>
-            <a:r>
-              <a:rPr sz="1200" b="0" i="0">
-                <a:solidFill>
-                  <a:srgbClr val="F0F0F0"/>
-                </a:solidFill>
-              </a:rPr>
-              <a:t>· $1M+ ARR run rate</a:t>
-            </a:r>
-          </a:p>
-        </p:txBody>
-      </p:sp>
-      <p:sp>
-        <p:nvSpPr>
-          <p:cNvPr id="24" name="Rectangle 23"/>
-          <p:cNvSpPr/>
-          <p:nvPr/>
-        </p:nvSpPr>
-        <p:spPr>
-          <a:xfrm>
-            <a:off x="8229600" y="2926080"/>
-            <a:ext cx="3520440" cy="3246120"/>
-          </a:xfrm>
-          <a:prstGeom prst="rect">
-            <a:avLst/>
-          </a:prstGeom>
-          <a:solidFill>
-            <a:srgbClr val="161830"/>
-          </a:solidFill>
-          <a:ln w="19050">
-            <a:solidFill>
-              <a:srgbClr val="7BD4FF"/>
-            </a:solidFill>
-          </a:ln>
-        </p:spPr>
-        <p:style>
-          <a:lnRef idx="1">
-            <a:schemeClr val="accent1"/>
-          </a:lnRef>
-          <a:fillRef idx="3">
-            <a:schemeClr val="accent1"/>
-          </a:fillRef>
-          <a:effectRef idx="2">
-            <a:schemeClr val="accent1"/>
-          </a:effectRef>
-          <a:fontRef idx="minor">
-            <a:schemeClr val="lt1"/>
-          </a:fontRef>
-        </p:style>
-        <p:txBody>
-          <a:bodyPr rtlCol="0" anchor="ctr"/>
-          <a:lstStyle/>
-          <a:p>
-            <a:pPr algn="ctr"/>
-          </a:p>
-        </p:txBody>
-      </p:sp>
-      <p:sp>
-        <p:nvSpPr>
-          <p:cNvPr id="25" name="TextBox 24"/>
-          <p:cNvSpPr txBox="1"/>
-          <p:nvPr/>
-        </p:nvSpPr>
-        <p:spPr>
-          <a:xfrm>
-            <a:off x="8366760" y="3017520"/>
-            <a:ext cx="3246120" cy="365760"/>
-          </a:xfrm>
-          <a:prstGeom prst="rect">
-            <a:avLst/>
-          </a:prstGeom>
-          <a:noFill/>
-        </p:spPr>
-        <p:txBody>
-          <a:bodyPr wrap="square">
-            <a:spAutoFit/>
-          </a:bodyPr>
-          <a:lstStyle/>
-          <a:p>
-            <a:pPr algn="l"/>
-            <a:r>
-              <a:rPr sz="1300" b="1" i="0">
-                <a:solidFill>
-                  <a:srgbClr val="7BD4FF"/>
-                </a:solidFill>
-              </a:rPr>
-              <a:t>Path to Series A</a:t>
-            </a:r>
-          </a:p>
-        </p:txBody>
-      </p:sp>
-      <p:sp>
-        <p:nvSpPr>
-          <p:cNvPr id="26" name="TextBox 25"/>
-          <p:cNvSpPr txBox="1"/>
-          <p:nvPr/>
-        </p:nvSpPr>
-        <p:spPr>
-          <a:xfrm>
-            <a:off x="8366760" y="3520440"/>
-            <a:ext cx="3246120" cy="411480"/>
-          </a:xfrm>
-          <a:prstGeom prst="rect">
-            <a:avLst/>
-          </a:prstGeom>
-          <a:noFill/>
-        </p:spPr>
-        <p:txBody>
-          <a:bodyPr wrap="square">
-            <a:spAutoFit/>
-          </a:bodyPr>
-          <a:lstStyle/>
-          <a:p>
-            <a:pPr algn="l"/>
-            <a:r>
-              <a:rPr sz="1200" b="0" i="0">
-                <a:solidFill>
-                  <a:srgbClr val="F0F0F0"/>
-                </a:solidFill>
-              </a:rPr>
-              <a:t>· Series A target: $10–15M at 250K+ MAU</a:t>
-            </a:r>
-          </a:p>
-        </p:txBody>
-      </p:sp>
-      <p:sp>
-        <p:nvSpPr>
-          <p:cNvPr id="27" name="TextBox 26"/>
-          <p:cNvSpPr txBox="1"/>
-          <p:nvPr/>
-        </p:nvSpPr>
-        <p:spPr>
-          <a:xfrm>
-            <a:off x="8366760" y="3977639"/>
-            <a:ext cx="3246120" cy="411480"/>
-          </a:xfrm>
-          <a:prstGeom prst="rect">
-            <a:avLst/>
-          </a:prstGeom>
-          <a:noFill/>
-        </p:spPr>
-        <p:txBody>
-          <a:bodyPr wrap="square">
-            <a:spAutoFit/>
-          </a:bodyPr>
-          <a:lstStyle/>
-          <a:p>
-            <a:pPr algn="l"/>
-            <a:r>
-              <a:rPr sz="1200" b="0" i="0">
-                <a:solidFill>
-                  <a:srgbClr val="F0F0F0"/>
-                </a:solidFill>
-              </a:rPr>
-              <a:t>· Expected timing: 18–24 months post-seed</a:t>
-            </a:r>
-          </a:p>
-        </p:txBody>
-      </p:sp>
-      <p:sp>
-        <p:nvSpPr>
-          <p:cNvPr id="28" name="TextBox 27"/>
-          <p:cNvSpPr txBox="1"/>
-          <p:nvPr/>
-        </p:nvSpPr>
-        <p:spPr>
-          <a:xfrm>
-            <a:off x="8366760" y="4434840"/>
-            <a:ext cx="3246120" cy="411480"/>
-          </a:xfrm>
-          <a:prstGeom prst="rect">
-            <a:avLst/>
-          </a:prstGeom>
-          <a:noFill/>
-        </p:spPr>
-        <p:txBody>
-          <a:bodyPr wrap="square">
-            <a:spAutoFit/>
-          </a:bodyPr>
-          <a:lstStyle/>
-          <a:p>
-            <a:pPr algn="l"/>
-            <a:r>
-              <a:rPr sz="1200" b="0" i="0">
-                <a:solidFill>
-                  <a:srgbClr val="F0F0F0"/>
-                </a:solidFill>
-              </a:rPr>
-              <a:t>· Target valuation: $40–60M pre-money</a:t>
-            </a:r>
-          </a:p>
-        </p:txBody>
-      </p:sp>
-      <p:sp>
-        <p:nvSpPr>
-          <p:cNvPr id="29" name="TextBox 28"/>
-          <p:cNvSpPr txBox="1"/>
-          <p:nvPr/>
-        </p:nvSpPr>
-        <p:spPr>
-          <a:xfrm>
-            <a:off x="8366760" y="4892040"/>
-            <a:ext cx="3246120" cy="411480"/>
-          </a:xfrm>
-          <a:prstGeom prst="rect">
-            <a:avLst/>
-          </a:prstGeom>
-          <a:noFill/>
-        </p:spPr>
-        <p:txBody>
-          <a:bodyPr wrap="square">
-            <a:spAutoFit/>
-          </a:bodyPr>
-          <a:lstStyle/>
-          <a:p>
-            <a:pPr algn="l"/>
-            <a:r>
-              <a:rPr sz="1200" b="0" i="0">
-                <a:solidFill>
-                  <a:srgbClr val="F0F0F0"/>
-                </a:solidFill>
-              </a:rPr>
-              <a:t>· Lead investor for Series A being identified</a:t>
-            </a:r>
-          </a:p>
-        </p:txBody>
-      </p:sp>
-      <p:sp>
-        <p:nvSpPr>
-          <p:cNvPr id="30" name="TextBox 29"/>
-          <p:cNvSpPr txBox="1"/>
-          <p:nvPr/>
-        </p:nvSpPr>
-        <p:spPr>
-          <a:xfrm>
-            <a:off x="8366760" y="5349240"/>
-            <a:ext cx="3246120" cy="411480"/>
-          </a:xfrm>
-          <a:prstGeom prst="rect">
-            <a:avLst/>
-          </a:prstGeom>
-          <a:noFill/>
-        </p:spPr>
-        <p:txBody>
-          <a:bodyPr wrap="square">
-            <a:spAutoFit/>
-          </a:bodyPr>
-          <a:lstStyle/>
-          <a:p>
-            <a:pPr algn="l"/>
-            <a:r>
-              <a:rPr sz="1200" b="0" i="0">
-                <a:solidFill>
-                  <a:srgbClr val="F0F0F0"/>
-                </a:solidFill>
-              </a:rPr>
-              <a:t>· Secondary markets: South Asia, Pacific</a:t>
-            </a:r>
-          </a:p>
-        </p:txBody>
-      </p:sp>
-      <p:sp>
-        <p:nvSpPr>
-          <p:cNvPr id="31" name="Rectangle 30"/>
-          <p:cNvSpPr/>
-          <p:nvPr/>
-        </p:nvSpPr>
-        <p:spPr>
-          <a:xfrm>
-            <a:off x="0" y="1005840"/>
-            <a:ext cx="12188952" cy="5852160"/>
-          </a:xfrm>
-          <a:prstGeom prst="rect">
-            <a:avLst/>
-          </a:prstGeom>
-          <a:solidFill>
-            <a:srgbClr val="0B0C1A"/>
-          </a:solidFill>
-          <a:ln>
-            <a:noFill/>
-          </a:ln>
-        </p:spPr>
-        <p:style>
-          <a:lnRef idx="1">
-            <a:schemeClr val="accent1"/>
-          </a:lnRef>
-          <a:fillRef idx="3">
-            <a:schemeClr val="accent1"/>
-          </a:fillRef>
-          <a:effectRef idx="2">
-            <a:schemeClr val="accent1"/>
-          </a:effectRef>
-          <a:fontRef idx="minor">
-            <a:schemeClr val="lt1"/>
-          </a:fontRef>
-        </p:style>
-        <p:txBody>
-          <a:bodyPr rtlCol="0" anchor="ctr"/>
-          <a:lstStyle/>
-          <a:p>
-            <a:pPr algn="ctr"/>
-          </a:p>
-        </p:txBody>
-      </p:sp>
-      <p:sp>
-        <p:nvSpPr>
-          <p:cNvPr id="32" name="TextBox 31"/>
-          <p:cNvSpPr txBox="1"/>
-          <p:nvPr/>
-        </p:nvSpPr>
-        <p:spPr>
-          <a:xfrm>
-            <a:off x="777240" y="1143000"/>
-            <a:ext cx="10515600" cy="868680"/>
-          </a:xfrm>
-          <a:prstGeom prst="rect">
-            <a:avLst/>
-          </a:prstGeom>
-          <a:noFill/>
-        </p:spPr>
-        <p:txBody>
-          <a:bodyPr wrap="square">
-            <a:spAutoFit/>
-          </a:bodyPr>
-          <a:lstStyle/>
-          <a:p>
-            <a:pPr algn="ctr"/>
-            <a:r>
-              <a:rPr sz="5200" b="1" i="0">
-                <a:solidFill>
-                  <a:srgbClr val="F5C842"/>
-                </a:solidFill>
-              </a:rPr>
-              <a:t>0,000,000  Total Raise</a:t>
-            </a:r>
-          </a:p>
-        </p:txBody>
-      </p:sp>
-      <p:sp>
-        <p:nvSpPr>
-          <p:cNvPr id="33" name="TextBox 32"/>
-          <p:cNvSpPr txBox="1"/>
-          <p:nvPr/>
-        </p:nvSpPr>
-        <p:spPr>
-          <a:xfrm>
-            <a:off x="777240" y="2011680"/>
-            <a:ext cx="10515600" cy="365760"/>
-          </a:xfrm>
-          <a:prstGeom prst="rect">
-            <a:avLst/>
-          </a:prstGeom>
-          <a:noFill/>
-        </p:spPr>
-        <p:txBody>
-          <a:bodyPr wrap="square">
-            <a:spAutoFit/>
-          </a:bodyPr>
-          <a:lstStyle/>
-          <a:p>
-            <a:pPr algn="ctr"/>
-            <a:r>
-              <a:rPr sz="1600" b="0" i="0">
-                <a:solidFill>
-                  <a:srgbClr val="CCCCCC"/>
-                </a:solidFill>
-              </a:rPr>
-              <a:t>Two-Round Structure  ·  LDNA Consulting LLC  ·  2026–2027</a:t>
-            </a:r>
-          </a:p>
-        </p:txBody>
-      </p:sp>
-      <p:sp>
-        <p:nvSpPr>
-          <p:cNvPr id="34" name="Rectangle 33"/>
-          <p:cNvSpPr/>
-          <p:nvPr/>
-        </p:nvSpPr>
-        <p:spPr>
-          <a:xfrm>
-            <a:off x="777240" y="2514600"/>
-            <a:ext cx="10515600" cy="27432"/>
-          </a:xfrm>
-          <a:prstGeom prst="rect">
-            <a:avLst/>
-          </a:prstGeom>
-          <a:solidFill>
-            <a:srgbClr val="FF6B6B"/>
-          </a:solidFill>
-          <a:ln>
-            <a:noFill/>
-          </a:ln>
-        </p:spPr>
-        <p:style>
-          <a:lnRef idx="1">
-            <a:schemeClr val="accent1"/>
-          </a:lnRef>
-          <a:fillRef idx="3">
-            <a:schemeClr val="accent1"/>
-          </a:fillRef>
-          <a:effectRef idx="2">
-            <a:schemeClr val="accent1"/>
-          </a:effectRef>
-          <a:fontRef idx="minor">
-            <a:schemeClr val="lt1"/>
-          </a:fontRef>
-        </p:style>
-        <p:txBody>
-          <a:bodyPr rtlCol="0" anchor="ctr"/>
-          <a:lstStyle/>
-          <a:p>
-            <a:pPr algn="ctr"/>
-          </a:p>
-        </p:txBody>
-      </p:sp>
-      <p:sp>
-        <p:nvSpPr>
-          <p:cNvPr id="35" name="Rectangle 34"/>
-          <p:cNvSpPr/>
-          <p:nvPr/>
-        </p:nvSpPr>
-        <p:spPr>
-          <a:xfrm>
-            <a:off x="594360" y="2697480"/>
-            <a:ext cx="3611880" cy="3749039"/>
+            <a:off x="594360" y="2606040"/>
+            <a:ext cx="3611880" cy="3840480"/>
           </a:xfrm>
           <a:prstGeom prst="rect">
             <a:avLst/>
@@ -22168,14 +19000,14 @@
       </p:sp>
       <p:sp>
         <p:nvSpPr>
-          <p:cNvPr id="36" name="TextBox 35"/>
-          <p:cNvSpPr txBox="1"/>
-          <p:nvPr/>
-        </p:nvSpPr>
-        <p:spPr>
-          <a:xfrm>
-            <a:off x="731520" y="2788920"/>
-            <a:ext cx="3337560" cy="347472"/>
+          <p:cNvPr id="14" name="TextBox 13"/>
+          <p:cNvSpPr txBox="1"/>
+          <p:nvPr/>
+        </p:nvSpPr>
+        <p:spPr>
+          <a:xfrm>
+            <a:off x="731520" y="2697480"/>
+            <a:ext cx="3337560" cy="329184"/>
           </a:xfrm>
           <a:prstGeom prst="rect">
             <a:avLst/>
@@ -22195,21 +19027,21 @@
                   <a:srgbClr val="F5C842"/>
                 </a:solidFill>
               </a:rPr>
-              <a:t>ROUND 1 — SEED</a:t>
-            </a:r>
-          </a:p>
-        </p:txBody>
-      </p:sp>
-      <p:sp>
-        <p:nvSpPr>
-          <p:cNvPr id="37" name="TextBox 36"/>
-          <p:cNvSpPr txBox="1"/>
-          <p:nvPr/>
-        </p:nvSpPr>
-        <p:spPr>
-          <a:xfrm>
-            <a:off x="731520" y="3172968"/>
-            <a:ext cx="3337560" cy="438912"/>
+              <a:t>ROUND 1  -  SEED</a:t>
+            </a:r>
+          </a:p>
+        </p:txBody>
+      </p:sp>
+      <p:sp>
+        <p:nvSpPr>
+          <p:cNvPr id="15" name="TextBox 14"/>
+          <p:cNvSpPr txBox="1"/>
+          <p:nvPr/>
+        </p:nvSpPr>
+        <p:spPr>
+          <a:xfrm>
+            <a:off x="731520" y="3063240"/>
+            <a:ext cx="3337560" cy="420624"/>
           </a:xfrm>
           <a:prstGeom prst="rect">
             <a:avLst/>
@@ -22224,26 +19056,26 @@
           <a:p>
             <a:pPr algn="l"/>
             <a:r>
-              <a:rPr sz="2200" b="1" i="0">
+              <a:rPr sz="2000" b="1" i="0">
                 <a:solidFill>
                   <a:srgbClr val="FFFFFF"/>
                 </a:solidFill>
               </a:rPr>
-              <a:t>,000,000</a:t>
-            </a:r>
-          </a:p>
-        </p:txBody>
-      </p:sp>
-      <p:sp>
-        <p:nvSpPr>
-          <p:cNvPr id="38" name="TextBox 37"/>
-          <p:cNvSpPr txBox="1"/>
-          <p:nvPr/>
-        </p:nvSpPr>
-        <p:spPr>
-          <a:xfrm>
-            <a:off x="731520" y="3593592"/>
-            <a:ext cx="3337560" cy="274320"/>
+              <a:t>USD 5,000,000</a:t>
+            </a:r>
+          </a:p>
+        </p:txBody>
+      </p:sp>
+      <p:sp>
+        <p:nvSpPr>
+          <p:cNvPr id="16" name="TextBox 15"/>
+          <p:cNvSpPr txBox="1"/>
+          <p:nvPr/>
+        </p:nvSpPr>
+        <p:spPr>
+          <a:xfrm>
+            <a:off x="731520" y="3502152"/>
+            <a:ext cx="3337560" cy="256032"/>
           </a:xfrm>
           <a:prstGeom prst="rect">
             <a:avLst/>
@@ -22263,20 +19095,20 @@
                   <a:srgbClr val="CCCCCC"/>
                 </a:solidFill>
               </a:rPr>
-              <a:t>Timing: Q2–Q3 2026</a:t>
-            </a:r>
-          </a:p>
-        </p:txBody>
-      </p:sp>
-      <p:sp>
-        <p:nvSpPr>
-          <p:cNvPr id="39" name="Rectangle 38"/>
+              <a:t>Timing: Q2-Q3 2026</a:t>
+            </a:r>
+          </a:p>
+        </p:txBody>
+      </p:sp>
+      <p:sp>
+        <p:nvSpPr>
+          <p:cNvPr id="17" name="Rectangle 16"/>
           <p:cNvSpPr/>
           <p:nvPr/>
         </p:nvSpPr>
         <p:spPr>
           <a:xfrm>
-            <a:off x="731520" y="3904488"/>
+            <a:off x="731520" y="3794760"/>
             <a:ext cx="3291840" cy="18288"/>
           </a:xfrm>
           <a:prstGeom prst="rect">
@@ -22313,13 +19145,13 @@
       </p:sp>
       <p:sp>
         <p:nvSpPr>
-          <p:cNvPr id="40" name="TextBox 39"/>
-          <p:cNvSpPr txBox="1"/>
-          <p:nvPr/>
-        </p:nvSpPr>
-        <p:spPr>
-          <a:xfrm>
-            <a:off x="731520" y="4023360"/>
+          <p:cNvPr id="18" name="TextBox 17"/>
+          <p:cNvSpPr txBox="1"/>
+          <p:nvPr/>
+        </p:nvSpPr>
+        <p:spPr>
+          <a:xfrm>
+            <a:off x="731520" y="3922776"/>
             <a:ext cx="3337560" cy="347472"/>
           </a:xfrm>
           <a:prstGeom prst="rect">
@@ -22340,20 +19172,20 @@
                   <a:srgbClr val="F0F0F0"/>
                 </a:solidFill>
               </a:rPr>
-              <a:t>· Platform iOS + Android launch (App Store + Google Play)</a:t>
-            </a:r>
-          </a:p>
-        </p:txBody>
-      </p:sp>
-      <p:sp>
-        <p:nvSpPr>
-          <p:cNvPr id="41" name="TextBox 40"/>
-          <p:cNvSpPr txBox="1"/>
-          <p:nvPr/>
-        </p:nvSpPr>
-        <p:spPr>
-          <a:xfrm>
-            <a:off x="731520" y="4407408"/>
+              <a:t>-  Platform iOS + Android launch (App Store + Google Play)</a:t>
+            </a:r>
+          </a:p>
+        </p:txBody>
+      </p:sp>
+      <p:sp>
+        <p:nvSpPr>
+          <p:cNvPr id="19" name="TextBox 18"/>
+          <p:cNvSpPr txBox="1"/>
+          <p:nvPr/>
+        </p:nvSpPr>
+        <p:spPr>
+          <a:xfrm>
+            <a:off x="731520" y="4306824"/>
             <a:ext cx="3337560" cy="347472"/>
           </a:xfrm>
           <a:prstGeom prst="rect">
@@ -22374,20 +19206,20 @@
                   <a:srgbClr val="F0F0F0"/>
                 </a:solidFill>
               </a:rPr>
-              <a:t>· Colombo engineering team: 10–15 developers hired</a:t>
-            </a:r>
-          </a:p>
-        </p:txBody>
-      </p:sp>
-      <p:sp>
-        <p:nvSpPr>
-          <p:cNvPr id="42" name="TextBox 41"/>
-          <p:cNvSpPr txBox="1"/>
-          <p:nvPr/>
-        </p:nvSpPr>
-        <p:spPr>
-          <a:xfrm>
-            <a:off x="731520" y="4791456"/>
+              <a:t>-  Colombo engineering team: 10-15 developers hired</a:t>
+            </a:r>
+          </a:p>
+        </p:txBody>
+      </p:sp>
+      <p:sp>
+        <p:nvSpPr>
+          <p:cNvPr id="20" name="TextBox 19"/>
+          <p:cNvSpPr txBox="1"/>
+          <p:nvPr/>
+        </p:nvSpPr>
+        <p:spPr>
+          <a:xfrm>
+            <a:off x="731520" y="4690871"/>
             <a:ext cx="3337560" cy="347472"/>
           </a:xfrm>
           <a:prstGeom prst="rect">
@@ -22408,20 +19240,20 @@
                   <a:srgbClr val="F0F0F0"/>
                 </a:solidFill>
               </a:rPr>
-              <a:t>· Bare metal infrastructure Phase 1 — Colombo facility</a:t>
-            </a:r>
-          </a:p>
-        </p:txBody>
-      </p:sp>
-      <p:sp>
-        <p:nvSpPr>
-          <p:cNvPr id="43" name="TextBox 42"/>
-          <p:cNvSpPr txBox="1"/>
-          <p:nvPr/>
-        </p:nvSpPr>
-        <p:spPr>
-          <a:xfrm>
-            <a:off x="731520" y="5175504"/>
+              <a:t>-  Bare metal infrastructure Phase 1  -  Colombo facility</a:t>
+            </a:r>
+          </a:p>
+        </p:txBody>
+      </p:sp>
+      <p:sp>
+        <p:nvSpPr>
+          <p:cNvPr id="21" name="TextBox 20"/>
+          <p:cNvSpPr txBox="1"/>
+          <p:nvPr/>
+        </p:nvSpPr>
+        <p:spPr>
+          <a:xfrm>
+            <a:off x="731520" y="5074920"/>
             <a:ext cx="3337560" cy="347472"/>
           </a:xfrm>
           <a:prstGeom prst="rect">
@@ -22442,20 +19274,20 @@
                   <a:srgbClr val="F0F0F0"/>
                 </a:solidFill>
               </a:rPr>
-              <a:t>· Marketing &amp; creator acquisition — 10,000 MAU target</a:t>
-            </a:r>
-          </a:p>
-        </p:txBody>
-      </p:sp>
-      <p:sp>
-        <p:nvSpPr>
-          <p:cNvPr id="44" name="TextBox 43"/>
-          <p:cNvSpPr txBox="1"/>
-          <p:nvPr/>
-        </p:nvSpPr>
-        <p:spPr>
-          <a:xfrm>
-            <a:off x="731520" y="5559552"/>
+              <a:t>-  Marketing &amp; creator acquisition  -  10,000 MAU target</a:t>
+            </a:r>
+          </a:p>
+        </p:txBody>
+      </p:sp>
+      <p:sp>
+        <p:nvSpPr>
+          <p:cNvPr id="22" name="TextBox 21"/>
+          <p:cNvSpPr txBox="1"/>
+          <p:nvPr/>
+        </p:nvSpPr>
+        <p:spPr>
+          <a:xfrm>
+            <a:off x="731520" y="5458968"/>
             <a:ext cx="3337560" cy="347472"/>
           </a:xfrm>
           <a:prstGeom prst="rect">
@@ -22476,20 +19308,20 @@
                   <a:srgbClr val="F0F0F0"/>
                 </a:solidFill>
               </a:rPr>
-              <a:t>· Equity offered: TBD in negotiation</a:t>
-            </a:r>
-          </a:p>
-        </p:txBody>
-      </p:sp>
-      <p:sp>
-        <p:nvSpPr>
-          <p:cNvPr id="45" name="TextBox 44"/>
-          <p:cNvSpPr txBox="1"/>
-          <p:nvPr/>
-        </p:nvSpPr>
-        <p:spPr>
-          <a:xfrm>
-            <a:off x="731520" y="5943600"/>
+              <a:t>-  Equity offered: TBD in negotiation</a:t>
+            </a:r>
+          </a:p>
+        </p:txBody>
+      </p:sp>
+      <p:sp>
+        <p:nvSpPr>
+          <p:cNvPr id="23" name="TextBox 22"/>
+          <p:cNvSpPr txBox="1"/>
+          <p:nvPr/>
+        </p:nvSpPr>
+        <p:spPr>
+          <a:xfrm>
+            <a:off x="731520" y="5843016"/>
             <a:ext cx="3337560" cy="347472"/>
           </a:xfrm>
           <a:prstGeom prst="rect">
@@ -22510,21 +19342,21 @@
                   <a:srgbClr val="F0F0F0"/>
                 </a:solidFill>
               </a:rPr>
-              <a:t>· Board observer seat at M+ commitment</a:t>
-            </a:r>
-          </a:p>
-        </p:txBody>
-      </p:sp>
-      <p:sp>
-        <p:nvSpPr>
-          <p:cNvPr id="46" name="Rectangle 45"/>
+              <a:t>-  Board observer seat at USD 1M+ commitment</a:t>
+            </a:r>
+          </a:p>
+        </p:txBody>
+      </p:sp>
+      <p:sp>
+        <p:nvSpPr>
+          <p:cNvPr id="24" name="Rectangle 23"/>
           <p:cNvSpPr/>
           <p:nvPr/>
         </p:nvSpPr>
         <p:spPr>
           <a:xfrm>
-            <a:off x="4434840" y="2697480"/>
-            <a:ext cx="3611880" cy="3749039"/>
+            <a:off x="4434840" y="2606040"/>
+            <a:ext cx="3611880" cy="3840480"/>
           </a:xfrm>
           <a:prstGeom prst="rect">
             <a:avLst/>
@@ -22562,14 +19394,14 @@
       </p:sp>
       <p:sp>
         <p:nvSpPr>
-          <p:cNvPr id="47" name="TextBox 46"/>
-          <p:cNvSpPr txBox="1"/>
-          <p:nvPr/>
-        </p:nvSpPr>
-        <p:spPr>
-          <a:xfrm>
-            <a:off x="4572000" y="2788920"/>
-            <a:ext cx="3337560" cy="347472"/>
+          <p:cNvPr id="25" name="TextBox 24"/>
+          <p:cNvSpPr txBox="1"/>
+          <p:nvPr/>
+        </p:nvSpPr>
+        <p:spPr>
+          <a:xfrm>
+            <a:off x="4572000" y="2697480"/>
+            <a:ext cx="3337560" cy="329184"/>
           </a:xfrm>
           <a:prstGeom prst="rect">
             <a:avLst/>
@@ -22589,21 +19421,21 @@
                   <a:srgbClr val="FF6B6B"/>
                 </a:solidFill>
               </a:rPr>
-              <a:t>ROUND 2 — SERIES A</a:t>
-            </a:r>
-          </a:p>
-        </p:txBody>
-      </p:sp>
-      <p:sp>
-        <p:nvSpPr>
-          <p:cNvPr id="48" name="TextBox 47"/>
-          <p:cNvSpPr txBox="1"/>
-          <p:nvPr/>
-        </p:nvSpPr>
-        <p:spPr>
-          <a:xfrm>
-            <a:off x="4572000" y="3172968"/>
-            <a:ext cx="3337560" cy="438912"/>
+              <a:t>ROUND 2  -  SERIES A</a:t>
+            </a:r>
+          </a:p>
+        </p:txBody>
+      </p:sp>
+      <p:sp>
+        <p:nvSpPr>
+          <p:cNvPr id="26" name="TextBox 25"/>
+          <p:cNvSpPr txBox="1"/>
+          <p:nvPr/>
+        </p:nvSpPr>
+        <p:spPr>
+          <a:xfrm>
+            <a:off x="4572000" y="3063240"/>
+            <a:ext cx="3337560" cy="420624"/>
           </a:xfrm>
           <a:prstGeom prst="rect">
             <a:avLst/>
@@ -22618,26 +19450,26 @@
           <a:p>
             <a:pPr algn="l"/>
             <a:r>
-              <a:rPr sz="2200" b="1" i="0">
+              <a:rPr sz="2000" b="1" i="0">
                 <a:solidFill>
                   <a:srgbClr val="FFFFFF"/>
                 </a:solidFill>
               </a:rPr>
-              <a:t>,000,000</a:t>
-            </a:r>
-          </a:p>
-        </p:txBody>
-      </p:sp>
-      <p:sp>
-        <p:nvSpPr>
-          <p:cNvPr id="49" name="TextBox 48"/>
-          <p:cNvSpPr txBox="1"/>
-          <p:nvPr/>
-        </p:nvSpPr>
-        <p:spPr>
-          <a:xfrm>
-            <a:off x="4572000" y="3593592"/>
-            <a:ext cx="3337560" cy="274320"/>
+              <a:t>USD 5,000,000</a:t>
+            </a:r>
+          </a:p>
+        </p:txBody>
+      </p:sp>
+      <p:sp>
+        <p:nvSpPr>
+          <p:cNvPr id="27" name="TextBox 26"/>
+          <p:cNvSpPr txBox="1"/>
+          <p:nvPr/>
+        </p:nvSpPr>
+        <p:spPr>
+          <a:xfrm>
+            <a:off x="4572000" y="3502152"/>
+            <a:ext cx="3337560" cy="256032"/>
           </a:xfrm>
           <a:prstGeom prst="rect">
             <a:avLst/>
@@ -22657,20 +19489,20 @@
                   <a:srgbClr val="CCCCCC"/>
                 </a:solidFill>
               </a:rPr>
-              <a:t>Timing: 18–24 months post-Seed (2027–2028)</a:t>
-            </a:r>
-          </a:p>
-        </p:txBody>
-      </p:sp>
-      <p:sp>
-        <p:nvSpPr>
-          <p:cNvPr id="50" name="Rectangle 49"/>
+              <a:t>Timing: 18-24 months post-Seed (2027-2028)</a:t>
+            </a:r>
+          </a:p>
+        </p:txBody>
+      </p:sp>
+      <p:sp>
+        <p:nvSpPr>
+          <p:cNvPr id="28" name="Rectangle 27"/>
           <p:cNvSpPr/>
           <p:nvPr/>
         </p:nvSpPr>
         <p:spPr>
           <a:xfrm>
-            <a:off x="4572000" y="3904488"/>
+            <a:off x="4572000" y="3794760"/>
             <a:ext cx="3291840" cy="18288"/>
           </a:xfrm>
           <a:prstGeom prst="rect">
@@ -22707,13 +19539,13 @@
       </p:sp>
       <p:sp>
         <p:nvSpPr>
-          <p:cNvPr id="51" name="TextBox 50"/>
-          <p:cNvSpPr txBox="1"/>
-          <p:nvPr/>
-        </p:nvSpPr>
-        <p:spPr>
-          <a:xfrm>
-            <a:off x="4572000" y="4023360"/>
+          <p:cNvPr id="29" name="TextBox 28"/>
+          <p:cNvSpPr txBox="1"/>
+          <p:nvPr/>
+        </p:nvSpPr>
+        <p:spPr>
+          <a:xfrm>
+            <a:off x="4572000" y="3922776"/>
             <a:ext cx="3337560" cy="347472"/>
           </a:xfrm>
           <a:prstGeom prst="rect">
@@ -22734,20 +19566,20 @@
                   <a:srgbClr val="F0F0F0"/>
                 </a:solidFill>
               </a:rPr>
-              <a:t>· Scale to 250,000–500,000 MAU</a:t>
-            </a:r>
-          </a:p>
-        </p:txBody>
-      </p:sp>
-      <p:sp>
-        <p:nvSpPr>
-          <p:cNvPr id="52" name="TextBox 51"/>
-          <p:cNvSpPr txBox="1"/>
-          <p:nvPr/>
-        </p:nvSpPr>
-        <p:spPr>
-          <a:xfrm>
-            <a:off x="4572000" y="4407408"/>
+              <a:t>-  Scale to 250,000-500,000 MAU</a:t>
+            </a:r>
+          </a:p>
+        </p:txBody>
+      </p:sp>
+      <p:sp>
+        <p:nvSpPr>
+          <p:cNvPr id="30" name="TextBox 29"/>
+          <p:cNvSpPr txBox="1"/>
+          <p:nvPr/>
+        </p:nvSpPr>
+        <p:spPr>
+          <a:xfrm>
+            <a:off x="4572000" y="4306824"/>
             <a:ext cx="3337560" cy="347472"/>
           </a:xfrm>
           <a:prstGeom prst="rect">
@@ -22768,20 +19600,20 @@
                   <a:srgbClr val="F0F0F0"/>
                 </a:solidFill>
               </a:rPr>
-              <a:t>· Bare metal infrastructure Phase 2 — full data center</a:t>
-            </a:r>
-          </a:p>
-        </p:txBody>
-      </p:sp>
-      <p:sp>
-        <p:nvSpPr>
-          <p:cNvPr id="53" name="TextBox 52"/>
-          <p:cNvSpPr txBox="1"/>
-          <p:nvPr/>
-        </p:nvSpPr>
-        <p:spPr>
-          <a:xfrm>
-            <a:off x="4572000" y="4791456"/>
+              <a:t>-  Bare metal infrastructure Phase 2  -  full data center</a:t>
+            </a:r>
+          </a:p>
+        </p:txBody>
+      </p:sp>
+      <p:sp>
+        <p:nvSpPr>
+          <p:cNvPr id="31" name="TextBox 30"/>
+          <p:cNvSpPr txBox="1"/>
+          <p:nvPr/>
+        </p:nvSpPr>
+        <p:spPr>
+          <a:xfrm>
+            <a:off x="4572000" y="4690871"/>
             <a:ext cx="3337560" cy="347472"/>
           </a:xfrm>
           <a:prstGeom prst="rect">
@@ -22802,20 +19634,20 @@
                   <a:srgbClr val="F0F0F0"/>
                 </a:solidFill>
               </a:rPr>
-              <a:t>· Regional expansion: South Asia, Pacific, Middle East</a:t>
-            </a:r>
-          </a:p>
-        </p:txBody>
-      </p:sp>
-      <p:sp>
-        <p:nvSpPr>
-          <p:cNvPr id="54" name="TextBox 53"/>
-          <p:cNvSpPr txBox="1"/>
-          <p:nvPr/>
-        </p:nvSpPr>
-        <p:spPr>
-          <a:xfrm>
-            <a:off x="4572000" y="5175504"/>
+              <a:t>-  Regional expansion: South Asia, Pacific, Middle East</a:t>
+            </a:r>
+          </a:p>
+        </p:txBody>
+      </p:sp>
+      <p:sp>
+        <p:nvSpPr>
+          <p:cNvPr id="32" name="TextBox 31"/>
+          <p:cNvSpPr txBox="1"/>
+          <p:nvPr/>
+        </p:nvSpPr>
+        <p:spPr>
+          <a:xfrm>
+            <a:off x="4572000" y="5074920"/>
             <a:ext cx="3337560" cy="347472"/>
           </a:xfrm>
           <a:prstGeom prst="rect">
@@ -22836,20 +19668,20 @@
                   <a:srgbClr val="F0F0F0"/>
                 </a:solidFill>
               </a:rPr>
-              <a:t>· Creator fund launch: M/year to top creators</a:t>
-            </a:r>
-          </a:p>
-        </p:txBody>
-      </p:sp>
-      <p:sp>
-        <p:nvSpPr>
-          <p:cNvPr id="55" name="TextBox 54"/>
-          <p:cNvSpPr txBox="1"/>
-          <p:nvPr/>
-        </p:nvSpPr>
-        <p:spPr>
-          <a:xfrm>
-            <a:off x="4572000" y="5559552"/>
+              <a:t>-  Creator fund launch: USD 1M/year to top creators</a:t>
+            </a:r>
+          </a:p>
+        </p:txBody>
+      </p:sp>
+      <p:sp>
+        <p:nvSpPr>
+          <p:cNvPr id="33" name="TextBox 32"/>
+          <p:cNvSpPr txBox="1"/>
+          <p:nvPr/>
+        </p:nvSpPr>
+        <p:spPr>
+          <a:xfrm>
+            <a:off x="4572000" y="5458968"/>
             <a:ext cx="3337560" cy="347472"/>
           </a:xfrm>
           <a:prstGeom prst="rect">
@@ -22870,20 +19702,20 @@
                   <a:srgbClr val="F0F0F0"/>
                 </a:solidFill>
               </a:rPr>
-              <a:t>· Pre-money valuation target: 0–60M</a:t>
-            </a:r>
-          </a:p>
-        </p:txBody>
-      </p:sp>
-      <p:sp>
-        <p:nvSpPr>
-          <p:cNvPr id="56" name="TextBox 55"/>
-          <p:cNvSpPr txBox="1"/>
-          <p:nvPr/>
-        </p:nvSpPr>
-        <p:spPr>
-          <a:xfrm>
-            <a:off x="4572000" y="5943600"/>
+              <a:t>-  Pre-money valuation target: USD 40M-60M</a:t>
+            </a:r>
+          </a:p>
+        </p:txBody>
+      </p:sp>
+      <p:sp>
+        <p:nvSpPr>
+          <p:cNvPr id="34" name="TextBox 33"/>
+          <p:cNvSpPr txBox="1"/>
+          <p:nvPr/>
+        </p:nvSpPr>
+        <p:spPr>
+          <a:xfrm>
+            <a:off x="4572000" y="5843016"/>
             <a:ext cx="3337560" cy="347472"/>
           </a:xfrm>
           <a:prstGeom prst="rect">
@@ -22904,21 +19736,21 @@
                   <a:srgbClr val="F0F0F0"/>
                 </a:solidFill>
               </a:rPr>
-              <a:t>· Trigger: M+ ARR run rate achieved</a:t>
-            </a:r>
-          </a:p>
-        </p:txBody>
-      </p:sp>
-      <p:sp>
-        <p:nvSpPr>
-          <p:cNvPr id="57" name="Rectangle 56"/>
+              <a:t>-  Trigger: USD 1M+ ARR run rate achieved</a:t>
+            </a:r>
+          </a:p>
+        </p:txBody>
+      </p:sp>
+      <p:sp>
+        <p:nvSpPr>
+          <p:cNvPr id="35" name="Rectangle 34"/>
           <p:cNvSpPr/>
           <p:nvPr/>
         </p:nvSpPr>
         <p:spPr>
           <a:xfrm>
-            <a:off x="8275320" y="2697480"/>
-            <a:ext cx="3611880" cy="3749039"/>
+            <a:off x="8275320" y="2606040"/>
+            <a:ext cx="3611880" cy="3840480"/>
           </a:xfrm>
           <a:prstGeom prst="rect">
             <a:avLst/>
@@ -22956,14 +19788,14 @@
       </p:sp>
       <p:sp>
         <p:nvSpPr>
-          <p:cNvPr id="58" name="TextBox 57"/>
-          <p:cNvSpPr txBox="1"/>
-          <p:nvPr/>
-        </p:nvSpPr>
-        <p:spPr>
-          <a:xfrm>
-            <a:off x="8412480" y="2788920"/>
-            <a:ext cx="3337560" cy="347472"/>
+          <p:cNvPr id="36" name="TextBox 35"/>
+          <p:cNvSpPr txBox="1"/>
+          <p:nvPr/>
+        </p:nvSpPr>
+        <p:spPr>
+          <a:xfrm>
+            <a:off x="8412480" y="2697480"/>
+            <a:ext cx="3337560" cy="329184"/>
           </a:xfrm>
           <a:prstGeom prst="rect">
             <a:avLst/>
@@ -22983,21 +19815,21 @@
                   <a:srgbClr val="7BD4FF"/>
                 </a:solidFill>
               </a:rPr>
-              <a:t>PATH TO 2M ARR</a:t>
-            </a:r>
-          </a:p>
-        </p:txBody>
-      </p:sp>
-      <p:sp>
-        <p:nvSpPr>
-          <p:cNvPr id="59" name="TextBox 58"/>
-          <p:cNvSpPr txBox="1"/>
-          <p:nvPr/>
-        </p:nvSpPr>
-        <p:spPr>
-          <a:xfrm>
-            <a:off x="8412480" y="3172968"/>
-            <a:ext cx="3337560" cy="438912"/>
+              <a:t>PATH TO USD 42M ARR</a:t>
+            </a:r>
+          </a:p>
+        </p:txBody>
+      </p:sp>
+      <p:sp>
+        <p:nvSpPr>
+          <p:cNvPr id="37" name="TextBox 36"/>
+          <p:cNvSpPr txBox="1"/>
+          <p:nvPr/>
+        </p:nvSpPr>
+        <p:spPr>
+          <a:xfrm>
+            <a:off x="8412480" y="3063240"/>
+            <a:ext cx="3337560" cy="420624"/>
           </a:xfrm>
           <a:prstGeom prst="rect">
             <a:avLst/>
@@ -23012,7 +19844,7 @@
           <a:p>
             <a:pPr algn="l"/>
             <a:r>
-              <a:rPr sz="2200" b="1" i="0">
+              <a:rPr sz="2000" b="1" i="0">
                 <a:solidFill>
                   <a:srgbClr val="FFFFFF"/>
                 </a:solidFill>
@@ -23024,14 +19856,14 @@
       </p:sp>
       <p:sp>
         <p:nvSpPr>
-          <p:cNvPr id="60" name="TextBox 59"/>
-          <p:cNvSpPr txBox="1"/>
-          <p:nvPr/>
-        </p:nvSpPr>
-        <p:spPr>
-          <a:xfrm>
-            <a:off x="8412480" y="3593592"/>
-            <a:ext cx="3337560" cy="274320"/>
+          <p:cNvPr id="38" name="TextBox 37"/>
+          <p:cNvSpPr txBox="1"/>
+          <p:nvPr/>
+        </p:nvSpPr>
+        <p:spPr>
+          <a:xfrm>
+            <a:off x="8412480" y="3502152"/>
+            <a:ext cx="3337560" cy="256032"/>
           </a:xfrm>
           <a:prstGeom prst="rect">
             <a:avLst/>
@@ -23051,20 +19883,20 @@
                   <a:srgbClr val="CCCCCC"/>
                 </a:solidFill>
               </a:rPr>
-              <a:t>By 2030 — 3M MAU</a:t>
-            </a:r>
-          </a:p>
-        </p:txBody>
-      </p:sp>
-      <p:sp>
-        <p:nvSpPr>
-          <p:cNvPr id="61" name="Rectangle 60"/>
+              <a:t>By 2030  -  3M MAU</a:t>
+            </a:r>
+          </a:p>
+        </p:txBody>
+      </p:sp>
+      <p:sp>
+        <p:nvSpPr>
+          <p:cNvPr id="39" name="Rectangle 38"/>
           <p:cNvSpPr/>
           <p:nvPr/>
         </p:nvSpPr>
         <p:spPr>
           <a:xfrm>
-            <a:off x="8412480" y="3904488"/>
+            <a:off x="8412480" y="3794760"/>
             <a:ext cx="3291840" cy="18288"/>
           </a:xfrm>
           <a:prstGeom prst="rect">
@@ -23101,13 +19933,13 @@
       </p:sp>
       <p:sp>
         <p:nvSpPr>
-          <p:cNvPr id="62" name="TextBox 61"/>
-          <p:cNvSpPr txBox="1"/>
-          <p:nvPr/>
-        </p:nvSpPr>
-        <p:spPr>
-          <a:xfrm>
-            <a:off x="8412480" y="4023360"/>
+          <p:cNvPr id="40" name="TextBox 39"/>
+          <p:cNvSpPr txBox="1"/>
+          <p:nvPr/>
+        </p:nvSpPr>
+        <p:spPr>
+          <a:xfrm>
+            <a:off x="8412480" y="3922776"/>
             <a:ext cx="3337560" cy="347472"/>
           </a:xfrm>
           <a:prstGeom prst="rect">
@@ -23128,20 +19960,20 @@
                   <a:srgbClr val="F0F0F0"/>
                 </a:solidFill>
               </a:rPr>
-              <a:t>· Gifting revenue: 8.8M</a:t>
-            </a:r>
-          </a:p>
-        </p:txBody>
-      </p:sp>
-      <p:sp>
-        <p:nvSpPr>
-          <p:cNvPr id="63" name="TextBox 62"/>
-          <p:cNvSpPr txBox="1"/>
-          <p:nvPr/>
-        </p:nvSpPr>
-        <p:spPr>
-          <a:xfrm>
-            <a:off x="8412480" y="4407408"/>
+              <a:t>-  Gifting revenue: USD 28.8M</a:t>
+            </a:r>
+          </a:p>
+        </p:txBody>
+      </p:sp>
+      <p:sp>
+        <p:nvSpPr>
+          <p:cNvPr id="41" name="TextBox 40"/>
+          <p:cNvSpPr txBox="1"/>
+          <p:nvPr/>
+        </p:nvSpPr>
+        <p:spPr>
+          <a:xfrm>
+            <a:off x="8412480" y="4306824"/>
             <a:ext cx="3337560" cy="347472"/>
           </a:xfrm>
           <a:prstGeom prst="rect">
@@ -23162,20 +19994,20 @@
                   <a:srgbClr val="F0F0F0"/>
                 </a:solidFill>
               </a:rPr>
-              <a:t>· Subscriptions: .2M</a:t>
-            </a:r>
-          </a:p>
-        </p:txBody>
-      </p:sp>
-      <p:sp>
-        <p:nvSpPr>
-          <p:cNvPr id="64" name="TextBox 63"/>
-          <p:cNvSpPr txBox="1"/>
-          <p:nvPr/>
-        </p:nvSpPr>
-        <p:spPr>
-          <a:xfrm>
-            <a:off x="8412480" y="4791456"/>
+              <a:t>-  Subscriptions: USD 7.2M</a:t>
+            </a:r>
+          </a:p>
+        </p:txBody>
+      </p:sp>
+      <p:sp>
+        <p:nvSpPr>
+          <p:cNvPr id="42" name="TextBox 41"/>
+          <p:cNvSpPr txBox="1"/>
+          <p:nvPr/>
+        </p:nvSpPr>
+        <p:spPr>
+          <a:xfrm>
+            <a:off x="8412480" y="4690871"/>
             <a:ext cx="3337560" cy="347472"/>
           </a:xfrm>
           <a:prstGeom prst="rect">
@@ -23196,20 +20028,20 @@
                   <a:srgbClr val="F0F0F0"/>
                 </a:solidFill>
               </a:rPr>
-              <a:t>· Advertising: .0M</a:t>
-            </a:r>
-          </a:p>
-        </p:txBody>
-      </p:sp>
-      <p:sp>
-        <p:nvSpPr>
-          <p:cNvPr id="65" name="TextBox 64"/>
-          <p:cNvSpPr txBox="1"/>
-          <p:nvPr/>
-        </p:nvSpPr>
-        <p:spPr>
-          <a:xfrm>
-            <a:off x="8412480" y="5175504"/>
+              <a:t>-  Advertising: USD 6.0M</a:t>
+            </a:r>
+          </a:p>
+        </p:txBody>
+      </p:sp>
+      <p:sp>
+        <p:nvSpPr>
+          <p:cNvPr id="43" name="TextBox 42"/>
+          <p:cNvSpPr txBox="1"/>
+          <p:nvPr/>
+        </p:nvSpPr>
+        <p:spPr>
+          <a:xfrm>
+            <a:off x="8412480" y="5074920"/>
             <a:ext cx="3337560" cy="347472"/>
           </a:xfrm>
           <a:prstGeom prst="rect">
@@ -23230,20 +20062,20 @@
                   <a:srgbClr val="F0F0F0"/>
                 </a:solidFill>
               </a:rPr>
-              <a:t>· EBITDA margin: 72%+</a:t>
-            </a:r>
-          </a:p>
-        </p:txBody>
-      </p:sp>
-      <p:sp>
-        <p:nvSpPr>
-          <p:cNvPr id="66" name="TextBox 65"/>
-          <p:cNvSpPr txBox="1"/>
-          <p:nvPr/>
-        </p:nvSpPr>
-        <p:spPr>
-          <a:xfrm>
-            <a:off x="8412480" y="5559552"/>
+              <a:t>-  EBITDA margin: 72%+</a:t>
+            </a:r>
+          </a:p>
+        </p:txBody>
+      </p:sp>
+      <p:sp>
+        <p:nvSpPr>
+          <p:cNvPr id="44" name="TextBox 43"/>
+          <p:cNvSpPr txBox="1"/>
+          <p:nvPr/>
+        </p:nvSpPr>
+        <p:spPr>
+          <a:xfrm>
+            <a:off x="8412480" y="5458968"/>
             <a:ext cx="3337560" cy="347472"/>
           </a:xfrm>
           <a:prstGeom prst="rect">
@@ -23264,20 +20096,20 @@
                   <a:srgbClr val="F0F0F0"/>
                 </a:solidFill>
               </a:rPr>
-              <a:t>· Series B / strategic acquisition potential</a:t>
-            </a:r>
-          </a:p>
-        </p:txBody>
-      </p:sp>
-      <p:sp>
-        <p:nvSpPr>
-          <p:cNvPr id="67" name="TextBox 66"/>
-          <p:cNvSpPr txBox="1"/>
-          <p:nvPr/>
-        </p:nvSpPr>
-        <p:spPr>
-          <a:xfrm>
-            <a:off x="8412480" y="5943600"/>
+              <a:t>-  Series B / strategic acquisition potential</a:t>
+            </a:r>
+          </a:p>
+        </p:txBody>
+      </p:sp>
+      <p:sp>
+        <p:nvSpPr>
+          <p:cNvPr id="45" name="TextBox 44"/>
+          <p:cNvSpPr txBox="1"/>
+          <p:nvPr/>
+        </p:nvSpPr>
+        <p:spPr>
+          <a:xfrm>
+            <a:off x="8412480" y="5843016"/>
             <a:ext cx="3337560" cy="347472"/>
           </a:xfrm>
           <a:prstGeom prst="rect">
@@ -23298,14 +20130,14 @@
                   <a:srgbClr val="F0F0F0"/>
                 </a:solidFill>
               </a:rPr>
-              <a:t>· IPO or exit evaluation at 5M MAU milestone</a:t>
+              <a:t>-  IPO or exit evaluation at 5M MAU milestone</a:t>
             </a:r>
           </a:p>
         </p:txBody>
       </p:sp>
       <p:pic>
         <p:nvPicPr>
-          <p:cNvPr id="68" name="Picture 67" descr="sachi_logo_transparent.png"/>
+          <p:cNvPr id="46" name="Picture 45" descr="image.png"/>
           <p:cNvPicPr>
             <a:picLocks noChangeAspect="1"/>
           </p:cNvPicPr>
@@ -23319,1367 +20151,7 @@
         </p:blipFill>
         <p:spPr>
           <a:xfrm>
-            <a:off x="11430000" y="109728"/>
-            <a:ext cx="594360" cy="594360"/>
-          </a:xfrm>
-          <a:prstGeom prst="rect">
-            <a:avLst/>
-          </a:prstGeom>
-        </p:spPr>
-      </p:pic>
-      <p:sp>
-        <p:nvSpPr>
-          <p:cNvPr id="69" name="Rectangle 68"/>
-          <p:cNvSpPr/>
-          <p:nvPr/>
-        </p:nvSpPr>
-        <p:spPr>
-          <a:xfrm>
-            <a:off x="0" y="1005840"/>
-            <a:ext cx="12188952" cy="5852160"/>
-          </a:xfrm>
-          <a:prstGeom prst="rect">
-            <a:avLst/>
-          </a:prstGeom>
-          <a:solidFill>
-            <a:srgbClr val="0B0C1A"/>
-          </a:solidFill>
-          <a:ln>
-            <a:noFill/>
-          </a:ln>
-        </p:spPr>
-        <p:style>
-          <a:lnRef idx="1">
-            <a:schemeClr val="accent1"/>
-          </a:lnRef>
-          <a:fillRef idx="3">
-            <a:schemeClr val="accent1"/>
-          </a:fillRef>
-          <a:effectRef idx="2">
-            <a:schemeClr val="accent1"/>
-          </a:effectRef>
-          <a:fontRef idx="minor">
-            <a:schemeClr val="lt1"/>
-          </a:fontRef>
-        </p:style>
-        <p:txBody>
-          <a:bodyPr rtlCol="0" anchor="ctr"/>
-          <a:lstStyle/>
-          <a:p>
-            <a:pPr algn="ctr"/>
-          </a:p>
-        </p:txBody>
-      </p:sp>
-      <p:sp>
-        <p:nvSpPr>
-          <p:cNvPr id="70" name="TextBox 69"/>
-          <p:cNvSpPr txBox="1"/>
-          <p:nvPr/>
-        </p:nvSpPr>
-        <p:spPr>
-          <a:xfrm>
-            <a:off x="777240" y="1143000"/>
-            <a:ext cx="10515600" cy="868680"/>
-          </a:xfrm>
-          <a:prstGeom prst="rect">
-            <a:avLst/>
-          </a:prstGeom>
-          <a:noFill/>
-        </p:spPr>
-        <p:txBody>
-          <a:bodyPr wrap="square">
-            <a:spAutoFit/>
-          </a:bodyPr>
-          <a:lstStyle/>
-          <a:p>
-            <a:pPr algn="ctr"/>
-            <a:r>
-              <a:rPr sz="5200" b="1" i="0">
-                <a:solidFill>
-                  <a:srgbClr val="F5C842"/>
-                </a:solidFill>
-              </a:rPr>
-              <a:t>USD 10,000,000  Total Raise</a:t>
-            </a:r>
-          </a:p>
-        </p:txBody>
-      </p:sp>
-      <p:sp>
-        <p:nvSpPr>
-          <p:cNvPr id="71" name="TextBox 70"/>
-          <p:cNvSpPr txBox="1"/>
-          <p:nvPr/>
-        </p:nvSpPr>
-        <p:spPr>
-          <a:xfrm>
-            <a:off x="777240" y="2011680"/>
-            <a:ext cx="10515600" cy="365760"/>
-          </a:xfrm>
-          <a:prstGeom prst="rect">
-            <a:avLst/>
-          </a:prstGeom>
-          <a:noFill/>
-        </p:spPr>
-        <p:txBody>
-          <a:bodyPr wrap="square">
-            <a:spAutoFit/>
-          </a:bodyPr>
-          <a:lstStyle/>
-          <a:p>
-            <a:pPr algn="ctr"/>
-            <a:r>
-              <a:rPr sz="1600" b="0" i="0">
-                <a:solidFill>
-                  <a:srgbClr val="CCCCCC"/>
-                </a:solidFill>
-              </a:rPr>
-              <a:t>Two-Round Structure  |  LDNA Consulting LLC  |  2026-2027</a:t>
-            </a:r>
-          </a:p>
-        </p:txBody>
-      </p:sp>
-      <p:sp>
-        <p:nvSpPr>
-          <p:cNvPr id="72" name="Rectangle 71"/>
-          <p:cNvSpPr/>
-          <p:nvPr/>
-        </p:nvSpPr>
-        <p:spPr>
-          <a:xfrm>
-            <a:off x="777240" y="2514600"/>
-            <a:ext cx="10515600" cy="27432"/>
-          </a:xfrm>
-          <a:prstGeom prst="rect">
-            <a:avLst/>
-          </a:prstGeom>
-          <a:solidFill>
-            <a:srgbClr val="FF6B6B"/>
-          </a:solidFill>
-          <a:ln>
-            <a:noFill/>
-          </a:ln>
-        </p:spPr>
-        <p:style>
-          <a:lnRef idx="1">
-            <a:schemeClr val="accent1"/>
-          </a:lnRef>
-          <a:fillRef idx="3">
-            <a:schemeClr val="accent1"/>
-          </a:fillRef>
-          <a:effectRef idx="2">
-            <a:schemeClr val="accent1"/>
-          </a:effectRef>
-          <a:fontRef idx="minor">
-            <a:schemeClr val="lt1"/>
-          </a:fontRef>
-        </p:style>
-        <p:txBody>
-          <a:bodyPr rtlCol="0" anchor="ctr"/>
-          <a:lstStyle/>
-          <a:p>
-            <a:pPr algn="ctr"/>
-          </a:p>
-        </p:txBody>
-      </p:sp>
-      <p:sp>
-        <p:nvSpPr>
-          <p:cNvPr id="73" name="Rectangle 72"/>
-          <p:cNvSpPr/>
-          <p:nvPr/>
-        </p:nvSpPr>
-        <p:spPr>
-          <a:xfrm>
-            <a:off x="594360" y="2697480"/>
-            <a:ext cx="3611880" cy="3749039"/>
-          </a:xfrm>
-          <a:prstGeom prst="rect">
-            <a:avLst/>
-          </a:prstGeom>
-          <a:solidFill>
-            <a:srgbClr val="161830"/>
-          </a:solidFill>
-          <a:ln w="22860">
-            <a:solidFill>
-              <a:srgbClr val="F5C842"/>
-            </a:solidFill>
-          </a:ln>
-        </p:spPr>
-        <p:style>
-          <a:lnRef idx="1">
-            <a:schemeClr val="accent1"/>
-          </a:lnRef>
-          <a:fillRef idx="3">
-            <a:schemeClr val="accent1"/>
-          </a:fillRef>
-          <a:effectRef idx="2">
-            <a:schemeClr val="accent1"/>
-          </a:effectRef>
-          <a:fontRef idx="minor">
-            <a:schemeClr val="lt1"/>
-          </a:fontRef>
-        </p:style>
-        <p:txBody>
-          <a:bodyPr rtlCol="0" anchor="ctr"/>
-          <a:lstStyle/>
-          <a:p>
-            <a:pPr algn="ctr"/>
-          </a:p>
-        </p:txBody>
-      </p:sp>
-      <p:sp>
-        <p:nvSpPr>
-          <p:cNvPr id="74" name="TextBox 73"/>
-          <p:cNvSpPr txBox="1"/>
-          <p:nvPr/>
-        </p:nvSpPr>
-        <p:spPr>
-          <a:xfrm>
-            <a:off x="731520" y="2788920"/>
-            <a:ext cx="3337560" cy="347472"/>
-          </a:xfrm>
-          <a:prstGeom prst="rect">
-            <a:avLst/>
-          </a:prstGeom>
-          <a:noFill/>
-        </p:spPr>
-        <p:txBody>
-          <a:bodyPr wrap="square">
-            <a:spAutoFit/>
-          </a:bodyPr>
-          <a:lstStyle/>
-          <a:p>
-            <a:pPr algn="l"/>
-            <a:r>
-              <a:rPr sz="1300" b="1" i="0">
-                <a:solidFill>
-                  <a:srgbClr val="F5C842"/>
-                </a:solidFill>
-              </a:rPr>
-              <a:t>ROUND 1 -- SEED</a:t>
-            </a:r>
-          </a:p>
-        </p:txBody>
-      </p:sp>
-      <p:sp>
-        <p:nvSpPr>
-          <p:cNvPr id="75" name="TextBox 74"/>
-          <p:cNvSpPr txBox="1"/>
-          <p:nvPr/>
-        </p:nvSpPr>
-        <p:spPr>
-          <a:xfrm>
-            <a:off x="731520" y="3172968"/>
-            <a:ext cx="3337560" cy="438912"/>
-          </a:xfrm>
-          <a:prstGeom prst="rect">
-            <a:avLst/>
-          </a:prstGeom>
-          <a:noFill/>
-        </p:spPr>
-        <p:txBody>
-          <a:bodyPr wrap="square">
-            <a:spAutoFit/>
-          </a:bodyPr>
-          <a:lstStyle/>
-          <a:p>
-            <a:pPr algn="l"/>
-            <a:r>
-              <a:rPr sz="2200" b="1" i="0">
-                <a:solidFill>
-                  <a:srgbClr val="FFFFFF"/>
-                </a:solidFill>
-              </a:rPr>
-              <a:t>USD 5,000,000</a:t>
-            </a:r>
-          </a:p>
-        </p:txBody>
-      </p:sp>
-      <p:sp>
-        <p:nvSpPr>
-          <p:cNvPr id="76" name="TextBox 75"/>
-          <p:cNvSpPr txBox="1"/>
-          <p:nvPr/>
-        </p:nvSpPr>
-        <p:spPr>
-          <a:xfrm>
-            <a:off x="731520" y="3593592"/>
-            <a:ext cx="3337560" cy="274320"/>
-          </a:xfrm>
-          <a:prstGeom prst="rect">
-            <a:avLst/>
-          </a:prstGeom>
-          <a:noFill/>
-        </p:spPr>
-        <p:txBody>
-          <a:bodyPr wrap="square">
-            <a:spAutoFit/>
-          </a:bodyPr>
-          <a:lstStyle/>
-          <a:p>
-            <a:pPr algn="l"/>
-            <a:r>
-              <a:rPr sz="1100" b="0" i="1">
-                <a:solidFill>
-                  <a:srgbClr val="CCCCCC"/>
-                </a:solidFill>
-              </a:rPr>
-              <a:t>Timing: Q2-Q3 2026</a:t>
-            </a:r>
-          </a:p>
-        </p:txBody>
-      </p:sp>
-      <p:sp>
-        <p:nvSpPr>
-          <p:cNvPr id="77" name="Rectangle 76"/>
-          <p:cNvSpPr/>
-          <p:nvPr/>
-        </p:nvSpPr>
-        <p:spPr>
-          <a:xfrm>
-            <a:off x="731520" y="3904488"/>
-            <a:ext cx="3291840" cy="18288"/>
-          </a:xfrm>
-          <a:prstGeom prst="rect">
-            <a:avLst/>
-          </a:prstGeom>
-          <a:solidFill>
-            <a:srgbClr val="F5C842"/>
-          </a:solidFill>
-          <a:ln>
-            <a:noFill/>
-          </a:ln>
-        </p:spPr>
-        <p:style>
-          <a:lnRef idx="1">
-            <a:schemeClr val="accent1"/>
-          </a:lnRef>
-          <a:fillRef idx="3">
-            <a:schemeClr val="accent1"/>
-          </a:fillRef>
-          <a:effectRef idx="2">
-            <a:schemeClr val="accent1"/>
-          </a:effectRef>
-          <a:fontRef idx="minor">
-            <a:schemeClr val="lt1"/>
-          </a:fontRef>
-        </p:style>
-        <p:txBody>
-          <a:bodyPr rtlCol="0" anchor="ctr"/>
-          <a:lstStyle/>
-          <a:p>
-            <a:pPr algn="ctr"/>
-          </a:p>
-        </p:txBody>
-      </p:sp>
-      <p:sp>
-        <p:nvSpPr>
-          <p:cNvPr id="78" name="TextBox 77"/>
-          <p:cNvSpPr txBox="1"/>
-          <p:nvPr/>
-        </p:nvSpPr>
-        <p:spPr>
-          <a:xfrm>
-            <a:off x="731520" y="4023360"/>
-            <a:ext cx="3337560" cy="347472"/>
-          </a:xfrm>
-          <a:prstGeom prst="rect">
-            <a:avLst/>
-          </a:prstGeom>
-          <a:noFill/>
-        </p:spPr>
-        <p:txBody>
-          <a:bodyPr wrap="square">
-            <a:spAutoFit/>
-          </a:bodyPr>
-          <a:lstStyle/>
-          <a:p>
-            <a:pPr algn="l"/>
-            <a:r>
-              <a:rPr sz="1100" b="0" i="0">
-                <a:solidFill>
-                  <a:srgbClr val="F0F0F0"/>
-                </a:solidFill>
-              </a:rPr>
-              <a:t>- Platform iOS + Android launch (App Store + Google Play)</a:t>
-            </a:r>
-          </a:p>
-        </p:txBody>
-      </p:sp>
-      <p:sp>
-        <p:nvSpPr>
-          <p:cNvPr id="79" name="TextBox 78"/>
-          <p:cNvSpPr txBox="1"/>
-          <p:nvPr/>
-        </p:nvSpPr>
-        <p:spPr>
-          <a:xfrm>
-            <a:off x="731520" y="4407408"/>
-            <a:ext cx="3337560" cy="347472"/>
-          </a:xfrm>
-          <a:prstGeom prst="rect">
-            <a:avLst/>
-          </a:prstGeom>
-          <a:noFill/>
-        </p:spPr>
-        <p:txBody>
-          <a:bodyPr wrap="square">
-            <a:spAutoFit/>
-          </a:bodyPr>
-          <a:lstStyle/>
-          <a:p>
-            <a:pPr algn="l"/>
-            <a:r>
-              <a:rPr sz="1100" b="0" i="0">
-                <a:solidFill>
-                  <a:srgbClr val="F0F0F0"/>
-                </a:solidFill>
-              </a:rPr>
-              <a:t>- Colombo engineering team: 10-15 developers hired</a:t>
-            </a:r>
-          </a:p>
-        </p:txBody>
-      </p:sp>
-      <p:sp>
-        <p:nvSpPr>
-          <p:cNvPr id="80" name="TextBox 79"/>
-          <p:cNvSpPr txBox="1"/>
-          <p:nvPr/>
-        </p:nvSpPr>
-        <p:spPr>
-          <a:xfrm>
-            <a:off x="731520" y="4791456"/>
-            <a:ext cx="3337560" cy="347472"/>
-          </a:xfrm>
-          <a:prstGeom prst="rect">
-            <a:avLst/>
-          </a:prstGeom>
-          <a:noFill/>
-        </p:spPr>
-        <p:txBody>
-          <a:bodyPr wrap="square">
-            <a:spAutoFit/>
-          </a:bodyPr>
-          <a:lstStyle/>
-          <a:p>
-            <a:pPr algn="l"/>
-            <a:r>
-              <a:rPr sz="1100" b="0" i="0">
-                <a:solidFill>
-                  <a:srgbClr val="F0F0F0"/>
-                </a:solidFill>
-              </a:rPr>
-              <a:t>- Bare metal infrastructure Phase 1 -- Colombo facility</a:t>
-            </a:r>
-          </a:p>
-        </p:txBody>
-      </p:sp>
-      <p:sp>
-        <p:nvSpPr>
-          <p:cNvPr id="81" name="TextBox 80"/>
-          <p:cNvSpPr txBox="1"/>
-          <p:nvPr/>
-        </p:nvSpPr>
-        <p:spPr>
-          <a:xfrm>
-            <a:off x="731520" y="5175504"/>
-            <a:ext cx="3337560" cy="347472"/>
-          </a:xfrm>
-          <a:prstGeom prst="rect">
-            <a:avLst/>
-          </a:prstGeom>
-          <a:noFill/>
-        </p:spPr>
-        <p:txBody>
-          <a:bodyPr wrap="square">
-            <a:spAutoFit/>
-          </a:bodyPr>
-          <a:lstStyle/>
-          <a:p>
-            <a:pPr algn="l"/>
-            <a:r>
-              <a:rPr sz="1100" b="0" i="0">
-                <a:solidFill>
-                  <a:srgbClr val="F0F0F0"/>
-                </a:solidFill>
-              </a:rPr>
-              <a:t>- Marketing &amp; creator acquisition -- 10,000 MAU target</a:t>
-            </a:r>
-          </a:p>
-        </p:txBody>
-      </p:sp>
-      <p:sp>
-        <p:nvSpPr>
-          <p:cNvPr id="82" name="TextBox 81"/>
-          <p:cNvSpPr txBox="1"/>
-          <p:nvPr/>
-        </p:nvSpPr>
-        <p:spPr>
-          <a:xfrm>
-            <a:off x="731520" y="5559552"/>
-            <a:ext cx="3337560" cy="347472"/>
-          </a:xfrm>
-          <a:prstGeom prst="rect">
-            <a:avLst/>
-          </a:prstGeom>
-          <a:noFill/>
-        </p:spPr>
-        <p:txBody>
-          <a:bodyPr wrap="square">
-            <a:spAutoFit/>
-          </a:bodyPr>
-          <a:lstStyle/>
-          <a:p>
-            <a:pPr algn="l"/>
-            <a:r>
-              <a:rPr sz="1100" b="0" i="0">
-                <a:solidFill>
-                  <a:srgbClr val="F0F0F0"/>
-                </a:solidFill>
-              </a:rPr>
-              <a:t>- Equity offered: TBD in negotiation</a:t>
-            </a:r>
-          </a:p>
-        </p:txBody>
-      </p:sp>
-      <p:sp>
-        <p:nvSpPr>
-          <p:cNvPr id="83" name="TextBox 82"/>
-          <p:cNvSpPr txBox="1"/>
-          <p:nvPr/>
-        </p:nvSpPr>
-        <p:spPr>
-          <a:xfrm>
-            <a:off x="731520" y="5943600"/>
-            <a:ext cx="3337560" cy="347472"/>
-          </a:xfrm>
-          <a:prstGeom prst="rect">
-            <a:avLst/>
-          </a:prstGeom>
-          <a:noFill/>
-        </p:spPr>
-        <p:txBody>
-          <a:bodyPr wrap="square">
-            <a:spAutoFit/>
-          </a:bodyPr>
-          <a:lstStyle/>
-          <a:p>
-            <a:pPr algn="l"/>
-            <a:r>
-              <a:rPr sz="1100" b="0" i="0">
-                <a:solidFill>
-                  <a:srgbClr val="F0F0F0"/>
-                </a:solidFill>
-              </a:rPr>
-              <a:t>- Board observer seat at USD 1M+ commitment</a:t>
-            </a:r>
-          </a:p>
-        </p:txBody>
-      </p:sp>
-      <p:sp>
-        <p:nvSpPr>
-          <p:cNvPr id="84" name="Rectangle 83"/>
-          <p:cNvSpPr/>
-          <p:nvPr/>
-        </p:nvSpPr>
-        <p:spPr>
-          <a:xfrm>
-            <a:off x="4434840" y="2697480"/>
-            <a:ext cx="3611880" cy="3749039"/>
-          </a:xfrm>
-          <a:prstGeom prst="rect">
-            <a:avLst/>
-          </a:prstGeom>
-          <a:solidFill>
-            <a:srgbClr val="161830"/>
-          </a:solidFill>
-          <a:ln w="22860">
-            <a:solidFill>
-              <a:srgbClr val="FF6B6B"/>
-            </a:solidFill>
-          </a:ln>
-        </p:spPr>
-        <p:style>
-          <a:lnRef idx="1">
-            <a:schemeClr val="accent1"/>
-          </a:lnRef>
-          <a:fillRef idx="3">
-            <a:schemeClr val="accent1"/>
-          </a:fillRef>
-          <a:effectRef idx="2">
-            <a:schemeClr val="accent1"/>
-          </a:effectRef>
-          <a:fontRef idx="minor">
-            <a:schemeClr val="lt1"/>
-          </a:fontRef>
-        </p:style>
-        <p:txBody>
-          <a:bodyPr rtlCol="0" anchor="ctr"/>
-          <a:lstStyle/>
-          <a:p>
-            <a:pPr algn="ctr"/>
-          </a:p>
-        </p:txBody>
-      </p:sp>
-      <p:sp>
-        <p:nvSpPr>
-          <p:cNvPr id="85" name="TextBox 84"/>
-          <p:cNvSpPr txBox="1"/>
-          <p:nvPr/>
-        </p:nvSpPr>
-        <p:spPr>
-          <a:xfrm>
-            <a:off x="4572000" y="2788920"/>
-            <a:ext cx="3337560" cy="347472"/>
-          </a:xfrm>
-          <a:prstGeom prst="rect">
-            <a:avLst/>
-          </a:prstGeom>
-          <a:noFill/>
-        </p:spPr>
-        <p:txBody>
-          <a:bodyPr wrap="square">
-            <a:spAutoFit/>
-          </a:bodyPr>
-          <a:lstStyle/>
-          <a:p>
-            <a:pPr algn="l"/>
-            <a:r>
-              <a:rPr sz="1300" b="1" i="0">
-                <a:solidFill>
-                  <a:srgbClr val="FF6B6B"/>
-                </a:solidFill>
-              </a:rPr>
-              <a:t>ROUND 2 -- SERIES A</a:t>
-            </a:r>
-          </a:p>
-        </p:txBody>
-      </p:sp>
-      <p:sp>
-        <p:nvSpPr>
-          <p:cNvPr id="86" name="TextBox 85"/>
-          <p:cNvSpPr txBox="1"/>
-          <p:nvPr/>
-        </p:nvSpPr>
-        <p:spPr>
-          <a:xfrm>
-            <a:off x="4572000" y="3172968"/>
-            <a:ext cx="3337560" cy="438912"/>
-          </a:xfrm>
-          <a:prstGeom prst="rect">
-            <a:avLst/>
-          </a:prstGeom>
-          <a:noFill/>
-        </p:spPr>
-        <p:txBody>
-          <a:bodyPr wrap="square">
-            <a:spAutoFit/>
-          </a:bodyPr>
-          <a:lstStyle/>
-          <a:p>
-            <a:pPr algn="l"/>
-            <a:r>
-              <a:rPr sz="2200" b="1" i="0">
-                <a:solidFill>
-                  <a:srgbClr val="FFFFFF"/>
-                </a:solidFill>
-              </a:rPr>
-              <a:t>USD 5,000,000</a:t>
-            </a:r>
-          </a:p>
-        </p:txBody>
-      </p:sp>
-      <p:sp>
-        <p:nvSpPr>
-          <p:cNvPr id="87" name="TextBox 86"/>
-          <p:cNvSpPr txBox="1"/>
-          <p:nvPr/>
-        </p:nvSpPr>
-        <p:spPr>
-          <a:xfrm>
-            <a:off x="4572000" y="3593592"/>
-            <a:ext cx="3337560" cy="274320"/>
-          </a:xfrm>
-          <a:prstGeom prst="rect">
-            <a:avLst/>
-          </a:prstGeom>
-          <a:noFill/>
-        </p:spPr>
-        <p:txBody>
-          <a:bodyPr wrap="square">
-            <a:spAutoFit/>
-          </a:bodyPr>
-          <a:lstStyle/>
-          <a:p>
-            <a:pPr algn="l"/>
-            <a:r>
-              <a:rPr sz="1100" b="0" i="1">
-                <a:solidFill>
-                  <a:srgbClr val="CCCCCC"/>
-                </a:solidFill>
-              </a:rPr>
-              <a:t>Timing: 18-24 months post-Seed (2027-2028)</a:t>
-            </a:r>
-          </a:p>
-        </p:txBody>
-      </p:sp>
-      <p:sp>
-        <p:nvSpPr>
-          <p:cNvPr id="88" name="Rectangle 87"/>
-          <p:cNvSpPr/>
-          <p:nvPr/>
-        </p:nvSpPr>
-        <p:spPr>
-          <a:xfrm>
-            <a:off x="4572000" y="3904488"/>
-            <a:ext cx="3291840" cy="18288"/>
-          </a:xfrm>
-          <a:prstGeom prst="rect">
-            <a:avLst/>
-          </a:prstGeom>
-          <a:solidFill>
-            <a:srgbClr val="FF6B6B"/>
-          </a:solidFill>
-          <a:ln>
-            <a:noFill/>
-          </a:ln>
-        </p:spPr>
-        <p:style>
-          <a:lnRef idx="1">
-            <a:schemeClr val="accent1"/>
-          </a:lnRef>
-          <a:fillRef idx="3">
-            <a:schemeClr val="accent1"/>
-          </a:fillRef>
-          <a:effectRef idx="2">
-            <a:schemeClr val="accent1"/>
-          </a:effectRef>
-          <a:fontRef idx="minor">
-            <a:schemeClr val="lt1"/>
-          </a:fontRef>
-        </p:style>
-        <p:txBody>
-          <a:bodyPr rtlCol="0" anchor="ctr"/>
-          <a:lstStyle/>
-          <a:p>
-            <a:pPr algn="ctr"/>
-          </a:p>
-        </p:txBody>
-      </p:sp>
-      <p:sp>
-        <p:nvSpPr>
-          <p:cNvPr id="89" name="TextBox 88"/>
-          <p:cNvSpPr txBox="1"/>
-          <p:nvPr/>
-        </p:nvSpPr>
-        <p:spPr>
-          <a:xfrm>
-            <a:off x="4572000" y="4023360"/>
-            <a:ext cx="3337560" cy="347472"/>
-          </a:xfrm>
-          <a:prstGeom prst="rect">
-            <a:avLst/>
-          </a:prstGeom>
-          <a:noFill/>
-        </p:spPr>
-        <p:txBody>
-          <a:bodyPr wrap="square">
-            <a:spAutoFit/>
-          </a:bodyPr>
-          <a:lstStyle/>
-          <a:p>
-            <a:pPr algn="l"/>
-            <a:r>
-              <a:rPr sz="1100" b="0" i="0">
-                <a:solidFill>
-                  <a:srgbClr val="F0F0F0"/>
-                </a:solidFill>
-              </a:rPr>
-              <a:t>- Scale to 250,000-500,000 MAU</a:t>
-            </a:r>
-          </a:p>
-        </p:txBody>
-      </p:sp>
-      <p:sp>
-        <p:nvSpPr>
-          <p:cNvPr id="90" name="TextBox 89"/>
-          <p:cNvSpPr txBox="1"/>
-          <p:nvPr/>
-        </p:nvSpPr>
-        <p:spPr>
-          <a:xfrm>
-            <a:off x="4572000" y="4407408"/>
-            <a:ext cx="3337560" cy="347472"/>
-          </a:xfrm>
-          <a:prstGeom prst="rect">
-            <a:avLst/>
-          </a:prstGeom>
-          <a:noFill/>
-        </p:spPr>
-        <p:txBody>
-          <a:bodyPr wrap="square">
-            <a:spAutoFit/>
-          </a:bodyPr>
-          <a:lstStyle/>
-          <a:p>
-            <a:pPr algn="l"/>
-            <a:r>
-              <a:rPr sz="1100" b="0" i="0">
-                <a:solidFill>
-                  <a:srgbClr val="F0F0F0"/>
-                </a:solidFill>
-              </a:rPr>
-              <a:t>- Bare metal infrastructure Phase 2 -- full data center</a:t>
-            </a:r>
-          </a:p>
-        </p:txBody>
-      </p:sp>
-      <p:sp>
-        <p:nvSpPr>
-          <p:cNvPr id="91" name="TextBox 90"/>
-          <p:cNvSpPr txBox="1"/>
-          <p:nvPr/>
-        </p:nvSpPr>
-        <p:spPr>
-          <a:xfrm>
-            <a:off x="4572000" y="4791456"/>
-            <a:ext cx="3337560" cy="347472"/>
-          </a:xfrm>
-          <a:prstGeom prst="rect">
-            <a:avLst/>
-          </a:prstGeom>
-          <a:noFill/>
-        </p:spPr>
-        <p:txBody>
-          <a:bodyPr wrap="square">
-            <a:spAutoFit/>
-          </a:bodyPr>
-          <a:lstStyle/>
-          <a:p>
-            <a:pPr algn="l"/>
-            <a:r>
-              <a:rPr sz="1100" b="0" i="0">
-                <a:solidFill>
-                  <a:srgbClr val="F0F0F0"/>
-                </a:solidFill>
-              </a:rPr>
-              <a:t>- Regional expansion: South Asia, Pacific, Middle East</a:t>
-            </a:r>
-          </a:p>
-        </p:txBody>
-      </p:sp>
-      <p:sp>
-        <p:nvSpPr>
-          <p:cNvPr id="92" name="TextBox 91"/>
-          <p:cNvSpPr txBox="1"/>
-          <p:nvPr/>
-        </p:nvSpPr>
-        <p:spPr>
-          <a:xfrm>
-            <a:off x="4572000" y="5175504"/>
-            <a:ext cx="3337560" cy="347472"/>
-          </a:xfrm>
-          <a:prstGeom prst="rect">
-            <a:avLst/>
-          </a:prstGeom>
-          <a:noFill/>
-        </p:spPr>
-        <p:txBody>
-          <a:bodyPr wrap="square">
-            <a:spAutoFit/>
-          </a:bodyPr>
-          <a:lstStyle/>
-          <a:p>
-            <a:pPr algn="l"/>
-            <a:r>
-              <a:rPr sz="1100" b="0" i="0">
-                <a:solidFill>
-                  <a:srgbClr val="F0F0F0"/>
-                </a:solidFill>
-              </a:rPr>
-              <a:t>- Creator fund launch: USD 1M/year to top creators</a:t>
-            </a:r>
-          </a:p>
-        </p:txBody>
-      </p:sp>
-      <p:sp>
-        <p:nvSpPr>
-          <p:cNvPr id="93" name="TextBox 92"/>
-          <p:cNvSpPr txBox="1"/>
-          <p:nvPr/>
-        </p:nvSpPr>
-        <p:spPr>
-          <a:xfrm>
-            <a:off x="4572000" y="5559552"/>
-            <a:ext cx="3337560" cy="347472"/>
-          </a:xfrm>
-          <a:prstGeom prst="rect">
-            <a:avLst/>
-          </a:prstGeom>
-          <a:noFill/>
-        </p:spPr>
-        <p:txBody>
-          <a:bodyPr wrap="square">
-            <a:spAutoFit/>
-          </a:bodyPr>
-          <a:lstStyle/>
-          <a:p>
-            <a:pPr algn="l"/>
-            <a:r>
-              <a:rPr sz="1100" b="0" i="0">
-                <a:solidFill>
-                  <a:srgbClr val="F0F0F0"/>
-                </a:solidFill>
-              </a:rPr>
-              <a:t>- Pre-money valuation target: USD 40M-60M</a:t>
-            </a:r>
-          </a:p>
-        </p:txBody>
-      </p:sp>
-      <p:sp>
-        <p:nvSpPr>
-          <p:cNvPr id="94" name="TextBox 93"/>
-          <p:cNvSpPr txBox="1"/>
-          <p:nvPr/>
-        </p:nvSpPr>
-        <p:spPr>
-          <a:xfrm>
-            <a:off x="4572000" y="5943600"/>
-            <a:ext cx="3337560" cy="347472"/>
-          </a:xfrm>
-          <a:prstGeom prst="rect">
-            <a:avLst/>
-          </a:prstGeom>
-          <a:noFill/>
-        </p:spPr>
-        <p:txBody>
-          <a:bodyPr wrap="square">
-            <a:spAutoFit/>
-          </a:bodyPr>
-          <a:lstStyle/>
-          <a:p>
-            <a:pPr algn="l"/>
-            <a:r>
-              <a:rPr sz="1100" b="0" i="0">
-                <a:solidFill>
-                  <a:srgbClr val="F0F0F0"/>
-                </a:solidFill>
-              </a:rPr>
-              <a:t>- Trigger: USD 1M+ ARR run rate achieved</a:t>
-            </a:r>
-          </a:p>
-        </p:txBody>
-      </p:sp>
-      <p:sp>
-        <p:nvSpPr>
-          <p:cNvPr id="95" name="Rectangle 94"/>
-          <p:cNvSpPr/>
-          <p:nvPr/>
-        </p:nvSpPr>
-        <p:spPr>
-          <a:xfrm>
-            <a:off x="8275320" y="2697480"/>
-            <a:ext cx="3611880" cy="3749039"/>
-          </a:xfrm>
-          <a:prstGeom prst="rect">
-            <a:avLst/>
-          </a:prstGeom>
-          <a:solidFill>
-            <a:srgbClr val="161830"/>
-          </a:solidFill>
-          <a:ln w="22860">
-            <a:solidFill>
-              <a:srgbClr val="7BD4FF"/>
-            </a:solidFill>
-          </a:ln>
-        </p:spPr>
-        <p:style>
-          <a:lnRef idx="1">
-            <a:schemeClr val="accent1"/>
-          </a:lnRef>
-          <a:fillRef idx="3">
-            <a:schemeClr val="accent1"/>
-          </a:fillRef>
-          <a:effectRef idx="2">
-            <a:schemeClr val="accent1"/>
-          </a:effectRef>
-          <a:fontRef idx="minor">
-            <a:schemeClr val="lt1"/>
-          </a:fontRef>
-        </p:style>
-        <p:txBody>
-          <a:bodyPr rtlCol="0" anchor="ctr"/>
-          <a:lstStyle/>
-          <a:p>
-            <a:pPr algn="ctr"/>
-          </a:p>
-        </p:txBody>
-      </p:sp>
-      <p:sp>
-        <p:nvSpPr>
-          <p:cNvPr id="96" name="TextBox 95"/>
-          <p:cNvSpPr txBox="1"/>
-          <p:nvPr/>
-        </p:nvSpPr>
-        <p:spPr>
-          <a:xfrm>
-            <a:off x="8412480" y="2788920"/>
-            <a:ext cx="3337560" cy="347472"/>
-          </a:xfrm>
-          <a:prstGeom prst="rect">
-            <a:avLst/>
-          </a:prstGeom>
-          <a:noFill/>
-        </p:spPr>
-        <p:txBody>
-          <a:bodyPr wrap="square">
-            <a:spAutoFit/>
-          </a:bodyPr>
-          <a:lstStyle/>
-          <a:p>
-            <a:pPr algn="l"/>
-            <a:r>
-              <a:rPr sz="1300" b="1" i="0">
-                <a:solidFill>
-                  <a:srgbClr val="7BD4FF"/>
-                </a:solidFill>
-              </a:rPr>
-              <a:t>PATH TO USD 42M ARR</a:t>
-            </a:r>
-          </a:p>
-        </p:txBody>
-      </p:sp>
-      <p:sp>
-        <p:nvSpPr>
-          <p:cNvPr id="97" name="TextBox 96"/>
-          <p:cNvSpPr txBox="1"/>
-          <p:nvPr/>
-        </p:nvSpPr>
-        <p:spPr>
-          <a:xfrm>
-            <a:off x="8412480" y="3172968"/>
-            <a:ext cx="3337560" cy="438912"/>
-          </a:xfrm>
-          <a:prstGeom prst="rect">
-            <a:avLst/>
-          </a:prstGeom>
-          <a:noFill/>
-        </p:spPr>
-        <p:txBody>
-          <a:bodyPr wrap="square">
-            <a:spAutoFit/>
-          </a:bodyPr>
-          <a:lstStyle/>
-          <a:p>
-            <a:pPr algn="l"/>
-            <a:r>
-              <a:rPr sz="2200" b="1" i="0">
-                <a:solidFill>
-                  <a:srgbClr val="FFFFFF"/>
-                </a:solidFill>
-              </a:rPr>
-              <a:t>Year 5 Target</a:t>
-            </a:r>
-          </a:p>
-        </p:txBody>
-      </p:sp>
-      <p:sp>
-        <p:nvSpPr>
-          <p:cNvPr id="98" name="TextBox 97"/>
-          <p:cNvSpPr txBox="1"/>
-          <p:nvPr/>
-        </p:nvSpPr>
-        <p:spPr>
-          <a:xfrm>
-            <a:off x="8412480" y="3593592"/>
-            <a:ext cx="3337560" cy="274320"/>
-          </a:xfrm>
-          <a:prstGeom prst="rect">
-            <a:avLst/>
-          </a:prstGeom>
-          <a:noFill/>
-        </p:spPr>
-        <p:txBody>
-          <a:bodyPr wrap="square">
-            <a:spAutoFit/>
-          </a:bodyPr>
-          <a:lstStyle/>
-          <a:p>
-            <a:pPr algn="l"/>
-            <a:r>
-              <a:rPr sz="1100" b="0" i="1">
-                <a:solidFill>
-                  <a:srgbClr val="CCCCCC"/>
-                </a:solidFill>
-              </a:rPr>
-              <a:t>By 2030 -- 3M MAU</a:t>
-            </a:r>
-          </a:p>
-        </p:txBody>
-      </p:sp>
-      <p:sp>
-        <p:nvSpPr>
-          <p:cNvPr id="99" name="Rectangle 98"/>
-          <p:cNvSpPr/>
-          <p:nvPr/>
-        </p:nvSpPr>
-        <p:spPr>
-          <a:xfrm>
-            <a:off x="8412480" y="3904488"/>
-            <a:ext cx="3291840" cy="18288"/>
-          </a:xfrm>
-          <a:prstGeom prst="rect">
-            <a:avLst/>
-          </a:prstGeom>
-          <a:solidFill>
-            <a:srgbClr val="7BD4FF"/>
-          </a:solidFill>
-          <a:ln>
-            <a:noFill/>
-          </a:ln>
-        </p:spPr>
-        <p:style>
-          <a:lnRef idx="1">
-            <a:schemeClr val="accent1"/>
-          </a:lnRef>
-          <a:fillRef idx="3">
-            <a:schemeClr val="accent1"/>
-          </a:fillRef>
-          <a:effectRef idx="2">
-            <a:schemeClr val="accent1"/>
-          </a:effectRef>
-          <a:fontRef idx="minor">
-            <a:schemeClr val="lt1"/>
-          </a:fontRef>
-        </p:style>
-        <p:txBody>
-          <a:bodyPr rtlCol="0" anchor="ctr"/>
-          <a:lstStyle/>
-          <a:p>
-            <a:pPr algn="ctr"/>
-          </a:p>
-        </p:txBody>
-      </p:sp>
-      <p:sp>
-        <p:nvSpPr>
-          <p:cNvPr id="100" name="TextBox 99"/>
-          <p:cNvSpPr txBox="1"/>
-          <p:nvPr/>
-        </p:nvSpPr>
-        <p:spPr>
-          <a:xfrm>
-            <a:off x="8412480" y="4023360"/>
-            <a:ext cx="3337560" cy="347472"/>
-          </a:xfrm>
-          <a:prstGeom prst="rect">
-            <a:avLst/>
-          </a:prstGeom>
-          <a:noFill/>
-        </p:spPr>
-        <p:txBody>
-          <a:bodyPr wrap="square">
-            <a:spAutoFit/>
-          </a:bodyPr>
-          <a:lstStyle/>
-          <a:p>
-            <a:pPr algn="l"/>
-            <a:r>
-              <a:rPr sz="1100" b="0" i="0">
-                <a:solidFill>
-                  <a:srgbClr val="F0F0F0"/>
-                </a:solidFill>
-              </a:rPr>
-              <a:t>- Gifting revenue: USD 28.8M</a:t>
-            </a:r>
-          </a:p>
-        </p:txBody>
-      </p:sp>
-      <p:sp>
-        <p:nvSpPr>
-          <p:cNvPr id="101" name="TextBox 100"/>
-          <p:cNvSpPr txBox="1"/>
-          <p:nvPr/>
-        </p:nvSpPr>
-        <p:spPr>
-          <a:xfrm>
-            <a:off x="8412480" y="4407408"/>
-            <a:ext cx="3337560" cy="347472"/>
-          </a:xfrm>
-          <a:prstGeom prst="rect">
-            <a:avLst/>
-          </a:prstGeom>
-          <a:noFill/>
-        </p:spPr>
-        <p:txBody>
-          <a:bodyPr wrap="square">
-            <a:spAutoFit/>
-          </a:bodyPr>
-          <a:lstStyle/>
-          <a:p>
-            <a:pPr algn="l"/>
-            <a:r>
-              <a:rPr sz="1100" b="0" i="0">
-                <a:solidFill>
-                  <a:srgbClr val="F0F0F0"/>
-                </a:solidFill>
-              </a:rPr>
-              <a:t>- Subscriptions: USD 7.2M</a:t>
-            </a:r>
-          </a:p>
-        </p:txBody>
-      </p:sp>
-      <p:sp>
-        <p:nvSpPr>
-          <p:cNvPr id="102" name="TextBox 101"/>
-          <p:cNvSpPr txBox="1"/>
-          <p:nvPr/>
-        </p:nvSpPr>
-        <p:spPr>
-          <a:xfrm>
-            <a:off x="8412480" y="4791456"/>
-            <a:ext cx="3337560" cy="347472"/>
-          </a:xfrm>
-          <a:prstGeom prst="rect">
-            <a:avLst/>
-          </a:prstGeom>
-          <a:noFill/>
-        </p:spPr>
-        <p:txBody>
-          <a:bodyPr wrap="square">
-            <a:spAutoFit/>
-          </a:bodyPr>
-          <a:lstStyle/>
-          <a:p>
-            <a:pPr algn="l"/>
-            <a:r>
-              <a:rPr sz="1100" b="0" i="0">
-                <a:solidFill>
-                  <a:srgbClr val="F0F0F0"/>
-                </a:solidFill>
-              </a:rPr>
-              <a:t>- Advertising: USD 6.0M</a:t>
-            </a:r>
-          </a:p>
-        </p:txBody>
-      </p:sp>
-      <p:sp>
-        <p:nvSpPr>
-          <p:cNvPr id="103" name="TextBox 102"/>
-          <p:cNvSpPr txBox="1"/>
-          <p:nvPr/>
-        </p:nvSpPr>
-        <p:spPr>
-          <a:xfrm>
-            <a:off x="8412480" y="5175504"/>
-            <a:ext cx="3337560" cy="347472"/>
-          </a:xfrm>
-          <a:prstGeom prst="rect">
-            <a:avLst/>
-          </a:prstGeom>
-          <a:noFill/>
-        </p:spPr>
-        <p:txBody>
-          <a:bodyPr wrap="square">
-            <a:spAutoFit/>
-          </a:bodyPr>
-          <a:lstStyle/>
-          <a:p>
-            <a:pPr algn="l"/>
-            <a:r>
-              <a:rPr sz="1100" b="0" i="0">
-                <a:solidFill>
-                  <a:srgbClr val="F0F0F0"/>
-                </a:solidFill>
-              </a:rPr>
-              <a:t>- EBITDA margin: 72%+</a:t>
-            </a:r>
-          </a:p>
-        </p:txBody>
-      </p:sp>
-      <p:sp>
-        <p:nvSpPr>
-          <p:cNvPr id="104" name="TextBox 103"/>
-          <p:cNvSpPr txBox="1"/>
-          <p:nvPr/>
-        </p:nvSpPr>
-        <p:spPr>
-          <a:xfrm>
-            <a:off x="8412480" y="5559552"/>
-            <a:ext cx="3337560" cy="347472"/>
-          </a:xfrm>
-          <a:prstGeom prst="rect">
-            <a:avLst/>
-          </a:prstGeom>
-          <a:noFill/>
-        </p:spPr>
-        <p:txBody>
-          <a:bodyPr wrap="square">
-            <a:spAutoFit/>
-          </a:bodyPr>
-          <a:lstStyle/>
-          <a:p>
-            <a:pPr algn="l"/>
-            <a:r>
-              <a:rPr sz="1100" b="0" i="0">
-                <a:solidFill>
-                  <a:srgbClr val="F0F0F0"/>
-                </a:solidFill>
-              </a:rPr>
-              <a:t>- Series B / strategic acquisition potential</a:t>
-            </a:r>
-          </a:p>
-        </p:txBody>
-      </p:sp>
-      <p:sp>
-        <p:nvSpPr>
-          <p:cNvPr id="105" name="TextBox 104"/>
-          <p:cNvSpPr txBox="1"/>
-          <p:nvPr/>
-        </p:nvSpPr>
-        <p:spPr>
-          <a:xfrm>
-            <a:off x="8412480" y="5943600"/>
-            <a:ext cx="3337560" cy="347472"/>
-          </a:xfrm>
-          <a:prstGeom prst="rect">
-            <a:avLst/>
-          </a:prstGeom>
-          <a:noFill/>
-        </p:spPr>
-        <p:txBody>
-          <a:bodyPr wrap="square">
-            <a:spAutoFit/>
-          </a:bodyPr>
-          <a:lstStyle/>
-          <a:p>
-            <a:pPr algn="l"/>
-            <a:r>
-              <a:rPr sz="1100" b="0" i="0">
-                <a:solidFill>
-                  <a:srgbClr val="F0F0F0"/>
-                </a:solidFill>
-              </a:rPr>
-              <a:t>- IPO or exit evaluation at 5M MAU milestone</a:t>
-            </a:r>
-          </a:p>
-        </p:txBody>
-      </p:sp>
-      <p:pic>
-        <p:nvPicPr>
-          <p:cNvPr id="106" name="Picture 105" descr="image.png"/>
-          <p:cNvPicPr>
-            <a:picLocks noChangeAspect="1"/>
-          </p:cNvPicPr>
-          <p:nvPr/>
-        </p:nvPicPr>
-        <p:blipFill>
-          <a:blip r:embed="rId2"/>
-          <a:stretch>
-            <a:fillRect/>
-          </a:stretch>
-        </p:blipFill>
-        <p:spPr>
-          <a:xfrm>
-            <a:off x="11430000" y="109728"/>
+            <a:off x="11430000" y="91440"/>
             <a:ext cx="594360" cy="594360"/>
           </a:xfrm>
           <a:prstGeom prst="rect">
@@ -25095,7 +20567,7 @@
       </p:sp>
       <p:pic>
         <p:nvPicPr>
-          <p:cNvPr id="12" name="Picture 11" descr="sachi_logo_transparent.png"/>
+          <p:cNvPr id="12" name="Picture 11" descr="image.png"/>
           <p:cNvPicPr>
             <a:picLocks noChangeAspect="1"/>
           </p:cNvPicPr>
@@ -25109,7 +20581,7 @@
         </p:blipFill>
         <p:spPr>
           <a:xfrm>
-            <a:off x="11430000" y="109728"/>
+            <a:off x="11430000" y="91440"/>
             <a:ext cx="594360" cy="594360"/>
           </a:xfrm>
           <a:prstGeom prst="rect">
@@ -25615,7 +21087,7 @@
       </p:sp>
       <p:pic>
         <p:nvPicPr>
-          <p:cNvPr id="15" name="Picture 14" descr="sachi_logo_transparent.png"/>
+          <p:cNvPr id="15" name="Picture 14" descr="image.png"/>
           <p:cNvPicPr>
             <a:picLocks noChangeAspect="1"/>
           </p:cNvPicPr>
@@ -25629,7 +21101,7 @@
         </p:blipFill>
         <p:spPr>
           <a:xfrm>
-            <a:off x="11430000" y="109728"/>
+            <a:off x="11430000" y="91440"/>
             <a:ext cx="594360" cy="594360"/>
           </a:xfrm>
           <a:prstGeom prst="rect">
@@ -26348,7 +21820,7 @@
       </p:sp>
       <p:pic>
         <p:nvPicPr>
-          <p:cNvPr id="21" name="Picture 20" descr="sachi_logo_transparent.png"/>
+          <p:cNvPr id="21" name="Picture 20" descr="image.png"/>
           <p:cNvPicPr>
             <a:picLocks noChangeAspect="1"/>
           </p:cNvPicPr>
@@ -26362,7 +21834,7 @@
         </p:blipFill>
         <p:spPr>
           <a:xfrm>
-            <a:off x="11430000" y="109728"/>
+            <a:off x="11430000" y="91440"/>
             <a:ext cx="594360" cy="594360"/>
           </a:xfrm>
           <a:prstGeom prst="rect">
@@ -27224,7 +22696,7 @@
       </p:sp>
       <p:pic>
         <p:nvPicPr>
-          <p:cNvPr id="23" name="Picture 22" descr="sachi_logo_transparent.png"/>
+          <p:cNvPr id="23" name="Picture 22" descr="image.png"/>
           <p:cNvPicPr>
             <a:picLocks noChangeAspect="1"/>
           </p:cNvPicPr>
@@ -27238,7 +22710,7 @@
         </p:blipFill>
         <p:spPr>
           <a:xfrm>
-            <a:off x="11430000" y="109728"/>
+            <a:off x="11430000" y="91440"/>
             <a:ext cx="594360" cy="594360"/>
           </a:xfrm>
           <a:prstGeom prst="rect">
@@ -28190,7 +23662,7 @@
       </p:sp>
       <p:pic>
         <p:nvPicPr>
-          <p:cNvPr id="26" name="Picture 25" descr="sachi_logo_transparent.png"/>
+          <p:cNvPr id="26" name="Picture 25" descr="image.png"/>
           <p:cNvPicPr>
             <a:picLocks noChangeAspect="1"/>
           </p:cNvPicPr>
@@ -28204,7 +23676,7 @@
         </p:blipFill>
         <p:spPr>
           <a:xfrm>
-            <a:off x="11430000" y="109728"/>
+            <a:off x="11430000" y="91440"/>
             <a:ext cx="594360" cy="594360"/>
           </a:xfrm>
           <a:prstGeom prst="rect">
@@ -29246,7 +24718,7 @@
       </p:sp>
       <p:pic>
         <p:nvPicPr>
-          <p:cNvPr id="29" name="Picture 28" descr="sachi_logo_transparent.png"/>
+          <p:cNvPr id="29" name="Picture 28" descr="image.png"/>
           <p:cNvPicPr>
             <a:picLocks noChangeAspect="1"/>
           </p:cNvPicPr>
@@ -29260,7 +24732,7 @@
         </p:blipFill>
         <p:spPr>
           <a:xfrm>
-            <a:off x="11430000" y="109728"/>
+            <a:off x="11430000" y="91440"/>
             <a:ext cx="594360" cy="594360"/>
           </a:xfrm>
           <a:prstGeom prst="rect">
@@ -29988,7 +25460,7 @@
       </p:sp>
       <p:pic>
         <p:nvPicPr>
-          <p:cNvPr id="20" name="Picture 19" descr="sachi_logo_transparent.png"/>
+          <p:cNvPr id="20" name="Picture 19" descr="image.png"/>
           <p:cNvPicPr>
             <a:picLocks noChangeAspect="1"/>
           </p:cNvPicPr>
@@ -30002,7 +25474,7 @@
         </p:blipFill>
         <p:spPr>
           <a:xfrm>
-            <a:off x="11430000" y="109728"/>
+            <a:off x="11430000" y="91440"/>
             <a:ext cx="594360" cy="594360"/>
           </a:xfrm>
           <a:prstGeom prst="rect">
@@ -30983,7 +26455,7 @@
       </p:sp>
       <p:pic>
         <p:nvPicPr>
-          <p:cNvPr id="28" name="Picture 27" descr="sachi_logo_transparent.png"/>
+          <p:cNvPr id="28" name="Picture 27" descr="image.png"/>
           <p:cNvPicPr>
             <a:picLocks noChangeAspect="1"/>
           </p:cNvPicPr>
@@ -30997,7 +26469,7 @@
         </p:blipFill>
         <p:spPr>
           <a:xfrm>
-            <a:off x="11430000" y="109728"/>
+            <a:off x="11430000" y="91440"/>
             <a:ext cx="594360" cy="594360"/>
           </a:xfrm>
           <a:prstGeom prst="rect">
@@ -33176,7 +28648,7 @@
       </p:sp>
       <p:pic>
         <p:nvPicPr>
-          <p:cNvPr id="61" name="Picture 60" descr="sachi_logo_transparent.png"/>
+          <p:cNvPr id="61" name="Picture 60" descr="image.png"/>
           <p:cNvPicPr>
             <a:picLocks noChangeAspect="1"/>
           </p:cNvPicPr>
@@ -33190,7 +28662,7 @@
         </p:blipFill>
         <p:spPr>
           <a:xfrm>
-            <a:off x="11430000" y="109728"/>
+            <a:off x="11430000" y="91440"/>
             <a:ext cx="594360" cy="594360"/>
           </a:xfrm>
           <a:prstGeom prst="rect">

--- a/Sachi_Stream_Investor_Deck_Seed_Round_May2026.pptx
+++ b/Sachi_Stream_Investor_Deck_Seed_Round_May2026.pptx
@@ -17085,8 +17085,8 @@
         </p:nvSpPr>
         <p:spPr>
           <a:xfrm>
-            <a:off x="0" y="6309360"/>
-            <a:ext cx="12188952" cy="64008"/>
+            <a:off x="0" y="0"/>
+            <a:ext cx="12188952" cy="45720"/>
           </a:xfrm>
           <a:prstGeom prst="rect">
             <a:avLst/>
@@ -17128,8 +17128,8 @@
         </p:nvSpPr>
         <p:spPr>
           <a:xfrm>
-            <a:off x="457200" y="1280160"/>
-            <a:ext cx="109728" cy="4114800"/>
+            <a:off x="0" y="6812280"/>
+            <a:ext cx="12188952" cy="45720"/>
           </a:xfrm>
           <a:prstGeom prst="rect">
             <a:avLst/>
@@ -17165,48 +17165,14 @@
       </p:sp>
       <p:sp>
         <p:nvSpPr>
-          <p:cNvPr id="5" name="TextBox 4"/>
-          <p:cNvSpPr txBox="1"/>
-          <p:nvPr/>
-        </p:nvSpPr>
-        <p:spPr>
-          <a:xfrm>
-            <a:off x="777240" y="274320"/>
-            <a:ext cx="9144000" cy="594360"/>
-          </a:xfrm>
-          <a:prstGeom prst="rect">
-            <a:avLst/>
-          </a:prstGeom>
-          <a:noFill/>
-        </p:spPr>
-        <p:txBody>
-          <a:bodyPr wrap="square">
-            <a:spAutoFit/>
-          </a:bodyPr>
-          <a:lstStyle/>
-          <a:p>
-            <a:pPr algn="l"/>
-            <a:r>
-              <a:rPr sz="3600" b="1" i="0">
-                <a:solidFill>
-                  <a:srgbClr val="F5C842"/>
-                </a:solidFill>
-              </a:rPr>
-              <a:t>Founding Team</a:t>
-            </a:r>
-          </a:p>
-        </p:txBody>
-      </p:sp>
-      <p:sp>
-        <p:nvSpPr>
-          <p:cNvPr id="6" name="Rectangle 5"/>
+          <p:cNvPr id="5" name="Rectangle 4"/>
           <p:cNvSpPr/>
           <p:nvPr/>
         </p:nvSpPr>
         <p:spPr>
           <a:xfrm>
-            <a:off x="640080" y="1005840"/>
-            <a:ext cx="10881360" cy="27432"/>
+            <a:off x="0" y="6309360"/>
+            <a:ext cx="12188952" cy="64008"/>
           </a:xfrm>
           <a:prstGeom prst="rect">
             <a:avLst/>
@@ -17242,61 +17208,50 @@
       </p:sp>
       <p:sp>
         <p:nvSpPr>
+          <p:cNvPr id="6" name="TextBox 5"/>
+          <p:cNvSpPr txBox="1"/>
+          <p:nvPr/>
+        </p:nvSpPr>
+        <p:spPr>
+          <a:xfrm>
+            <a:off x="777240" y="201168"/>
+            <a:ext cx="9144000" cy="594360"/>
+          </a:xfrm>
+          <a:prstGeom prst="rect">
+            <a:avLst/>
+          </a:prstGeom>
+          <a:noFill/>
+        </p:spPr>
+        <p:txBody>
+          <a:bodyPr wrap="square">
+            <a:spAutoFit/>
+          </a:bodyPr>
+          <a:lstStyle/>
+          <a:p>
+            <a:pPr algn="l"/>
+            <a:r>
+              <a:rPr sz="3400" b="1" i="0">
+                <a:solidFill>
+                  <a:srgbClr val="F5C842"/>
+                </a:solidFill>
+              </a:rPr>
+              <a:t>Founding Team</a:t>
+            </a:r>
+          </a:p>
+        </p:txBody>
+      </p:sp>
+      <p:sp>
+        <p:nvSpPr>
           <p:cNvPr id="7" name="Rectangle 6"/>
           <p:cNvSpPr/>
           <p:nvPr/>
         </p:nvSpPr>
         <p:spPr>
           <a:xfrm>
-            <a:off x="640080" y="1280160"/>
-            <a:ext cx="3520440" cy="4480560"/>
-          </a:xfrm>
-          <a:prstGeom prst="rect">
-            <a:avLst/>
-          </a:prstGeom>
-          <a:solidFill>
-            <a:srgbClr val="161830"/>
-          </a:solidFill>
-          <a:ln w="19050">
-            <a:solidFill>
-              <a:srgbClr val="F5C842"/>
-            </a:solidFill>
-          </a:ln>
-        </p:spPr>
-        <p:style>
-          <a:lnRef idx="1">
-            <a:schemeClr val="accent1"/>
-          </a:lnRef>
-          <a:fillRef idx="3">
-            <a:schemeClr val="accent1"/>
-          </a:fillRef>
-          <a:effectRef idx="2">
-            <a:schemeClr val="accent1"/>
-          </a:effectRef>
-          <a:fontRef idx="minor">
-            <a:schemeClr val="lt1"/>
-          </a:fontRef>
-        </p:style>
-        <p:txBody>
-          <a:bodyPr rtlCol="0" anchor="ctr"/>
-          <a:lstStyle/>
-          <a:p>
-            <a:pPr algn="ctr"/>
-          </a:p>
-        </p:txBody>
-      </p:sp>
-      <p:sp>
-        <p:nvSpPr>
-          <p:cNvPr id="8" name="Oval 7"/>
-          <p:cNvSpPr/>
-          <p:nvPr/>
-        </p:nvSpPr>
-        <p:spPr>
-          <a:xfrm>
-            <a:off x="1965960" y="1417320"/>
-            <a:ext cx="868680" cy="868680"/>
-          </a:xfrm>
-          <a:prstGeom prst="ellipse">
+            <a:off x="640080" y="914400"/>
+            <a:ext cx="10881360" cy="27432"/>
+          </a:xfrm>
+          <a:prstGeom prst="rect">
             <a:avLst/>
           </a:prstGeom>
           <a:solidFill>
@@ -17330,154 +17285,14 @@
       </p:sp>
       <p:sp>
         <p:nvSpPr>
-          <p:cNvPr id="9" name="TextBox 8"/>
-          <p:cNvSpPr txBox="1"/>
-          <p:nvPr/>
-        </p:nvSpPr>
-        <p:spPr>
-          <a:xfrm>
-            <a:off x="2057400" y="1554480"/>
-            <a:ext cx="685800" cy="594360"/>
-          </a:xfrm>
-          <a:prstGeom prst="rect">
-            <a:avLst/>
-          </a:prstGeom>
-          <a:noFill/>
-        </p:spPr>
-        <p:txBody>
-          <a:bodyPr wrap="square">
-            <a:spAutoFit/>
-          </a:bodyPr>
-          <a:lstStyle/>
-          <a:p>
-            <a:pPr algn="ctr"/>
-            <a:r>
-              <a:rPr sz="2200" b="1" i="0">
-                <a:solidFill>
-                  <a:srgbClr val="0B0C1A"/>
-                </a:solidFill>
-              </a:rPr>
-              <a:t>D</a:t>
-            </a:r>
-          </a:p>
-        </p:txBody>
-      </p:sp>
-      <p:sp>
-        <p:nvSpPr>
-          <p:cNvPr id="10" name="TextBox 9"/>
-          <p:cNvSpPr txBox="1"/>
-          <p:nvPr/>
-        </p:nvSpPr>
-        <p:spPr>
-          <a:xfrm>
-            <a:off x="777240" y="2423160"/>
-            <a:ext cx="3246120" cy="411480"/>
-          </a:xfrm>
-          <a:prstGeom prst="rect">
-            <a:avLst/>
-          </a:prstGeom>
-          <a:noFill/>
-        </p:spPr>
-        <p:txBody>
-          <a:bodyPr wrap="square">
-            <a:spAutoFit/>
-          </a:bodyPr>
-          <a:lstStyle/>
-          <a:p>
-            <a:pPr algn="l"/>
-            <a:r>
-              <a:rPr sz="1400" b="1" i="0">
-                <a:solidFill>
-                  <a:srgbClr val="F5C842"/>
-                </a:solidFill>
-              </a:rPr>
-              <a:t>Dhananjaya (Jay) Gunaratne</a:t>
-            </a:r>
-          </a:p>
-        </p:txBody>
-      </p:sp>
-      <p:sp>
-        <p:nvSpPr>
-          <p:cNvPr id="11" name="TextBox 10"/>
-          <p:cNvSpPr txBox="1"/>
-          <p:nvPr/>
-        </p:nvSpPr>
-        <p:spPr>
-          <a:xfrm>
-            <a:off x="777240" y="2834640"/>
-            <a:ext cx="3246120" cy="320040"/>
-          </a:xfrm>
-          <a:prstGeom prst="rect">
-            <a:avLst/>
-          </a:prstGeom>
-          <a:noFill/>
-        </p:spPr>
-        <p:txBody>
-          <a:bodyPr wrap="square">
-            <a:spAutoFit/>
-          </a:bodyPr>
-          <a:lstStyle/>
-          <a:p>
-            <a:pPr algn="l"/>
-            <a:r>
-              <a:rPr sz="1200" b="0" i="1">
-                <a:solidFill>
-                  <a:srgbClr val="CCCCCC"/>
-                </a:solidFill>
-              </a:rPr>
-              <a:t>Founder &amp; CEO</a:t>
-            </a:r>
-          </a:p>
-        </p:txBody>
-      </p:sp>
-      <p:sp>
-        <p:nvSpPr>
-          <p:cNvPr id="12" name="TextBox 11"/>
-          <p:cNvSpPr txBox="1"/>
-          <p:nvPr/>
-        </p:nvSpPr>
-        <p:spPr>
-          <a:xfrm>
-            <a:off x="777240" y="3246120"/>
-            <a:ext cx="3246120" cy="2286000"/>
-          </a:xfrm>
-          <a:prstGeom prst="rect">
-            <a:avLst/>
-          </a:prstGeom>
-          <a:noFill/>
-        </p:spPr>
-        <p:txBody>
-          <a:bodyPr wrap="square">
-            <a:spAutoFit/>
-          </a:bodyPr>
-          <a:lstStyle/>
-          <a:p>
-            <a:pPr algn="l"/>
-            <a:r>
-              <a:rPr sz="1100" b="0" i="0">
-                <a:solidFill>
-                  <a:srgbClr val="F0F0F0"/>
-                </a:solidFill>
-              </a:rPr>
-              <a:t>21+ years Senior Infrastructure Project Manager
-Nokia, MPLS, NERC-CIP, SCADA, data center, telecom
-PSEG Long Island — $10M+ infrastructure programs
-Founder, LDNA Consulting LLC
-Architect of Sachi Stream platform vision and strategy</a:t>
-            </a:r>
-          </a:p>
-        </p:txBody>
-      </p:sp>
-      <p:sp>
-        <p:nvSpPr>
-          <p:cNvPr id="13" name="Rectangle 12"/>
+          <p:cNvPr id="8" name="Rectangle 7"/>
           <p:cNvSpPr/>
           <p:nvPr/>
         </p:nvSpPr>
         <p:spPr>
           <a:xfrm>
-            <a:off x="4434840" y="1280160"/>
-            <a:ext cx="3520440" cy="4480560"/>
+            <a:off x="594360" y="1078992"/>
+            <a:ext cx="6949440" cy="5349240"/>
           </a:xfrm>
           <a:prstGeom prst="rect">
             <a:avLst/>
@@ -17485,9 +17300,9 @@
           <a:solidFill>
             <a:srgbClr val="161830"/>
           </a:solidFill>
-          <a:ln w="19050">
+          <a:ln w="22860">
             <a:solidFill>
-              <a:srgbClr val="FF6B6B"/>
+              <a:srgbClr val="F5C842"/>
             </a:solidFill>
           </a:ln>
         </p:spPr>
@@ -17513,22 +17328,148 @@
           </a:p>
         </p:txBody>
       </p:sp>
-      <p:sp>
-        <p:nvSpPr>
-          <p:cNvPr id="14" name="Oval 13"/>
+      <p:pic>
+        <p:nvPicPr>
+          <p:cNvPr id="9" name="Picture 8" descr="jay_headshot_circle.png"/>
+          <p:cNvPicPr>
+            <a:picLocks noChangeAspect="1"/>
+          </p:cNvPicPr>
+          <p:nvPr/>
+        </p:nvPicPr>
+        <p:blipFill>
+          <a:blip r:embed="rId3"/>
+          <a:stretch>
+            <a:fillRect/>
+          </a:stretch>
+        </p:blipFill>
+        <p:spPr>
+          <a:xfrm>
+            <a:off x="777240" y="1234440"/>
+            <a:ext cx="1920240" cy="1920240"/>
+          </a:xfrm>
+          <a:prstGeom prst="rect">
+            <a:avLst/>
+          </a:prstGeom>
+        </p:spPr>
+      </p:pic>
+      <p:sp>
+        <p:nvSpPr>
+          <p:cNvPr id="10" name="TextBox 9"/>
+          <p:cNvSpPr txBox="1"/>
+          <p:nvPr/>
+        </p:nvSpPr>
+        <p:spPr>
+          <a:xfrm>
+            <a:off x="2880360" y="1325880"/>
+            <a:ext cx="4572000" cy="411480"/>
+          </a:xfrm>
+          <a:prstGeom prst="rect">
+            <a:avLst/>
+          </a:prstGeom>
+          <a:noFill/>
+        </p:spPr>
+        <p:txBody>
+          <a:bodyPr wrap="square">
+            <a:spAutoFit/>
+          </a:bodyPr>
+          <a:lstStyle/>
+          <a:p>
+            <a:pPr algn="l"/>
+            <a:r>
+              <a:rPr sz="1700" b="1" i="0">
+                <a:solidFill>
+                  <a:srgbClr val="F5C842"/>
+                </a:solidFill>
+              </a:rPr>
+              <a:t>Dhananjaya (Jay) Gunaratne</a:t>
+            </a:r>
+          </a:p>
+        </p:txBody>
+      </p:sp>
+      <p:sp>
+        <p:nvSpPr>
+          <p:cNvPr id="11" name="TextBox 10"/>
+          <p:cNvSpPr txBox="1"/>
+          <p:nvPr/>
+        </p:nvSpPr>
+        <p:spPr>
+          <a:xfrm>
+            <a:off x="2880360" y="1755648"/>
+            <a:ext cx="4572000" cy="320040"/>
+          </a:xfrm>
+          <a:prstGeom prst="rect">
+            <a:avLst/>
+          </a:prstGeom>
+          <a:noFill/>
+        </p:spPr>
+        <p:txBody>
+          <a:bodyPr wrap="square">
+            <a:spAutoFit/>
+          </a:bodyPr>
+          <a:lstStyle/>
+          <a:p>
+            <a:pPr algn="l"/>
+            <a:r>
+              <a:rPr sz="1200" b="0" i="1">
+                <a:solidFill>
+                  <a:srgbClr val="CCCCCC"/>
+                </a:solidFill>
+              </a:rPr>
+              <a:t>Founder &amp; CEO  |  LDNA Consulting LLC</a:t>
+            </a:r>
+          </a:p>
+        </p:txBody>
+      </p:sp>
+      <p:sp>
+        <p:nvSpPr>
+          <p:cNvPr id="12" name="TextBox 11"/>
+          <p:cNvSpPr txBox="1"/>
+          <p:nvPr/>
+        </p:nvSpPr>
+        <p:spPr>
+          <a:xfrm>
+            <a:off x="2880360" y="2103120"/>
+            <a:ext cx="4572000" cy="274320"/>
+          </a:xfrm>
+          <a:prstGeom prst="rect">
+            <a:avLst/>
+          </a:prstGeom>
+          <a:noFill/>
+        </p:spPr>
+        <p:txBody>
+          <a:bodyPr wrap="square">
+            <a:spAutoFit/>
+          </a:bodyPr>
+          <a:lstStyle/>
+          <a:p>
+            <a:pPr algn="l"/>
+            <a:r>
+              <a:rPr sz="1100" b="0" i="0">
+                <a:solidFill>
+                  <a:srgbClr val="CCCCCC"/>
+                </a:solidFill>
+              </a:rPr>
+              <a:t>New Providence, NJ  |  jaygnz27@gmail.com</a:t>
+            </a:r>
+          </a:p>
+        </p:txBody>
+      </p:sp>
+      <p:sp>
+        <p:nvSpPr>
+          <p:cNvPr id="13" name="Rectangle 12"/>
           <p:cNvSpPr/>
           <p:nvPr/>
         </p:nvSpPr>
         <p:spPr>
           <a:xfrm>
-            <a:off x="5760720" y="1417320"/>
-            <a:ext cx="868680" cy="868680"/>
-          </a:xfrm>
-          <a:prstGeom prst="ellipse">
+            <a:off x="2880360" y="2450592"/>
+            <a:ext cx="4480560" cy="22860"/>
+          </a:xfrm>
+          <a:prstGeom prst="rect">
             <a:avLst/>
           </a:prstGeom>
           <a:solidFill>
-            <a:srgbClr val="FF6B6B"/>
+            <a:srgbClr val="F5C842"/>
           </a:solidFill>
           <a:ln>
             <a:noFill/>
@@ -17558,34 +17499,68 @@
       </p:sp>
       <p:sp>
         <p:nvSpPr>
+          <p:cNvPr id="14" name="TextBox 13"/>
+          <p:cNvSpPr txBox="1"/>
+          <p:nvPr/>
+        </p:nvSpPr>
+        <p:spPr>
+          <a:xfrm>
+            <a:off x="804672" y="2606040"/>
+            <a:ext cx="6583680" cy="438912"/>
+          </a:xfrm>
+          <a:prstGeom prst="rect">
+            <a:avLst/>
+          </a:prstGeom>
+          <a:noFill/>
+        </p:spPr>
+        <p:txBody>
+          <a:bodyPr wrap="square">
+            <a:spAutoFit/>
+          </a:bodyPr>
+          <a:lstStyle/>
+          <a:p>
+            <a:pPr algn="l"/>
+            <a:r>
+              <a:rPr sz="1150" b="0" i="0">
+                <a:solidFill>
+                  <a:srgbClr val="F0F0F0"/>
+                </a:solidFill>
+              </a:rPr>
+              <a:t>-  21+ years Senior Infrastructure Project Manager — Nokia, MPLS, NERC-CIP, SCADA, telecom</a:t>
+            </a:r>
+          </a:p>
+        </p:txBody>
+      </p:sp>
+      <p:sp>
+        <p:nvSpPr>
           <p:cNvPr id="15" name="TextBox 14"/>
           <p:cNvSpPr txBox="1"/>
           <p:nvPr/>
         </p:nvSpPr>
         <p:spPr>
           <a:xfrm>
-            <a:off x="5852160" y="1554480"/>
-            <a:ext cx="685800" cy="594360"/>
-          </a:xfrm>
-          <a:prstGeom prst="rect">
-            <a:avLst/>
-          </a:prstGeom>
-          <a:noFill/>
-        </p:spPr>
-        <p:txBody>
-          <a:bodyPr wrap="square">
-            <a:spAutoFit/>
-          </a:bodyPr>
-          <a:lstStyle/>
-          <a:p>
-            <a:pPr algn="ctr"/>
-            <a:r>
-              <a:rPr sz="2200" b="1" i="0">
-                <a:solidFill>
-                  <a:srgbClr val="0B0C1A"/>
-                </a:solidFill>
-              </a:rPr>
-              <a:t>A</a:t>
+            <a:off x="804672" y="3081528"/>
+            <a:ext cx="6583680" cy="438912"/>
+          </a:xfrm>
+          <a:prstGeom prst="rect">
+            <a:avLst/>
+          </a:prstGeom>
+          <a:noFill/>
+        </p:spPr>
+        <p:txBody>
+          <a:bodyPr wrap="square">
+            <a:spAutoFit/>
+          </a:bodyPr>
+          <a:lstStyle/>
+          <a:p>
+            <a:pPr algn="l"/>
+            <a:r>
+              <a:rPr sz="1150" b="0" i="0">
+                <a:solidFill>
+                  <a:srgbClr val="F0F0F0"/>
+                </a:solidFill>
+              </a:rPr>
+              <a:t>-  Architect of Sachi Stream: platform vision, product design, strategy &amp; brand identity</a:t>
             </a:r>
           </a:p>
         </p:txBody>
@@ -17598,8 +17573,8 @@
         </p:nvSpPr>
         <p:spPr>
           <a:xfrm>
-            <a:off x="4572000" y="2423160"/>
-            <a:ext cx="3246120" cy="411480"/>
+            <a:off x="804672" y="3557016"/>
+            <a:ext cx="6583680" cy="438912"/>
           </a:xfrm>
           <a:prstGeom prst="rect">
             <a:avLst/>
@@ -17614,12 +17589,12 @@
           <a:p>
             <a:pPr algn="l"/>
             <a:r>
-              <a:rPr sz="1400" b="1" i="0">
-                <a:solidFill>
-                  <a:srgbClr val="FF6B6B"/>
-                </a:solidFill>
-              </a:rPr>
-              <a:t>Aanjinie Gunaratne</a:t>
+              <a:rPr sz="1150" b="0" i="0">
+                <a:solidFill>
+                  <a:srgbClr val="F0F0F0"/>
+                </a:solidFill>
+              </a:rPr>
+              <a:t>-  Creator community strategy, content culture, and diaspora community engagement</a:t>
             </a:r>
           </a:p>
         </p:txBody>
@@ -17632,8 +17607,8 @@
         </p:nvSpPr>
         <p:spPr>
           <a:xfrm>
-            <a:off x="4572000" y="2834640"/>
-            <a:ext cx="3246120" cy="320040"/>
+            <a:off x="804672" y="4032504"/>
+            <a:ext cx="6583680" cy="438912"/>
           </a:xfrm>
           <a:prstGeom prst="rect">
             <a:avLst/>
@@ -17648,12 +17623,12 @@
           <a:p>
             <a:pPr algn="l"/>
             <a:r>
-              <a:rPr sz="1200" b="0" i="1">
-                <a:solidFill>
-                  <a:srgbClr val="CCCCCC"/>
-                </a:solidFill>
-              </a:rPr>
-              <a:t>Head of Creator &amp; Community</a:t>
+              <a:rPr sz="1150" b="0" i="0">
+                <a:solidFill>
+                  <a:srgbClr val="F0F0F0"/>
+                </a:solidFill>
+              </a:rPr>
+              <a:t>-  User experience design, creator onboarding, and founding creator program</a:t>
             </a:r>
           </a:p>
         </p:txBody>
@@ -17666,8 +17641,8 @@
         </p:nvSpPr>
         <p:spPr>
           <a:xfrm>
-            <a:off x="4572000" y="3246120"/>
-            <a:ext cx="3246120" cy="2286000"/>
+            <a:off x="804672" y="4507992"/>
+            <a:ext cx="6583680" cy="438912"/>
           </a:xfrm>
           <a:prstGeom prst="rect">
             <a:avLst/>
@@ -17682,29 +17657,60 @@
           <a:p>
             <a:pPr algn="l"/>
             <a:r>
-              <a:rPr sz="1100" b="0" i="0">
+              <a:rPr sz="1150" b="0" i="0">
                 <a:solidFill>
                   <a:srgbClr val="F0F0F0"/>
                 </a:solidFill>
               </a:rPr>
-              <a:t>Platform creator and founding community lead
-Sachi content strategy and creator culture
-User experience design and community onboarding
-Brand identity and diaspora community engagement</a:t>
-            </a:r>
-          </a:p>
-        </p:txBody>
-      </p:sp>
-      <p:sp>
-        <p:nvSpPr>
-          <p:cNvPr id="19" name="Rectangle 18"/>
+              <a:t>-  Manages all technical, operational, and creative aspects of the platform solo</a:t>
+            </a:r>
+          </a:p>
+        </p:txBody>
+      </p:sp>
+      <p:sp>
+        <p:nvSpPr>
+          <p:cNvPr id="19" name="TextBox 18"/>
+          <p:cNvSpPr txBox="1"/>
+          <p:nvPr/>
+        </p:nvSpPr>
+        <p:spPr>
+          <a:xfrm>
+            <a:off x="804672" y="4983480"/>
+            <a:ext cx="6583680" cy="438912"/>
+          </a:xfrm>
+          <a:prstGeom prst="rect">
+            <a:avLst/>
+          </a:prstGeom>
+          <a:noFill/>
+        </p:spPr>
+        <p:txBody>
+          <a:bodyPr wrap="square">
+            <a:spAutoFit/>
+          </a:bodyPr>
+          <a:lstStyle/>
+          <a:p>
+            <a:pPr algn="l"/>
+            <a:r>
+              <a:rPr sz="1150" b="0" i="0">
+                <a:solidFill>
+                  <a:srgbClr val="F0F0F0"/>
+                </a:solidFill>
+              </a:rPr>
+              <a:t>-  PSEG Long Island  -  USD 10M+ infrastructure programs  |  Founder, LDNA Consulting LLC</a:t>
+            </a:r>
+          </a:p>
+        </p:txBody>
+      </p:sp>
+      <p:sp>
+        <p:nvSpPr>
+          <p:cNvPr id="20" name="Rectangle 19"/>
           <p:cNvSpPr/>
           <p:nvPr/>
         </p:nvSpPr>
         <p:spPr>
           <a:xfrm>
-            <a:off x="8229600" y="1280160"/>
-            <a:ext cx="3520440" cy="4480560"/>
+            <a:off x="7726679" y="1078992"/>
+            <a:ext cx="4160520" cy="5349240"/>
           </a:xfrm>
           <a:prstGeom prst="rect">
             <a:avLst/>
@@ -17742,14 +17748,14 @@
       </p:sp>
       <p:sp>
         <p:nvSpPr>
-          <p:cNvPr id="20" name="Oval 19"/>
+          <p:cNvPr id="21" name="Oval 20"/>
           <p:cNvSpPr/>
           <p:nvPr/>
         </p:nvSpPr>
         <p:spPr>
           <a:xfrm>
-            <a:off x="9555480" y="1417320"/>
-            <a:ext cx="868680" cy="868680"/>
+            <a:off x="8915400" y="1325880"/>
+            <a:ext cx="1280160" cy="1280160"/>
           </a:xfrm>
           <a:prstGeom prst="ellipse">
             <a:avLst/>
@@ -17785,48 +17791,48 @@
       </p:sp>
       <p:sp>
         <p:nvSpPr>
-          <p:cNvPr id="21" name="TextBox 20"/>
-          <p:cNvSpPr txBox="1"/>
-          <p:nvPr/>
-        </p:nvSpPr>
-        <p:spPr>
-          <a:xfrm>
-            <a:off x="9646920" y="1554480"/>
-            <a:ext cx="685800" cy="594360"/>
-          </a:xfrm>
-          <a:prstGeom prst="rect">
-            <a:avLst/>
-          </a:prstGeom>
-          <a:noFill/>
-        </p:spPr>
-        <p:txBody>
-          <a:bodyPr wrap="square">
-            <a:spAutoFit/>
-          </a:bodyPr>
-          <a:lstStyle/>
-          <a:p>
-            <a:pPr algn="ctr"/>
-            <a:r>
-              <a:rPr sz="2200" b="1" i="0">
+          <p:cNvPr id="22" name="TextBox 21"/>
+          <p:cNvSpPr txBox="1"/>
+          <p:nvPr/>
+        </p:nvSpPr>
+        <p:spPr>
+          <a:xfrm>
+            <a:off x="8915400" y="1572768"/>
+            <a:ext cx="1280160" cy="640080"/>
+          </a:xfrm>
+          <a:prstGeom prst="rect">
+            <a:avLst/>
+          </a:prstGeom>
+          <a:noFill/>
+        </p:spPr>
+        <p:txBody>
+          <a:bodyPr wrap="square">
+            <a:spAutoFit/>
+          </a:bodyPr>
+          <a:lstStyle/>
+          <a:p>
+            <a:pPr algn="ctr"/>
+            <a:r>
+              <a:rPr sz="3200" b="1" i="0">
                 <a:solidFill>
                   <a:srgbClr val="0B0C1A"/>
                 </a:solidFill>
               </a:rPr>
-              <a:t>C</a:t>
-            </a:r>
-          </a:p>
-        </p:txBody>
-      </p:sp>
-      <p:sp>
-        <p:nvSpPr>
-          <p:cNvPr id="22" name="TextBox 21"/>
-          <p:cNvSpPr txBox="1"/>
-          <p:nvPr/>
-        </p:nvSpPr>
-        <p:spPr>
-          <a:xfrm>
-            <a:off x="8366760" y="2423160"/>
-            <a:ext cx="3246120" cy="411480"/>
+              <a:t>?</a:t>
+            </a:r>
+          </a:p>
+        </p:txBody>
+      </p:sp>
+      <p:sp>
+        <p:nvSpPr>
+          <p:cNvPr id="23" name="TextBox 22"/>
+          <p:cNvSpPr txBox="1"/>
+          <p:nvPr/>
+        </p:nvSpPr>
+        <p:spPr>
+          <a:xfrm>
+            <a:off x="7863840" y="2788920"/>
+            <a:ext cx="3840480" cy="384048"/>
           </a:xfrm>
           <a:prstGeom prst="rect">
             <a:avLst/>
@@ -17853,14 +17859,14 @@
       </p:sp>
       <p:sp>
         <p:nvSpPr>
-          <p:cNvPr id="23" name="TextBox 22"/>
-          <p:cNvSpPr txBox="1"/>
-          <p:nvPr/>
-        </p:nvSpPr>
-        <p:spPr>
-          <a:xfrm>
-            <a:off x="8366760" y="2834640"/>
-            <a:ext cx="3246120" cy="320040"/>
+          <p:cNvPr id="24" name="TextBox 23"/>
+          <p:cNvSpPr txBox="1"/>
+          <p:nvPr/>
+        </p:nvSpPr>
+        <p:spPr>
+          <a:xfrm>
+            <a:off x="7863840" y="3200400"/>
+            <a:ext cx="3840480" cy="292608"/>
           </a:xfrm>
           <a:prstGeom prst="rect">
             <a:avLst/>
@@ -17875,50 +17881,12 @@
           <a:p>
             <a:pPr algn="l"/>
             <a:r>
-              <a:rPr sz="1200" b="0" i="1">
+              <a:rPr sz="1100" b="0" i="1">
                 <a:solidFill>
                   <a:srgbClr val="CCCCCC"/>
                 </a:solidFill>
               </a:rPr>
-              <a:t>VP Engineering (To Be Hired)</a:t>
-            </a:r>
-          </a:p>
-        </p:txBody>
-      </p:sp>
-      <p:sp>
-        <p:nvSpPr>
-          <p:cNvPr id="24" name="TextBox 23"/>
-          <p:cNvSpPr txBox="1"/>
-          <p:nvPr/>
-        </p:nvSpPr>
-        <p:spPr>
-          <a:xfrm>
-            <a:off x="8366760" y="3246120"/>
-            <a:ext cx="3246120" cy="2286000"/>
-          </a:xfrm>
-          <a:prstGeom prst="rect">
-            <a:avLst/>
-          </a:prstGeom>
-          <a:noFill/>
-        </p:spPr>
-        <p:txBody>
-          <a:bodyPr wrap="square">
-            <a:spAutoFit/>
-          </a:bodyPr>
-          <a:lstStyle/>
-          <a:p>
-            <a:pPr algn="l"/>
-            <a:r>
-              <a:rPr sz="1100" b="0" i="0">
-                <a:solidFill>
-                  <a:srgbClr val="F0F0F0"/>
-                </a:solidFill>
-              </a:rPr>
-              <a:t>Target: Senior full-stack engineering leader
-Based in Colombo, Sri Lanka
-Will manage 10–15 developer team
-Responsible for platform migration and scaling
-Recruitment underway — Q3 2026 target start</a:t>
+              <a:t>VP Engineering  (To Be Hired)</a:t>
             </a:r>
           </a:p>
         </p:txBody>
@@ -17931,369 +17899,10 @@
         </p:nvSpPr>
         <p:spPr>
           <a:xfrm>
-            <a:off x="0" y="1005840"/>
-            <a:ext cx="12188952" cy="5852160"/>
-          </a:xfrm>
-          <a:prstGeom prst="rect">
-            <a:avLst/>
-          </a:prstGeom>
-          <a:solidFill>
-            <a:srgbClr val="0B0C1A"/>
-          </a:solidFill>
-          <a:ln>
-            <a:noFill/>
-          </a:ln>
-        </p:spPr>
-        <p:style>
-          <a:lnRef idx="1">
-            <a:schemeClr val="accent1"/>
-          </a:lnRef>
-          <a:fillRef idx="3">
-            <a:schemeClr val="accent1"/>
-          </a:fillRef>
-          <a:effectRef idx="2">
-            <a:schemeClr val="accent1"/>
-          </a:effectRef>
-          <a:fontRef idx="minor">
-            <a:schemeClr val="lt1"/>
-          </a:fontRef>
-        </p:style>
-        <p:txBody>
-          <a:bodyPr rtlCol="0" anchor="ctr"/>
-          <a:lstStyle/>
-          <a:p>
-            <a:pPr algn="ctr"/>
-          </a:p>
-        </p:txBody>
-      </p:sp>
-      <p:sp>
-        <p:nvSpPr>
-          <p:cNvPr id="26" name="Rectangle 25"/>
-          <p:cNvSpPr/>
-          <p:nvPr/>
-        </p:nvSpPr>
-        <p:spPr>
-          <a:xfrm>
-            <a:off x="640080" y="1280160"/>
-            <a:ext cx="5394960" cy="5120640"/>
-          </a:xfrm>
-          <a:prstGeom prst="rect">
-            <a:avLst/>
-          </a:prstGeom>
-          <a:solidFill>
-            <a:srgbClr val="161830"/>
-          </a:solidFill>
-          <a:ln w="22860">
-            <a:solidFill>
-              <a:srgbClr val="F5C842"/>
-            </a:solidFill>
-          </a:ln>
-        </p:spPr>
-        <p:style>
-          <a:lnRef idx="1">
-            <a:schemeClr val="accent1"/>
-          </a:lnRef>
-          <a:fillRef idx="3">
-            <a:schemeClr val="accent1"/>
-          </a:fillRef>
-          <a:effectRef idx="2">
-            <a:schemeClr val="accent1"/>
-          </a:effectRef>
-          <a:fontRef idx="minor">
-            <a:schemeClr val="lt1"/>
-          </a:fontRef>
-        </p:style>
-        <p:txBody>
-          <a:bodyPr rtlCol="0" anchor="ctr"/>
-          <a:lstStyle/>
-          <a:p>
-            <a:pPr algn="ctr"/>
-          </a:p>
-        </p:txBody>
-      </p:sp>
-      <p:sp>
-        <p:nvSpPr>
-          <p:cNvPr id="27" name="Oval 26"/>
-          <p:cNvSpPr/>
-          <p:nvPr/>
-        </p:nvSpPr>
-        <p:spPr>
-          <a:xfrm>
-            <a:off x="2743200" y="1417320"/>
-            <a:ext cx="1005840" cy="1005840"/>
-          </a:xfrm>
-          <a:prstGeom prst="ellipse">
-            <a:avLst/>
-          </a:prstGeom>
-          <a:solidFill>
-            <a:srgbClr val="F5C842"/>
-          </a:solidFill>
-          <a:ln>
-            <a:noFill/>
-          </a:ln>
-        </p:spPr>
-        <p:style>
-          <a:lnRef idx="1">
-            <a:schemeClr val="accent1"/>
-          </a:lnRef>
-          <a:fillRef idx="3">
-            <a:schemeClr val="accent1"/>
-          </a:fillRef>
-          <a:effectRef idx="2">
-            <a:schemeClr val="accent1"/>
-          </a:effectRef>
-          <a:fontRef idx="minor">
-            <a:schemeClr val="lt1"/>
-          </a:fontRef>
-        </p:style>
-        <p:txBody>
-          <a:bodyPr rtlCol="0" anchor="ctr"/>
-          <a:lstStyle/>
-          <a:p>
-            <a:pPr algn="ctr"/>
-          </a:p>
-        </p:txBody>
-      </p:sp>
-      <p:sp>
-        <p:nvSpPr>
-          <p:cNvPr id="28" name="TextBox 27"/>
-          <p:cNvSpPr txBox="1"/>
-          <p:nvPr/>
-        </p:nvSpPr>
-        <p:spPr>
-          <a:xfrm>
-            <a:off x="2880360" y="1554480"/>
-            <a:ext cx="731520" cy="731520"/>
-          </a:xfrm>
-          <a:prstGeom prst="rect">
-            <a:avLst/>
-          </a:prstGeom>
-          <a:noFill/>
-        </p:spPr>
-        <p:txBody>
-          <a:bodyPr wrap="square">
-            <a:spAutoFit/>
-          </a:bodyPr>
-          <a:lstStyle/>
-          <a:p>
-            <a:pPr algn="ctr"/>
-            <a:r>
-              <a:rPr sz="2600" b="1" i="0">
-                <a:solidFill>
-                  <a:srgbClr val="0B0C1A"/>
-                </a:solidFill>
-              </a:rPr>
-              <a:t>D</a:t>
-            </a:r>
-          </a:p>
-        </p:txBody>
-      </p:sp>
-      <p:sp>
-        <p:nvSpPr>
-          <p:cNvPr id="29" name="TextBox 28"/>
-          <p:cNvSpPr txBox="1"/>
-          <p:nvPr/>
-        </p:nvSpPr>
-        <p:spPr>
-          <a:xfrm>
-            <a:off x="822960" y="2578608"/>
-            <a:ext cx="5029200" cy="411480"/>
-          </a:xfrm>
-          <a:prstGeom prst="rect">
-            <a:avLst/>
-          </a:prstGeom>
-          <a:noFill/>
-        </p:spPr>
-        <p:txBody>
-          <a:bodyPr wrap="square">
-            <a:spAutoFit/>
-          </a:bodyPr>
-          <a:lstStyle/>
-          <a:p>
-            <a:pPr algn="l"/>
-            <a:r>
-              <a:rPr sz="1500" b="1" i="0">
-                <a:solidFill>
-                  <a:srgbClr val="F5C842"/>
-                </a:solidFill>
-              </a:rPr>
-              <a:t>Dhananjaya (Jay) Gunaratne</a:t>
-            </a:r>
-          </a:p>
-        </p:txBody>
-      </p:sp>
-      <p:sp>
-        <p:nvSpPr>
-          <p:cNvPr id="30" name="TextBox 29"/>
-          <p:cNvSpPr txBox="1"/>
-          <p:nvPr/>
-        </p:nvSpPr>
-        <p:spPr>
-          <a:xfrm>
-            <a:off x="822960" y="3017520"/>
-            <a:ext cx="5029200" cy="320040"/>
-          </a:xfrm>
-          <a:prstGeom prst="rect">
-            <a:avLst/>
-          </a:prstGeom>
-          <a:noFill/>
-        </p:spPr>
-        <p:txBody>
-          <a:bodyPr wrap="square">
-            <a:spAutoFit/>
-          </a:bodyPr>
-          <a:lstStyle/>
-          <a:p>
-            <a:pPr algn="l"/>
-            <a:r>
-              <a:rPr sz="1200" b="0" i="1">
-                <a:solidFill>
-                  <a:srgbClr val="CCCCCC"/>
-                </a:solidFill>
-              </a:rPr>
-              <a:t>Founder &amp; CEO</a:t>
-            </a:r>
-          </a:p>
-        </p:txBody>
-      </p:sp>
-      <p:sp>
-        <p:nvSpPr>
-          <p:cNvPr id="31" name="Rectangle 30"/>
-          <p:cNvSpPr/>
-          <p:nvPr/>
-        </p:nvSpPr>
-        <p:spPr>
-          <a:xfrm>
-            <a:off x="822960" y="3401568"/>
-            <a:ext cx="5029200" cy="18288"/>
-          </a:xfrm>
-          <a:prstGeom prst="rect">
-            <a:avLst/>
-          </a:prstGeom>
-          <a:solidFill>
-            <a:srgbClr val="F5C842"/>
-          </a:solidFill>
-          <a:ln>
-            <a:noFill/>
-          </a:ln>
-        </p:spPr>
-        <p:style>
-          <a:lnRef idx="1">
-            <a:schemeClr val="accent1"/>
-          </a:lnRef>
-          <a:fillRef idx="3">
-            <a:schemeClr val="accent1"/>
-          </a:fillRef>
-          <a:effectRef idx="2">
-            <a:schemeClr val="accent1"/>
-          </a:effectRef>
-          <a:fontRef idx="minor">
-            <a:schemeClr val="lt1"/>
-          </a:fontRef>
-        </p:style>
-        <p:txBody>
-          <a:bodyPr rtlCol="0" anchor="ctr"/>
-          <a:lstStyle/>
-          <a:p>
-            <a:pPr algn="ctr"/>
-          </a:p>
-        </p:txBody>
-      </p:sp>
-      <p:sp>
-        <p:nvSpPr>
-          <p:cNvPr id="32" name="TextBox 31"/>
-          <p:cNvSpPr txBox="1"/>
-          <p:nvPr/>
-        </p:nvSpPr>
-        <p:spPr>
-          <a:xfrm>
-            <a:off x="822960" y="3520440"/>
-            <a:ext cx="5029200" cy="2606040"/>
-          </a:xfrm>
-          <a:prstGeom prst="rect">
-            <a:avLst/>
-          </a:prstGeom>
-          <a:noFill/>
-        </p:spPr>
-        <p:txBody>
-          <a:bodyPr wrap="square">
-            <a:spAutoFit/>
-          </a:bodyPr>
-          <a:lstStyle/>
-          <a:p>
-            <a:pPr algn="l"/>
-            <a:r>
-              <a:rPr sz="1200" b="0" i="0">
-                <a:solidFill>
-                  <a:srgbClr val="F0F0F0"/>
-                </a:solidFill>
-              </a:rPr>
-              <a:t>21+ years Senior Infrastructure Project Manager — Nokia, MPLS, NERC-CIP, SCADA, telecom
-Architect of Sachi Stream: platform vision, strategy, product design, and brand identity
-Creator community strategy, content culture, and diaspora community engagement
-User experience design, creator onboarding, and founding creator program
-PSEG Long Island — 0M+ infrastructure programs  ·  Founder, LDNA Consulting LLC</a:t>
-            </a:r>
-          </a:p>
-        </p:txBody>
-      </p:sp>
-      <p:sp>
-        <p:nvSpPr>
-          <p:cNvPr id="33" name="Rectangle 32"/>
-          <p:cNvSpPr/>
-          <p:nvPr/>
-        </p:nvSpPr>
-        <p:spPr>
-          <a:xfrm>
-            <a:off x="6492240" y="1280160"/>
-            <a:ext cx="5394960" cy="5120640"/>
-          </a:xfrm>
-          <a:prstGeom prst="rect">
-            <a:avLst/>
-          </a:prstGeom>
-          <a:solidFill>
-            <a:srgbClr val="161830"/>
-          </a:solidFill>
-          <a:ln w="22860">
-            <a:solidFill>
-              <a:srgbClr val="7BD4FF"/>
-            </a:solidFill>
-          </a:ln>
-        </p:spPr>
-        <p:style>
-          <a:lnRef idx="1">
-            <a:schemeClr val="accent1"/>
-          </a:lnRef>
-          <a:fillRef idx="3">
-            <a:schemeClr val="accent1"/>
-          </a:fillRef>
-          <a:effectRef idx="2">
-            <a:schemeClr val="accent1"/>
-          </a:effectRef>
-          <a:fontRef idx="minor">
-            <a:schemeClr val="lt1"/>
-          </a:fontRef>
-        </p:style>
-        <p:txBody>
-          <a:bodyPr rtlCol="0" anchor="ctr"/>
-          <a:lstStyle/>
-          <a:p>
-            <a:pPr algn="ctr"/>
-          </a:p>
-        </p:txBody>
-      </p:sp>
-      <p:sp>
-        <p:nvSpPr>
-          <p:cNvPr id="34" name="Oval 33"/>
-          <p:cNvSpPr/>
-          <p:nvPr/>
-        </p:nvSpPr>
-        <p:spPr>
-          <a:xfrm>
-            <a:off x="8595360" y="1417320"/>
-            <a:ext cx="1005840" cy="1005840"/>
-          </a:xfrm>
-          <a:prstGeom prst="ellipse">
+            <a:off x="7863840" y="3547872"/>
+            <a:ext cx="3840480" cy="22860"/>
+          </a:xfrm>
+          <a:prstGeom prst="rect">
             <a:avLst/>
           </a:prstGeom>
           <a:solidFill>
@@ -18327,48 +17936,14 @@
       </p:sp>
       <p:sp>
         <p:nvSpPr>
-          <p:cNvPr id="35" name="TextBox 34"/>
-          <p:cNvSpPr txBox="1"/>
-          <p:nvPr/>
-        </p:nvSpPr>
-        <p:spPr>
-          <a:xfrm>
-            <a:off x="8732520" y="1554480"/>
-            <a:ext cx="731520" cy="731520"/>
-          </a:xfrm>
-          <a:prstGeom prst="rect">
-            <a:avLst/>
-          </a:prstGeom>
-          <a:noFill/>
-        </p:spPr>
-        <p:txBody>
-          <a:bodyPr wrap="square">
-            <a:spAutoFit/>
-          </a:bodyPr>
-          <a:lstStyle/>
-          <a:p>
-            <a:pPr algn="ctr"/>
-            <a:r>
-              <a:rPr sz="2600" b="1" i="0">
-                <a:solidFill>
-                  <a:srgbClr val="0B0C1A"/>
-                </a:solidFill>
-              </a:rPr>
-              <a:t>C</a:t>
-            </a:r>
-          </a:p>
-        </p:txBody>
-      </p:sp>
-      <p:sp>
-        <p:nvSpPr>
-          <p:cNvPr id="36" name="TextBox 35"/>
-          <p:cNvSpPr txBox="1"/>
-          <p:nvPr/>
-        </p:nvSpPr>
-        <p:spPr>
-          <a:xfrm>
-            <a:off x="6675120" y="2578608"/>
-            <a:ext cx="5029200" cy="411480"/>
+          <p:cNvPr id="26" name="TextBox 25"/>
+          <p:cNvSpPr txBox="1"/>
+          <p:nvPr/>
+        </p:nvSpPr>
+        <p:spPr>
+          <a:xfrm>
+            <a:off x="7863840" y="3703320"/>
+            <a:ext cx="3840480" cy="411480"/>
           </a:xfrm>
           <a:prstGeom prst="rect">
             <a:avLst/>
@@ -18383,26 +17958,26 @@
           <a:p>
             <a:pPr algn="l"/>
             <a:r>
-              <a:rPr sz="1500" b="1" i="0">
-                <a:solidFill>
-                  <a:srgbClr val="7BD4FF"/>
-                </a:solidFill>
-              </a:rPr>
-              <a:t>Colombo Engineering Director</a:t>
-            </a:r>
-          </a:p>
-        </p:txBody>
-      </p:sp>
-      <p:sp>
-        <p:nvSpPr>
-          <p:cNvPr id="37" name="TextBox 36"/>
-          <p:cNvSpPr txBox="1"/>
-          <p:nvPr/>
-        </p:nvSpPr>
-        <p:spPr>
-          <a:xfrm>
-            <a:off x="6675120" y="3017520"/>
-            <a:ext cx="5029200" cy="320040"/>
+              <a:rPr sz="1100" b="0" i="0">
+                <a:solidFill>
+                  <a:srgbClr val="F0F0F0"/>
+                </a:solidFill>
+              </a:rPr>
+              <a:t>-  Senior full-stack engineering leader based in Colombo, Sri Lanka</a:t>
+            </a:r>
+          </a:p>
+        </p:txBody>
+      </p:sp>
+      <p:sp>
+        <p:nvSpPr>
+          <p:cNvPr id="27" name="TextBox 26"/>
+          <p:cNvSpPr txBox="1"/>
+          <p:nvPr/>
+        </p:nvSpPr>
+        <p:spPr>
+          <a:xfrm>
+            <a:off x="7863840" y="4160520"/>
+            <a:ext cx="3840480" cy="411480"/>
           </a:xfrm>
           <a:prstGeom prst="rect">
             <a:avLst/>
@@ -18417,69 +17992,26 @@
           <a:p>
             <a:pPr algn="l"/>
             <a:r>
-              <a:rPr sz="1200" b="0" i="1">
-                <a:solidFill>
-                  <a:srgbClr val="CCCCCC"/>
-                </a:solidFill>
-              </a:rPr>
-              <a:t>VP Engineering (To Be Hired)</a:t>
-            </a:r>
-          </a:p>
-        </p:txBody>
-      </p:sp>
-      <p:sp>
-        <p:nvSpPr>
-          <p:cNvPr id="38" name="Rectangle 37"/>
-          <p:cNvSpPr/>
-          <p:nvPr/>
-        </p:nvSpPr>
-        <p:spPr>
-          <a:xfrm>
-            <a:off x="6675120" y="3401568"/>
-            <a:ext cx="5029200" cy="18288"/>
-          </a:xfrm>
-          <a:prstGeom prst="rect">
-            <a:avLst/>
-          </a:prstGeom>
-          <a:solidFill>
-            <a:srgbClr val="7BD4FF"/>
-          </a:solidFill>
-          <a:ln>
-            <a:noFill/>
-          </a:ln>
-        </p:spPr>
-        <p:style>
-          <a:lnRef idx="1">
-            <a:schemeClr val="accent1"/>
-          </a:lnRef>
-          <a:fillRef idx="3">
-            <a:schemeClr val="accent1"/>
-          </a:fillRef>
-          <a:effectRef idx="2">
-            <a:schemeClr val="accent1"/>
-          </a:effectRef>
-          <a:fontRef idx="minor">
-            <a:schemeClr val="lt1"/>
-          </a:fontRef>
-        </p:style>
-        <p:txBody>
-          <a:bodyPr rtlCol="0" anchor="ctr"/>
-          <a:lstStyle/>
-          <a:p>
-            <a:pPr algn="ctr"/>
-          </a:p>
-        </p:txBody>
-      </p:sp>
-      <p:sp>
-        <p:nvSpPr>
-          <p:cNvPr id="39" name="TextBox 38"/>
-          <p:cNvSpPr txBox="1"/>
-          <p:nvPr/>
-        </p:nvSpPr>
-        <p:spPr>
-          <a:xfrm>
-            <a:off x="6675120" y="3520440"/>
-            <a:ext cx="5029200" cy="2606040"/>
+              <a:rPr sz="1100" b="0" i="0">
+                <a:solidFill>
+                  <a:srgbClr val="F0F0F0"/>
+                </a:solidFill>
+              </a:rPr>
+              <a:t>-  Manages 10-15 developer team across platform, mobile &amp; infrastructure</a:t>
+            </a:r>
+          </a:p>
+        </p:txBody>
+      </p:sp>
+      <p:sp>
+        <p:nvSpPr>
+          <p:cNvPr id="28" name="TextBox 27"/>
+          <p:cNvSpPr txBox="1"/>
+          <p:nvPr/>
+        </p:nvSpPr>
+        <p:spPr>
+          <a:xfrm>
+            <a:off x="7863840" y="4617720"/>
+            <a:ext cx="3840480" cy="411480"/>
           </a:xfrm>
           <a:prstGeom prst="rect">
             <a:avLst/>
@@ -18494,23 +18026,87 @@
           <a:p>
             <a:pPr algn="l"/>
             <a:r>
-              <a:rPr sz="1200" b="0" i="0">
+              <a:rPr sz="1100" b="0" i="0">
                 <a:solidFill>
                   <a:srgbClr val="F0F0F0"/>
                 </a:solidFill>
               </a:rPr>
-              <a:t>Target: Senior full-stack engineering leader based in Colombo, Sri Lanka
-Will manage 10–15 developer team across platform, mobile, and infrastructure
-Responsible for platform migration, scaling, and bare metal buildout
-App Store compliance, release management, and 24/7 ops oversight
-Recruitment underway — Q3 2026 target start date</a:t>
+              <a:t>-  Platform migration, scaling, and bare metal buildout</a:t>
+            </a:r>
+          </a:p>
+        </p:txBody>
+      </p:sp>
+      <p:sp>
+        <p:nvSpPr>
+          <p:cNvPr id="29" name="TextBox 28"/>
+          <p:cNvSpPr txBox="1"/>
+          <p:nvPr/>
+        </p:nvSpPr>
+        <p:spPr>
+          <a:xfrm>
+            <a:off x="7863840" y="5074920"/>
+            <a:ext cx="3840480" cy="411480"/>
+          </a:xfrm>
+          <a:prstGeom prst="rect">
+            <a:avLst/>
+          </a:prstGeom>
+          <a:noFill/>
+        </p:spPr>
+        <p:txBody>
+          <a:bodyPr wrap="square">
+            <a:spAutoFit/>
+          </a:bodyPr>
+          <a:lstStyle/>
+          <a:p>
+            <a:pPr algn="l"/>
+            <a:r>
+              <a:rPr sz="1100" b="0" i="0">
+                <a:solidFill>
+                  <a:srgbClr val="F0F0F0"/>
+                </a:solidFill>
+              </a:rPr>
+              <a:t>-  App Store compliance, release management, 24/7 ops oversight</a:t>
+            </a:r>
+          </a:p>
+        </p:txBody>
+      </p:sp>
+      <p:sp>
+        <p:nvSpPr>
+          <p:cNvPr id="30" name="TextBox 29"/>
+          <p:cNvSpPr txBox="1"/>
+          <p:nvPr/>
+        </p:nvSpPr>
+        <p:spPr>
+          <a:xfrm>
+            <a:off x="7863840" y="5532120"/>
+            <a:ext cx="3840480" cy="411480"/>
+          </a:xfrm>
+          <a:prstGeom prst="rect">
+            <a:avLst/>
+          </a:prstGeom>
+          <a:noFill/>
+        </p:spPr>
+        <p:txBody>
+          <a:bodyPr wrap="square">
+            <a:spAutoFit/>
+          </a:bodyPr>
+          <a:lstStyle/>
+          <a:p>
+            <a:pPr algn="l"/>
+            <a:r>
+              <a:rPr sz="1100" b="0" i="0">
+                <a:solidFill>
+                  <a:srgbClr val="F0F0F0"/>
+                </a:solidFill>
+              </a:rPr>
+              <a:t>-  Recruitment underway  -  Q3 2026 target start date</a:t>
             </a:r>
           </a:p>
         </p:txBody>
       </p:sp>
       <p:pic>
         <p:nvPicPr>
-          <p:cNvPr id="40" name="Picture 39" descr="image.png"/>
+          <p:cNvPr id="31" name="Picture 30" descr="image.png"/>
           <p:cNvPicPr>
             <a:picLocks noChangeAspect="1"/>
           </p:cNvPicPr>

--- a/Sachi_Stream_Investor_Deck_Seed_Round_May2026.pptx
+++ b/Sachi_Stream_Investor_Deck_Seed_Round_May2026.pptx
@@ -17291,8 +17291,8 @@
         </p:nvSpPr>
         <p:spPr>
           <a:xfrm>
-            <a:off x="594360" y="1078992"/>
-            <a:ext cx="6949440" cy="5349240"/>
+            <a:off x="594360" y="1051560"/>
+            <a:ext cx="6995160" cy="5394960"/>
           </a:xfrm>
           <a:prstGeom prst="rect">
             <a:avLst/>
@@ -17330,22 +17330,22 @@
       </p:sp>
       <p:pic>
         <p:nvPicPr>
-          <p:cNvPr id="9" name="Picture 8" descr="jay_headshot_circle.png"/>
+          <p:cNvPr id="9" name="Picture 8" descr="jay_real_circle.png"/>
           <p:cNvPicPr>
             <a:picLocks noChangeAspect="1"/>
           </p:cNvPicPr>
           <p:nvPr/>
         </p:nvPicPr>
         <p:blipFill>
-          <a:blip r:embed="rId3"/>
+          <a:blip r:embed="rId4"/>
           <a:stretch>
             <a:fillRect/>
           </a:stretch>
         </p:blipFill>
         <p:spPr>
           <a:xfrm>
-            <a:off x="777240" y="1234440"/>
-            <a:ext cx="1920240" cy="1920240"/>
+            <a:off x="749808" y="1170432"/>
+            <a:ext cx="2011680" cy="2011680"/>
           </a:xfrm>
           <a:prstGeom prst="rect">
             <a:avLst/>
@@ -17360,8 +17360,8 @@
         </p:nvSpPr>
         <p:spPr>
           <a:xfrm>
-            <a:off x="2880360" y="1325880"/>
-            <a:ext cx="4572000" cy="411480"/>
+            <a:off x="2926080" y="1298448"/>
+            <a:ext cx="4572000" cy="438912"/>
           </a:xfrm>
           <a:prstGeom prst="rect">
             <a:avLst/>
@@ -17394,7 +17394,7 @@
         </p:nvSpPr>
         <p:spPr>
           <a:xfrm>
-            <a:off x="2880360" y="1755648"/>
+            <a:off x="2926080" y="1764792"/>
             <a:ext cx="4572000" cy="320040"/>
           </a:xfrm>
           <a:prstGeom prst="rect">
@@ -17428,7 +17428,7 @@
         </p:nvSpPr>
         <p:spPr>
           <a:xfrm>
-            <a:off x="2880360" y="2103120"/>
+            <a:off x="2926080" y="2103120"/>
             <a:ext cx="4572000" cy="274320"/>
           </a:xfrm>
           <a:prstGeom prst="rect">
@@ -17462,8 +17462,8 @@
         </p:nvSpPr>
         <p:spPr>
           <a:xfrm>
-            <a:off x="2880360" y="2450592"/>
-            <a:ext cx="4480560" cy="22860"/>
+            <a:off x="777240" y="2487168"/>
+            <a:ext cx="6675120" cy="22860"/>
           </a:xfrm>
           <a:prstGeom prst="rect">
             <a:avLst/>
@@ -17505,8 +17505,8 @@
         </p:nvSpPr>
         <p:spPr>
           <a:xfrm>
-            <a:off x="804672" y="2606040"/>
-            <a:ext cx="6583680" cy="438912"/>
+            <a:off x="804672" y="2651760"/>
+            <a:ext cx="6629400" cy="420624"/>
           </a:xfrm>
           <a:prstGeom prst="rect">
             <a:avLst/>
@@ -17526,7 +17526,7 @@
                   <a:srgbClr val="F0F0F0"/>
                 </a:solidFill>
               </a:rPr>
-              <a:t>-  21+ years Senior Infrastructure Project Manager — Nokia, MPLS, NERC-CIP, SCADA, telecom</a:t>
+              <a:t>-  21+ years Senior Infrastructure Project Manager - Utilities, Telecom &amp; Energy sectors</a:t>
             </a:r>
           </a:p>
         </p:txBody>
@@ -17539,8 +17539,8 @@
         </p:nvSpPr>
         <p:spPr>
           <a:xfrm>
-            <a:off x="804672" y="3081528"/>
-            <a:ext cx="6583680" cy="438912"/>
+            <a:off x="804672" y="3118104"/>
+            <a:ext cx="6629400" cy="420624"/>
           </a:xfrm>
           <a:prstGeom prst="rect">
             <a:avLst/>
@@ -17560,6 +17560,40 @@
                   <a:srgbClr val="F0F0F0"/>
                 </a:solidFill>
               </a:rPr>
+              <a:t>-  Deep expertise: Nokia, MPLS, NERC-CIP, SCADA, data center &amp; grid modernization</a:t>
+            </a:r>
+          </a:p>
+        </p:txBody>
+      </p:sp>
+      <p:sp>
+        <p:nvSpPr>
+          <p:cNvPr id="16" name="TextBox 15"/>
+          <p:cNvSpPr txBox="1"/>
+          <p:nvPr/>
+        </p:nvSpPr>
+        <p:spPr>
+          <a:xfrm>
+            <a:off x="804672" y="3584448"/>
+            <a:ext cx="6629400" cy="420624"/>
+          </a:xfrm>
+          <a:prstGeom prst="rect">
+            <a:avLst/>
+          </a:prstGeom>
+          <a:noFill/>
+        </p:spPr>
+        <p:txBody>
+          <a:bodyPr wrap="square">
+            <a:spAutoFit/>
+          </a:bodyPr>
+          <a:lstStyle/>
+          <a:p>
+            <a:pPr algn="l"/>
+            <a:r>
+              <a:rPr sz="1150" b="0" i="0">
+                <a:solidFill>
+                  <a:srgbClr val="F0F0F0"/>
+                </a:solidFill>
+              </a:rPr>
               <a:t>-  Architect of Sachi Stream: platform vision, product design, strategy &amp; brand identity</a:t>
             </a:r>
           </a:p>
@@ -17567,14 +17601,14 @@
       </p:sp>
       <p:sp>
         <p:nvSpPr>
-          <p:cNvPr id="16" name="TextBox 15"/>
-          <p:cNvSpPr txBox="1"/>
-          <p:nvPr/>
-        </p:nvSpPr>
-        <p:spPr>
-          <a:xfrm>
-            <a:off x="804672" y="3557016"/>
-            <a:ext cx="6583680" cy="438912"/>
+          <p:cNvPr id="17" name="TextBox 16"/>
+          <p:cNvSpPr txBox="1"/>
+          <p:nvPr/>
+        </p:nvSpPr>
+        <p:spPr>
+          <a:xfrm>
+            <a:off x="804672" y="4050791"/>
+            <a:ext cx="6629400" cy="420624"/>
           </a:xfrm>
           <a:prstGeom prst="rect">
             <a:avLst/>
@@ -17601,14 +17635,14 @@
       </p:sp>
       <p:sp>
         <p:nvSpPr>
-          <p:cNvPr id="17" name="TextBox 16"/>
-          <p:cNvSpPr txBox="1"/>
-          <p:nvPr/>
-        </p:nvSpPr>
-        <p:spPr>
-          <a:xfrm>
-            <a:off x="804672" y="4032504"/>
-            <a:ext cx="6583680" cy="438912"/>
+          <p:cNvPr id="18" name="TextBox 17"/>
+          <p:cNvSpPr txBox="1"/>
+          <p:nvPr/>
+        </p:nvSpPr>
+        <p:spPr>
+          <a:xfrm>
+            <a:off x="804672" y="4517136"/>
+            <a:ext cx="6629400" cy="420624"/>
           </a:xfrm>
           <a:prstGeom prst="rect">
             <a:avLst/>
@@ -17628,21 +17662,21 @@
                   <a:srgbClr val="F0F0F0"/>
                 </a:solidFill>
               </a:rPr>
-              <a:t>-  User experience design, creator onboarding, and founding creator program</a:t>
-            </a:r>
-          </a:p>
-        </p:txBody>
-      </p:sp>
-      <p:sp>
-        <p:nvSpPr>
-          <p:cNvPr id="18" name="TextBox 17"/>
-          <p:cNvSpPr txBox="1"/>
-          <p:nvPr/>
-        </p:nvSpPr>
-        <p:spPr>
-          <a:xfrm>
-            <a:off x="804672" y="4507992"/>
-            <a:ext cx="6583680" cy="438912"/>
+              <a:t>-  Full platform built and launched solo - video, live streaming, podcasts, gifts &amp; coins</a:t>
+            </a:r>
+          </a:p>
+        </p:txBody>
+      </p:sp>
+      <p:sp>
+        <p:nvSpPr>
+          <p:cNvPr id="19" name="TextBox 18"/>
+          <p:cNvSpPr txBox="1"/>
+          <p:nvPr/>
+        </p:nvSpPr>
+        <p:spPr>
+          <a:xfrm>
+            <a:off x="804672" y="4983479"/>
+            <a:ext cx="6629400" cy="420624"/>
           </a:xfrm>
           <a:prstGeom prst="rect">
             <a:avLst/>
@@ -17662,41 +17696,7 @@
                   <a:srgbClr val="F0F0F0"/>
                 </a:solidFill>
               </a:rPr>
-              <a:t>-  Manages all technical, operational, and creative aspects of the platform solo</a:t>
-            </a:r>
-          </a:p>
-        </p:txBody>
-      </p:sp>
-      <p:sp>
-        <p:nvSpPr>
-          <p:cNvPr id="19" name="TextBox 18"/>
-          <p:cNvSpPr txBox="1"/>
-          <p:nvPr/>
-        </p:nvSpPr>
-        <p:spPr>
-          <a:xfrm>
-            <a:off x="804672" y="4983480"/>
-            <a:ext cx="6583680" cy="438912"/>
-          </a:xfrm>
-          <a:prstGeom prst="rect">
-            <a:avLst/>
-          </a:prstGeom>
-          <a:noFill/>
-        </p:spPr>
-        <p:txBody>
-          <a:bodyPr wrap="square">
-            <a:spAutoFit/>
-          </a:bodyPr>
-          <a:lstStyle/>
-          <a:p>
-            <a:pPr algn="l"/>
-            <a:r>
-              <a:rPr sz="1150" b="0" i="0">
-                <a:solidFill>
-                  <a:srgbClr val="F0F0F0"/>
-                </a:solidFill>
-              </a:rPr>
-              <a:t>-  PSEG Long Island  -  USD 10M+ infrastructure programs  |  Founder, LDNA Consulting LLC</a:t>
+              <a:t>-  Founder, LDNA Consulting LLC  |  USD 10M+ infrastructure programs delivered</a:t>
             </a:r>
           </a:p>
         </p:txBody>
@@ -17709,8 +17709,8 @@
         </p:nvSpPr>
         <p:spPr>
           <a:xfrm>
-            <a:off x="7726679" y="1078992"/>
-            <a:ext cx="4160520" cy="5349240"/>
+            <a:off x="7772400" y="1051560"/>
+            <a:ext cx="4114800" cy="5394960"/>
           </a:xfrm>
           <a:prstGeom prst="rect">
             <a:avLst/>
@@ -17754,8 +17754,8 @@
         </p:nvSpPr>
         <p:spPr>
           <a:xfrm>
-            <a:off x="8915400" y="1325880"/>
-            <a:ext cx="1280160" cy="1280160"/>
+            <a:off x="8961120" y="1298448"/>
+            <a:ext cx="1234440" cy="1234440"/>
           </a:xfrm>
           <a:prstGeom prst="ellipse">
             <a:avLst/>
@@ -17797,23 +17797,23 @@
         </p:nvSpPr>
         <p:spPr>
           <a:xfrm>
-            <a:off x="8915400" y="1572768"/>
-            <a:ext cx="1280160" cy="640080"/>
-          </a:xfrm>
-          <a:prstGeom prst="rect">
-            <a:avLst/>
-          </a:prstGeom>
-          <a:noFill/>
-        </p:spPr>
-        <p:txBody>
-          <a:bodyPr wrap="square">
-            <a:spAutoFit/>
-          </a:bodyPr>
-          <a:lstStyle/>
-          <a:p>
-            <a:pPr algn="ctr"/>
-            <a:r>
-              <a:rPr sz="3200" b="1" i="0">
+            <a:off x="8961120" y="1536192"/>
+            <a:ext cx="1234440" cy="594360"/>
+          </a:xfrm>
+          <a:prstGeom prst="rect">
+            <a:avLst/>
+          </a:prstGeom>
+          <a:noFill/>
+        </p:spPr>
+        <p:txBody>
+          <a:bodyPr wrap="square">
+            <a:spAutoFit/>
+          </a:bodyPr>
+          <a:lstStyle/>
+          <a:p>
+            <a:pPr algn="ctr"/>
+            <a:r>
+              <a:rPr sz="3000" b="1" i="0">
                 <a:solidFill>
                   <a:srgbClr val="0B0C1A"/>
                 </a:solidFill>
@@ -17831,8 +17831,8 @@
         </p:nvSpPr>
         <p:spPr>
           <a:xfrm>
-            <a:off x="7863840" y="2788920"/>
-            <a:ext cx="3840480" cy="384048"/>
+            <a:off x="7909560" y="2724912"/>
+            <a:ext cx="3794760" cy="384048"/>
           </a:xfrm>
           <a:prstGeom prst="rect">
             <a:avLst/>
@@ -17847,7 +17847,7 @@
           <a:p>
             <a:pPr algn="l"/>
             <a:r>
-              <a:rPr sz="1400" b="1" i="0">
+              <a:rPr sz="1300" b="1" i="0">
                 <a:solidFill>
                   <a:srgbClr val="7BD4FF"/>
                 </a:solidFill>
@@ -17865,8 +17865,8 @@
         </p:nvSpPr>
         <p:spPr>
           <a:xfrm>
-            <a:off x="7863840" y="3200400"/>
-            <a:ext cx="3840480" cy="292608"/>
+            <a:off x="7909560" y="3136392"/>
+            <a:ext cx="3794760" cy="292608"/>
           </a:xfrm>
           <a:prstGeom prst="rect">
             <a:avLst/>
@@ -17886,7 +17886,7 @@
                   <a:srgbClr val="CCCCCC"/>
                 </a:solidFill>
               </a:rPr>
-              <a:t>VP Engineering  (To Be Hired)</a:t>
+              <a:t>VP Engineering  (To Be Hired - Q3 2026)</a:t>
             </a:r>
           </a:p>
         </p:txBody>
@@ -17899,8 +17899,8 @@
         </p:nvSpPr>
         <p:spPr>
           <a:xfrm>
-            <a:off x="7863840" y="3547872"/>
-            <a:ext cx="3840480" cy="22860"/>
+            <a:off x="7909560" y="3493008"/>
+            <a:ext cx="3794760" cy="22860"/>
           </a:xfrm>
           <a:prstGeom prst="rect">
             <a:avLst/>
@@ -17942,8 +17942,8 @@
         </p:nvSpPr>
         <p:spPr>
           <a:xfrm>
-            <a:off x="7863840" y="3703320"/>
-            <a:ext cx="3840480" cy="411480"/>
+            <a:off x="7909560" y="3657600"/>
+            <a:ext cx="3794760" cy="411480"/>
           </a:xfrm>
           <a:prstGeom prst="rect">
             <a:avLst/>
@@ -17963,7 +17963,7 @@
                   <a:srgbClr val="F0F0F0"/>
                 </a:solidFill>
               </a:rPr>
-              <a:t>-  Senior full-stack engineering leader based in Colombo, Sri Lanka</a:t>
+              <a:t>-  Senior full-stack engineering leader - Colombo, Sri Lanka</a:t>
             </a:r>
           </a:p>
         </p:txBody>
@@ -17976,8 +17976,8 @@
         </p:nvSpPr>
         <p:spPr>
           <a:xfrm>
-            <a:off x="7863840" y="4160520"/>
-            <a:ext cx="3840480" cy="411480"/>
+            <a:off x="7909560" y="4114800"/>
+            <a:ext cx="3794760" cy="411480"/>
           </a:xfrm>
           <a:prstGeom prst="rect">
             <a:avLst/>
@@ -17997,7 +17997,7 @@
                   <a:srgbClr val="F0F0F0"/>
                 </a:solidFill>
               </a:rPr>
-              <a:t>-  Manages 10-15 developer team across platform, mobile &amp; infrastructure</a:t>
+              <a:t>-  Leads 10-15 developer team across platform, mobile &amp; infra</a:t>
             </a:r>
           </a:p>
         </p:txBody>
@@ -18010,8 +18010,8 @@
         </p:nvSpPr>
         <p:spPr>
           <a:xfrm>
-            <a:off x="7863840" y="4617720"/>
-            <a:ext cx="3840480" cy="411480"/>
+            <a:off x="7909560" y="4572000"/>
+            <a:ext cx="3794760" cy="411480"/>
           </a:xfrm>
           <a:prstGeom prst="rect">
             <a:avLst/>
@@ -18031,7 +18031,7 @@
                   <a:srgbClr val="F0F0F0"/>
                 </a:solidFill>
               </a:rPr>
-              <a:t>-  Platform migration, scaling, and bare metal buildout</a:t>
+              <a:t>-  Platform migration, scaling &amp; bare metal buildout</a:t>
             </a:r>
           </a:p>
         </p:txBody>
@@ -18044,8 +18044,8 @@
         </p:nvSpPr>
         <p:spPr>
           <a:xfrm>
-            <a:off x="7863840" y="5074920"/>
-            <a:ext cx="3840480" cy="411480"/>
+            <a:off x="7909560" y="5029200"/>
+            <a:ext cx="3794760" cy="411480"/>
           </a:xfrm>
           <a:prstGeom prst="rect">
             <a:avLst/>
@@ -18065,7 +18065,7 @@
                   <a:srgbClr val="F0F0F0"/>
                 </a:solidFill>
               </a:rPr>
-              <a:t>-  App Store compliance, release management, 24/7 ops oversight</a:t>
+              <a:t>-  App Store compliance &amp; 24/7 operations oversight</a:t>
             </a:r>
           </a:p>
         </p:txBody>
@@ -18078,8 +18078,8 @@
         </p:nvSpPr>
         <p:spPr>
           <a:xfrm>
-            <a:off x="7863840" y="5532120"/>
-            <a:ext cx="3840480" cy="411480"/>
+            <a:off x="7909560" y="5486400"/>
+            <a:ext cx="3794760" cy="411480"/>
           </a:xfrm>
           <a:prstGeom prst="rect">
             <a:avLst/>
@@ -18099,7 +18099,7 @@
                   <a:srgbClr val="F0F0F0"/>
                 </a:solidFill>
               </a:rPr>
-              <a:t>-  Recruitment underway  -  Q3 2026 target start date</a:t>
+              <a:t>-  Recruitment underway - Q3 2026 target start</a:t>
             </a:r>
           </a:p>
         </p:txBody>
